--- a/docs/VSCA11Y_Prezentacija.pptx
+++ b/docs/VSCA11Y_Prezentacija.pptx
@@ -19,7 +19,9 @@
     <p:sldId id="270" r:id="rId13"/>
     <p:sldId id="264" r:id="rId14"/>
     <p:sldId id="265" r:id="rId15"/>
-    <p:sldId id="266" r:id="rId16"/>
+    <p:sldId id="271" r:id="rId16"/>
+    <p:sldId id="272" r:id="rId17"/>
+    <p:sldId id="266" r:id="rId18"/>
   </p:sldIdLst>
   <p:sldSz cx="12192000" cy="6858000"/>
   <p:notesSz cx="6858000" cy="9144000"/>
@@ -6762,7 +6764,7 @@
           <a:noFill/>
           <a:extLst>
             <a:ext uri="{909E8E84-426E-40dd-AFC4-6F175D3DCCD1}">
-              <a14:hiddenFill xmlns:a14="http://schemas.microsoft.com/office/drawing/2010/main" xmlns="">
+              <a14:hiddenFill xmlns="" xmlns:a14="http://schemas.microsoft.com/office/drawing/2010/main">
                 <a:solidFill>
                   <a:srgbClr val="FFFFFF"/>
                 </a:solidFill>
@@ -6822,7 +6824,7 @@
             </a:ln>
             <a:extLst>
               <a:ext uri="{91240B29-F687-4f45-9708-019B960494DF}">
-                <a14:hiddenLine xmlns:a14="http://schemas.microsoft.com/office/drawing/2010/main" xmlns="" w="9525">
+                <a14:hiddenLine xmlns="" xmlns:a14="http://schemas.microsoft.com/office/drawing/2010/main" w="9525">
                   <a:solidFill>
                     <a:srgbClr val="000000"/>
                   </a:solidFill>
@@ -6919,7 +6921,7 @@
             </a:ln>
             <a:extLst>
               <a:ext uri="{91240B29-F687-4f45-9708-019B960494DF}">
-                <a14:hiddenLine xmlns:a14="http://schemas.microsoft.com/office/drawing/2010/main" xmlns="" w="9525">
+                <a14:hiddenLine xmlns="" xmlns:a14="http://schemas.microsoft.com/office/drawing/2010/main" w="9525">
                   <a:solidFill>
                     <a:srgbClr val="000000"/>
                   </a:solidFill>
@@ -7016,7 +7018,7 @@
             </a:ln>
             <a:extLst>
               <a:ext uri="{91240B29-F687-4f45-9708-019B960494DF}">
-                <a14:hiddenLine xmlns:a14="http://schemas.microsoft.com/office/drawing/2010/main" xmlns="" w="9525">
+                <a14:hiddenLine xmlns="" xmlns:a14="http://schemas.microsoft.com/office/drawing/2010/main" w="9525">
                   <a:solidFill>
                     <a:srgbClr val="000000"/>
                   </a:solidFill>
@@ -7057,7 +7059,7 @@
             </a:ln>
             <a:extLst>
               <a:ext uri="{91240B29-F687-4f45-9708-019B960494DF}">
-                <a14:hiddenLine xmlns:a14="http://schemas.microsoft.com/office/drawing/2010/main" xmlns="" w="9525">
+                <a14:hiddenLine xmlns="" xmlns:a14="http://schemas.microsoft.com/office/drawing/2010/main" w="9525">
                   <a:solidFill>
                     <a:srgbClr val="000000"/>
                   </a:solidFill>
@@ -7154,7 +7156,7 @@
             </a:ln>
             <a:extLst>
               <a:ext uri="{91240B29-F687-4f45-9708-019B960494DF}">
-                <a14:hiddenLine xmlns:a14="http://schemas.microsoft.com/office/drawing/2010/main" xmlns="" w="9525">
+                <a14:hiddenLine xmlns="" xmlns:a14="http://schemas.microsoft.com/office/drawing/2010/main" w="9525">
                   <a:solidFill>
                     <a:srgbClr val="000000"/>
                   </a:solidFill>
@@ -7223,7 +7225,7 @@
             </a:ln>
             <a:extLst>
               <a:ext uri="{91240B29-F687-4f45-9708-019B960494DF}">
-                <a14:hiddenLine xmlns:a14="http://schemas.microsoft.com/office/drawing/2010/main" xmlns="" w="9525">
+                <a14:hiddenLine xmlns="" xmlns:a14="http://schemas.microsoft.com/office/drawing/2010/main" w="9525">
                   <a:solidFill>
                     <a:srgbClr val="000000"/>
                   </a:solidFill>
@@ -7292,7 +7294,7 @@
             </a:ln>
             <a:extLst>
               <a:ext uri="{91240B29-F687-4f45-9708-019B960494DF}">
-                <a14:hiddenLine xmlns:a14="http://schemas.microsoft.com/office/drawing/2010/main" xmlns="" w="9525">
+                <a14:hiddenLine xmlns="" xmlns:a14="http://schemas.microsoft.com/office/drawing/2010/main" w="9525">
                   <a:solidFill>
                     <a:srgbClr val="000000"/>
                   </a:solidFill>
@@ -7389,7 +7391,7 @@
             </a:ln>
             <a:extLst>
               <a:ext uri="{91240B29-F687-4f45-9708-019B960494DF}">
-                <a14:hiddenLine xmlns:a14="http://schemas.microsoft.com/office/drawing/2010/main" xmlns="" w="9525">
+                <a14:hiddenLine xmlns="" xmlns:a14="http://schemas.microsoft.com/office/drawing/2010/main" w="9525">
                   <a:solidFill>
                     <a:srgbClr val="000000"/>
                   </a:solidFill>
@@ -7458,7 +7460,7 @@
             </a:ln>
             <a:extLst>
               <a:ext uri="{91240B29-F687-4f45-9708-019B960494DF}">
-                <a14:hiddenLine xmlns:a14="http://schemas.microsoft.com/office/drawing/2010/main" xmlns="" w="9525">
+                <a14:hiddenLine xmlns="" xmlns:a14="http://schemas.microsoft.com/office/drawing/2010/main" w="9525">
                   <a:solidFill>
                     <a:srgbClr val="000000"/>
                   </a:solidFill>
@@ -7527,7 +7529,7 @@
             </a:ln>
             <a:extLst>
               <a:ext uri="{91240B29-F687-4f45-9708-019B960494DF}">
-                <a14:hiddenLine xmlns:a14="http://schemas.microsoft.com/office/drawing/2010/main" xmlns="" w="9525">
+                <a14:hiddenLine xmlns="" xmlns:a14="http://schemas.microsoft.com/office/drawing/2010/main" w="9525">
                   <a:solidFill>
                     <a:srgbClr val="000000"/>
                   </a:solidFill>
@@ -7624,7 +7626,7 @@
             </a:ln>
             <a:extLst>
               <a:ext uri="{91240B29-F687-4f45-9708-019B960494DF}">
-                <a14:hiddenLine xmlns:a14="http://schemas.microsoft.com/office/drawing/2010/main" xmlns="" w="9525">
+                <a14:hiddenLine xmlns="" xmlns:a14="http://schemas.microsoft.com/office/drawing/2010/main" w="9525">
                   <a:solidFill>
                     <a:srgbClr val="000000"/>
                   </a:solidFill>
@@ -7721,7 +7723,7 @@
             </a:ln>
             <a:extLst>
               <a:ext uri="{91240B29-F687-4f45-9708-019B960494DF}">
-                <a14:hiddenLine xmlns:a14="http://schemas.microsoft.com/office/drawing/2010/main" xmlns="" w="9525">
+                <a14:hiddenLine xmlns="" xmlns:a14="http://schemas.microsoft.com/office/drawing/2010/main" w="9525">
                   <a:solidFill>
                     <a:srgbClr val="000000"/>
                   </a:solidFill>
@@ -7790,7 +7792,7 @@
             </a:ln>
             <a:extLst>
               <a:ext uri="{91240B29-F687-4f45-9708-019B960494DF}">
-                <a14:hiddenLine xmlns:a14="http://schemas.microsoft.com/office/drawing/2010/main" xmlns="" w="9525">
+                <a14:hiddenLine xmlns="" xmlns:a14="http://schemas.microsoft.com/office/drawing/2010/main" w="9525">
                   <a:solidFill>
                     <a:srgbClr val="000000"/>
                   </a:solidFill>
@@ -7907,7 +7909,7 @@
             </a:ln>
             <a:extLst>
               <a:ext uri="{91240B29-F687-4f45-9708-019B960494DF}">
-                <a14:hiddenLine xmlns:a14="http://schemas.microsoft.com/office/drawing/2010/main" xmlns="" w="9525">
+                <a14:hiddenLine xmlns="" xmlns:a14="http://schemas.microsoft.com/office/drawing/2010/main" w="9525">
                   <a:solidFill>
                     <a:srgbClr val="000000"/>
                   </a:solidFill>
@@ -7976,7 +7978,7 @@
             </a:ln>
             <a:extLst>
               <a:ext uri="{91240B29-F687-4f45-9708-019B960494DF}">
-                <a14:hiddenLine xmlns:a14="http://schemas.microsoft.com/office/drawing/2010/main" xmlns="" w="9525">
+                <a14:hiddenLine xmlns="" xmlns:a14="http://schemas.microsoft.com/office/drawing/2010/main" w="9525">
                   <a:solidFill>
                     <a:srgbClr val="000000"/>
                   </a:solidFill>
@@ -8073,7 +8075,7 @@
             </a:ln>
             <a:extLst>
               <a:ext uri="{91240B29-F687-4f45-9708-019B960494DF}">
-                <a14:hiddenLine xmlns:a14="http://schemas.microsoft.com/office/drawing/2010/main" xmlns="" w="9525">
+                <a14:hiddenLine xmlns="" xmlns:a14="http://schemas.microsoft.com/office/drawing/2010/main" w="9525">
                   <a:solidFill>
                     <a:srgbClr val="000000"/>
                   </a:solidFill>
@@ -8170,7 +8172,7 @@
             </a:ln>
             <a:extLst>
               <a:ext uri="{91240B29-F687-4f45-9708-019B960494DF}">
-                <a14:hiddenLine xmlns:a14="http://schemas.microsoft.com/office/drawing/2010/main" xmlns="" w="9525">
+                <a14:hiddenLine xmlns="" xmlns:a14="http://schemas.microsoft.com/office/drawing/2010/main" w="9525">
                   <a:solidFill>
                     <a:srgbClr val="000000"/>
                   </a:solidFill>
@@ -8239,7 +8241,7 @@
             </a:ln>
             <a:extLst>
               <a:ext uri="{91240B29-F687-4f45-9708-019B960494DF}">
-                <a14:hiddenLine xmlns:a14="http://schemas.microsoft.com/office/drawing/2010/main" xmlns="" w="9525">
+                <a14:hiddenLine xmlns="" xmlns:a14="http://schemas.microsoft.com/office/drawing/2010/main" w="9525">
                   <a:solidFill>
                     <a:srgbClr val="000000"/>
                   </a:solidFill>
@@ -8336,7 +8338,7 @@
             </a:ln>
             <a:extLst>
               <a:ext uri="{91240B29-F687-4f45-9708-019B960494DF}">
-                <a14:hiddenLine xmlns:a14="http://schemas.microsoft.com/office/drawing/2010/main" xmlns="" w="9525">
+                <a14:hiddenLine xmlns="" xmlns:a14="http://schemas.microsoft.com/office/drawing/2010/main" w="9525">
                   <a:solidFill>
                     <a:srgbClr val="000000"/>
                   </a:solidFill>
@@ -8433,7 +8435,7 @@
             </a:ln>
             <a:extLst>
               <a:ext uri="{91240B29-F687-4f45-9708-019B960494DF}">
-                <a14:hiddenLine xmlns:a14="http://schemas.microsoft.com/office/drawing/2010/main" xmlns="" w="9525">
+                <a14:hiddenLine xmlns="" xmlns:a14="http://schemas.microsoft.com/office/drawing/2010/main" w="9525">
                   <a:solidFill>
                     <a:srgbClr val="000000"/>
                   </a:solidFill>
@@ -8496,7 +8498,7 @@
             </a:ln>
             <a:extLst>
               <a:ext uri="{91240B29-F687-4f45-9708-019B960494DF}">
-                <a14:hiddenLine xmlns:a14="http://schemas.microsoft.com/office/drawing/2010/main" xmlns="" w="9525">
+                <a14:hiddenLine xmlns="" xmlns:a14="http://schemas.microsoft.com/office/drawing/2010/main" w="9525">
                   <a:solidFill>
                     <a:srgbClr val="000000"/>
                   </a:solidFill>
@@ -8593,7 +8595,7 @@
             </a:ln>
             <a:extLst>
               <a:ext uri="{91240B29-F687-4f45-9708-019B960494DF}">
-                <a14:hiddenLine xmlns:a14="http://schemas.microsoft.com/office/drawing/2010/main" xmlns="" w="9525">
+                <a14:hiddenLine xmlns="" xmlns:a14="http://schemas.microsoft.com/office/drawing/2010/main" w="9525">
                   <a:solidFill>
                     <a:srgbClr val="000000"/>
                   </a:solidFill>
@@ -8656,7 +8658,7 @@
             </a:ln>
             <a:extLst>
               <a:ext uri="{91240B29-F687-4f45-9708-019B960494DF}">
-                <a14:hiddenLine xmlns:a14="http://schemas.microsoft.com/office/drawing/2010/main" xmlns="" w="9525">
+                <a14:hiddenLine xmlns="" xmlns:a14="http://schemas.microsoft.com/office/drawing/2010/main" w="9525">
                   <a:solidFill>
                     <a:srgbClr val="000000"/>
                   </a:solidFill>
@@ -8753,7 +8755,7 @@
             </a:ln>
             <a:extLst>
               <a:ext uri="{91240B29-F687-4f45-9708-019B960494DF}">
-                <a14:hiddenLine xmlns:a14="http://schemas.microsoft.com/office/drawing/2010/main" xmlns="" w="9525">
+                <a14:hiddenLine xmlns="" xmlns:a14="http://schemas.microsoft.com/office/drawing/2010/main" w="9525">
                   <a:solidFill>
                     <a:srgbClr val="000000"/>
                   </a:solidFill>
@@ -8828,7 +8830,7 @@
             </a:ln>
             <a:extLst>
               <a:ext uri="{91240B29-F687-4f45-9708-019B960494DF}">
-                <a14:hiddenLine xmlns:a14="http://schemas.microsoft.com/office/drawing/2010/main" xmlns="" w="9525">
+                <a14:hiddenLine xmlns="" xmlns:a14="http://schemas.microsoft.com/office/drawing/2010/main" w="9525">
                   <a:solidFill>
                     <a:srgbClr val="000000"/>
                   </a:solidFill>
@@ -8925,7 +8927,7 @@
             </a:ln>
             <a:extLst>
               <a:ext uri="{91240B29-F687-4f45-9708-019B960494DF}">
-                <a14:hiddenLine xmlns:a14="http://schemas.microsoft.com/office/drawing/2010/main" xmlns="" w="9525">
+                <a14:hiddenLine xmlns="" xmlns:a14="http://schemas.microsoft.com/office/drawing/2010/main" w="9525">
                   <a:solidFill>
                     <a:srgbClr val="000000"/>
                   </a:solidFill>
@@ -9000,7 +9002,7 @@
             </a:ln>
             <a:extLst>
               <a:ext uri="{91240B29-F687-4f45-9708-019B960494DF}">
-                <a14:hiddenLine xmlns:a14="http://schemas.microsoft.com/office/drawing/2010/main" xmlns="" w="9525">
+                <a14:hiddenLine xmlns="" xmlns:a14="http://schemas.microsoft.com/office/drawing/2010/main" w="9525">
                   <a:solidFill>
                     <a:srgbClr val="000000"/>
                   </a:solidFill>
@@ -9097,7 +9099,7 @@
             </a:ln>
             <a:extLst>
               <a:ext uri="{91240B29-F687-4f45-9708-019B960494DF}">
-                <a14:hiddenLine xmlns:a14="http://schemas.microsoft.com/office/drawing/2010/main" xmlns="" w="9525">
+                <a14:hiddenLine xmlns="" xmlns:a14="http://schemas.microsoft.com/office/drawing/2010/main" w="9525">
                   <a:solidFill>
                     <a:srgbClr val="000000"/>
                   </a:solidFill>
@@ -9138,7 +9140,7 @@
             </a:ln>
             <a:extLst>
               <a:ext uri="{91240B29-F687-4f45-9708-019B960494DF}">
-                <a14:hiddenLine xmlns:a14="http://schemas.microsoft.com/office/drawing/2010/main" xmlns="" w="9525">
+                <a14:hiddenLine xmlns="" xmlns:a14="http://schemas.microsoft.com/office/drawing/2010/main" w="9525">
                   <a:solidFill>
                     <a:srgbClr val="000000"/>
                   </a:solidFill>
@@ -9235,7 +9237,7 @@
             </a:ln>
             <a:extLst>
               <a:ext uri="{91240B29-F687-4f45-9708-019B960494DF}">
-                <a14:hiddenLine xmlns:a14="http://schemas.microsoft.com/office/drawing/2010/main" xmlns="" w="9525">
+                <a14:hiddenLine xmlns="" xmlns:a14="http://schemas.microsoft.com/office/drawing/2010/main" w="9525">
                   <a:solidFill>
                     <a:srgbClr val="000000"/>
                   </a:solidFill>
@@ -9304,7 +9306,7 @@
             </a:ln>
             <a:extLst>
               <a:ext uri="{91240B29-F687-4f45-9708-019B960494DF}">
-                <a14:hiddenLine xmlns:a14="http://schemas.microsoft.com/office/drawing/2010/main" xmlns="" w="9525">
+                <a14:hiddenLine xmlns="" xmlns:a14="http://schemas.microsoft.com/office/drawing/2010/main" w="9525">
                   <a:solidFill>
                     <a:srgbClr val="000000"/>
                   </a:solidFill>
@@ -9373,7 +9375,7 @@
             </a:ln>
             <a:extLst>
               <a:ext uri="{91240B29-F687-4f45-9708-019B960494DF}">
-                <a14:hiddenLine xmlns:a14="http://schemas.microsoft.com/office/drawing/2010/main" xmlns="" w="9525">
+                <a14:hiddenLine xmlns="" xmlns:a14="http://schemas.microsoft.com/office/drawing/2010/main" w="9525">
                   <a:solidFill>
                     <a:srgbClr val="000000"/>
                   </a:solidFill>
@@ -9470,7 +9472,7 @@
             </a:ln>
             <a:extLst>
               <a:ext uri="{91240B29-F687-4f45-9708-019B960494DF}">
-                <a14:hiddenLine xmlns:a14="http://schemas.microsoft.com/office/drawing/2010/main" xmlns="" w="9525">
+                <a14:hiddenLine xmlns="" xmlns:a14="http://schemas.microsoft.com/office/drawing/2010/main" w="9525">
                   <a:solidFill>
                     <a:srgbClr val="000000"/>
                   </a:solidFill>
@@ -9545,7 +9547,7 @@
             </a:ln>
             <a:extLst>
               <a:ext uri="{91240B29-F687-4f45-9708-019B960494DF}">
-                <a14:hiddenLine xmlns:a14="http://schemas.microsoft.com/office/drawing/2010/main" xmlns="" w="9525">
+                <a14:hiddenLine xmlns="" xmlns:a14="http://schemas.microsoft.com/office/drawing/2010/main" w="9525">
                   <a:solidFill>
                     <a:srgbClr val="000000"/>
                   </a:solidFill>
@@ -9614,7 +9616,7 @@
             </a:ln>
             <a:extLst>
               <a:ext uri="{91240B29-F687-4f45-9708-019B960494DF}">
-                <a14:hiddenLine xmlns:a14="http://schemas.microsoft.com/office/drawing/2010/main" xmlns="" w="9525">
+                <a14:hiddenLine xmlns="" xmlns:a14="http://schemas.microsoft.com/office/drawing/2010/main" w="9525">
                   <a:solidFill>
                     <a:srgbClr val="000000"/>
                   </a:solidFill>
@@ -9711,7 +9713,7 @@
             </a:ln>
             <a:extLst>
               <a:ext uri="{91240B29-F687-4f45-9708-019B960494DF}">
-                <a14:hiddenLine xmlns:a14="http://schemas.microsoft.com/office/drawing/2010/main" xmlns="" w="9525">
+                <a14:hiddenLine xmlns="" xmlns:a14="http://schemas.microsoft.com/office/drawing/2010/main" w="9525">
                   <a:solidFill>
                     <a:srgbClr val="000000"/>
                   </a:solidFill>
@@ -9780,7 +9782,7 @@
             </a:ln>
             <a:extLst>
               <a:ext uri="{91240B29-F687-4f45-9708-019B960494DF}">
-                <a14:hiddenLine xmlns:a14="http://schemas.microsoft.com/office/drawing/2010/main" xmlns="" w="9525">
+                <a14:hiddenLine xmlns="" xmlns:a14="http://schemas.microsoft.com/office/drawing/2010/main" w="9525">
                   <a:solidFill>
                     <a:srgbClr val="000000"/>
                   </a:solidFill>
@@ -9877,7 +9879,7 @@
             </a:ln>
             <a:extLst>
               <a:ext uri="{91240B29-F687-4f45-9708-019B960494DF}">
-                <a14:hiddenLine xmlns:a14="http://schemas.microsoft.com/office/drawing/2010/main" xmlns="" w="9525">
+                <a14:hiddenLine xmlns="" xmlns:a14="http://schemas.microsoft.com/office/drawing/2010/main" w="9525">
                   <a:solidFill>
                     <a:srgbClr val="000000"/>
                   </a:solidFill>
@@ -9946,7 +9948,7 @@
             </a:ln>
             <a:extLst>
               <a:ext uri="{91240B29-F687-4f45-9708-019B960494DF}">
-                <a14:hiddenLine xmlns:a14="http://schemas.microsoft.com/office/drawing/2010/main" xmlns="" w="9525">
+                <a14:hiddenLine xmlns="" xmlns:a14="http://schemas.microsoft.com/office/drawing/2010/main" w="9525">
                   <a:solidFill>
                     <a:srgbClr val="000000"/>
                   </a:solidFill>
@@ -10043,7 +10045,7 @@
             </a:ln>
             <a:extLst>
               <a:ext uri="{91240B29-F687-4f45-9708-019B960494DF}">
-                <a14:hiddenLine xmlns:a14="http://schemas.microsoft.com/office/drawing/2010/main" xmlns="" w="9525">
+                <a14:hiddenLine xmlns="" xmlns:a14="http://schemas.microsoft.com/office/drawing/2010/main" w="9525">
                   <a:solidFill>
                     <a:srgbClr val="000000"/>
                   </a:solidFill>
@@ -10084,7 +10086,7 @@
             </a:ln>
             <a:extLst>
               <a:ext uri="{91240B29-F687-4f45-9708-019B960494DF}">
-                <a14:hiddenLine xmlns:a14="http://schemas.microsoft.com/office/drawing/2010/main" xmlns="" w="9525">
+                <a14:hiddenLine xmlns="" xmlns:a14="http://schemas.microsoft.com/office/drawing/2010/main" w="9525">
                   <a:solidFill>
                     <a:srgbClr val="000000"/>
                   </a:solidFill>
@@ -10156,7 +10158,7 @@
             </a:ln>
             <a:extLst>
               <a:ext uri="{91240B29-F687-4f45-9708-019B960494DF}">
-                <a14:hiddenLine xmlns:a14="http://schemas.microsoft.com/office/drawing/2010/main" xmlns="" w="9525">
+                <a14:hiddenLine xmlns="" xmlns:a14="http://schemas.microsoft.com/office/drawing/2010/main" w="9525">
                   <a:solidFill>
                     <a:srgbClr val="000000"/>
                   </a:solidFill>
@@ -10253,7 +10255,7 @@
             </a:ln>
             <a:extLst>
               <a:ext uri="{91240B29-F687-4f45-9708-019B960494DF}">
-                <a14:hiddenLine xmlns:a14="http://schemas.microsoft.com/office/drawing/2010/main" xmlns="" w="9525">
+                <a14:hiddenLine xmlns="" xmlns:a14="http://schemas.microsoft.com/office/drawing/2010/main" w="9525">
                   <a:solidFill>
                     <a:srgbClr val="000000"/>
                   </a:solidFill>
@@ -10322,7 +10324,7 @@
             </a:ln>
             <a:extLst>
               <a:ext uri="{91240B29-F687-4f45-9708-019B960494DF}">
-                <a14:hiddenLine xmlns:a14="http://schemas.microsoft.com/office/drawing/2010/main" xmlns="" w="9525">
+                <a14:hiddenLine xmlns="" xmlns:a14="http://schemas.microsoft.com/office/drawing/2010/main" w="9525">
                   <a:solidFill>
                     <a:srgbClr val="000000"/>
                   </a:solidFill>
@@ -10419,7 +10421,7 @@
             </a:ln>
             <a:extLst>
               <a:ext uri="{91240B29-F687-4f45-9708-019B960494DF}">
-                <a14:hiddenLine xmlns:a14="http://schemas.microsoft.com/office/drawing/2010/main" xmlns="" w="9525">
+                <a14:hiddenLine xmlns="" xmlns:a14="http://schemas.microsoft.com/office/drawing/2010/main" w="9525">
                   <a:solidFill>
                     <a:srgbClr val="000000"/>
                   </a:solidFill>
@@ -10516,7 +10518,7 @@
             </a:ln>
             <a:extLst>
               <a:ext uri="{91240B29-F687-4f45-9708-019B960494DF}">
-                <a14:hiddenLine xmlns:a14="http://schemas.microsoft.com/office/drawing/2010/main" xmlns="" w="9525">
+                <a14:hiddenLine xmlns="" xmlns:a14="http://schemas.microsoft.com/office/drawing/2010/main" w="9525">
                   <a:solidFill>
                     <a:srgbClr val="000000"/>
                   </a:solidFill>
@@ -10588,7 +10590,7 @@
             </a:ln>
             <a:extLst>
               <a:ext uri="{91240B29-F687-4f45-9708-019B960494DF}">
-                <a14:hiddenLine xmlns:a14="http://schemas.microsoft.com/office/drawing/2010/main" xmlns="" w="9525">
+                <a14:hiddenLine xmlns="" xmlns:a14="http://schemas.microsoft.com/office/drawing/2010/main" w="9525">
                   <a:solidFill>
                     <a:srgbClr val="000000"/>
                   </a:solidFill>
@@ -10657,7 +10659,7 @@
             </a:ln>
             <a:extLst>
               <a:ext uri="{91240B29-F687-4f45-9708-019B960494DF}">
-                <a14:hiddenLine xmlns:a14="http://schemas.microsoft.com/office/drawing/2010/main" xmlns="" w="9525">
+                <a14:hiddenLine xmlns="" xmlns:a14="http://schemas.microsoft.com/office/drawing/2010/main" w="9525">
                   <a:solidFill>
                     <a:srgbClr val="000000"/>
                   </a:solidFill>
@@ -10754,7 +10756,7 @@
             </a:ln>
             <a:extLst>
               <a:ext uri="{91240B29-F687-4f45-9708-019B960494DF}">
-                <a14:hiddenLine xmlns:a14="http://schemas.microsoft.com/office/drawing/2010/main" xmlns="" w="9525">
+                <a14:hiddenLine xmlns="" xmlns:a14="http://schemas.microsoft.com/office/drawing/2010/main" w="9525">
                   <a:solidFill>
                     <a:srgbClr val="000000"/>
                   </a:solidFill>
@@ -10851,7 +10853,7 @@
             </a:ln>
             <a:extLst>
               <a:ext uri="{91240B29-F687-4f45-9708-019B960494DF}">
-                <a14:hiddenLine xmlns:a14="http://schemas.microsoft.com/office/drawing/2010/main" xmlns="" w="9525">
+                <a14:hiddenLine xmlns="" xmlns:a14="http://schemas.microsoft.com/office/drawing/2010/main" w="9525">
                   <a:solidFill>
                     <a:srgbClr val="000000"/>
                   </a:solidFill>
@@ -10920,7 +10922,7 @@
             </a:ln>
             <a:extLst>
               <a:ext uri="{91240B29-F687-4f45-9708-019B960494DF}">
-                <a14:hiddenLine xmlns:a14="http://schemas.microsoft.com/office/drawing/2010/main" xmlns="" w="9525">
+                <a14:hiddenLine xmlns="" xmlns:a14="http://schemas.microsoft.com/office/drawing/2010/main" w="9525">
                   <a:solidFill>
                     <a:srgbClr val="000000"/>
                   </a:solidFill>
@@ -11047,7 +11049,7 @@
             </a:ln>
             <a:extLst>
               <a:ext uri="{91240B29-F687-4f45-9708-019B960494DF}">
-                <a14:hiddenLine xmlns:a14="http://schemas.microsoft.com/office/drawing/2010/main" xmlns="" w="9525">
+                <a14:hiddenLine xmlns="" xmlns:a14="http://schemas.microsoft.com/office/drawing/2010/main" w="9525">
                   <a:solidFill>
                     <a:srgbClr val="000000"/>
                   </a:solidFill>
@@ -11122,7 +11124,7 @@
             </a:ln>
             <a:extLst>
               <a:ext uri="{91240B29-F687-4f45-9708-019B960494DF}">
-                <a14:hiddenLine xmlns:a14="http://schemas.microsoft.com/office/drawing/2010/main" xmlns="" w="9525">
+                <a14:hiddenLine xmlns="" xmlns:a14="http://schemas.microsoft.com/office/drawing/2010/main" w="9525">
                   <a:solidFill>
                     <a:srgbClr val="000000"/>
                   </a:solidFill>
@@ -11219,7 +11221,7 @@
             </a:ln>
             <a:extLst>
               <a:ext uri="{91240B29-F687-4f45-9708-019B960494DF}">
-                <a14:hiddenLine xmlns:a14="http://schemas.microsoft.com/office/drawing/2010/main" xmlns="" w="9525">
+                <a14:hiddenLine xmlns="" xmlns:a14="http://schemas.microsoft.com/office/drawing/2010/main" w="9525">
                   <a:solidFill>
                     <a:srgbClr val="000000"/>
                   </a:solidFill>
@@ -11366,7 +11368,7 @@
           <a:p>
             <a:fld id="{6733B157-BC8D-485A-B099-210699CD19FB}" type="datetimeFigureOut">
               <a:rPr lang="en-US" smtClean="0"/>
-              <a:t>4/5/2026</a:t>
+              <a:t>4/6/2026</a:t>
             </a:fld>
             <a:endParaRPr lang="en-US"/>
           </a:p>
@@ -11633,7 +11635,7 @@
           <a:p>
             <a:fld id="{6733B157-BC8D-485A-B099-210699CD19FB}" type="datetimeFigureOut">
               <a:rPr lang="en-US" smtClean="0"/>
-              <a:t>4/5/2026</a:t>
+              <a:t>4/6/2026</a:t>
             </a:fld>
             <a:endParaRPr lang="en-US"/>
           </a:p>
@@ -11829,7 +11831,7 @@
           <a:p>
             <a:fld id="{6733B157-BC8D-485A-B099-210699CD19FB}" type="datetimeFigureOut">
               <a:rPr lang="en-US" smtClean="0"/>
-              <a:t>4/5/2026</a:t>
+              <a:t>4/6/2026</a:t>
             </a:fld>
             <a:endParaRPr lang="en-US"/>
           </a:p>
@@ -12092,7 +12094,7 @@
           <a:p>
             <a:fld id="{6733B157-BC8D-485A-B099-210699CD19FB}" type="datetimeFigureOut">
               <a:rPr lang="en-US" smtClean="0"/>
-              <a:t>4/5/2026</a:t>
+              <a:t>4/6/2026</a:t>
             </a:fld>
             <a:endParaRPr lang="en-US"/>
           </a:p>
@@ -12526,7 +12528,7 @@
           <a:p>
             <a:fld id="{6733B157-BC8D-485A-B099-210699CD19FB}" type="datetimeFigureOut">
               <a:rPr lang="en-US" smtClean="0"/>
-              <a:t>4/5/2026</a:t>
+              <a:t>4/6/2026</a:t>
             </a:fld>
             <a:endParaRPr lang="en-US"/>
           </a:p>
@@ -13072,7 +13074,7 @@
           <a:p>
             <a:fld id="{6733B157-BC8D-485A-B099-210699CD19FB}" type="datetimeFigureOut">
               <a:rPr lang="en-US" smtClean="0"/>
-              <a:t>4/5/2026</a:t>
+              <a:t>4/6/2026</a:t>
             </a:fld>
             <a:endParaRPr lang="en-US"/>
           </a:p>
@@ -13792,7 +13794,7 @@
           <a:p>
             <a:fld id="{6733B157-BC8D-485A-B099-210699CD19FB}" type="datetimeFigureOut">
               <a:rPr lang="en-US" smtClean="0"/>
-              <a:t>4/5/2026</a:t>
+              <a:t>4/6/2026</a:t>
             </a:fld>
             <a:endParaRPr lang="en-US"/>
           </a:p>
@@ -13962,7 +13964,7 @@
           <a:p>
             <a:fld id="{6733B157-BC8D-485A-B099-210699CD19FB}" type="datetimeFigureOut">
               <a:rPr lang="en-US" smtClean="0"/>
-              <a:t>4/5/2026</a:t>
+              <a:t>4/6/2026</a:t>
             </a:fld>
             <a:endParaRPr lang="en-US"/>
           </a:p>
@@ -14142,7 +14144,7 @@
           <a:p>
             <a:fld id="{6733B157-BC8D-485A-B099-210699CD19FB}" type="datetimeFigureOut">
               <a:rPr lang="en-US" smtClean="0"/>
-              <a:t>4/5/2026</a:t>
+              <a:t>4/6/2026</a:t>
             </a:fld>
             <a:endParaRPr lang="en-US"/>
           </a:p>
@@ -14312,7 +14314,7 @@
           <a:p>
             <a:fld id="{6733B157-BC8D-485A-B099-210699CD19FB}" type="datetimeFigureOut">
               <a:rPr lang="en-US" smtClean="0"/>
-              <a:t>4/5/2026</a:t>
+              <a:t>4/6/2026</a:t>
             </a:fld>
             <a:endParaRPr lang="en-US"/>
           </a:p>
@@ -14562,7 +14564,7 @@
           <a:p>
             <a:fld id="{6733B157-BC8D-485A-B099-210699CD19FB}" type="datetimeFigureOut">
               <a:rPr lang="en-US" smtClean="0"/>
-              <a:t>4/5/2026</a:t>
+              <a:t>4/6/2026</a:t>
             </a:fld>
             <a:endParaRPr lang="en-US"/>
           </a:p>
@@ -14794,7 +14796,7 @@
           <a:p>
             <a:fld id="{6733B157-BC8D-485A-B099-210699CD19FB}" type="datetimeFigureOut">
               <a:rPr lang="en-US" smtClean="0"/>
-              <a:t>4/5/2026</a:t>
+              <a:t>4/6/2026</a:t>
             </a:fld>
             <a:endParaRPr lang="en-US"/>
           </a:p>
@@ -15175,7 +15177,7 @@
           <a:p>
             <a:fld id="{6733B157-BC8D-485A-B099-210699CD19FB}" type="datetimeFigureOut">
               <a:rPr lang="en-US" smtClean="0"/>
-              <a:t>4/5/2026</a:t>
+              <a:t>4/6/2026</a:t>
             </a:fld>
             <a:endParaRPr lang="en-US"/>
           </a:p>
@@ -15293,7 +15295,7 @@
           <a:p>
             <a:fld id="{6733B157-BC8D-485A-B099-210699CD19FB}" type="datetimeFigureOut">
               <a:rPr lang="en-US" smtClean="0"/>
-              <a:t>4/5/2026</a:t>
+              <a:t>4/6/2026</a:t>
             </a:fld>
             <a:endParaRPr lang="en-US"/>
           </a:p>
@@ -15388,7 +15390,7 @@
           <a:p>
             <a:fld id="{6733B157-BC8D-485A-B099-210699CD19FB}" type="datetimeFigureOut">
               <a:rPr lang="en-US" smtClean="0"/>
-              <a:t>4/5/2026</a:t>
+              <a:t>4/6/2026</a:t>
             </a:fld>
             <a:endParaRPr lang="en-US"/>
           </a:p>
@@ -15637,7 +15639,7 @@
           <a:p>
             <a:fld id="{6733B157-BC8D-485A-B099-210699CD19FB}" type="datetimeFigureOut">
               <a:rPr lang="en-US" smtClean="0"/>
-              <a:t>4/5/2026</a:t>
+              <a:t>4/6/2026</a:t>
             </a:fld>
             <a:endParaRPr lang="en-US"/>
           </a:p>
@@ -15917,7 +15919,7 @@
           <a:p>
             <a:fld id="{6733B157-BC8D-485A-B099-210699CD19FB}" type="datetimeFigureOut">
               <a:rPr lang="en-US" smtClean="0"/>
-              <a:t>4/5/2026</a:t>
+              <a:t>4/6/2026</a:t>
             </a:fld>
             <a:endParaRPr lang="en-US"/>
           </a:p>
@@ -16033,7 +16035,7 @@
           <a:noFill/>
           <a:extLst>
             <a:ext uri="{909E8E84-426E-40dd-AFC4-6F175D3DCCD1}">
-              <a14:hiddenFill xmlns:a14="http://schemas.microsoft.com/office/drawing/2010/main" xmlns="">
+              <a14:hiddenFill xmlns="" xmlns:a14="http://schemas.microsoft.com/office/drawing/2010/main">
                 <a:solidFill>
                   <a:srgbClr val="FFFFFF"/>
                 </a:solidFill>
@@ -16107,7 +16109,7 @@
               </a:ln>
               <a:extLst>
                 <a:ext uri="{91240B29-F687-4f45-9708-019B960494DF}">
-                  <a14:hiddenLine xmlns:a14="http://schemas.microsoft.com/office/drawing/2010/main" xmlns="" w="9525">
+                  <a14:hiddenLine xmlns="" xmlns:a14="http://schemas.microsoft.com/office/drawing/2010/main" w="9525">
                     <a:solidFill>
                       <a:srgbClr val="000000"/>
                     </a:solidFill>
@@ -16204,7 +16206,7 @@
               </a:ln>
               <a:extLst>
                 <a:ext uri="{91240B29-F687-4f45-9708-019B960494DF}">
-                  <a14:hiddenLine xmlns:a14="http://schemas.microsoft.com/office/drawing/2010/main" xmlns="" w="9525">
+                  <a14:hiddenLine xmlns="" xmlns:a14="http://schemas.microsoft.com/office/drawing/2010/main" w="9525">
                     <a:solidFill>
                       <a:srgbClr val="000000"/>
                     </a:solidFill>
@@ -16301,7 +16303,7 @@
               </a:ln>
               <a:extLst>
                 <a:ext uri="{91240B29-F687-4f45-9708-019B960494DF}">
-                  <a14:hiddenLine xmlns:a14="http://schemas.microsoft.com/office/drawing/2010/main" xmlns="" w="9525">
+                  <a14:hiddenLine xmlns="" xmlns:a14="http://schemas.microsoft.com/office/drawing/2010/main" w="9525">
                     <a:solidFill>
                       <a:srgbClr val="000000"/>
                     </a:solidFill>
@@ -16370,7 +16372,7 @@
               </a:ln>
               <a:extLst>
                 <a:ext uri="{91240B29-F687-4f45-9708-019B960494DF}">
-                  <a14:hiddenLine xmlns:a14="http://schemas.microsoft.com/office/drawing/2010/main" xmlns="" w="9525">
+                  <a14:hiddenLine xmlns="" xmlns:a14="http://schemas.microsoft.com/office/drawing/2010/main" w="9525">
                     <a:solidFill>
                       <a:srgbClr val="000000"/>
                     </a:solidFill>
@@ -16467,7 +16469,7 @@
               </a:ln>
               <a:extLst>
                 <a:ext uri="{91240B29-F687-4f45-9708-019B960494DF}">
-                  <a14:hiddenLine xmlns:a14="http://schemas.microsoft.com/office/drawing/2010/main" xmlns="" w="9525">
+                  <a14:hiddenLine xmlns="" xmlns:a14="http://schemas.microsoft.com/office/drawing/2010/main" w="9525">
                     <a:solidFill>
                       <a:srgbClr val="000000"/>
                     </a:solidFill>
@@ -16536,7 +16538,7 @@
               </a:ln>
               <a:extLst>
                 <a:ext uri="{91240B29-F687-4f45-9708-019B960494DF}">
-                  <a14:hiddenLine xmlns:a14="http://schemas.microsoft.com/office/drawing/2010/main" xmlns="" w="9525">
+                  <a14:hiddenLine xmlns="" xmlns:a14="http://schemas.microsoft.com/office/drawing/2010/main" w="9525">
                     <a:solidFill>
                       <a:srgbClr val="000000"/>
                     </a:solidFill>
@@ -16605,7 +16607,7 @@
               </a:ln>
               <a:extLst>
                 <a:ext uri="{91240B29-F687-4f45-9708-019B960494DF}">
-                  <a14:hiddenLine xmlns:a14="http://schemas.microsoft.com/office/drawing/2010/main" xmlns="" w="9525">
+                  <a14:hiddenLine xmlns="" xmlns:a14="http://schemas.microsoft.com/office/drawing/2010/main" w="9525">
                     <a:solidFill>
                       <a:srgbClr val="000000"/>
                     </a:solidFill>
@@ -16702,7 +16704,7 @@
               </a:ln>
               <a:extLst>
                 <a:ext uri="{91240B29-F687-4f45-9708-019B960494DF}">
-                  <a14:hiddenLine xmlns:a14="http://schemas.microsoft.com/office/drawing/2010/main" xmlns="" w="9525">
+                  <a14:hiddenLine xmlns="" xmlns:a14="http://schemas.microsoft.com/office/drawing/2010/main" w="9525">
                     <a:solidFill>
                       <a:srgbClr val="000000"/>
                     </a:solidFill>
@@ -16799,7 +16801,7 @@
               </a:ln>
               <a:extLst>
                 <a:ext uri="{91240B29-F687-4f45-9708-019B960494DF}">
-                  <a14:hiddenLine xmlns:a14="http://schemas.microsoft.com/office/drawing/2010/main" xmlns="" w="9525">
+                  <a14:hiddenLine xmlns="" xmlns:a14="http://schemas.microsoft.com/office/drawing/2010/main" w="9525">
                     <a:solidFill>
                       <a:srgbClr val="000000"/>
                     </a:solidFill>
@@ -16868,7 +16870,7 @@
               </a:ln>
               <a:extLst>
                 <a:ext uri="{91240B29-F687-4f45-9708-019B960494DF}">
-                  <a14:hiddenLine xmlns:a14="http://schemas.microsoft.com/office/drawing/2010/main" xmlns="" w="9525">
+                  <a14:hiddenLine xmlns="" xmlns:a14="http://schemas.microsoft.com/office/drawing/2010/main" w="9525">
                     <a:solidFill>
                       <a:srgbClr val="000000"/>
                     </a:solidFill>
@@ -16985,7 +16987,7 @@
               </a:ln>
               <a:extLst>
                 <a:ext uri="{91240B29-F687-4f45-9708-019B960494DF}">
-                  <a14:hiddenLine xmlns:a14="http://schemas.microsoft.com/office/drawing/2010/main" xmlns="" w="9525">
+                  <a14:hiddenLine xmlns="" xmlns:a14="http://schemas.microsoft.com/office/drawing/2010/main" w="9525">
                     <a:solidFill>
                       <a:srgbClr val="000000"/>
                     </a:solidFill>
@@ -17083,7 +17085,7 @@
               </a:ln>
               <a:extLst>
                 <a:ext uri="{91240B29-F687-4f45-9708-019B960494DF}">
-                  <a14:hiddenLine xmlns:a14="http://schemas.microsoft.com/office/drawing/2010/main" xmlns="" w="9525">
+                  <a14:hiddenLine xmlns="" xmlns:a14="http://schemas.microsoft.com/office/drawing/2010/main" w="9525">
                     <a:solidFill>
                       <a:srgbClr val="000000"/>
                     </a:solidFill>
@@ -17152,7 +17154,7 @@
               </a:ln>
               <a:extLst>
                 <a:ext uri="{91240B29-F687-4f45-9708-019B960494DF}">
-                  <a14:hiddenLine xmlns:a14="http://schemas.microsoft.com/office/drawing/2010/main" xmlns="" w="9525">
+                  <a14:hiddenLine xmlns="" xmlns:a14="http://schemas.microsoft.com/office/drawing/2010/main" w="9525">
                     <a:solidFill>
                       <a:srgbClr val="000000"/>
                     </a:solidFill>
@@ -17221,7 +17223,7 @@
               </a:ln>
               <a:extLst>
                 <a:ext uri="{91240B29-F687-4f45-9708-019B960494DF}">
-                  <a14:hiddenLine xmlns:a14="http://schemas.microsoft.com/office/drawing/2010/main" xmlns="" w="9525">
+                  <a14:hiddenLine xmlns="" xmlns:a14="http://schemas.microsoft.com/office/drawing/2010/main" w="9525">
                     <a:solidFill>
                       <a:srgbClr val="000000"/>
                     </a:solidFill>
@@ -17318,7 +17320,7 @@
               </a:ln>
               <a:extLst>
                 <a:ext uri="{91240B29-F687-4f45-9708-019B960494DF}">
-                  <a14:hiddenLine xmlns:a14="http://schemas.microsoft.com/office/drawing/2010/main" xmlns="" w="9525">
+                  <a14:hiddenLine xmlns="" xmlns:a14="http://schemas.microsoft.com/office/drawing/2010/main" w="9525">
                     <a:solidFill>
                       <a:srgbClr val="000000"/>
                     </a:solidFill>
@@ -17359,7 +17361,7 @@
               </a:ln>
               <a:extLst>
                 <a:ext uri="{91240B29-F687-4f45-9708-019B960494DF}">
-                  <a14:hiddenLine xmlns:a14="http://schemas.microsoft.com/office/drawing/2010/main" xmlns="" w="9525">
+                  <a14:hiddenLine xmlns="" xmlns:a14="http://schemas.microsoft.com/office/drawing/2010/main" w="9525">
                     <a:solidFill>
                       <a:srgbClr val="000000"/>
                     </a:solidFill>
@@ -17431,7 +17433,7 @@
               </a:ln>
               <a:extLst>
                 <a:ext uri="{91240B29-F687-4f45-9708-019B960494DF}">
-                  <a14:hiddenLine xmlns:a14="http://schemas.microsoft.com/office/drawing/2010/main" xmlns="" w="9525">
+                  <a14:hiddenLine xmlns="" xmlns:a14="http://schemas.microsoft.com/office/drawing/2010/main" w="9525">
                     <a:solidFill>
                       <a:srgbClr val="000000"/>
                     </a:solidFill>
@@ -17528,7 +17530,7 @@
               </a:ln>
               <a:extLst>
                 <a:ext uri="{91240B29-F687-4f45-9708-019B960494DF}">
-                  <a14:hiddenLine xmlns:a14="http://schemas.microsoft.com/office/drawing/2010/main" xmlns="" w="9525">
+                  <a14:hiddenLine xmlns="" xmlns:a14="http://schemas.microsoft.com/office/drawing/2010/main" w="9525">
                     <a:solidFill>
                       <a:srgbClr val="000000"/>
                     </a:solidFill>
@@ -17597,7 +17599,7 @@
               </a:ln>
               <a:extLst>
                 <a:ext uri="{91240B29-F687-4f45-9708-019B960494DF}">
-                  <a14:hiddenLine xmlns:a14="http://schemas.microsoft.com/office/drawing/2010/main" xmlns="" w="9525">
+                  <a14:hiddenLine xmlns="" xmlns:a14="http://schemas.microsoft.com/office/drawing/2010/main" w="9525">
                     <a:solidFill>
                       <a:srgbClr val="000000"/>
                     </a:solidFill>
@@ -17694,7 +17696,7 @@
               </a:ln>
               <a:extLst>
                 <a:ext uri="{91240B29-F687-4f45-9708-019B960494DF}">
-                  <a14:hiddenLine xmlns:a14="http://schemas.microsoft.com/office/drawing/2010/main" xmlns="" w="9525">
+                  <a14:hiddenLine xmlns="" xmlns:a14="http://schemas.microsoft.com/office/drawing/2010/main" w="9525">
                     <a:solidFill>
                       <a:srgbClr val="000000"/>
                     </a:solidFill>
@@ -17766,7 +17768,7 @@
               </a:ln>
               <a:extLst>
                 <a:ext uri="{91240B29-F687-4f45-9708-019B960494DF}">
-                  <a14:hiddenLine xmlns:a14="http://schemas.microsoft.com/office/drawing/2010/main" xmlns="" w="9525">
+                  <a14:hiddenLine xmlns="" xmlns:a14="http://schemas.microsoft.com/office/drawing/2010/main" w="9525">
                     <a:solidFill>
                       <a:srgbClr val="000000"/>
                     </a:solidFill>
@@ -17835,7 +17837,7 @@
               </a:ln>
               <a:extLst>
                 <a:ext uri="{91240B29-F687-4f45-9708-019B960494DF}">
-                  <a14:hiddenLine xmlns:a14="http://schemas.microsoft.com/office/drawing/2010/main" xmlns="" w="9525">
+                  <a14:hiddenLine xmlns="" xmlns:a14="http://schemas.microsoft.com/office/drawing/2010/main" w="9525">
                     <a:solidFill>
                       <a:srgbClr val="000000"/>
                     </a:solidFill>
@@ -17932,7 +17934,7 @@
               </a:ln>
               <a:extLst>
                 <a:ext uri="{91240B29-F687-4f45-9708-019B960494DF}">
-                  <a14:hiddenLine xmlns:a14="http://schemas.microsoft.com/office/drawing/2010/main" xmlns="" w="9525">
+                  <a14:hiddenLine xmlns="" xmlns:a14="http://schemas.microsoft.com/office/drawing/2010/main" w="9525">
                     <a:solidFill>
                       <a:srgbClr val="000000"/>
                     </a:solidFill>
@@ -18029,7 +18031,7 @@
               </a:ln>
               <a:extLst>
                 <a:ext uri="{91240B29-F687-4f45-9708-019B960494DF}">
-                  <a14:hiddenLine xmlns:a14="http://schemas.microsoft.com/office/drawing/2010/main" xmlns="" w="9525">
+                  <a14:hiddenLine xmlns="" xmlns:a14="http://schemas.microsoft.com/office/drawing/2010/main" w="9525">
                     <a:solidFill>
                       <a:srgbClr val="000000"/>
                     </a:solidFill>
@@ -18101,7 +18103,7 @@
               </a:ln>
               <a:extLst>
                 <a:ext uri="{91240B29-F687-4f45-9708-019B960494DF}">
-                  <a14:hiddenLine xmlns:a14="http://schemas.microsoft.com/office/drawing/2010/main" xmlns="" w="9525">
+                  <a14:hiddenLine xmlns="" xmlns:a14="http://schemas.microsoft.com/office/drawing/2010/main" w="9525">
                     <a:solidFill>
                       <a:srgbClr val="000000"/>
                     </a:solidFill>
@@ -18228,7 +18230,7 @@
               </a:ln>
               <a:extLst>
                 <a:ext uri="{91240B29-F687-4f45-9708-019B960494DF}">
-                  <a14:hiddenLine xmlns:a14="http://schemas.microsoft.com/office/drawing/2010/main" xmlns="" w="9525">
+                  <a14:hiddenLine xmlns="" xmlns:a14="http://schemas.microsoft.com/office/drawing/2010/main" w="9525">
                     <a:solidFill>
                       <a:srgbClr val="000000"/>
                     </a:solidFill>
@@ -18333,7 +18335,7 @@
               </a:ln>
               <a:extLst>
                 <a:ext uri="{91240B29-F687-4f45-9708-019B960494DF}">
-                  <a14:hiddenLine xmlns:a14="http://schemas.microsoft.com/office/drawing/2010/main" xmlns="" w="9525">
+                  <a14:hiddenLine xmlns="" xmlns:a14="http://schemas.microsoft.com/office/drawing/2010/main" w="9525">
                     <a:solidFill>
                       <a:srgbClr val="000000"/>
                     </a:solidFill>
@@ -18455,7 +18457,7 @@
               </a:ln>
               <a:extLst>
                 <a:ext uri="{91240B29-F687-4f45-9708-019B960494DF}">
-                  <a14:hiddenLine xmlns:a14="http://schemas.microsoft.com/office/drawing/2010/main" xmlns="" w="9525">
+                  <a14:hiddenLine xmlns="" xmlns:a14="http://schemas.microsoft.com/office/drawing/2010/main" w="9525">
                     <a:solidFill>
                       <a:srgbClr val="000000"/>
                     </a:solidFill>
@@ -18552,7 +18554,7 @@
               </a:ln>
               <a:extLst>
                 <a:ext uri="{91240B29-F687-4f45-9708-019B960494DF}">
-                  <a14:hiddenLine xmlns:a14="http://schemas.microsoft.com/office/drawing/2010/main" xmlns="" w="9525">
+                  <a14:hiddenLine xmlns="" xmlns:a14="http://schemas.microsoft.com/office/drawing/2010/main" w="9525">
                     <a:solidFill>
                       <a:srgbClr val="000000"/>
                     </a:solidFill>
@@ -18624,7 +18626,7 @@
               </a:ln>
               <a:extLst>
                 <a:ext uri="{91240B29-F687-4f45-9708-019B960494DF}">
-                  <a14:hiddenLine xmlns:a14="http://schemas.microsoft.com/office/drawing/2010/main" xmlns="" w="9525">
+                  <a14:hiddenLine xmlns="" xmlns:a14="http://schemas.microsoft.com/office/drawing/2010/main" w="9525">
                     <a:solidFill>
                       <a:srgbClr val="000000"/>
                     </a:solidFill>
@@ -18721,7 +18723,7 @@
               </a:ln>
               <a:extLst>
                 <a:ext uri="{91240B29-F687-4f45-9708-019B960494DF}">
-                  <a14:hiddenLine xmlns:a14="http://schemas.microsoft.com/office/drawing/2010/main" xmlns="" w="9525">
+                  <a14:hiddenLine xmlns="" xmlns:a14="http://schemas.microsoft.com/office/drawing/2010/main" w="9525">
                     <a:solidFill>
                       <a:srgbClr val="000000"/>
                     </a:solidFill>
@@ -18796,7 +18798,7 @@
               </a:ln>
               <a:extLst>
                 <a:ext uri="{91240B29-F687-4f45-9708-019B960494DF}">
-                  <a14:hiddenLine xmlns:a14="http://schemas.microsoft.com/office/drawing/2010/main" xmlns="" w="9525">
+                  <a14:hiddenLine xmlns="" xmlns:a14="http://schemas.microsoft.com/office/drawing/2010/main" w="9525">
                     <a:solidFill>
                       <a:srgbClr val="000000"/>
                     </a:solidFill>
@@ -18893,7 +18895,7 @@
               </a:ln>
               <a:extLst>
                 <a:ext uri="{91240B29-F687-4f45-9708-019B960494DF}">
-                  <a14:hiddenLine xmlns:a14="http://schemas.microsoft.com/office/drawing/2010/main" xmlns="" w="9525">
+                  <a14:hiddenLine xmlns="" xmlns:a14="http://schemas.microsoft.com/office/drawing/2010/main" w="9525">
                     <a:solidFill>
                       <a:srgbClr val="000000"/>
                     </a:solidFill>
@@ -18968,7 +18970,7 @@
               </a:ln>
               <a:extLst>
                 <a:ext uri="{91240B29-F687-4f45-9708-019B960494DF}">
-                  <a14:hiddenLine xmlns:a14="http://schemas.microsoft.com/office/drawing/2010/main" xmlns="" w="9525">
+                  <a14:hiddenLine xmlns="" xmlns:a14="http://schemas.microsoft.com/office/drawing/2010/main" w="9525">
                     <a:solidFill>
                       <a:srgbClr val="000000"/>
                     </a:solidFill>
@@ -19065,7 +19067,7 @@
               </a:ln>
               <a:extLst>
                 <a:ext uri="{91240B29-F687-4f45-9708-019B960494DF}">
-                  <a14:hiddenLine xmlns:a14="http://schemas.microsoft.com/office/drawing/2010/main" xmlns="" w="9525">
+                  <a14:hiddenLine xmlns="" xmlns:a14="http://schemas.microsoft.com/office/drawing/2010/main" w="9525">
                     <a:solidFill>
                       <a:srgbClr val="000000"/>
                     </a:solidFill>
@@ -19106,7 +19108,7 @@
               </a:ln>
               <a:extLst>
                 <a:ext uri="{91240B29-F687-4f45-9708-019B960494DF}">
-                  <a14:hiddenLine xmlns:a14="http://schemas.microsoft.com/office/drawing/2010/main" xmlns="" w="9525">
+                  <a14:hiddenLine xmlns="" xmlns:a14="http://schemas.microsoft.com/office/drawing/2010/main" w="9525">
                     <a:solidFill>
                       <a:srgbClr val="000000"/>
                     </a:solidFill>
@@ -19253,7 +19255,7 @@
           <a:p>
             <a:fld id="{6733B157-BC8D-485A-B099-210699CD19FB}" type="datetimeFigureOut">
               <a:rPr lang="en-US" smtClean="0"/>
-              <a:t>4/5/2026</a:t>
+              <a:t>4/6/2026</a:t>
             </a:fld>
             <a:endParaRPr lang="en-US"/>
           </a:p>
@@ -20583,13 +20585,13 @@
   <p:clrMapOvr>
     <a:masterClrMapping/>
   </p:clrMapOvr>
-  <mc:AlternateContent xmlns:mc="http://schemas.openxmlformats.org/markup-compatibility/2006">
-    <mc:Choice xmlns:p15="http://schemas.microsoft.com/office/powerpoint/2012/main" Requires="p15">
+  <mc:AlternateContent xmlns:mc="http://schemas.openxmlformats.org/markup-compatibility/2006" xmlns:p15="http://schemas.microsoft.com/office/powerpoint/2012/main">
+    <mc:Choice Requires="p15">
       <p:transition xmlns:p14="http://schemas.microsoft.com/office/powerpoint/2010/main" spd="slow" p14:dur="1250">
         <p15:prstTrans prst="peelOff"/>
       </p:transition>
     </mc:Choice>
-    <mc:Fallback>
+    <mc:Fallback xmlns="">
       <p:transition spd="slow">
         <p:fade/>
       </p:transition>
@@ -21365,13 +21367,13 @@
   <p:clrMapOvr>
     <a:masterClrMapping/>
   </p:clrMapOvr>
-  <mc:AlternateContent xmlns:mc="http://schemas.openxmlformats.org/markup-compatibility/2006">
-    <mc:Choice xmlns:p15="http://schemas.microsoft.com/office/powerpoint/2012/main" Requires="p15">
+  <mc:AlternateContent xmlns:mc="http://schemas.openxmlformats.org/markup-compatibility/2006" xmlns:p15="http://schemas.microsoft.com/office/powerpoint/2012/main">
+    <mc:Choice Requires="p15">
       <p:transition xmlns:p14="http://schemas.microsoft.com/office/powerpoint/2010/main" spd="slow" p14:dur="1250">
         <p15:prstTrans prst="pageCurlDouble"/>
       </p:transition>
     </mc:Choice>
-    <mc:Fallback>
+    <mc:Fallback xmlns="">
       <p:transition spd="slow">
         <p:fade/>
       </p:transition>
@@ -21783,13 +21785,13 @@
   <p:clrMapOvr>
     <a:masterClrMapping/>
   </p:clrMapOvr>
-  <mc:AlternateContent xmlns:mc="http://schemas.openxmlformats.org/markup-compatibility/2006">
-    <mc:Choice xmlns:p14="http://schemas.microsoft.com/office/powerpoint/2010/main" Requires="p14">
+  <mc:AlternateContent xmlns:mc="http://schemas.openxmlformats.org/markup-compatibility/2006" xmlns:p14="http://schemas.microsoft.com/office/powerpoint/2010/main">
+    <mc:Choice Requires="p14">
       <p:transition spd="slow" p14:dur="900">
         <p14:warp dir="in"/>
       </p:transition>
     </mc:Choice>
-    <mc:Fallback>
+    <mc:Fallback xmlns="">
       <p:transition spd="slow">
         <p:fade/>
       </p:transition>
@@ -22199,7 +22201,7 @@
             <a:noFill/>
             <a:extLst>
               <a:ext uri="{909E8E84-426E-40dd-AFC4-6F175D3DCCD1}">
-                <a14:hiddenFill xmlns="" xmlns:a16="http://schemas.microsoft.com/office/drawing/2014/main" xmlns:a14="http://schemas.microsoft.com/office/drawing/2010/main" xmlns:p14="http://schemas.microsoft.com/office/powerpoint/2010/main">
+                <a14:hiddenFill xmlns:p14="http://schemas.microsoft.com/office/powerpoint/2010/main" xmlns:a14="http://schemas.microsoft.com/office/drawing/2010/main" xmlns:a16="http://schemas.microsoft.com/office/drawing/2014/main" xmlns="">
                   <a:solidFill>
                     <a:srgbClr val="FFFFFF"/>
                   </a:solidFill>
@@ -22319,7 +22321,7 @@
             </a:ln>
             <a:extLst>
               <a:ext uri="{91240B29-F687-4f45-9708-019B960494DF}">
-                <a14:hiddenLine xmlns="" xmlns:a16="http://schemas.microsoft.com/office/drawing/2014/main" xmlns:a14="http://schemas.microsoft.com/office/drawing/2010/main" xmlns:p14="http://schemas.microsoft.com/office/powerpoint/2010/main" w="9525">
+                <a14:hiddenLine xmlns:p14="http://schemas.microsoft.com/office/powerpoint/2010/main" xmlns:a14="http://schemas.microsoft.com/office/drawing/2010/main" xmlns:a16="http://schemas.microsoft.com/office/drawing/2014/main" xmlns="" w="9525">
                   <a:solidFill>
                     <a:srgbClr val="000000"/>
                   </a:solidFill>
@@ -22431,7 +22433,7 @@
             </a:ln>
             <a:extLst>
               <a:ext uri="{91240B29-F687-4f45-9708-019B960494DF}">
-                <a14:hiddenLine xmlns="" xmlns:a16="http://schemas.microsoft.com/office/drawing/2014/main" xmlns:a14="http://schemas.microsoft.com/office/drawing/2010/main" xmlns:p14="http://schemas.microsoft.com/office/powerpoint/2010/main" w="9525">
+                <a14:hiddenLine xmlns:p14="http://schemas.microsoft.com/office/powerpoint/2010/main" xmlns:a14="http://schemas.microsoft.com/office/drawing/2010/main" xmlns:a16="http://schemas.microsoft.com/office/drawing/2014/main" xmlns="" w="9525">
                   <a:solidFill>
                     <a:srgbClr val="000000"/>
                   </a:solidFill>
@@ -22543,7 +22545,7 @@
             </a:ln>
             <a:extLst>
               <a:ext uri="{91240B29-F687-4f45-9708-019B960494DF}">
-                <a14:hiddenLine xmlns="" xmlns:a16="http://schemas.microsoft.com/office/drawing/2014/main" xmlns:a14="http://schemas.microsoft.com/office/drawing/2010/main" xmlns:p14="http://schemas.microsoft.com/office/powerpoint/2010/main" w="9525">
+                <a14:hiddenLine xmlns:p14="http://schemas.microsoft.com/office/powerpoint/2010/main" xmlns:a14="http://schemas.microsoft.com/office/drawing/2010/main" xmlns:a16="http://schemas.microsoft.com/office/drawing/2014/main" xmlns="" w="9525">
                   <a:solidFill>
                     <a:srgbClr val="000000"/>
                   </a:solidFill>
@@ -22599,7 +22601,7 @@
             </a:ln>
             <a:extLst>
               <a:ext uri="{91240B29-F687-4f45-9708-019B960494DF}">
-                <a14:hiddenLine xmlns="" xmlns:a16="http://schemas.microsoft.com/office/drawing/2014/main" xmlns:a14="http://schemas.microsoft.com/office/drawing/2010/main" xmlns:p14="http://schemas.microsoft.com/office/powerpoint/2010/main" w="9525">
+                <a14:hiddenLine xmlns:p14="http://schemas.microsoft.com/office/powerpoint/2010/main" xmlns:a14="http://schemas.microsoft.com/office/drawing/2010/main" xmlns:a16="http://schemas.microsoft.com/office/drawing/2014/main" xmlns="" w="9525">
                   <a:solidFill>
                     <a:srgbClr val="000000"/>
                   </a:solidFill>
@@ -22711,7 +22713,7 @@
             </a:ln>
             <a:extLst>
               <a:ext uri="{91240B29-F687-4f45-9708-019B960494DF}">
-                <a14:hiddenLine xmlns="" xmlns:a16="http://schemas.microsoft.com/office/drawing/2014/main" xmlns:a14="http://schemas.microsoft.com/office/drawing/2010/main" xmlns:p14="http://schemas.microsoft.com/office/powerpoint/2010/main" w="9525">
+                <a14:hiddenLine xmlns:p14="http://schemas.microsoft.com/office/powerpoint/2010/main" xmlns:a14="http://schemas.microsoft.com/office/drawing/2010/main" xmlns:a16="http://schemas.microsoft.com/office/drawing/2014/main" xmlns="" w="9525">
                   <a:solidFill>
                     <a:srgbClr val="000000"/>
                   </a:solidFill>
@@ -22795,7 +22797,7 @@
             </a:ln>
             <a:extLst>
               <a:ext uri="{91240B29-F687-4f45-9708-019B960494DF}">
-                <a14:hiddenLine xmlns="" xmlns:a16="http://schemas.microsoft.com/office/drawing/2014/main" xmlns:a14="http://schemas.microsoft.com/office/drawing/2010/main" xmlns:p14="http://schemas.microsoft.com/office/powerpoint/2010/main" w="9525">
+                <a14:hiddenLine xmlns:p14="http://schemas.microsoft.com/office/powerpoint/2010/main" xmlns:a14="http://schemas.microsoft.com/office/drawing/2010/main" xmlns:a16="http://schemas.microsoft.com/office/drawing/2014/main" xmlns="" w="9525">
                   <a:solidFill>
                     <a:srgbClr val="000000"/>
                   </a:solidFill>
@@ -22879,7 +22881,7 @@
             </a:ln>
             <a:extLst>
               <a:ext uri="{91240B29-F687-4f45-9708-019B960494DF}">
-                <a14:hiddenLine xmlns="" xmlns:a16="http://schemas.microsoft.com/office/drawing/2014/main" xmlns:a14="http://schemas.microsoft.com/office/drawing/2010/main" xmlns:p14="http://schemas.microsoft.com/office/powerpoint/2010/main" w="9525">
+                <a14:hiddenLine xmlns:p14="http://schemas.microsoft.com/office/powerpoint/2010/main" xmlns:a14="http://schemas.microsoft.com/office/drawing/2010/main" xmlns:a16="http://schemas.microsoft.com/office/drawing/2014/main" xmlns="" w="9525">
                   <a:solidFill>
                     <a:srgbClr val="000000"/>
                   </a:solidFill>
@@ -22991,7 +22993,7 @@
             </a:ln>
             <a:extLst>
               <a:ext uri="{91240B29-F687-4f45-9708-019B960494DF}">
-                <a14:hiddenLine xmlns="" xmlns:a16="http://schemas.microsoft.com/office/drawing/2014/main" xmlns:a14="http://schemas.microsoft.com/office/drawing/2010/main" xmlns:p14="http://schemas.microsoft.com/office/powerpoint/2010/main" w="9525">
+                <a14:hiddenLine xmlns:p14="http://schemas.microsoft.com/office/powerpoint/2010/main" xmlns:a14="http://schemas.microsoft.com/office/drawing/2010/main" xmlns:a16="http://schemas.microsoft.com/office/drawing/2014/main" xmlns="" w="9525">
                   <a:solidFill>
                     <a:srgbClr val="000000"/>
                   </a:solidFill>
@@ -23075,7 +23077,7 @@
             </a:ln>
             <a:extLst>
               <a:ext uri="{91240B29-F687-4f45-9708-019B960494DF}">
-                <a14:hiddenLine xmlns="" xmlns:a16="http://schemas.microsoft.com/office/drawing/2014/main" xmlns:a14="http://schemas.microsoft.com/office/drawing/2010/main" xmlns:p14="http://schemas.microsoft.com/office/powerpoint/2010/main" w="9525">
+                <a14:hiddenLine xmlns:p14="http://schemas.microsoft.com/office/powerpoint/2010/main" xmlns:a14="http://schemas.microsoft.com/office/drawing/2010/main" xmlns:a16="http://schemas.microsoft.com/office/drawing/2014/main" xmlns="" w="9525">
                   <a:solidFill>
                     <a:srgbClr val="000000"/>
                   </a:solidFill>
@@ -23159,7 +23161,7 @@
             </a:ln>
             <a:extLst>
               <a:ext uri="{91240B29-F687-4f45-9708-019B960494DF}">
-                <a14:hiddenLine xmlns="" xmlns:a16="http://schemas.microsoft.com/office/drawing/2014/main" xmlns:a14="http://schemas.microsoft.com/office/drawing/2010/main" xmlns:p14="http://schemas.microsoft.com/office/powerpoint/2010/main" w="9525">
+                <a14:hiddenLine xmlns:p14="http://schemas.microsoft.com/office/powerpoint/2010/main" xmlns:a14="http://schemas.microsoft.com/office/drawing/2010/main" xmlns:a16="http://schemas.microsoft.com/office/drawing/2014/main" xmlns="" w="9525">
                   <a:solidFill>
                     <a:srgbClr val="000000"/>
                   </a:solidFill>
@@ -23271,7 +23273,7 @@
             </a:ln>
             <a:extLst>
               <a:ext uri="{91240B29-F687-4f45-9708-019B960494DF}">
-                <a14:hiddenLine xmlns="" xmlns:a16="http://schemas.microsoft.com/office/drawing/2014/main" xmlns:a14="http://schemas.microsoft.com/office/drawing/2010/main" xmlns:p14="http://schemas.microsoft.com/office/powerpoint/2010/main" w="9525">
+                <a14:hiddenLine xmlns:p14="http://schemas.microsoft.com/office/powerpoint/2010/main" xmlns:a14="http://schemas.microsoft.com/office/drawing/2010/main" xmlns:a16="http://schemas.microsoft.com/office/drawing/2014/main" xmlns="" w="9525">
                   <a:solidFill>
                     <a:srgbClr val="000000"/>
                   </a:solidFill>
@@ -23383,7 +23385,7 @@
             </a:ln>
             <a:extLst>
               <a:ext uri="{91240B29-F687-4f45-9708-019B960494DF}">
-                <a14:hiddenLine xmlns="" xmlns:a16="http://schemas.microsoft.com/office/drawing/2014/main" xmlns:a14="http://schemas.microsoft.com/office/drawing/2010/main" xmlns:p14="http://schemas.microsoft.com/office/powerpoint/2010/main" w="9525">
+                <a14:hiddenLine xmlns:p14="http://schemas.microsoft.com/office/powerpoint/2010/main" xmlns:a14="http://schemas.microsoft.com/office/drawing/2010/main" xmlns:a16="http://schemas.microsoft.com/office/drawing/2014/main" xmlns="" w="9525">
                   <a:solidFill>
                     <a:srgbClr val="000000"/>
                   </a:solidFill>
@@ -23467,7 +23469,7 @@
             </a:ln>
             <a:extLst>
               <a:ext uri="{91240B29-F687-4f45-9708-019B960494DF}">
-                <a14:hiddenLine xmlns="" xmlns:a16="http://schemas.microsoft.com/office/drawing/2014/main" xmlns:a14="http://schemas.microsoft.com/office/drawing/2010/main" xmlns:p14="http://schemas.microsoft.com/office/powerpoint/2010/main" w="9525">
+                <a14:hiddenLine xmlns:p14="http://schemas.microsoft.com/office/powerpoint/2010/main" xmlns:a14="http://schemas.microsoft.com/office/drawing/2010/main" xmlns:a16="http://schemas.microsoft.com/office/drawing/2014/main" xmlns="" w="9525">
                   <a:solidFill>
                     <a:srgbClr val="000000"/>
                   </a:solidFill>
@@ -23599,7 +23601,7 @@
             </a:ln>
             <a:extLst>
               <a:ext uri="{91240B29-F687-4f45-9708-019B960494DF}">
-                <a14:hiddenLine xmlns="" xmlns:a16="http://schemas.microsoft.com/office/drawing/2014/main" xmlns:a14="http://schemas.microsoft.com/office/drawing/2010/main" xmlns:p14="http://schemas.microsoft.com/office/powerpoint/2010/main" w="9525">
+                <a14:hiddenLine xmlns:p14="http://schemas.microsoft.com/office/powerpoint/2010/main" xmlns:a14="http://schemas.microsoft.com/office/drawing/2010/main" xmlns:a16="http://schemas.microsoft.com/office/drawing/2014/main" xmlns="" w="9525">
                   <a:solidFill>
                     <a:srgbClr val="000000"/>
                   </a:solidFill>
@@ -23683,7 +23685,7 @@
             </a:ln>
             <a:extLst>
               <a:ext uri="{91240B29-F687-4f45-9708-019B960494DF}">
-                <a14:hiddenLine xmlns="" xmlns:a16="http://schemas.microsoft.com/office/drawing/2014/main" xmlns:a14="http://schemas.microsoft.com/office/drawing/2010/main" xmlns:p14="http://schemas.microsoft.com/office/powerpoint/2010/main" w="9525">
+                <a14:hiddenLine xmlns:p14="http://schemas.microsoft.com/office/powerpoint/2010/main" xmlns:a14="http://schemas.microsoft.com/office/drawing/2010/main" xmlns:a16="http://schemas.microsoft.com/office/drawing/2014/main" xmlns="" w="9525">
                   <a:solidFill>
                     <a:srgbClr val="000000"/>
                   </a:solidFill>
@@ -23795,7 +23797,7 @@
             </a:ln>
             <a:extLst>
               <a:ext uri="{91240B29-F687-4f45-9708-019B960494DF}">
-                <a14:hiddenLine xmlns="" xmlns:a16="http://schemas.microsoft.com/office/drawing/2014/main" xmlns:a14="http://schemas.microsoft.com/office/drawing/2010/main" xmlns:p14="http://schemas.microsoft.com/office/powerpoint/2010/main" w="9525">
+                <a14:hiddenLine xmlns:p14="http://schemas.microsoft.com/office/powerpoint/2010/main" xmlns:a14="http://schemas.microsoft.com/office/drawing/2010/main" xmlns:a16="http://schemas.microsoft.com/office/drawing/2014/main" xmlns="" w="9525">
                   <a:solidFill>
                     <a:srgbClr val="000000"/>
                   </a:solidFill>
@@ -23907,7 +23909,7 @@
             </a:ln>
             <a:extLst>
               <a:ext uri="{91240B29-F687-4f45-9708-019B960494DF}">
-                <a14:hiddenLine xmlns="" xmlns:a16="http://schemas.microsoft.com/office/drawing/2014/main" xmlns:a14="http://schemas.microsoft.com/office/drawing/2010/main" xmlns:p14="http://schemas.microsoft.com/office/powerpoint/2010/main" w="9525">
+                <a14:hiddenLine xmlns:p14="http://schemas.microsoft.com/office/powerpoint/2010/main" xmlns:a14="http://schemas.microsoft.com/office/drawing/2010/main" xmlns:a16="http://schemas.microsoft.com/office/drawing/2014/main" xmlns="" w="9525">
                   <a:solidFill>
                     <a:srgbClr val="000000"/>
                   </a:solidFill>
@@ -23991,7 +23993,7 @@
             </a:ln>
             <a:extLst>
               <a:ext uri="{91240B29-F687-4f45-9708-019B960494DF}">
-                <a14:hiddenLine xmlns="" xmlns:a16="http://schemas.microsoft.com/office/drawing/2014/main" xmlns:a14="http://schemas.microsoft.com/office/drawing/2010/main" xmlns:p14="http://schemas.microsoft.com/office/powerpoint/2010/main" w="9525">
+                <a14:hiddenLine xmlns:p14="http://schemas.microsoft.com/office/powerpoint/2010/main" xmlns:a14="http://schemas.microsoft.com/office/drawing/2010/main" xmlns:a16="http://schemas.microsoft.com/office/drawing/2014/main" xmlns="" w="9525">
                   <a:solidFill>
                     <a:srgbClr val="000000"/>
                   </a:solidFill>
@@ -24103,7 +24105,7 @@
             </a:ln>
             <a:extLst>
               <a:ext uri="{91240B29-F687-4f45-9708-019B960494DF}">
-                <a14:hiddenLine xmlns="" xmlns:a16="http://schemas.microsoft.com/office/drawing/2014/main" xmlns:a14="http://schemas.microsoft.com/office/drawing/2010/main" xmlns:p14="http://schemas.microsoft.com/office/powerpoint/2010/main" w="9525">
+                <a14:hiddenLine xmlns:p14="http://schemas.microsoft.com/office/powerpoint/2010/main" xmlns:a14="http://schemas.microsoft.com/office/drawing/2010/main" xmlns:a16="http://schemas.microsoft.com/office/drawing/2014/main" xmlns="" w="9525">
                   <a:solidFill>
                     <a:srgbClr val="000000"/>
                   </a:solidFill>
@@ -24215,7 +24217,7 @@
             </a:ln>
             <a:extLst>
               <a:ext uri="{91240B29-F687-4f45-9708-019B960494DF}">
-                <a14:hiddenLine xmlns="" xmlns:a16="http://schemas.microsoft.com/office/drawing/2014/main" xmlns:a14="http://schemas.microsoft.com/office/drawing/2010/main" xmlns:p14="http://schemas.microsoft.com/office/powerpoint/2010/main" w="9525">
+                <a14:hiddenLine xmlns:p14="http://schemas.microsoft.com/office/powerpoint/2010/main" xmlns:a14="http://schemas.microsoft.com/office/drawing/2010/main" xmlns:a16="http://schemas.microsoft.com/office/drawing/2014/main" xmlns="" w="9525">
                   <a:solidFill>
                     <a:srgbClr val="000000"/>
                   </a:solidFill>
@@ -24293,7 +24295,7 @@
             </a:ln>
             <a:extLst>
               <a:ext uri="{91240B29-F687-4f45-9708-019B960494DF}">
-                <a14:hiddenLine xmlns="" xmlns:a16="http://schemas.microsoft.com/office/drawing/2014/main" xmlns:a14="http://schemas.microsoft.com/office/drawing/2010/main" xmlns:p14="http://schemas.microsoft.com/office/powerpoint/2010/main" w="9525">
+                <a14:hiddenLine xmlns:p14="http://schemas.microsoft.com/office/powerpoint/2010/main" xmlns:a14="http://schemas.microsoft.com/office/drawing/2010/main" xmlns:a16="http://schemas.microsoft.com/office/drawing/2014/main" xmlns="" w="9525">
                   <a:solidFill>
                     <a:srgbClr val="000000"/>
                   </a:solidFill>
@@ -24405,7 +24407,7 @@
             </a:ln>
             <a:extLst>
               <a:ext uri="{91240B29-F687-4f45-9708-019B960494DF}">
-                <a14:hiddenLine xmlns="" xmlns:a16="http://schemas.microsoft.com/office/drawing/2014/main" xmlns:a14="http://schemas.microsoft.com/office/drawing/2010/main" xmlns:p14="http://schemas.microsoft.com/office/powerpoint/2010/main" w="9525">
+                <a14:hiddenLine xmlns:p14="http://schemas.microsoft.com/office/powerpoint/2010/main" xmlns:a14="http://schemas.microsoft.com/office/drawing/2010/main" xmlns:a16="http://schemas.microsoft.com/office/drawing/2014/main" xmlns="" w="9525">
                   <a:solidFill>
                     <a:srgbClr val="000000"/>
                   </a:solidFill>
@@ -24483,7 +24485,7 @@
             </a:ln>
             <a:extLst>
               <a:ext uri="{91240B29-F687-4f45-9708-019B960494DF}">
-                <a14:hiddenLine xmlns="" xmlns:a16="http://schemas.microsoft.com/office/drawing/2014/main" xmlns:a14="http://schemas.microsoft.com/office/drawing/2010/main" xmlns:p14="http://schemas.microsoft.com/office/powerpoint/2010/main" w="9525">
+                <a14:hiddenLine xmlns:p14="http://schemas.microsoft.com/office/powerpoint/2010/main" xmlns:a14="http://schemas.microsoft.com/office/drawing/2010/main" xmlns:a16="http://schemas.microsoft.com/office/drawing/2014/main" xmlns="" w="9525">
                   <a:solidFill>
                     <a:srgbClr val="000000"/>
                   </a:solidFill>
@@ -24595,7 +24597,7 @@
             </a:ln>
             <a:extLst>
               <a:ext uri="{91240B29-F687-4f45-9708-019B960494DF}">
-                <a14:hiddenLine xmlns="" xmlns:a16="http://schemas.microsoft.com/office/drawing/2014/main" xmlns:a14="http://schemas.microsoft.com/office/drawing/2010/main" xmlns:p14="http://schemas.microsoft.com/office/powerpoint/2010/main" w="9525">
+                <a14:hiddenLine xmlns:p14="http://schemas.microsoft.com/office/powerpoint/2010/main" xmlns:a14="http://schemas.microsoft.com/office/drawing/2010/main" xmlns:a16="http://schemas.microsoft.com/office/drawing/2014/main" xmlns="" w="9525">
                   <a:solidFill>
                     <a:srgbClr val="000000"/>
                   </a:solidFill>
@@ -24685,7 +24687,7 @@
             </a:ln>
             <a:extLst>
               <a:ext uri="{91240B29-F687-4f45-9708-019B960494DF}">
-                <a14:hiddenLine xmlns="" xmlns:a16="http://schemas.microsoft.com/office/drawing/2014/main" xmlns:a14="http://schemas.microsoft.com/office/drawing/2010/main" xmlns:p14="http://schemas.microsoft.com/office/powerpoint/2010/main" w="9525">
+                <a14:hiddenLine xmlns:p14="http://schemas.microsoft.com/office/powerpoint/2010/main" xmlns:a14="http://schemas.microsoft.com/office/drawing/2010/main" xmlns:a16="http://schemas.microsoft.com/office/drawing/2014/main" xmlns="" w="9525">
                   <a:solidFill>
                     <a:srgbClr val="000000"/>
                   </a:solidFill>
@@ -24797,7 +24799,7 @@
             </a:ln>
             <a:extLst>
               <a:ext uri="{91240B29-F687-4f45-9708-019B960494DF}">
-                <a14:hiddenLine xmlns="" xmlns:a16="http://schemas.microsoft.com/office/drawing/2014/main" xmlns:a14="http://schemas.microsoft.com/office/drawing/2010/main" xmlns:p14="http://schemas.microsoft.com/office/powerpoint/2010/main" w="9525">
+                <a14:hiddenLine xmlns:p14="http://schemas.microsoft.com/office/powerpoint/2010/main" xmlns:a14="http://schemas.microsoft.com/office/drawing/2010/main" xmlns:a16="http://schemas.microsoft.com/office/drawing/2014/main" xmlns="" w="9525">
                   <a:solidFill>
                     <a:srgbClr val="000000"/>
                   </a:solidFill>
@@ -24887,7 +24889,7 @@
             </a:ln>
             <a:extLst>
               <a:ext uri="{91240B29-F687-4f45-9708-019B960494DF}">
-                <a14:hiddenLine xmlns="" xmlns:a16="http://schemas.microsoft.com/office/drawing/2014/main" xmlns:a14="http://schemas.microsoft.com/office/drawing/2010/main" xmlns:p14="http://schemas.microsoft.com/office/powerpoint/2010/main" w="9525">
+                <a14:hiddenLine xmlns:p14="http://schemas.microsoft.com/office/powerpoint/2010/main" xmlns:a14="http://schemas.microsoft.com/office/drawing/2010/main" xmlns:a16="http://schemas.microsoft.com/office/drawing/2014/main" xmlns="" w="9525">
                   <a:solidFill>
                     <a:srgbClr val="000000"/>
                   </a:solidFill>
@@ -24999,7 +25001,7 @@
             </a:ln>
             <a:extLst>
               <a:ext uri="{91240B29-F687-4f45-9708-019B960494DF}">
-                <a14:hiddenLine xmlns="" xmlns:a16="http://schemas.microsoft.com/office/drawing/2014/main" xmlns:a14="http://schemas.microsoft.com/office/drawing/2010/main" xmlns:p14="http://schemas.microsoft.com/office/powerpoint/2010/main" w="9525">
+                <a14:hiddenLine xmlns:p14="http://schemas.microsoft.com/office/powerpoint/2010/main" xmlns:a14="http://schemas.microsoft.com/office/drawing/2010/main" xmlns:a16="http://schemas.microsoft.com/office/drawing/2014/main" xmlns="" w="9525">
                   <a:solidFill>
                     <a:srgbClr val="000000"/>
                   </a:solidFill>
@@ -25055,7 +25057,7 @@
             </a:ln>
             <a:extLst>
               <a:ext uri="{91240B29-F687-4f45-9708-019B960494DF}">
-                <a14:hiddenLine xmlns="" xmlns:a16="http://schemas.microsoft.com/office/drawing/2014/main" xmlns:a14="http://schemas.microsoft.com/office/drawing/2010/main" xmlns:p14="http://schemas.microsoft.com/office/powerpoint/2010/main" w="9525">
+                <a14:hiddenLine xmlns:p14="http://schemas.microsoft.com/office/powerpoint/2010/main" xmlns:a14="http://schemas.microsoft.com/office/drawing/2010/main" xmlns:a16="http://schemas.microsoft.com/office/drawing/2014/main" xmlns="" w="9525">
                   <a:solidFill>
                     <a:srgbClr val="000000"/>
                   </a:solidFill>
@@ -25167,7 +25169,7 @@
             </a:ln>
             <a:extLst>
               <a:ext uri="{91240B29-F687-4f45-9708-019B960494DF}">
-                <a14:hiddenLine xmlns="" xmlns:a16="http://schemas.microsoft.com/office/drawing/2014/main" xmlns:a14="http://schemas.microsoft.com/office/drawing/2010/main" xmlns:p14="http://schemas.microsoft.com/office/powerpoint/2010/main" w="9525">
+                <a14:hiddenLine xmlns:p14="http://schemas.microsoft.com/office/powerpoint/2010/main" xmlns:a14="http://schemas.microsoft.com/office/drawing/2010/main" xmlns:a16="http://schemas.microsoft.com/office/drawing/2014/main" xmlns="" w="9525">
                   <a:solidFill>
                     <a:srgbClr val="000000"/>
                   </a:solidFill>
@@ -25251,7 +25253,7 @@
             </a:ln>
             <a:extLst>
               <a:ext uri="{91240B29-F687-4f45-9708-019B960494DF}">
-                <a14:hiddenLine xmlns="" xmlns:a16="http://schemas.microsoft.com/office/drawing/2014/main" xmlns:a14="http://schemas.microsoft.com/office/drawing/2010/main" xmlns:p14="http://schemas.microsoft.com/office/powerpoint/2010/main" w="9525">
+                <a14:hiddenLine xmlns:p14="http://schemas.microsoft.com/office/powerpoint/2010/main" xmlns:a14="http://schemas.microsoft.com/office/drawing/2010/main" xmlns:a16="http://schemas.microsoft.com/office/drawing/2014/main" xmlns="" w="9525">
                   <a:solidFill>
                     <a:srgbClr val="000000"/>
                   </a:solidFill>
@@ -25335,7 +25337,7 @@
             </a:ln>
             <a:extLst>
               <a:ext uri="{91240B29-F687-4f45-9708-019B960494DF}">
-                <a14:hiddenLine xmlns="" xmlns:a16="http://schemas.microsoft.com/office/drawing/2014/main" xmlns:a14="http://schemas.microsoft.com/office/drawing/2010/main" xmlns:p14="http://schemas.microsoft.com/office/powerpoint/2010/main" w="9525">
+                <a14:hiddenLine xmlns:p14="http://schemas.microsoft.com/office/powerpoint/2010/main" xmlns:a14="http://schemas.microsoft.com/office/drawing/2010/main" xmlns:a16="http://schemas.microsoft.com/office/drawing/2014/main" xmlns="" w="9525">
                   <a:solidFill>
                     <a:srgbClr val="000000"/>
                   </a:solidFill>
@@ -25447,7 +25449,7 @@
             </a:ln>
             <a:extLst>
               <a:ext uri="{91240B29-F687-4f45-9708-019B960494DF}">
-                <a14:hiddenLine xmlns="" xmlns:a16="http://schemas.microsoft.com/office/drawing/2014/main" xmlns:a14="http://schemas.microsoft.com/office/drawing/2010/main" xmlns:p14="http://schemas.microsoft.com/office/powerpoint/2010/main" w="9525">
+                <a14:hiddenLine xmlns:p14="http://schemas.microsoft.com/office/powerpoint/2010/main" xmlns:a14="http://schemas.microsoft.com/office/drawing/2010/main" xmlns:a16="http://schemas.microsoft.com/office/drawing/2014/main" xmlns="" w="9525">
                   <a:solidFill>
                     <a:srgbClr val="000000"/>
                   </a:solidFill>
@@ -25537,7 +25539,7 @@
             </a:ln>
             <a:extLst>
               <a:ext uri="{91240B29-F687-4f45-9708-019B960494DF}">
-                <a14:hiddenLine xmlns="" xmlns:a16="http://schemas.microsoft.com/office/drawing/2014/main" xmlns:a14="http://schemas.microsoft.com/office/drawing/2010/main" xmlns:p14="http://schemas.microsoft.com/office/powerpoint/2010/main" w="9525">
+                <a14:hiddenLine xmlns:p14="http://schemas.microsoft.com/office/powerpoint/2010/main" xmlns:a14="http://schemas.microsoft.com/office/drawing/2010/main" xmlns:a16="http://schemas.microsoft.com/office/drawing/2014/main" xmlns="" w="9525">
                   <a:solidFill>
                     <a:srgbClr val="000000"/>
                   </a:solidFill>
@@ -25621,7 +25623,7 @@
             </a:ln>
             <a:extLst>
               <a:ext uri="{91240B29-F687-4f45-9708-019B960494DF}">
-                <a14:hiddenLine xmlns="" xmlns:a16="http://schemas.microsoft.com/office/drawing/2014/main" xmlns:a14="http://schemas.microsoft.com/office/drawing/2010/main" xmlns:p14="http://schemas.microsoft.com/office/powerpoint/2010/main" w="9525">
+                <a14:hiddenLine xmlns:p14="http://schemas.microsoft.com/office/powerpoint/2010/main" xmlns:a14="http://schemas.microsoft.com/office/drawing/2010/main" xmlns:a16="http://schemas.microsoft.com/office/drawing/2014/main" xmlns="" w="9525">
                   <a:solidFill>
                     <a:srgbClr val="000000"/>
                   </a:solidFill>
@@ -25733,7 +25735,7 @@
             </a:ln>
             <a:extLst>
               <a:ext uri="{91240B29-F687-4f45-9708-019B960494DF}">
-                <a14:hiddenLine xmlns="" xmlns:a16="http://schemas.microsoft.com/office/drawing/2014/main" xmlns:a14="http://schemas.microsoft.com/office/drawing/2010/main" xmlns:p14="http://schemas.microsoft.com/office/powerpoint/2010/main" w="9525">
+                <a14:hiddenLine xmlns:p14="http://schemas.microsoft.com/office/powerpoint/2010/main" xmlns:a14="http://schemas.microsoft.com/office/drawing/2010/main" xmlns:a16="http://schemas.microsoft.com/office/drawing/2014/main" xmlns="" w="9525">
                   <a:solidFill>
                     <a:srgbClr val="000000"/>
                   </a:solidFill>
@@ -25817,7 +25819,7 @@
             </a:ln>
             <a:extLst>
               <a:ext uri="{91240B29-F687-4f45-9708-019B960494DF}">
-                <a14:hiddenLine xmlns="" xmlns:a16="http://schemas.microsoft.com/office/drawing/2014/main" xmlns:a14="http://schemas.microsoft.com/office/drawing/2010/main" xmlns:p14="http://schemas.microsoft.com/office/powerpoint/2010/main" w="9525">
+                <a14:hiddenLine xmlns:p14="http://schemas.microsoft.com/office/powerpoint/2010/main" xmlns:a14="http://schemas.microsoft.com/office/drawing/2010/main" xmlns:a16="http://schemas.microsoft.com/office/drawing/2014/main" xmlns="" w="9525">
                   <a:solidFill>
                     <a:srgbClr val="000000"/>
                   </a:solidFill>
@@ -25929,7 +25931,7 @@
             </a:ln>
             <a:extLst>
               <a:ext uri="{91240B29-F687-4f45-9708-019B960494DF}">
-                <a14:hiddenLine xmlns="" xmlns:a16="http://schemas.microsoft.com/office/drawing/2014/main" xmlns:a14="http://schemas.microsoft.com/office/drawing/2010/main" xmlns:p14="http://schemas.microsoft.com/office/powerpoint/2010/main" w="9525">
+                <a14:hiddenLine xmlns:p14="http://schemas.microsoft.com/office/powerpoint/2010/main" xmlns:a14="http://schemas.microsoft.com/office/drawing/2010/main" xmlns:a16="http://schemas.microsoft.com/office/drawing/2014/main" xmlns="" w="9525">
                   <a:solidFill>
                     <a:srgbClr val="000000"/>
                   </a:solidFill>
@@ -26013,7 +26015,7 @@
             </a:ln>
             <a:extLst>
               <a:ext uri="{91240B29-F687-4f45-9708-019B960494DF}">
-                <a14:hiddenLine xmlns="" xmlns:a16="http://schemas.microsoft.com/office/drawing/2014/main" xmlns:a14="http://schemas.microsoft.com/office/drawing/2010/main" xmlns:p14="http://schemas.microsoft.com/office/powerpoint/2010/main" w="9525">
+                <a14:hiddenLine xmlns:p14="http://schemas.microsoft.com/office/powerpoint/2010/main" xmlns:a14="http://schemas.microsoft.com/office/drawing/2010/main" xmlns:a16="http://schemas.microsoft.com/office/drawing/2014/main" xmlns="" w="9525">
                   <a:solidFill>
                     <a:srgbClr val="000000"/>
                   </a:solidFill>
@@ -26125,7 +26127,7 @@
             </a:ln>
             <a:extLst>
               <a:ext uri="{91240B29-F687-4f45-9708-019B960494DF}">
-                <a14:hiddenLine xmlns="" xmlns:a16="http://schemas.microsoft.com/office/drawing/2014/main" xmlns:a14="http://schemas.microsoft.com/office/drawing/2010/main" xmlns:p14="http://schemas.microsoft.com/office/powerpoint/2010/main" w="9525">
+                <a14:hiddenLine xmlns:p14="http://schemas.microsoft.com/office/powerpoint/2010/main" xmlns:a14="http://schemas.microsoft.com/office/drawing/2010/main" xmlns:a16="http://schemas.microsoft.com/office/drawing/2014/main" xmlns="" w="9525">
                   <a:solidFill>
                     <a:srgbClr val="000000"/>
                   </a:solidFill>
@@ -26181,7 +26183,7 @@
             </a:ln>
             <a:extLst>
               <a:ext uri="{91240B29-F687-4f45-9708-019B960494DF}">
-                <a14:hiddenLine xmlns="" xmlns:a16="http://schemas.microsoft.com/office/drawing/2014/main" xmlns:a14="http://schemas.microsoft.com/office/drawing/2010/main" xmlns:p14="http://schemas.microsoft.com/office/powerpoint/2010/main" w="9525">
+                <a14:hiddenLine xmlns:p14="http://schemas.microsoft.com/office/powerpoint/2010/main" xmlns:a14="http://schemas.microsoft.com/office/drawing/2010/main" xmlns:a16="http://schemas.microsoft.com/office/drawing/2014/main" xmlns="" w="9525">
                   <a:solidFill>
                     <a:srgbClr val="000000"/>
                   </a:solidFill>
@@ -26268,7 +26270,7 @@
             </a:ln>
             <a:extLst>
               <a:ext uri="{91240B29-F687-4f45-9708-019B960494DF}">
-                <a14:hiddenLine xmlns="" xmlns:a16="http://schemas.microsoft.com/office/drawing/2014/main" xmlns:a14="http://schemas.microsoft.com/office/drawing/2010/main" xmlns:p14="http://schemas.microsoft.com/office/powerpoint/2010/main" w="9525">
+                <a14:hiddenLine xmlns:p14="http://schemas.microsoft.com/office/powerpoint/2010/main" xmlns:a14="http://schemas.microsoft.com/office/drawing/2010/main" xmlns:a16="http://schemas.microsoft.com/office/drawing/2014/main" xmlns="" w="9525">
                   <a:solidFill>
                     <a:srgbClr val="000000"/>
                   </a:solidFill>
@@ -26380,7 +26382,7 @@
             </a:ln>
             <a:extLst>
               <a:ext uri="{91240B29-F687-4f45-9708-019B960494DF}">
-                <a14:hiddenLine xmlns="" xmlns:a16="http://schemas.microsoft.com/office/drawing/2014/main" xmlns:a14="http://schemas.microsoft.com/office/drawing/2010/main" xmlns:p14="http://schemas.microsoft.com/office/powerpoint/2010/main" w="9525">
+                <a14:hiddenLine xmlns:p14="http://schemas.microsoft.com/office/powerpoint/2010/main" xmlns:a14="http://schemas.microsoft.com/office/drawing/2010/main" xmlns:a16="http://schemas.microsoft.com/office/drawing/2014/main" xmlns="" w="9525">
                   <a:solidFill>
                     <a:srgbClr val="000000"/>
                   </a:solidFill>
@@ -26464,7 +26466,7 @@
             </a:ln>
             <a:extLst>
               <a:ext uri="{91240B29-F687-4f45-9708-019B960494DF}">
-                <a14:hiddenLine xmlns="" xmlns:a16="http://schemas.microsoft.com/office/drawing/2014/main" xmlns:a14="http://schemas.microsoft.com/office/drawing/2010/main" xmlns:p14="http://schemas.microsoft.com/office/powerpoint/2010/main" w="9525">
+                <a14:hiddenLine xmlns:p14="http://schemas.microsoft.com/office/powerpoint/2010/main" xmlns:a14="http://schemas.microsoft.com/office/drawing/2010/main" xmlns:a16="http://schemas.microsoft.com/office/drawing/2014/main" xmlns="" w="9525">
                   <a:solidFill>
                     <a:srgbClr val="000000"/>
                   </a:solidFill>
@@ -26576,7 +26578,7 @@
             </a:ln>
             <a:extLst>
               <a:ext uri="{91240B29-F687-4f45-9708-019B960494DF}">
-                <a14:hiddenLine xmlns="" xmlns:a16="http://schemas.microsoft.com/office/drawing/2014/main" xmlns:a14="http://schemas.microsoft.com/office/drawing/2010/main" xmlns:p14="http://schemas.microsoft.com/office/powerpoint/2010/main" w="9525">
+                <a14:hiddenLine xmlns:p14="http://schemas.microsoft.com/office/powerpoint/2010/main" xmlns:a14="http://schemas.microsoft.com/office/drawing/2010/main" xmlns:a16="http://schemas.microsoft.com/office/drawing/2014/main" xmlns="" w="9525">
                   <a:solidFill>
                     <a:srgbClr val="000000"/>
                   </a:solidFill>
@@ -26688,7 +26690,7 @@
             </a:ln>
             <a:extLst>
               <a:ext uri="{91240B29-F687-4f45-9708-019B960494DF}">
-                <a14:hiddenLine xmlns="" xmlns:a16="http://schemas.microsoft.com/office/drawing/2014/main" xmlns:a14="http://schemas.microsoft.com/office/drawing/2010/main" xmlns:p14="http://schemas.microsoft.com/office/powerpoint/2010/main" w="9525">
+                <a14:hiddenLine xmlns:p14="http://schemas.microsoft.com/office/powerpoint/2010/main" xmlns:a14="http://schemas.microsoft.com/office/drawing/2010/main" xmlns:a16="http://schemas.microsoft.com/office/drawing/2014/main" xmlns="" w="9525">
                   <a:solidFill>
                     <a:srgbClr val="000000"/>
                   </a:solidFill>
@@ -26775,7 +26777,7 @@
             </a:ln>
             <a:extLst>
               <a:ext uri="{91240B29-F687-4f45-9708-019B960494DF}">
-                <a14:hiddenLine xmlns="" xmlns:a16="http://schemas.microsoft.com/office/drawing/2014/main" xmlns:a14="http://schemas.microsoft.com/office/drawing/2010/main" xmlns:p14="http://schemas.microsoft.com/office/powerpoint/2010/main" w="9525">
+                <a14:hiddenLine xmlns:p14="http://schemas.microsoft.com/office/powerpoint/2010/main" xmlns:a14="http://schemas.microsoft.com/office/drawing/2010/main" xmlns:a16="http://schemas.microsoft.com/office/drawing/2014/main" xmlns="" w="9525">
                   <a:solidFill>
                     <a:srgbClr val="000000"/>
                   </a:solidFill>
@@ -26859,7 +26861,7 @@
             </a:ln>
             <a:extLst>
               <a:ext uri="{91240B29-F687-4f45-9708-019B960494DF}">
-                <a14:hiddenLine xmlns="" xmlns:a16="http://schemas.microsoft.com/office/drawing/2014/main" xmlns:a14="http://schemas.microsoft.com/office/drawing/2010/main" xmlns:p14="http://schemas.microsoft.com/office/powerpoint/2010/main" w="9525">
+                <a14:hiddenLine xmlns:p14="http://schemas.microsoft.com/office/powerpoint/2010/main" xmlns:a14="http://schemas.microsoft.com/office/drawing/2010/main" xmlns:a16="http://schemas.microsoft.com/office/drawing/2014/main" xmlns="" w="9525">
                   <a:solidFill>
                     <a:srgbClr val="000000"/>
                   </a:solidFill>
@@ -26971,7 +26973,7 @@
             </a:ln>
             <a:extLst>
               <a:ext uri="{91240B29-F687-4f45-9708-019B960494DF}">
-                <a14:hiddenLine xmlns="" xmlns:a16="http://schemas.microsoft.com/office/drawing/2014/main" xmlns:a14="http://schemas.microsoft.com/office/drawing/2010/main" xmlns:p14="http://schemas.microsoft.com/office/powerpoint/2010/main" w="9525">
+                <a14:hiddenLine xmlns:p14="http://schemas.microsoft.com/office/powerpoint/2010/main" xmlns:a14="http://schemas.microsoft.com/office/drawing/2010/main" xmlns:a16="http://schemas.microsoft.com/office/drawing/2014/main" xmlns="" w="9525">
                   <a:solidFill>
                     <a:srgbClr val="000000"/>
                   </a:solidFill>
@@ -27083,7 +27085,7 @@
             </a:ln>
             <a:extLst>
               <a:ext uri="{91240B29-F687-4f45-9708-019B960494DF}">
-                <a14:hiddenLine xmlns="" xmlns:a16="http://schemas.microsoft.com/office/drawing/2014/main" xmlns:a14="http://schemas.microsoft.com/office/drawing/2010/main" xmlns:p14="http://schemas.microsoft.com/office/powerpoint/2010/main" w="9525">
+                <a14:hiddenLine xmlns:p14="http://schemas.microsoft.com/office/powerpoint/2010/main" xmlns:a14="http://schemas.microsoft.com/office/drawing/2010/main" xmlns:a16="http://schemas.microsoft.com/office/drawing/2014/main" xmlns="" w="9525">
                   <a:solidFill>
                     <a:srgbClr val="000000"/>
                   </a:solidFill>
@@ -27167,7 +27169,7 @@
             </a:ln>
             <a:extLst>
               <a:ext uri="{91240B29-F687-4f45-9708-019B960494DF}">
-                <a14:hiddenLine xmlns="" xmlns:a16="http://schemas.microsoft.com/office/drawing/2014/main" xmlns:a14="http://schemas.microsoft.com/office/drawing/2010/main" xmlns:p14="http://schemas.microsoft.com/office/powerpoint/2010/main" w="9525">
+                <a14:hiddenLine xmlns:p14="http://schemas.microsoft.com/office/powerpoint/2010/main" xmlns:a14="http://schemas.microsoft.com/office/drawing/2010/main" xmlns:a16="http://schemas.microsoft.com/office/drawing/2014/main" xmlns="" w="9525">
                   <a:solidFill>
                     <a:srgbClr val="000000"/>
                   </a:solidFill>
@@ -27309,7 +27311,7 @@
             </a:ln>
             <a:extLst>
               <a:ext uri="{91240B29-F687-4f45-9708-019B960494DF}">
-                <a14:hiddenLine xmlns="" xmlns:a16="http://schemas.microsoft.com/office/drawing/2014/main" xmlns:a14="http://schemas.microsoft.com/office/drawing/2010/main" xmlns:p14="http://schemas.microsoft.com/office/powerpoint/2010/main" w="9525">
+                <a14:hiddenLine xmlns:p14="http://schemas.microsoft.com/office/powerpoint/2010/main" xmlns:a14="http://schemas.microsoft.com/office/drawing/2010/main" xmlns:a16="http://schemas.microsoft.com/office/drawing/2014/main" xmlns="" w="9525">
                   <a:solidFill>
                     <a:srgbClr val="000000"/>
                   </a:solidFill>
@@ -27399,7 +27401,7 @@
             </a:ln>
             <a:extLst>
               <a:ext uri="{91240B29-F687-4f45-9708-019B960494DF}">
-                <a14:hiddenLine xmlns="" xmlns:a16="http://schemas.microsoft.com/office/drawing/2014/main" xmlns:a14="http://schemas.microsoft.com/office/drawing/2010/main" xmlns:p14="http://schemas.microsoft.com/office/powerpoint/2010/main" w="9525">
+                <a14:hiddenLine xmlns:p14="http://schemas.microsoft.com/office/powerpoint/2010/main" xmlns:a14="http://schemas.microsoft.com/office/drawing/2010/main" xmlns:a16="http://schemas.microsoft.com/office/drawing/2014/main" xmlns="" w="9525">
                   <a:solidFill>
                     <a:srgbClr val="000000"/>
                   </a:solidFill>
@@ -27511,7 +27513,7 @@
             </a:ln>
             <a:extLst>
               <a:ext uri="{91240B29-F687-4f45-9708-019B960494DF}">
-                <a14:hiddenLine xmlns="" xmlns:a16="http://schemas.microsoft.com/office/drawing/2014/main" xmlns:a14="http://schemas.microsoft.com/office/drawing/2010/main" xmlns:p14="http://schemas.microsoft.com/office/powerpoint/2010/main" w="9525">
+                <a14:hiddenLine xmlns:p14="http://schemas.microsoft.com/office/powerpoint/2010/main" xmlns:a14="http://schemas.microsoft.com/office/drawing/2010/main" xmlns:a16="http://schemas.microsoft.com/office/drawing/2014/main" xmlns="" w="9525">
                   <a:solidFill>
                     <a:srgbClr val="000000"/>
                   </a:solidFill>
@@ -27947,13 +27949,13 @@
   <p:clrMapOvr>
     <a:masterClrMapping/>
   </p:clrMapOvr>
-  <mc:AlternateContent xmlns:mc="http://schemas.openxmlformats.org/markup-compatibility/2006">
-    <mc:Choice xmlns:p14="http://schemas.microsoft.com/office/powerpoint/2010/main" Requires="p14">
+  <mc:AlternateContent xmlns:mc="http://schemas.openxmlformats.org/markup-compatibility/2006" xmlns:p14="http://schemas.microsoft.com/office/powerpoint/2010/main">
+    <mc:Choice Requires="p14">
       <p:transition spd="slow" p14:dur="2500">
         <p:checker/>
       </p:transition>
     </mc:Choice>
-    <mc:Fallback>
+    <mc:Fallback xmlns="">
       <p:transition spd="slow">
         <p:checker/>
       </p:transition>
@@ -28303,6 +28305,363 @@
 <file path=ppt/slides/slide15.xml><?xml version="1.0" encoding="utf-8"?>
 <p:sld xmlns:a="http://schemas.openxmlformats.org/drawingml/2006/main" xmlns:r="http://schemas.openxmlformats.org/officeDocument/2006/relationships" xmlns:p="http://schemas.openxmlformats.org/presentationml/2006/main">
   <p:cSld>
+    <p:spTree>
+      <p:nvGrpSpPr>
+        <p:cNvPr id="1" name=""/>
+        <p:cNvGrpSpPr/>
+        <p:nvPr/>
+      </p:nvGrpSpPr>
+      <p:grpSpPr>
+        <a:xfrm>
+          <a:off x="0" y="0"/>
+          <a:ext cx="0" cy="0"/>
+          <a:chOff x="0" y="0"/>
+          <a:chExt cx="0" cy="0"/>
+        </a:xfrm>
+      </p:grpSpPr>
+      <p:sp>
+        <p:nvSpPr>
+          <p:cNvPr id="2" name="Title 1">
+            <a:extLst>
+              <a:ext uri="{FF2B5EF4-FFF2-40B4-BE49-F238E27FC236}">
+                <a16:creationId xmlns:a16="http://schemas.microsoft.com/office/drawing/2014/main" id="{DAD3F605-B66F-EDF3-B2A1-1C176C43E7CF}"/>
+              </a:ext>
+            </a:extLst>
+          </p:cNvPr>
+          <p:cNvSpPr>
+            <a:spLocks noGrp="1"/>
+          </p:cNvSpPr>
+          <p:nvPr>
+            <p:ph type="title"/>
+          </p:nvPr>
+        </p:nvSpPr>
+        <p:spPr/>
+        <p:txBody>
+          <a:bodyPr/>
+          <a:lstStyle/>
+          <a:p>
+            <a:r>
+              <a:rPr lang="hr-HR" dirty="0"/>
+              <a:t>Plan daljnjeg razvoja</a:t>
+            </a:r>
+            <a:endParaRPr lang="en-US" dirty="0"/>
+          </a:p>
+        </p:txBody>
+      </p:sp>
+      <p:sp>
+        <p:nvSpPr>
+          <p:cNvPr id="3" name="Content Placeholder 2">
+            <a:extLst>
+              <a:ext uri="{FF2B5EF4-FFF2-40B4-BE49-F238E27FC236}">
+                <a16:creationId xmlns:a16="http://schemas.microsoft.com/office/drawing/2014/main" id="{8295AB1F-9C22-0716-EF91-E24907931980}"/>
+              </a:ext>
+            </a:extLst>
+          </p:cNvPr>
+          <p:cNvSpPr>
+            <a:spLocks noGrp="1"/>
+          </p:cNvSpPr>
+          <p:nvPr>
+            <p:ph idx="1"/>
+          </p:nvPr>
+        </p:nvSpPr>
+        <p:spPr/>
+        <p:txBody>
+          <a:bodyPr/>
+          <a:lstStyle/>
+          <a:p>
+            <a:r>
+              <a:rPr lang="hr-HR" dirty="0"/>
+              <a:t>Dodati nove mogućnosti(npr. vrste označavanja)</a:t>
+            </a:r>
+          </a:p>
+          <a:p>
+            <a:r>
+              <a:rPr lang="hr-HR" dirty="0"/>
+              <a:t>Podijeliti ekstenziju s više osoba</a:t>
+            </a:r>
+          </a:p>
+          <a:p>
+            <a:r>
+              <a:rPr lang="hr-HR" dirty="0"/>
+              <a:t>Pomoći ljudima s drugim poteškoćama</a:t>
+            </a:r>
+          </a:p>
+          <a:p>
+            <a:endParaRPr lang="hr-HR" dirty="0"/>
+          </a:p>
+          <a:p>
+            <a:endParaRPr lang="en-US" dirty="0"/>
+          </a:p>
+        </p:txBody>
+      </p:sp>
+      <p:pic>
+        <p:nvPicPr>
+          <p:cNvPr id="5" name="Picture 4">
+            <a:extLst>
+              <a:ext uri="{FF2B5EF4-FFF2-40B4-BE49-F238E27FC236}">
+                <a16:creationId xmlns:a16="http://schemas.microsoft.com/office/drawing/2014/main" id="{4C656693-CFDA-4E38-9151-E4CED359B071}"/>
+              </a:ext>
+            </a:extLst>
+          </p:cNvPr>
+          <p:cNvPicPr>
+            <a:picLocks noChangeAspect="1"/>
+          </p:cNvPicPr>
+          <p:nvPr/>
+        </p:nvPicPr>
+        <p:blipFill>
+          <a:blip r:embed="rId2">
+            <a:extLst>
+              <a:ext uri="{28A0092B-C50C-407E-A947-70E740481C1C}">
+                <a14:useLocalDpi xmlns:a14="http://schemas.microsoft.com/office/drawing/2010/main" val="0"/>
+              </a:ext>
+            </a:extLst>
+          </a:blip>
+          <a:stretch>
+            <a:fillRect/>
+          </a:stretch>
+        </p:blipFill>
+        <p:spPr>
+          <a:xfrm>
+            <a:off x="6881812" y="2757487"/>
+            <a:ext cx="4367213" cy="3373886"/>
+          </a:xfrm>
+          <a:prstGeom prst="rect">
+            <a:avLst/>
+          </a:prstGeom>
+        </p:spPr>
+      </p:pic>
+    </p:spTree>
+    <p:extLst>
+      <p:ext uri="{BB962C8B-B14F-4D97-AF65-F5344CB8AC3E}">
+        <p14:creationId xmlns:p14="http://schemas.microsoft.com/office/powerpoint/2010/main" val="2753080093"/>
+      </p:ext>
+    </p:extLst>
+  </p:cSld>
+  <p:clrMapOvr>
+    <a:masterClrMapping/>
+  </p:clrMapOvr>
+</p:sld>
+</file>
+
+<file path=ppt/slides/slide16.xml><?xml version="1.0" encoding="utf-8"?>
+<p:sld xmlns:a="http://schemas.openxmlformats.org/drawingml/2006/main" xmlns:r="http://schemas.openxmlformats.org/officeDocument/2006/relationships" xmlns:p="http://schemas.openxmlformats.org/presentationml/2006/main">
+  <p:cSld>
+    <p:spTree>
+      <p:nvGrpSpPr>
+        <p:cNvPr id="1" name=""/>
+        <p:cNvGrpSpPr/>
+        <p:nvPr/>
+      </p:nvGrpSpPr>
+      <p:grpSpPr>
+        <a:xfrm>
+          <a:off x="0" y="0"/>
+          <a:ext cx="0" cy="0"/>
+          <a:chOff x="0" y="0"/>
+          <a:chExt cx="0" cy="0"/>
+        </a:xfrm>
+      </p:grpSpPr>
+      <p:sp>
+        <p:nvSpPr>
+          <p:cNvPr id="2" name="Title 1">
+            <a:extLst>
+              <a:ext uri="{FF2B5EF4-FFF2-40B4-BE49-F238E27FC236}">
+                <a16:creationId xmlns:a16="http://schemas.microsoft.com/office/drawing/2014/main" id="{B23AF4DE-BB11-04A0-2082-1130EBE9819F}"/>
+              </a:ext>
+            </a:extLst>
+          </p:cNvPr>
+          <p:cNvSpPr>
+            <a:spLocks noGrp="1"/>
+          </p:cNvSpPr>
+          <p:nvPr>
+            <p:ph type="title"/>
+          </p:nvPr>
+        </p:nvSpPr>
+        <p:spPr/>
+        <p:txBody>
+          <a:bodyPr/>
+          <a:lstStyle/>
+          <a:p>
+            <a:r>
+              <a:rPr lang="hr-HR" dirty="0" err="1"/>
+              <a:t>SLIČna</a:t>
+            </a:r>
+            <a:r>
+              <a:rPr lang="hr-HR" dirty="0"/>
+              <a:t> rješenja</a:t>
+            </a:r>
+            <a:endParaRPr lang="en-US" dirty="0"/>
+          </a:p>
+        </p:txBody>
+      </p:sp>
+      <p:sp>
+        <p:nvSpPr>
+          <p:cNvPr id="3" name="Content Placeholder 2">
+            <a:extLst>
+              <a:ext uri="{FF2B5EF4-FFF2-40B4-BE49-F238E27FC236}">
+                <a16:creationId xmlns:a16="http://schemas.microsoft.com/office/drawing/2014/main" id="{3E018779-69B0-B1EA-F9A1-89C4662F15EB}"/>
+              </a:ext>
+            </a:extLst>
+          </p:cNvPr>
+          <p:cNvSpPr>
+            <a:spLocks noGrp="1"/>
+          </p:cNvSpPr>
+          <p:nvPr>
+            <p:ph idx="1"/>
+          </p:nvPr>
+        </p:nvSpPr>
+        <p:spPr/>
+        <p:txBody>
+          <a:bodyPr/>
+          <a:lstStyle/>
+          <a:p>
+            <a:r>
+              <a:rPr lang="hr-HR" dirty="0"/>
+              <a:t>Postoje rješenja sa sličnom idejom</a:t>
+            </a:r>
+          </a:p>
+          <a:p>
+            <a:r>
+              <a:rPr lang="hr-HR" dirty="0">
+                <a:hlinkClick r:id="rId2"/>
+              </a:rPr>
+              <a:t>Generiranje krugova u obliku umjetnosti </a:t>
+            </a:r>
+            <a:r>
+              <a:rPr lang="hr-HR" dirty="0"/>
+              <a:t>u Python-u</a:t>
+            </a:r>
+          </a:p>
+          <a:p>
+            <a:r>
+              <a:rPr lang="hr-HR" dirty="0" err="1"/>
+              <a:t>Error</a:t>
+            </a:r>
+            <a:r>
+              <a:rPr lang="hr-HR" dirty="0"/>
+              <a:t> i </a:t>
+            </a:r>
+            <a:r>
+              <a:rPr lang="hr-HR" dirty="0" err="1"/>
+              <a:t>warning</a:t>
+            </a:r>
+            <a:r>
+              <a:rPr lang="hr-HR" dirty="0"/>
+              <a:t> oznake, ali na drugačiji način – </a:t>
+            </a:r>
+            <a:r>
+              <a:rPr lang="hr-HR" dirty="0" err="1">
+                <a:hlinkClick r:id="rId3"/>
+              </a:rPr>
+              <a:t>Error</a:t>
+            </a:r>
+            <a:r>
+              <a:rPr lang="hr-HR" dirty="0">
+                <a:hlinkClick r:id="rId3"/>
+              </a:rPr>
+              <a:t> </a:t>
+            </a:r>
+            <a:r>
+              <a:rPr lang="hr-HR" dirty="0" err="1">
+                <a:hlinkClick r:id="rId3"/>
+              </a:rPr>
+              <a:t>lens</a:t>
+            </a:r>
+            <a:endParaRPr lang="hr-HR" dirty="0"/>
+          </a:p>
+          <a:p>
+            <a:endParaRPr lang="en-US" dirty="0"/>
+          </a:p>
+        </p:txBody>
+      </p:sp>
+      <p:pic>
+        <p:nvPicPr>
+          <p:cNvPr id="5" name="Picture 4">
+            <a:extLst>
+              <a:ext uri="{FF2B5EF4-FFF2-40B4-BE49-F238E27FC236}">
+                <a16:creationId xmlns:a16="http://schemas.microsoft.com/office/drawing/2014/main" id="{B0C1989A-A62F-AB76-9C83-55E1086815CA}"/>
+              </a:ext>
+            </a:extLst>
+          </p:cNvPr>
+          <p:cNvPicPr>
+            <a:picLocks noChangeAspect="1"/>
+          </p:cNvPicPr>
+          <p:nvPr/>
+        </p:nvPicPr>
+        <p:blipFill>
+          <a:blip r:embed="rId4">
+            <a:extLst>
+              <a:ext uri="{28A0092B-C50C-407E-A947-70E740481C1C}">
+                <a14:useLocalDpi xmlns:a14="http://schemas.microsoft.com/office/drawing/2010/main" val="0"/>
+              </a:ext>
+            </a:extLst>
+          </a:blip>
+          <a:srcRect l="31791" t="26656" r="9796"/>
+          <a:stretch>
+            <a:fillRect/>
+          </a:stretch>
+        </p:blipFill>
+        <p:spPr>
+          <a:xfrm>
+            <a:off x="8553450" y="342900"/>
+            <a:ext cx="3067050" cy="2878478"/>
+          </a:xfrm>
+          <a:prstGeom prst="rect">
+            <a:avLst/>
+          </a:prstGeom>
+        </p:spPr>
+      </p:pic>
+      <p:pic>
+        <p:nvPicPr>
+          <p:cNvPr id="9" name="Picture 8">
+            <a:extLst>
+              <a:ext uri="{FF2B5EF4-FFF2-40B4-BE49-F238E27FC236}">
+                <a16:creationId xmlns:a16="http://schemas.microsoft.com/office/drawing/2014/main" id="{7F4427D1-1736-B9A5-229B-5775933D678C}"/>
+              </a:ext>
+            </a:extLst>
+          </p:cNvPr>
+          <p:cNvPicPr>
+            <a:picLocks noChangeAspect="1"/>
+          </p:cNvPicPr>
+          <p:nvPr/>
+        </p:nvPicPr>
+        <p:blipFill>
+          <a:blip r:embed="rId5">
+            <a:extLst>
+              <a:ext uri="{28A0092B-C50C-407E-A947-70E740481C1C}">
+                <a14:useLocalDpi xmlns:a14="http://schemas.microsoft.com/office/drawing/2010/main" val="0"/>
+              </a:ext>
+            </a:extLst>
+          </a:blip>
+          <a:stretch>
+            <a:fillRect/>
+          </a:stretch>
+        </p:blipFill>
+        <p:spPr>
+          <a:xfrm>
+            <a:off x="2314575" y="3906044"/>
+            <a:ext cx="3200400" cy="2633056"/>
+          </a:xfrm>
+          <a:prstGeom prst="rect">
+            <a:avLst/>
+          </a:prstGeom>
+        </p:spPr>
+      </p:pic>
+    </p:spTree>
+    <p:extLst>
+      <p:ext uri="{BB962C8B-B14F-4D97-AF65-F5344CB8AC3E}">
+        <p14:creationId xmlns:p14="http://schemas.microsoft.com/office/powerpoint/2010/main" val="1591004117"/>
+      </p:ext>
+    </p:extLst>
+  </p:cSld>
+  <p:clrMapOvr>
+    <a:masterClrMapping/>
+  </p:clrMapOvr>
+</p:sld>
+</file>
+
+<file path=ppt/slides/slide17.xml><?xml version="1.0" encoding="utf-8"?>
+<p:sld xmlns:a="http://schemas.openxmlformats.org/drawingml/2006/main" xmlns:r="http://schemas.openxmlformats.org/officeDocument/2006/relationships" xmlns:p="http://schemas.openxmlformats.org/presentationml/2006/main">
+  <p:cSld>
     <p:bg>
       <p:bgPr>
         <a:gradFill rotWithShape="1">
@@ -28480,13 +28839,13 @@
   <p:clrMapOvr>
     <a:masterClrMapping/>
   </p:clrMapOvr>
-  <mc:AlternateContent xmlns:mc="http://schemas.openxmlformats.org/markup-compatibility/2006">
-    <mc:Choice xmlns:p14="http://schemas.microsoft.com/office/powerpoint/2010/main" Requires="p14">
+  <mc:AlternateContent xmlns:mc="http://schemas.openxmlformats.org/markup-compatibility/2006" xmlns:p14="http://schemas.microsoft.com/office/powerpoint/2010/main">
+    <mc:Choice Requires="p14">
       <p:transition spd="slow" p14:dur="1500">
         <p:split orient="vert"/>
       </p:transition>
     </mc:Choice>
-    <mc:Fallback>
+    <mc:Fallback xmlns="">
       <p:transition spd="slow">
         <p:split orient="vert"/>
       </p:transition>
@@ -28680,7 +29039,7 @@
             <a:noFill/>
             <a:extLst>
               <a:ext uri="{909E8E84-426E-40dd-AFC4-6F175D3DCCD1}">
-                <a14:hiddenFill xmlns="" xmlns:a16="http://schemas.microsoft.com/office/drawing/2014/main" xmlns:a14="http://schemas.microsoft.com/office/drawing/2010/main" xmlns:p14="http://schemas.microsoft.com/office/powerpoint/2010/main">
+                <a14:hiddenFill xmlns:p14="http://schemas.microsoft.com/office/powerpoint/2010/main" xmlns:a14="http://schemas.microsoft.com/office/drawing/2010/main" xmlns:a16="http://schemas.microsoft.com/office/drawing/2014/main" xmlns="">
                   <a:solidFill>
                     <a:srgbClr val="FFFFFF"/>
                   </a:solidFill>
@@ -31912,7 +32271,7 @@
             <a:noFill/>
             <a:extLst>
               <a:ext uri="{909E8E84-426E-40dd-AFC4-6F175D3DCCD1}">
-                <a14:hiddenFill xmlns="" xmlns:a16="http://schemas.microsoft.com/office/drawing/2014/main" xmlns:a14="http://schemas.microsoft.com/office/drawing/2010/main" xmlns:p14="http://schemas.microsoft.com/office/powerpoint/2010/main">
+                <a14:hiddenFill xmlns:p14="http://schemas.microsoft.com/office/powerpoint/2010/main" xmlns:a14="http://schemas.microsoft.com/office/drawing/2010/main" xmlns:a16="http://schemas.microsoft.com/office/drawing/2014/main" xmlns="">
                   <a:solidFill>
                     <a:srgbClr val="FFFFFF"/>
                   </a:solidFill>
@@ -32069,7 +32428,7 @@
             </a:ln>
             <a:extLst>
               <a:ext uri="{91240B29-F687-4f45-9708-019B960494DF}">
-                <a14:hiddenLine xmlns="" xmlns:a16="http://schemas.microsoft.com/office/drawing/2014/main" xmlns:a14="http://schemas.microsoft.com/office/drawing/2010/main" xmlns:p14="http://schemas.microsoft.com/office/powerpoint/2010/main" w="9525">
+                <a14:hiddenLine xmlns:p14="http://schemas.microsoft.com/office/powerpoint/2010/main" xmlns:a14="http://schemas.microsoft.com/office/drawing/2010/main" xmlns:a16="http://schemas.microsoft.com/office/drawing/2014/main" xmlns="" w="9525">
                   <a:solidFill>
                     <a:srgbClr val="000000"/>
                   </a:solidFill>
@@ -32181,7 +32540,7 @@
             </a:ln>
             <a:extLst>
               <a:ext uri="{91240B29-F687-4f45-9708-019B960494DF}">
-                <a14:hiddenLine xmlns="" xmlns:a16="http://schemas.microsoft.com/office/drawing/2014/main" xmlns:a14="http://schemas.microsoft.com/office/drawing/2010/main" xmlns:p14="http://schemas.microsoft.com/office/powerpoint/2010/main" w="9525">
+                <a14:hiddenLine xmlns:p14="http://schemas.microsoft.com/office/powerpoint/2010/main" xmlns:a14="http://schemas.microsoft.com/office/drawing/2010/main" xmlns:a16="http://schemas.microsoft.com/office/drawing/2014/main" xmlns="" w="9525">
                   <a:solidFill>
                     <a:srgbClr val="000000"/>
                   </a:solidFill>
@@ -32293,7 +32652,7 @@
             </a:ln>
             <a:extLst>
               <a:ext uri="{91240B29-F687-4f45-9708-019B960494DF}">
-                <a14:hiddenLine xmlns="" xmlns:a16="http://schemas.microsoft.com/office/drawing/2014/main" xmlns:a14="http://schemas.microsoft.com/office/drawing/2010/main" xmlns:p14="http://schemas.microsoft.com/office/powerpoint/2010/main" w="9525">
+                <a14:hiddenLine xmlns:p14="http://schemas.microsoft.com/office/powerpoint/2010/main" xmlns:a14="http://schemas.microsoft.com/office/drawing/2010/main" xmlns:a16="http://schemas.microsoft.com/office/drawing/2014/main" xmlns="" w="9525">
                   <a:solidFill>
                     <a:srgbClr val="000000"/>
                   </a:solidFill>
@@ -32349,7 +32708,7 @@
             </a:ln>
             <a:extLst>
               <a:ext uri="{91240B29-F687-4f45-9708-019B960494DF}">
-                <a14:hiddenLine xmlns="" xmlns:a16="http://schemas.microsoft.com/office/drawing/2014/main" xmlns:a14="http://schemas.microsoft.com/office/drawing/2010/main" xmlns:p14="http://schemas.microsoft.com/office/powerpoint/2010/main" w="9525">
+                <a14:hiddenLine xmlns:p14="http://schemas.microsoft.com/office/powerpoint/2010/main" xmlns:a14="http://schemas.microsoft.com/office/drawing/2010/main" xmlns:a16="http://schemas.microsoft.com/office/drawing/2014/main" xmlns="" w="9525">
                   <a:solidFill>
                     <a:srgbClr val="000000"/>
                   </a:solidFill>
@@ -32461,7 +32820,7 @@
             </a:ln>
             <a:extLst>
               <a:ext uri="{91240B29-F687-4f45-9708-019B960494DF}">
-                <a14:hiddenLine xmlns="" xmlns:a16="http://schemas.microsoft.com/office/drawing/2014/main" xmlns:a14="http://schemas.microsoft.com/office/drawing/2010/main" xmlns:p14="http://schemas.microsoft.com/office/powerpoint/2010/main" w="9525">
+                <a14:hiddenLine xmlns:p14="http://schemas.microsoft.com/office/powerpoint/2010/main" xmlns:a14="http://schemas.microsoft.com/office/drawing/2010/main" xmlns:a16="http://schemas.microsoft.com/office/drawing/2014/main" xmlns="" w="9525">
                   <a:solidFill>
                     <a:srgbClr val="000000"/>
                   </a:solidFill>
@@ -32545,7 +32904,7 @@
             </a:ln>
             <a:extLst>
               <a:ext uri="{91240B29-F687-4f45-9708-019B960494DF}">
-                <a14:hiddenLine xmlns="" xmlns:a16="http://schemas.microsoft.com/office/drawing/2014/main" xmlns:a14="http://schemas.microsoft.com/office/drawing/2010/main" xmlns:p14="http://schemas.microsoft.com/office/powerpoint/2010/main" w="9525">
+                <a14:hiddenLine xmlns:p14="http://schemas.microsoft.com/office/powerpoint/2010/main" xmlns:a14="http://schemas.microsoft.com/office/drawing/2010/main" xmlns:a16="http://schemas.microsoft.com/office/drawing/2014/main" xmlns="" w="9525">
                   <a:solidFill>
                     <a:srgbClr val="000000"/>
                   </a:solidFill>
@@ -32629,7 +32988,7 @@
             </a:ln>
             <a:extLst>
               <a:ext uri="{91240B29-F687-4f45-9708-019B960494DF}">
-                <a14:hiddenLine xmlns="" xmlns:a16="http://schemas.microsoft.com/office/drawing/2014/main" xmlns:a14="http://schemas.microsoft.com/office/drawing/2010/main" xmlns:p14="http://schemas.microsoft.com/office/powerpoint/2010/main" w="9525">
+                <a14:hiddenLine xmlns:p14="http://schemas.microsoft.com/office/powerpoint/2010/main" xmlns:a14="http://schemas.microsoft.com/office/drawing/2010/main" xmlns:a16="http://schemas.microsoft.com/office/drawing/2014/main" xmlns="" w="9525">
                   <a:solidFill>
                     <a:srgbClr val="000000"/>
                   </a:solidFill>
@@ -32741,7 +33100,7 @@
             </a:ln>
             <a:extLst>
               <a:ext uri="{91240B29-F687-4f45-9708-019B960494DF}">
-                <a14:hiddenLine xmlns="" xmlns:a16="http://schemas.microsoft.com/office/drawing/2014/main" xmlns:a14="http://schemas.microsoft.com/office/drawing/2010/main" xmlns:p14="http://schemas.microsoft.com/office/powerpoint/2010/main" w="9525">
+                <a14:hiddenLine xmlns:p14="http://schemas.microsoft.com/office/powerpoint/2010/main" xmlns:a14="http://schemas.microsoft.com/office/drawing/2010/main" xmlns:a16="http://schemas.microsoft.com/office/drawing/2014/main" xmlns="" w="9525">
                   <a:solidFill>
                     <a:srgbClr val="000000"/>
                   </a:solidFill>
@@ -32825,7 +33184,7 @@
             </a:ln>
             <a:extLst>
               <a:ext uri="{91240B29-F687-4f45-9708-019B960494DF}">
-                <a14:hiddenLine xmlns="" xmlns:a16="http://schemas.microsoft.com/office/drawing/2014/main" xmlns:a14="http://schemas.microsoft.com/office/drawing/2010/main" xmlns:p14="http://schemas.microsoft.com/office/powerpoint/2010/main" w="9525">
+                <a14:hiddenLine xmlns:p14="http://schemas.microsoft.com/office/powerpoint/2010/main" xmlns:a14="http://schemas.microsoft.com/office/drawing/2010/main" xmlns:a16="http://schemas.microsoft.com/office/drawing/2014/main" xmlns="" w="9525">
                   <a:solidFill>
                     <a:srgbClr val="000000"/>
                   </a:solidFill>
@@ -32909,7 +33268,7 @@
             </a:ln>
             <a:extLst>
               <a:ext uri="{91240B29-F687-4f45-9708-019B960494DF}">
-                <a14:hiddenLine xmlns="" xmlns:a16="http://schemas.microsoft.com/office/drawing/2014/main" xmlns:a14="http://schemas.microsoft.com/office/drawing/2010/main" xmlns:p14="http://schemas.microsoft.com/office/powerpoint/2010/main" w="9525">
+                <a14:hiddenLine xmlns:p14="http://schemas.microsoft.com/office/powerpoint/2010/main" xmlns:a14="http://schemas.microsoft.com/office/drawing/2010/main" xmlns:a16="http://schemas.microsoft.com/office/drawing/2014/main" xmlns="" w="9525">
                   <a:solidFill>
                     <a:srgbClr val="000000"/>
                   </a:solidFill>
@@ -33021,7 +33380,7 @@
             </a:ln>
             <a:extLst>
               <a:ext uri="{91240B29-F687-4f45-9708-019B960494DF}">
-                <a14:hiddenLine xmlns="" xmlns:a16="http://schemas.microsoft.com/office/drawing/2014/main" xmlns:a14="http://schemas.microsoft.com/office/drawing/2010/main" xmlns:p14="http://schemas.microsoft.com/office/powerpoint/2010/main" w="9525">
+                <a14:hiddenLine xmlns:p14="http://schemas.microsoft.com/office/powerpoint/2010/main" xmlns:a14="http://schemas.microsoft.com/office/drawing/2010/main" xmlns:a16="http://schemas.microsoft.com/office/drawing/2014/main" xmlns="" w="9525">
                   <a:solidFill>
                     <a:srgbClr val="000000"/>
                   </a:solidFill>
@@ -33133,7 +33492,7 @@
             </a:ln>
             <a:extLst>
               <a:ext uri="{91240B29-F687-4f45-9708-019B960494DF}">
-                <a14:hiddenLine xmlns="" xmlns:a16="http://schemas.microsoft.com/office/drawing/2014/main" xmlns:a14="http://schemas.microsoft.com/office/drawing/2010/main" xmlns:p14="http://schemas.microsoft.com/office/powerpoint/2010/main" w="9525">
+                <a14:hiddenLine xmlns:p14="http://schemas.microsoft.com/office/powerpoint/2010/main" xmlns:a14="http://schemas.microsoft.com/office/drawing/2010/main" xmlns:a16="http://schemas.microsoft.com/office/drawing/2014/main" xmlns="" w="9525">
                   <a:solidFill>
                     <a:srgbClr val="000000"/>
                   </a:solidFill>
@@ -33217,7 +33576,7 @@
             </a:ln>
             <a:extLst>
               <a:ext uri="{91240B29-F687-4f45-9708-019B960494DF}">
-                <a14:hiddenLine xmlns="" xmlns:a16="http://schemas.microsoft.com/office/drawing/2014/main" xmlns:a14="http://schemas.microsoft.com/office/drawing/2010/main" xmlns:p14="http://schemas.microsoft.com/office/powerpoint/2010/main" w="9525">
+                <a14:hiddenLine xmlns:p14="http://schemas.microsoft.com/office/powerpoint/2010/main" xmlns:a14="http://schemas.microsoft.com/office/drawing/2010/main" xmlns:a16="http://schemas.microsoft.com/office/drawing/2014/main" xmlns="" w="9525">
                   <a:solidFill>
                     <a:srgbClr val="000000"/>
                   </a:solidFill>
@@ -33349,7 +33708,7 @@
             </a:ln>
             <a:extLst>
               <a:ext uri="{91240B29-F687-4f45-9708-019B960494DF}">
-                <a14:hiddenLine xmlns="" xmlns:a16="http://schemas.microsoft.com/office/drawing/2014/main" xmlns:a14="http://schemas.microsoft.com/office/drawing/2010/main" xmlns:p14="http://schemas.microsoft.com/office/powerpoint/2010/main" w="9525">
+                <a14:hiddenLine xmlns:p14="http://schemas.microsoft.com/office/powerpoint/2010/main" xmlns:a14="http://schemas.microsoft.com/office/drawing/2010/main" xmlns:a16="http://schemas.microsoft.com/office/drawing/2014/main" xmlns="" w="9525">
                   <a:solidFill>
                     <a:srgbClr val="000000"/>
                   </a:solidFill>
@@ -33433,7 +33792,7 @@
             </a:ln>
             <a:extLst>
               <a:ext uri="{91240B29-F687-4f45-9708-019B960494DF}">
-                <a14:hiddenLine xmlns="" xmlns:a16="http://schemas.microsoft.com/office/drawing/2014/main" xmlns:a14="http://schemas.microsoft.com/office/drawing/2010/main" xmlns:p14="http://schemas.microsoft.com/office/powerpoint/2010/main" w="9525">
+                <a14:hiddenLine xmlns:p14="http://schemas.microsoft.com/office/powerpoint/2010/main" xmlns:a14="http://schemas.microsoft.com/office/drawing/2010/main" xmlns:a16="http://schemas.microsoft.com/office/drawing/2014/main" xmlns="" w="9525">
                   <a:solidFill>
                     <a:srgbClr val="000000"/>
                   </a:solidFill>
@@ -33545,7 +33904,7 @@
             </a:ln>
             <a:extLst>
               <a:ext uri="{91240B29-F687-4f45-9708-019B960494DF}">
-                <a14:hiddenLine xmlns="" xmlns:a16="http://schemas.microsoft.com/office/drawing/2014/main" xmlns:a14="http://schemas.microsoft.com/office/drawing/2010/main" xmlns:p14="http://schemas.microsoft.com/office/powerpoint/2010/main" w="9525">
+                <a14:hiddenLine xmlns:p14="http://schemas.microsoft.com/office/powerpoint/2010/main" xmlns:a14="http://schemas.microsoft.com/office/drawing/2010/main" xmlns:a16="http://schemas.microsoft.com/office/drawing/2014/main" xmlns="" w="9525">
                   <a:solidFill>
                     <a:srgbClr val="000000"/>
                   </a:solidFill>
@@ -33657,7 +34016,7 @@
             </a:ln>
             <a:extLst>
               <a:ext uri="{91240B29-F687-4f45-9708-019B960494DF}">
-                <a14:hiddenLine xmlns="" xmlns:a16="http://schemas.microsoft.com/office/drawing/2014/main" xmlns:a14="http://schemas.microsoft.com/office/drawing/2010/main" xmlns:p14="http://schemas.microsoft.com/office/powerpoint/2010/main" w="9525">
+                <a14:hiddenLine xmlns:p14="http://schemas.microsoft.com/office/powerpoint/2010/main" xmlns:a14="http://schemas.microsoft.com/office/drawing/2010/main" xmlns:a16="http://schemas.microsoft.com/office/drawing/2014/main" xmlns="" w="9525">
                   <a:solidFill>
                     <a:srgbClr val="000000"/>
                   </a:solidFill>
@@ -33741,7 +34100,7 @@
             </a:ln>
             <a:extLst>
               <a:ext uri="{91240B29-F687-4f45-9708-019B960494DF}">
-                <a14:hiddenLine xmlns="" xmlns:a16="http://schemas.microsoft.com/office/drawing/2014/main" xmlns:a14="http://schemas.microsoft.com/office/drawing/2010/main" xmlns:p14="http://schemas.microsoft.com/office/powerpoint/2010/main" w="9525">
+                <a14:hiddenLine xmlns:p14="http://schemas.microsoft.com/office/powerpoint/2010/main" xmlns:a14="http://schemas.microsoft.com/office/drawing/2010/main" xmlns:a16="http://schemas.microsoft.com/office/drawing/2014/main" xmlns="" w="9525">
                   <a:solidFill>
                     <a:srgbClr val="000000"/>
                   </a:solidFill>
@@ -33853,7 +34212,7 @@
             </a:ln>
             <a:extLst>
               <a:ext uri="{91240B29-F687-4f45-9708-019B960494DF}">
-                <a14:hiddenLine xmlns="" xmlns:a16="http://schemas.microsoft.com/office/drawing/2014/main" xmlns:a14="http://schemas.microsoft.com/office/drawing/2010/main" xmlns:p14="http://schemas.microsoft.com/office/powerpoint/2010/main" w="9525">
+                <a14:hiddenLine xmlns:p14="http://schemas.microsoft.com/office/powerpoint/2010/main" xmlns:a14="http://schemas.microsoft.com/office/drawing/2010/main" xmlns:a16="http://schemas.microsoft.com/office/drawing/2014/main" xmlns="" w="9525">
                   <a:solidFill>
                     <a:srgbClr val="000000"/>
                   </a:solidFill>
@@ -33965,7 +34324,7 @@
             </a:ln>
             <a:extLst>
               <a:ext uri="{91240B29-F687-4f45-9708-019B960494DF}">
-                <a14:hiddenLine xmlns="" xmlns:a16="http://schemas.microsoft.com/office/drawing/2014/main" xmlns:a14="http://schemas.microsoft.com/office/drawing/2010/main" xmlns:p14="http://schemas.microsoft.com/office/powerpoint/2010/main" w="9525">
+                <a14:hiddenLine xmlns:p14="http://schemas.microsoft.com/office/powerpoint/2010/main" xmlns:a14="http://schemas.microsoft.com/office/drawing/2010/main" xmlns:a16="http://schemas.microsoft.com/office/drawing/2014/main" xmlns="" w="9525">
                   <a:solidFill>
                     <a:srgbClr val="000000"/>
                   </a:solidFill>
@@ -34043,7 +34402,7 @@
             </a:ln>
             <a:extLst>
               <a:ext uri="{91240B29-F687-4f45-9708-019B960494DF}">
-                <a14:hiddenLine xmlns="" xmlns:a16="http://schemas.microsoft.com/office/drawing/2014/main" xmlns:a14="http://schemas.microsoft.com/office/drawing/2010/main" xmlns:p14="http://schemas.microsoft.com/office/powerpoint/2010/main" w="9525">
+                <a14:hiddenLine xmlns:p14="http://schemas.microsoft.com/office/powerpoint/2010/main" xmlns:a14="http://schemas.microsoft.com/office/drawing/2010/main" xmlns:a16="http://schemas.microsoft.com/office/drawing/2014/main" xmlns="" w="9525">
                   <a:solidFill>
                     <a:srgbClr val="000000"/>
                   </a:solidFill>
@@ -34155,7 +34514,7 @@
             </a:ln>
             <a:extLst>
               <a:ext uri="{91240B29-F687-4f45-9708-019B960494DF}">
-                <a14:hiddenLine xmlns="" xmlns:a16="http://schemas.microsoft.com/office/drawing/2014/main" xmlns:a14="http://schemas.microsoft.com/office/drawing/2010/main" xmlns:p14="http://schemas.microsoft.com/office/powerpoint/2010/main" w="9525">
+                <a14:hiddenLine xmlns:p14="http://schemas.microsoft.com/office/powerpoint/2010/main" xmlns:a14="http://schemas.microsoft.com/office/drawing/2010/main" xmlns:a16="http://schemas.microsoft.com/office/drawing/2014/main" xmlns="" w="9525">
                   <a:solidFill>
                     <a:srgbClr val="000000"/>
                   </a:solidFill>
@@ -34233,7 +34592,7 @@
             </a:ln>
             <a:extLst>
               <a:ext uri="{91240B29-F687-4f45-9708-019B960494DF}">
-                <a14:hiddenLine xmlns="" xmlns:a16="http://schemas.microsoft.com/office/drawing/2014/main" xmlns:a14="http://schemas.microsoft.com/office/drawing/2010/main" xmlns:p14="http://schemas.microsoft.com/office/powerpoint/2010/main" w="9525">
+                <a14:hiddenLine xmlns:p14="http://schemas.microsoft.com/office/powerpoint/2010/main" xmlns:a14="http://schemas.microsoft.com/office/drawing/2010/main" xmlns:a16="http://schemas.microsoft.com/office/drawing/2014/main" xmlns="" w="9525">
                   <a:solidFill>
                     <a:srgbClr val="000000"/>
                   </a:solidFill>
@@ -34345,7 +34704,7 @@
             </a:ln>
             <a:extLst>
               <a:ext uri="{91240B29-F687-4f45-9708-019B960494DF}">
-                <a14:hiddenLine xmlns="" xmlns:a16="http://schemas.microsoft.com/office/drawing/2014/main" xmlns:a14="http://schemas.microsoft.com/office/drawing/2010/main" xmlns:p14="http://schemas.microsoft.com/office/powerpoint/2010/main" w="9525">
+                <a14:hiddenLine xmlns:p14="http://schemas.microsoft.com/office/powerpoint/2010/main" xmlns:a14="http://schemas.microsoft.com/office/drawing/2010/main" xmlns:a16="http://schemas.microsoft.com/office/drawing/2014/main" xmlns="" w="9525">
                   <a:solidFill>
                     <a:srgbClr val="000000"/>
                   </a:solidFill>
@@ -34435,7 +34794,7 @@
             </a:ln>
             <a:extLst>
               <a:ext uri="{91240B29-F687-4f45-9708-019B960494DF}">
-                <a14:hiddenLine xmlns="" xmlns:a16="http://schemas.microsoft.com/office/drawing/2014/main" xmlns:a14="http://schemas.microsoft.com/office/drawing/2010/main" xmlns:p14="http://schemas.microsoft.com/office/powerpoint/2010/main" w="9525">
+                <a14:hiddenLine xmlns:p14="http://schemas.microsoft.com/office/powerpoint/2010/main" xmlns:a14="http://schemas.microsoft.com/office/drawing/2010/main" xmlns:a16="http://schemas.microsoft.com/office/drawing/2014/main" xmlns="" w="9525">
                   <a:solidFill>
                     <a:srgbClr val="000000"/>
                   </a:solidFill>
@@ -34547,7 +34906,7 @@
             </a:ln>
             <a:extLst>
               <a:ext uri="{91240B29-F687-4f45-9708-019B960494DF}">
-                <a14:hiddenLine xmlns="" xmlns:a16="http://schemas.microsoft.com/office/drawing/2014/main" xmlns:a14="http://schemas.microsoft.com/office/drawing/2010/main" xmlns:p14="http://schemas.microsoft.com/office/powerpoint/2010/main" w="9525">
+                <a14:hiddenLine xmlns:p14="http://schemas.microsoft.com/office/powerpoint/2010/main" xmlns:a14="http://schemas.microsoft.com/office/drawing/2010/main" xmlns:a16="http://schemas.microsoft.com/office/drawing/2014/main" xmlns="" w="9525">
                   <a:solidFill>
                     <a:srgbClr val="000000"/>
                   </a:solidFill>
@@ -34637,7 +34996,7 @@
             </a:ln>
             <a:extLst>
               <a:ext uri="{91240B29-F687-4f45-9708-019B960494DF}">
-                <a14:hiddenLine xmlns="" xmlns:a16="http://schemas.microsoft.com/office/drawing/2014/main" xmlns:a14="http://schemas.microsoft.com/office/drawing/2010/main" xmlns:p14="http://schemas.microsoft.com/office/powerpoint/2010/main" w="9525">
+                <a14:hiddenLine xmlns:p14="http://schemas.microsoft.com/office/powerpoint/2010/main" xmlns:a14="http://schemas.microsoft.com/office/drawing/2010/main" xmlns:a16="http://schemas.microsoft.com/office/drawing/2014/main" xmlns="" w="9525">
                   <a:solidFill>
                     <a:srgbClr val="000000"/>
                   </a:solidFill>
@@ -34749,7 +35108,7 @@
             </a:ln>
             <a:extLst>
               <a:ext uri="{91240B29-F687-4f45-9708-019B960494DF}">
-                <a14:hiddenLine xmlns="" xmlns:a16="http://schemas.microsoft.com/office/drawing/2014/main" xmlns:a14="http://schemas.microsoft.com/office/drawing/2010/main" xmlns:p14="http://schemas.microsoft.com/office/powerpoint/2010/main" w="9525">
+                <a14:hiddenLine xmlns:p14="http://schemas.microsoft.com/office/powerpoint/2010/main" xmlns:a14="http://schemas.microsoft.com/office/drawing/2010/main" xmlns:a16="http://schemas.microsoft.com/office/drawing/2014/main" xmlns="" w="9525">
                   <a:solidFill>
                     <a:srgbClr val="000000"/>
                   </a:solidFill>
@@ -34805,7 +35164,7 @@
             </a:ln>
             <a:extLst>
               <a:ext uri="{91240B29-F687-4f45-9708-019B960494DF}">
-                <a14:hiddenLine xmlns="" xmlns:a16="http://schemas.microsoft.com/office/drawing/2014/main" xmlns:a14="http://schemas.microsoft.com/office/drawing/2010/main" xmlns:p14="http://schemas.microsoft.com/office/powerpoint/2010/main" w="9525">
+                <a14:hiddenLine xmlns:p14="http://schemas.microsoft.com/office/powerpoint/2010/main" xmlns:a14="http://schemas.microsoft.com/office/drawing/2010/main" xmlns:a16="http://schemas.microsoft.com/office/drawing/2014/main" xmlns="" w="9525">
                   <a:solidFill>
                     <a:srgbClr val="000000"/>
                   </a:solidFill>
@@ -34917,7 +35276,7 @@
             </a:ln>
             <a:extLst>
               <a:ext uri="{91240B29-F687-4f45-9708-019B960494DF}">
-                <a14:hiddenLine xmlns="" xmlns:a16="http://schemas.microsoft.com/office/drawing/2014/main" xmlns:a14="http://schemas.microsoft.com/office/drawing/2010/main" xmlns:p14="http://schemas.microsoft.com/office/powerpoint/2010/main" w="9525">
+                <a14:hiddenLine xmlns:p14="http://schemas.microsoft.com/office/powerpoint/2010/main" xmlns:a14="http://schemas.microsoft.com/office/drawing/2010/main" xmlns:a16="http://schemas.microsoft.com/office/drawing/2014/main" xmlns="" w="9525">
                   <a:solidFill>
                     <a:srgbClr val="000000"/>
                   </a:solidFill>
@@ -35001,7 +35360,7 @@
             </a:ln>
             <a:extLst>
               <a:ext uri="{91240B29-F687-4f45-9708-019B960494DF}">
-                <a14:hiddenLine xmlns="" xmlns:a16="http://schemas.microsoft.com/office/drawing/2014/main" xmlns:a14="http://schemas.microsoft.com/office/drawing/2010/main" xmlns:p14="http://schemas.microsoft.com/office/powerpoint/2010/main" w="9525">
+                <a14:hiddenLine xmlns:p14="http://schemas.microsoft.com/office/powerpoint/2010/main" xmlns:a14="http://schemas.microsoft.com/office/drawing/2010/main" xmlns:a16="http://schemas.microsoft.com/office/drawing/2014/main" xmlns="" w="9525">
                   <a:solidFill>
                     <a:srgbClr val="000000"/>
                   </a:solidFill>
@@ -35085,7 +35444,7 @@
             </a:ln>
             <a:extLst>
               <a:ext uri="{91240B29-F687-4f45-9708-019B960494DF}">
-                <a14:hiddenLine xmlns="" xmlns:a16="http://schemas.microsoft.com/office/drawing/2014/main" xmlns:a14="http://schemas.microsoft.com/office/drawing/2010/main" xmlns:p14="http://schemas.microsoft.com/office/powerpoint/2010/main" w="9525">
+                <a14:hiddenLine xmlns:p14="http://schemas.microsoft.com/office/powerpoint/2010/main" xmlns:a14="http://schemas.microsoft.com/office/drawing/2010/main" xmlns:a16="http://schemas.microsoft.com/office/drawing/2014/main" xmlns="" w="9525">
                   <a:solidFill>
                     <a:srgbClr val="000000"/>
                   </a:solidFill>
@@ -35197,7 +35556,7 @@
             </a:ln>
             <a:extLst>
               <a:ext uri="{91240B29-F687-4f45-9708-019B960494DF}">
-                <a14:hiddenLine xmlns="" xmlns:a16="http://schemas.microsoft.com/office/drawing/2014/main" xmlns:a14="http://schemas.microsoft.com/office/drawing/2010/main" xmlns:p14="http://schemas.microsoft.com/office/powerpoint/2010/main" w="9525">
+                <a14:hiddenLine xmlns:p14="http://schemas.microsoft.com/office/powerpoint/2010/main" xmlns:a14="http://schemas.microsoft.com/office/drawing/2010/main" xmlns:a16="http://schemas.microsoft.com/office/drawing/2014/main" xmlns="" w="9525">
                   <a:solidFill>
                     <a:srgbClr val="000000"/>
                   </a:solidFill>
@@ -35287,7 +35646,7 @@
             </a:ln>
             <a:extLst>
               <a:ext uri="{91240B29-F687-4f45-9708-019B960494DF}">
-                <a14:hiddenLine xmlns="" xmlns:a16="http://schemas.microsoft.com/office/drawing/2014/main" xmlns:a14="http://schemas.microsoft.com/office/drawing/2010/main" xmlns:p14="http://schemas.microsoft.com/office/powerpoint/2010/main" w="9525">
+                <a14:hiddenLine xmlns:p14="http://schemas.microsoft.com/office/powerpoint/2010/main" xmlns:a14="http://schemas.microsoft.com/office/drawing/2010/main" xmlns:a16="http://schemas.microsoft.com/office/drawing/2014/main" xmlns="" w="9525">
                   <a:solidFill>
                     <a:srgbClr val="000000"/>
                   </a:solidFill>
@@ -35371,7 +35730,7 @@
             </a:ln>
             <a:extLst>
               <a:ext uri="{91240B29-F687-4f45-9708-019B960494DF}">
-                <a14:hiddenLine xmlns="" xmlns:a16="http://schemas.microsoft.com/office/drawing/2014/main" xmlns:a14="http://schemas.microsoft.com/office/drawing/2010/main" xmlns:p14="http://schemas.microsoft.com/office/powerpoint/2010/main" w="9525">
+                <a14:hiddenLine xmlns:p14="http://schemas.microsoft.com/office/powerpoint/2010/main" xmlns:a14="http://schemas.microsoft.com/office/drawing/2010/main" xmlns:a16="http://schemas.microsoft.com/office/drawing/2014/main" xmlns="" w="9525">
                   <a:solidFill>
                     <a:srgbClr val="000000"/>
                   </a:solidFill>
@@ -35483,7 +35842,7 @@
             </a:ln>
             <a:extLst>
               <a:ext uri="{91240B29-F687-4f45-9708-019B960494DF}">
-                <a14:hiddenLine xmlns="" xmlns:a16="http://schemas.microsoft.com/office/drawing/2014/main" xmlns:a14="http://schemas.microsoft.com/office/drawing/2010/main" xmlns:p14="http://schemas.microsoft.com/office/powerpoint/2010/main" w="9525">
+                <a14:hiddenLine xmlns:p14="http://schemas.microsoft.com/office/powerpoint/2010/main" xmlns:a14="http://schemas.microsoft.com/office/drawing/2010/main" xmlns:a16="http://schemas.microsoft.com/office/drawing/2014/main" xmlns="" w="9525">
                   <a:solidFill>
                     <a:srgbClr val="000000"/>
                   </a:solidFill>
@@ -35567,7 +35926,7 @@
             </a:ln>
             <a:extLst>
               <a:ext uri="{91240B29-F687-4f45-9708-019B960494DF}">
-                <a14:hiddenLine xmlns="" xmlns:a16="http://schemas.microsoft.com/office/drawing/2014/main" xmlns:a14="http://schemas.microsoft.com/office/drawing/2010/main" xmlns:p14="http://schemas.microsoft.com/office/powerpoint/2010/main" w="9525">
+                <a14:hiddenLine xmlns:p14="http://schemas.microsoft.com/office/powerpoint/2010/main" xmlns:a14="http://schemas.microsoft.com/office/drawing/2010/main" xmlns:a16="http://schemas.microsoft.com/office/drawing/2014/main" xmlns="" w="9525">
                   <a:solidFill>
                     <a:srgbClr val="000000"/>
                   </a:solidFill>
@@ -35679,7 +36038,7 @@
             </a:ln>
             <a:extLst>
               <a:ext uri="{91240B29-F687-4f45-9708-019B960494DF}">
-                <a14:hiddenLine xmlns="" xmlns:a16="http://schemas.microsoft.com/office/drawing/2014/main" xmlns:a14="http://schemas.microsoft.com/office/drawing/2010/main" xmlns:p14="http://schemas.microsoft.com/office/powerpoint/2010/main" w="9525">
+                <a14:hiddenLine xmlns:p14="http://schemas.microsoft.com/office/powerpoint/2010/main" xmlns:a14="http://schemas.microsoft.com/office/drawing/2010/main" xmlns:a16="http://schemas.microsoft.com/office/drawing/2014/main" xmlns="" w="9525">
                   <a:solidFill>
                     <a:srgbClr val="000000"/>
                   </a:solidFill>
@@ -35763,7 +36122,7 @@
             </a:ln>
             <a:extLst>
               <a:ext uri="{91240B29-F687-4f45-9708-019B960494DF}">
-                <a14:hiddenLine xmlns="" xmlns:a16="http://schemas.microsoft.com/office/drawing/2014/main" xmlns:a14="http://schemas.microsoft.com/office/drawing/2010/main" xmlns:p14="http://schemas.microsoft.com/office/powerpoint/2010/main" w="9525">
+                <a14:hiddenLine xmlns:p14="http://schemas.microsoft.com/office/powerpoint/2010/main" xmlns:a14="http://schemas.microsoft.com/office/drawing/2010/main" xmlns:a16="http://schemas.microsoft.com/office/drawing/2014/main" xmlns="" w="9525">
                   <a:solidFill>
                     <a:srgbClr val="000000"/>
                   </a:solidFill>
@@ -35875,7 +36234,7 @@
             </a:ln>
             <a:extLst>
               <a:ext uri="{91240B29-F687-4f45-9708-019B960494DF}">
-                <a14:hiddenLine xmlns="" xmlns:a16="http://schemas.microsoft.com/office/drawing/2014/main" xmlns:a14="http://schemas.microsoft.com/office/drawing/2010/main" xmlns:p14="http://schemas.microsoft.com/office/powerpoint/2010/main" w="9525">
+                <a14:hiddenLine xmlns:p14="http://schemas.microsoft.com/office/powerpoint/2010/main" xmlns:a14="http://schemas.microsoft.com/office/drawing/2010/main" xmlns:a16="http://schemas.microsoft.com/office/drawing/2014/main" xmlns="" w="9525">
                   <a:solidFill>
                     <a:srgbClr val="000000"/>
                   </a:solidFill>
@@ -35931,7 +36290,7 @@
             </a:ln>
             <a:extLst>
               <a:ext uri="{91240B29-F687-4f45-9708-019B960494DF}">
-                <a14:hiddenLine xmlns="" xmlns:a16="http://schemas.microsoft.com/office/drawing/2014/main" xmlns:a14="http://schemas.microsoft.com/office/drawing/2010/main" xmlns:p14="http://schemas.microsoft.com/office/powerpoint/2010/main" w="9525">
+                <a14:hiddenLine xmlns:p14="http://schemas.microsoft.com/office/powerpoint/2010/main" xmlns:a14="http://schemas.microsoft.com/office/drawing/2010/main" xmlns:a16="http://schemas.microsoft.com/office/drawing/2014/main" xmlns="" w="9525">
                   <a:solidFill>
                     <a:srgbClr val="000000"/>
                   </a:solidFill>
@@ -36018,7 +36377,7 @@
             </a:ln>
             <a:extLst>
               <a:ext uri="{91240B29-F687-4f45-9708-019B960494DF}">
-                <a14:hiddenLine xmlns="" xmlns:a16="http://schemas.microsoft.com/office/drawing/2014/main" xmlns:a14="http://schemas.microsoft.com/office/drawing/2010/main" xmlns:p14="http://schemas.microsoft.com/office/powerpoint/2010/main" w="9525">
+                <a14:hiddenLine xmlns:p14="http://schemas.microsoft.com/office/powerpoint/2010/main" xmlns:a14="http://schemas.microsoft.com/office/drawing/2010/main" xmlns:a16="http://schemas.microsoft.com/office/drawing/2014/main" xmlns="" w="9525">
                   <a:solidFill>
                     <a:srgbClr val="000000"/>
                   </a:solidFill>
@@ -36130,7 +36489,7 @@
             </a:ln>
             <a:extLst>
               <a:ext uri="{91240B29-F687-4f45-9708-019B960494DF}">
-                <a14:hiddenLine xmlns="" xmlns:a16="http://schemas.microsoft.com/office/drawing/2014/main" xmlns:a14="http://schemas.microsoft.com/office/drawing/2010/main" xmlns:p14="http://schemas.microsoft.com/office/powerpoint/2010/main" w="9525">
+                <a14:hiddenLine xmlns:p14="http://schemas.microsoft.com/office/powerpoint/2010/main" xmlns:a14="http://schemas.microsoft.com/office/drawing/2010/main" xmlns:a16="http://schemas.microsoft.com/office/drawing/2014/main" xmlns="" w="9525">
                   <a:solidFill>
                     <a:srgbClr val="000000"/>
                   </a:solidFill>
@@ -36214,7 +36573,7 @@
             </a:ln>
             <a:extLst>
               <a:ext uri="{91240B29-F687-4f45-9708-019B960494DF}">
-                <a14:hiddenLine xmlns="" xmlns:a16="http://schemas.microsoft.com/office/drawing/2014/main" xmlns:a14="http://schemas.microsoft.com/office/drawing/2010/main" xmlns:p14="http://schemas.microsoft.com/office/powerpoint/2010/main" w="9525">
+                <a14:hiddenLine xmlns:p14="http://schemas.microsoft.com/office/powerpoint/2010/main" xmlns:a14="http://schemas.microsoft.com/office/drawing/2010/main" xmlns:a16="http://schemas.microsoft.com/office/drawing/2014/main" xmlns="" w="9525">
                   <a:solidFill>
                     <a:srgbClr val="000000"/>
                   </a:solidFill>
@@ -36326,7 +36685,7 @@
             </a:ln>
             <a:extLst>
               <a:ext uri="{91240B29-F687-4f45-9708-019B960494DF}">
-                <a14:hiddenLine xmlns="" xmlns:a16="http://schemas.microsoft.com/office/drawing/2014/main" xmlns:a14="http://schemas.microsoft.com/office/drawing/2010/main" xmlns:p14="http://schemas.microsoft.com/office/powerpoint/2010/main" w="9525">
+                <a14:hiddenLine xmlns:p14="http://schemas.microsoft.com/office/powerpoint/2010/main" xmlns:a14="http://schemas.microsoft.com/office/drawing/2010/main" xmlns:a16="http://schemas.microsoft.com/office/drawing/2014/main" xmlns="" w="9525">
                   <a:solidFill>
                     <a:srgbClr val="000000"/>
                   </a:solidFill>
@@ -36438,7 +36797,7 @@
             </a:ln>
             <a:extLst>
               <a:ext uri="{91240B29-F687-4f45-9708-019B960494DF}">
-                <a14:hiddenLine xmlns="" xmlns:a16="http://schemas.microsoft.com/office/drawing/2014/main" xmlns:a14="http://schemas.microsoft.com/office/drawing/2010/main" xmlns:p14="http://schemas.microsoft.com/office/powerpoint/2010/main" w="9525">
+                <a14:hiddenLine xmlns:p14="http://schemas.microsoft.com/office/powerpoint/2010/main" xmlns:a14="http://schemas.microsoft.com/office/drawing/2010/main" xmlns:a16="http://schemas.microsoft.com/office/drawing/2014/main" xmlns="" w="9525">
                   <a:solidFill>
                     <a:srgbClr val="000000"/>
                   </a:solidFill>
@@ -36525,7 +36884,7 @@
             </a:ln>
             <a:extLst>
               <a:ext uri="{91240B29-F687-4f45-9708-019B960494DF}">
-                <a14:hiddenLine xmlns="" xmlns:a16="http://schemas.microsoft.com/office/drawing/2014/main" xmlns:a14="http://schemas.microsoft.com/office/drawing/2010/main" xmlns:p14="http://schemas.microsoft.com/office/powerpoint/2010/main" w="9525">
+                <a14:hiddenLine xmlns:p14="http://schemas.microsoft.com/office/powerpoint/2010/main" xmlns:a14="http://schemas.microsoft.com/office/drawing/2010/main" xmlns:a16="http://schemas.microsoft.com/office/drawing/2014/main" xmlns="" w="9525">
                   <a:solidFill>
                     <a:srgbClr val="000000"/>
                   </a:solidFill>
@@ -36609,7 +36968,7 @@
             </a:ln>
             <a:extLst>
               <a:ext uri="{91240B29-F687-4f45-9708-019B960494DF}">
-                <a14:hiddenLine xmlns="" xmlns:a16="http://schemas.microsoft.com/office/drawing/2014/main" xmlns:a14="http://schemas.microsoft.com/office/drawing/2010/main" xmlns:p14="http://schemas.microsoft.com/office/powerpoint/2010/main" w="9525">
+                <a14:hiddenLine xmlns:p14="http://schemas.microsoft.com/office/powerpoint/2010/main" xmlns:a14="http://schemas.microsoft.com/office/drawing/2010/main" xmlns:a16="http://schemas.microsoft.com/office/drawing/2014/main" xmlns="" w="9525">
                   <a:solidFill>
                     <a:srgbClr val="000000"/>
                   </a:solidFill>
@@ -36721,7 +37080,7 @@
             </a:ln>
             <a:extLst>
               <a:ext uri="{91240B29-F687-4f45-9708-019B960494DF}">
-                <a14:hiddenLine xmlns="" xmlns:a16="http://schemas.microsoft.com/office/drawing/2014/main" xmlns:a14="http://schemas.microsoft.com/office/drawing/2010/main" xmlns:p14="http://schemas.microsoft.com/office/powerpoint/2010/main" w="9525">
+                <a14:hiddenLine xmlns:p14="http://schemas.microsoft.com/office/powerpoint/2010/main" xmlns:a14="http://schemas.microsoft.com/office/drawing/2010/main" xmlns:a16="http://schemas.microsoft.com/office/drawing/2014/main" xmlns="" w="9525">
                   <a:solidFill>
                     <a:srgbClr val="000000"/>
                   </a:solidFill>
@@ -36833,7 +37192,7 @@
             </a:ln>
             <a:extLst>
               <a:ext uri="{91240B29-F687-4f45-9708-019B960494DF}">
-                <a14:hiddenLine xmlns="" xmlns:a16="http://schemas.microsoft.com/office/drawing/2014/main" xmlns:a14="http://schemas.microsoft.com/office/drawing/2010/main" xmlns:p14="http://schemas.microsoft.com/office/powerpoint/2010/main" w="9525">
+                <a14:hiddenLine xmlns:p14="http://schemas.microsoft.com/office/powerpoint/2010/main" xmlns:a14="http://schemas.microsoft.com/office/drawing/2010/main" xmlns:a16="http://schemas.microsoft.com/office/drawing/2014/main" xmlns="" w="9525">
                   <a:solidFill>
                     <a:srgbClr val="000000"/>
                   </a:solidFill>
@@ -36917,7 +37276,7 @@
             </a:ln>
             <a:extLst>
               <a:ext uri="{91240B29-F687-4f45-9708-019B960494DF}">
-                <a14:hiddenLine xmlns="" xmlns:a16="http://schemas.microsoft.com/office/drawing/2014/main" xmlns:a14="http://schemas.microsoft.com/office/drawing/2010/main" xmlns:p14="http://schemas.microsoft.com/office/powerpoint/2010/main" w="9525">
+                <a14:hiddenLine xmlns:p14="http://schemas.microsoft.com/office/powerpoint/2010/main" xmlns:a14="http://schemas.microsoft.com/office/drawing/2010/main" xmlns:a16="http://schemas.microsoft.com/office/drawing/2014/main" xmlns="" w="9525">
                   <a:solidFill>
                     <a:srgbClr val="000000"/>
                   </a:solidFill>
@@ -37059,7 +37418,7 @@
             </a:ln>
             <a:extLst>
               <a:ext uri="{91240B29-F687-4f45-9708-019B960494DF}">
-                <a14:hiddenLine xmlns="" xmlns:a16="http://schemas.microsoft.com/office/drawing/2014/main" xmlns:a14="http://schemas.microsoft.com/office/drawing/2010/main" xmlns:p14="http://schemas.microsoft.com/office/powerpoint/2010/main" w="9525">
+                <a14:hiddenLine xmlns:p14="http://schemas.microsoft.com/office/powerpoint/2010/main" xmlns:a14="http://schemas.microsoft.com/office/drawing/2010/main" xmlns:a16="http://schemas.microsoft.com/office/drawing/2014/main" xmlns="" w="9525">
                   <a:solidFill>
                     <a:srgbClr val="000000"/>
                   </a:solidFill>
@@ -37149,7 +37508,7 @@
             </a:ln>
             <a:extLst>
               <a:ext uri="{91240B29-F687-4f45-9708-019B960494DF}">
-                <a14:hiddenLine xmlns="" xmlns:a16="http://schemas.microsoft.com/office/drawing/2014/main" xmlns:a14="http://schemas.microsoft.com/office/drawing/2010/main" xmlns:p14="http://schemas.microsoft.com/office/powerpoint/2010/main" w="9525">
+                <a14:hiddenLine xmlns:p14="http://schemas.microsoft.com/office/powerpoint/2010/main" xmlns:a14="http://schemas.microsoft.com/office/drawing/2010/main" xmlns:a16="http://schemas.microsoft.com/office/drawing/2014/main" xmlns="" w="9525">
                   <a:solidFill>
                     <a:srgbClr val="000000"/>
                   </a:solidFill>
@@ -37261,7 +37620,7 @@
             </a:ln>
             <a:extLst>
               <a:ext uri="{91240B29-F687-4f45-9708-019B960494DF}">
-                <a14:hiddenLine xmlns="" xmlns:a16="http://schemas.microsoft.com/office/drawing/2014/main" xmlns:a14="http://schemas.microsoft.com/office/drawing/2010/main" xmlns:p14="http://schemas.microsoft.com/office/powerpoint/2010/main" w="9525">
+                <a14:hiddenLine xmlns:p14="http://schemas.microsoft.com/office/powerpoint/2010/main" xmlns:a14="http://schemas.microsoft.com/office/drawing/2010/main" xmlns:a16="http://schemas.microsoft.com/office/drawing/2014/main" xmlns="" w="9525">
                   <a:solidFill>
                     <a:srgbClr val="000000"/>
                   </a:solidFill>
@@ -37844,13 +38203,13 @@
   <p:clrMapOvr>
     <a:masterClrMapping/>
   </p:clrMapOvr>
-  <mc:AlternateContent xmlns:mc="http://schemas.openxmlformats.org/markup-compatibility/2006">
-    <mc:Choice xmlns:p14="http://schemas.microsoft.com/office/powerpoint/2010/main" Requires="p14">
+  <mc:AlternateContent xmlns:mc="http://schemas.openxmlformats.org/markup-compatibility/2006" xmlns:p14="http://schemas.microsoft.com/office/powerpoint/2010/main">
+    <mc:Choice Requires="p14">
       <p:transition spd="slow" p14:dur="800">
         <p:circle/>
       </p:transition>
     </mc:Choice>
-    <mc:Fallback>
+    <mc:Fallback xmlns="">
       <p:transition spd="slow">
         <p:circle/>
       </p:transition>
@@ -38244,13 +38603,13 @@
   <p:clrMapOvr>
     <a:masterClrMapping/>
   </p:clrMapOvr>
-  <mc:AlternateContent xmlns:mc="http://schemas.openxmlformats.org/markup-compatibility/2006">
-    <mc:Choice xmlns:p15="http://schemas.microsoft.com/office/powerpoint/2012/main" Requires="p15">
+  <mc:AlternateContent xmlns:mc="http://schemas.openxmlformats.org/markup-compatibility/2006" xmlns:p15="http://schemas.microsoft.com/office/powerpoint/2012/main">
+    <mc:Choice Requires="p15">
       <p:transition xmlns:p14="http://schemas.microsoft.com/office/powerpoint/2010/main" spd="slow" p14:dur="2000">
         <p15:prstTrans prst="prestige"/>
       </p:transition>
     </mc:Choice>
-    <mc:Fallback>
+    <mc:Fallback xmlns="">
       <p:transition spd="slow">
         <p:fade/>
       </p:transition>
@@ -39138,13 +39497,13 @@
   <p:clrMapOvr>
     <a:masterClrMapping/>
   </p:clrMapOvr>
-  <mc:AlternateContent xmlns:mc="http://schemas.openxmlformats.org/markup-compatibility/2006">
-    <mc:Choice xmlns:p14="http://schemas.microsoft.com/office/powerpoint/2010/main" Requires="p14">
+  <mc:AlternateContent xmlns:mc="http://schemas.openxmlformats.org/markup-compatibility/2006" xmlns:p14="http://schemas.microsoft.com/office/powerpoint/2010/main">
+    <mc:Choice Requires="p14">
       <p:transition spd="slow" p14:dur="1600">
         <p14:gallery dir="l"/>
       </p:transition>
     </mc:Choice>
-    <mc:Fallback>
+    <mc:Fallback xmlns="">
       <p:transition spd="slow">
         <p:fade/>
       </p:transition>
@@ -39831,13 +40190,13 @@
   <p:clrMapOvr>
     <a:masterClrMapping/>
   </p:clrMapOvr>
-  <mc:AlternateContent xmlns:mc="http://schemas.openxmlformats.org/markup-compatibility/2006">
-    <mc:Choice xmlns:p14="http://schemas.microsoft.com/office/powerpoint/2010/main" Requires="p14">
+  <mc:AlternateContent xmlns:mc="http://schemas.openxmlformats.org/markup-compatibility/2006" xmlns:p14="http://schemas.microsoft.com/office/powerpoint/2010/main">
+    <mc:Choice Requires="p14">
       <p:transition spd="slow" p14:dur="1600">
         <p14:prism isInverted="1"/>
       </p:transition>
     </mc:Choice>
-    <mc:Fallback>
+    <mc:Fallback xmlns="">
       <p:transition spd="slow">
         <p:fade/>
       </p:transition>
@@ -40837,7 +41196,7 @@
           <a:noFill/>
           <a:extLst>
             <a:ext uri="{909E8E84-426E-40dd-AFC4-6F175D3DCCD1}">
-              <a14:hiddenFill xmlns="" xmlns:a16="http://schemas.microsoft.com/office/drawing/2014/main" xmlns:p14="http://schemas.microsoft.com/office/powerpoint/2010/main" xmlns:a14="http://schemas.microsoft.com/office/drawing/2010/main">
+              <a14:hiddenFill xmlns:a14="http://schemas.microsoft.com/office/drawing/2010/main" xmlns:p14="http://schemas.microsoft.com/office/powerpoint/2010/main" xmlns:a16="http://schemas.microsoft.com/office/drawing/2014/main" xmlns="">
                 <a:solidFill>
                   <a:srgbClr val="FFFFFF"/>
                 </a:solidFill>
@@ -41341,7 +41700,7 @@
               <a:rPr lang="hr-HR" altLang="en-US" sz="2000" dirty="0">
                 <a:latin typeface="Arial" panose="020B0604020202020204" pitchFamily="34" charset="0"/>
               </a:rPr>
-              <a:t> za lakše uklapanje</a:t>
+              <a:t>(uz umjetnu inteligenciju) za lakše uklapanje</a:t>
             </a:r>
             <a:endParaRPr kumimoji="0" lang="en-US" altLang="en-US" sz="2000" b="0" i="0" u="none" strike="noStrike" cap="none" normalizeH="0" baseline="0" dirty="0">
               <a:ln>
@@ -41502,7 +41861,7 @@
             </a:ln>
             <a:extLst>
               <a:ext uri="{91240B29-F687-4f45-9708-019B960494DF}">
-                <a14:hiddenLine xmlns="" xmlns:a16="http://schemas.microsoft.com/office/drawing/2014/main" xmlns:p14="http://schemas.microsoft.com/office/powerpoint/2010/main" xmlns:a14="http://schemas.microsoft.com/office/drawing/2010/main" w="9525">
+                <a14:hiddenLine xmlns:a14="http://schemas.microsoft.com/office/drawing/2010/main" xmlns:p14="http://schemas.microsoft.com/office/powerpoint/2010/main" xmlns:a16="http://schemas.microsoft.com/office/drawing/2014/main" xmlns="" w="9525">
                   <a:solidFill>
                     <a:srgbClr val="000000"/>
                   </a:solidFill>
@@ -41614,7 +41973,7 @@
             </a:ln>
             <a:extLst>
               <a:ext uri="{91240B29-F687-4f45-9708-019B960494DF}">
-                <a14:hiddenLine xmlns="" xmlns:a16="http://schemas.microsoft.com/office/drawing/2014/main" xmlns:p14="http://schemas.microsoft.com/office/powerpoint/2010/main" xmlns:a14="http://schemas.microsoft.com/office/drawing/2010/main" w="9525">
+                <a14:hiddenLine xmlns:a14="http://schemas.microsoft.com/office/drawing/2010/main" xmlns:p14="http://schemas.microsoft.com/office/powerpoint/2010/main" xmlns:a16="http://schemas.microsoft.com/office/drawing/2014/main" xmlns="" w="9525">
                   <a:solidFill>
                     <a:srgbClr val="000000"/>
                   </a:solidFill>
@@ -41726,7 +42085,7 @@
             </a:ln>
             <a:extLst>
               <a:ext uri="{91240B29-F687-4f45-9708-019B960494DF}">
-                <a14:hiddenLine xmlns="" xmlns:a16="http://schemas.microsoft.com/office/drawing/2014/main" xmlns:p14="http://schemas.microsoft.com/office/powerpoint/2010/main" xmlns:a14="http://schemas.microsoft.com/office/drawing/2010/main" w="9525">
+                <a14:hiddenLine xmlns:a14="http://schemas.microsoft.com/office/drawing/2010/main" xmlns:p14="http://schemas.microsoft.com/office/powerpoint/2010/main" xmlns:a16="http://schemas.microsoft.com/office/drawing/2014/main" xmlns="" w="9525">
                   <a:solidFill>
                     <a:srgbClr val="000000"/>
                   </a:solidFill>
@@ -41810,7 +42169,7 @@
             </a:ln>
             <a:extLst>
               <a:ext uri="{91240B29-F687-4f45-9708-019B960494DF}">
-                <a14:hiddenLine xmlns="" xmlns:a16="http://schemas.microsoft.com/office/drawing/2014/main" xmlns:p14="http://schemas.microsoft.com/office/powerpoint/2010/main" xmlns:a14="http://schemas.microsoft.com/office/drawing/2010/main" w="9525">
+                <a14:hiddenLine xmlns:a14="http://schemas.microsoft.com/office/drawing/2010/main" xmlns:p14="http://schemas.microsoft.com/office/powerpoint/2010/main" xmlns:a16="http://schemas.microsoft.com/office/drawing/2014/main" xmlns="" w="9525">
                   <a:solidFill>
                     <a:srgbClr val="000000"/>
                   </a:solidFill>
@@ -41922,7 +42281,7 @@
             </a:ln>
             <a:extLst>
               <a:ext uri="{91240B29-F687-4f45-9708-019B960494DF}">
-                <a14:hiddenLine xmlns="" xmlns:a16="http://schemas.microsoft.com/office/drawing/2014/main" xmlns:p14="http://schemas.microsoft.com/office/powerpoint/2010/main" xmlns:a14="http://schemas.microsoft.com/office/drawing/2010/main" w="9525">
+                <a14:hiddenLine xmlns:a14="http://schemas.microsoft.com/office/drawing/2010/main" xmlns:p14="http://schemas.microsoft.com/office/powerpoint/2010/main" xmlns:a16="http://schemas.microsoft.com/office/drawing/2014/main" xmlns="" w="9525">
                   <a:solidFill>
                     <a:srgbClr val="000000"/>
                   </a:solidFill>
@@ -42006,7 +42365,7 @@
             </a:ln>
             <a:extLst>
               <a:ext uri="{91240B29-F687-4f45-9708-019B960494DF}">
-                <a14:hiddenLine xmlns="" xmlns:a16="http://schemas.microsoft.com/office/drawing/2014/main" xmlns:p14="http://schemas.microsoft.com/office/powerpoint/2010/main" xmlns:a14="http://schemas.microsoft.com/office/drawing/2010/main" w="9525">
+                <a14:hiddenLine xmlns:a14="http://schemas.microsoft.com/office/drawing/2010/main" xmlns:p14="http://schemas.microsoft.com/office/powerpoint/2010/main" xmlns:a16="http://schemas.microsoft.com/office/drawing/2014/main" xmlns="" w="9525">
                   <a:solidFill>
                     <a:srgbClr val="000000"/>
                   </a:solidFill>
@@ -42090,7 +42449,7 @@
             </a:ln>
             <a:extLst>
               <a:ext uri="{91240B29-F687-4f45-9708-019B960494DF}">
-                <a14:hiddenLine xmlns="" xmlns:a16="http://schemas.microsoft.com/office/drawing/2014/main" xmlns:p14="http://schemas.microsoft.com/office/powerpoint/2010/main" xmlns:a14="http://schemas.microsoft.com/office/drawing/2010/main" w="9525">
+                <a14:hiddenLine xmlns:a14="http://schemas.microsoft.com/office/drawing/2010/main" xmlns:p14="http://schemas.microsoft.com/office/powerpoint/2010/main" xmlns:a16="http://schemas.microsoft.com/office/drawing/2014/main" xmlns="" w="9525">
                   <a:solidFill>
                     <a:srgbClr val="000000"/>
                   </a:solidFill>
@@ -42202,7 +42561,7 @@
             </a:ln>
             <a:extLst>
               <a:ext uri="{91240B29-F687-4f45-9708-019B960494DF}">
-                <a14:hiddenLine xmlns="" xmlns:a16="http://schemas.microsoft.com/office/drawing/2014/main" xmlns:p14="http://schemas.microsoft.com/office/powerpoint/2010/main" xmlns:a14="http://schemas.microsoft.com/office/drawing/2010/main" w="9525">
+                <a14:hiddenLine xmlns:a14="http://schemas.microsoft.com/office/drawing/2010/main" xmlns:p14="http://schemas.microsoft.com/office/powerpoint/2010/main" xmlns:a16="http://schemas.microsoft.com/office/drawing/2014/main" xmlns="" w="9525">
                   <a:solidFill>
                     <a:srgbClr val="000000"/>
                   </a:solidFill>
@@ -42314,7 +42673,7 @@
             </a:ln>
             <a:extLst>
               <a:ext uri="{91240B29-F687-4f45-9708-019B960494DF}">
-                <a14:hiddenLine xmlns="" xmlns:a16="http://schemas.microsoft.com/office/drawing/2014/main" xmlns:p14="http://schemas.microsoft.com/office/powerpoint/2010/main" xmlns:a14="http://schemas.microsoft.com/office/drawing/2010/main" w="9525">
+                <a14:hiddenLine xmlns:a14="http://schemas.microsoft.com/office/drawing/2010/main" xmlns:p14="http://schemas.microsoft.com/office/powerpoint/2010/main" xmlns:a16="http://schemas.microsoft.com/office/drawing/2014/main" xmlns="" w="9525">
                   <a:solidFill>
                     <a:srgbClr val="000000"/>
                   </a:solidFill>
@@ -42398,7 +42757,7 @@
             </a:ln>
             <a:extLst>
               <a:ext uri="{91240B29-F687-4f45-9708-019B960494DF}">
-                <a14:hiddenLine xmlns="" xmlns:a16="http://schemas.microsoft.com/office/drawing/2014/main" xmlns:p14="http://schemas.microsoft.com/office/powerpoint/2010/main" xmlns:a14="http://schemas.microsoft.com/office/drawing/2010/main" w="9525">
+                <a14:hiddenLine xmlns:a14="http://schemas.microsoft.com/office/drawing/2010/main" xmlns:p14="http://schemas.microsoft.com/office/powerpoint/2010/main" xmlns:a16="http://schemas.microsoft.com/office/drawing/2014/main" xmlns="" w="9525">
                   <a:solidFill>
                     <a:srgbClr val="000000"/>
                   </a:solidFill>
@@ -42530,7 +42889,7 @@
             </a:ln>
             <a:extLst>
               <a:ext uri="{91240B29-F687-4f45-9708-019B960494DF}">
-                <a14:hiddenLine xmlns="" xmlns:a16="http://schemas.microsoft.com/office/drawing/2014/main" xmlns:p14="http://schemas.microsoft.com/office/powerpoint/2010/main" xmlns:a14="http://schemas.microsoft.com/office/drawing/2010/main" w="9525">
+                <a14:hiddenLine xmlns:a14="http://schemas.microsoft.com/office/drawing/2010/main" xmlns:p14="http://schemas.microsoft.com/office/powerpoint/2010/main" xmlns:a16="http://schemas.microsoft.com/office/drawing/2014/main" xmlns="" w="9525">
                   <a:solidFill>
                     <a:srgbClr val="000000"/>
                   </a:solidFill>
@@ -42658,7 +43017,7 @@
             </a:ln>
             <a:extLst>
               <a:ext uri="{91240B29-F687-4f45-9708-019B960494DF}">
-                <a14:hiddenLine xmlns="" xmlns:a16="http://schemas.microsoft.com/office/drawing/2014/main" xmlns:p14="http://schemas.microsoft.com/office/powerpoint/2010/main" xmlns:a14="http://schemas.microsoft.com/office/drawing/2010/main" w="9525">
+                <a14:hiddenLine xmlns:a14="http://schemas.microsoft.com/office/drawing/2010/main" xmlns:p14="http://schemas.microsoft.com/office/powerpoint/2010/main" xmlns:a16="http://schemas.microsoft.com/office/drawing/2014/main" xmlns="" w="9525">
                   <a:solidFill>
                     <a:srgbClr val="000000"/>
                   </a:solidFill>
@@ -42742,7 +43101,7 @@
             </a:ln>
             <a:extLst>
               <a:ext uri="{91240B29-F687-4f45-9708-019B960494DF}">
-                <a14:hiddenLine xmlns="" xmlns:a16="http://schemas.microsoft.com/office/drawing/2014/main" xmlns:p14="http://schemas.microsoft.com/office/powerpoint/2010/main" xmlns:a14="http://schemas.microsoft.com/office/drawing/2010/main" w="9525">
+                <a14:hiddenLine xmlns:a14="http://schemas.microsoft.com/office/drawing/2010/main" xmlns:p14="http://schemas.microsoft.com/office/powerpoint/2010/main" xmlns:a16="http://schemas.microsoft.com/office/drawing/2014/main" xmlns="" w="9525">
                   <a:solidFill>
                     <a:srgbClr val="000000"/>
                   </a:solidFill>
@@ -42826,7 +43185,7 @@
             </a:ln>
             <a:extLst>
               <a:ext uri="{91240B29-F687-4f45-9708-019B960494DF}">
-                <a14:hiddenLine xmlns="" xmlns:a16="http://schemas.microsoft.com/office/drawing/2014/main" xmlns:p14="http://schemas.microsoft.com/office/powerpoint/2010/main" xmlns:a14="http://schemas.microsoft.com/office/drawing/2010/main" w="9525">
+                <a14:hiddenLine xmlns:a14="http://schemas.microsoft.com/office/drawing/2010/main" xmlns:p14="http://schemas.microsoft.com/office/powerpoint/2010/main" xmlns:a16="http://schemas.microsoft.com/office/drawing/2014/main" xmlns="" w="9525">
                   <a:solidFill>
                     <a:srgbClr val="000000"/>
                   </a:solidFill>
@@ -42938,7 +43297,7 @@
             </a:ln>
             <a:extLst>
               <a:ext uri="{91240B29-F687-4f45-9708-019B960494DF}">
-                <a14:hiddenLine xmlns="" xmlns:a16="http://schemas.microsoft.com/office/drawing/2014/main" xmlns:p14="http://schemas.microsoft.com/office/powerpoint/2010/main" xmlns:a14="http://schemas.microsoft.com/office/drawing/2010/main" w="9525">
+                <a14:hiddenLine xmlns:a14="http://schemas.microsoft.com/office/drawing/2010/main" xmlns:p14="http://schemas.microsoft.com/office/powerpoint/2010/main" xmlns:a16="http://schemas.microsoft.com/office/drawing/2014/main" xmlns="" w="9525">
                   <a:solidFill>
                     <a:srgbClr val="000000"/>
                   </a:solidFill>
@@ -42994,7 +43353,7 @@
             </a:ln>
             <a:extLst>
               <a:ext uri="{91240B29-F687-4f45-9708-019B960494DF}">
-                <a14:hiddenLine xmlns="" xmlns:a16="http://schemas.microsoft.com/office/drawing/2014/main" xmlns:p14="http://schemas.microsoft.com/office/powerpoint/2010/main" xmlns:a14="http://schemas.microsoft.com/office/drawing/2010/main" w="9525">
+                <a14:hiddenLine xmlns:a14="http://schemas.microsoft.com/office/drawing/2010/main" xmlns:p14="http://schemas.microsoft.com/office/powerpoint/2010/main" xmlns:a16="http://schemas.microsoft.com/office/drawing/2014/main" xmlns="" w="9525">
                   <a:solidFill>
                     <a:srgbClr val="000000"/>
                   </a:solidFill>
@@ -43081,7 +43440,7 @@
             </a:ln>
             <a:extLst>
               <a:ext uri="{91240B29-F687-4f45-9708-019B960494DF}">
-                <a14:hiddenLine xmlns="" xmlns:a16="http://schemas.microsoft.com/office/drawing/2014/main" xmlns:p14="http://schemas.microsoft.com/office/powerpoint/2010/main" xmlns:a14="http://schemas.microsoft.com/office/drawing/2010/main" w="9525">
+                <a14:hiddenLine xmlns:a14="http://schemas.microsoft.com/office/drawing/2010/main" xmlns:p14="http://schemas.microsoft.com/office/powerpoint/2010/main" xmlns:a16="http://schemas.microsoft.com/office/drawing/2014/main" xmlns="" w="9525">
                   <a:solidFill>
                     <a:srgbClr val="000000"/>
                   </a:solidFill>
@@ -43193,7 +43552,7 @@
             </a:ln>
             <a:extLst>
               <a:ext uri="{91240B29-F687-4f45-9708-019B960494DF}">
-                <a14:hiddenLine xmlns="" xmlns:a16="http://schemas.microsoft.com/office/drawing/2014/main" xmlns:p14="http://schemas.microsoft.com/office/powerpoint/2010/main" xmlns:a14="http://schemas.microsoft.com/office/drawing/2010/main" w="9525">
+                <a14:hiddenLine xmlns:a14="http://schemas.microsoft.com/office/drawing/2010/main" xmlns:p14="http://schemas.microsoft.com/office/powerpoint/2010/main" xmlns:a16="http://schemas.microsoft.com/office/drawing/2014/main" xmlns="" w="9525">
                   <a:solidFill>
                     <a:srgbClr val="000000"/>
                   </a:solidFill>
@@ -43277,7 +43636,7 @@
             </a:ln>
             <a:extLst>
               <a:ext uri="{91240B29-F687-4f45-9708-019B960494DF}">
-                <a14:hiddenLine xmlns="" xmlns:a16="http://schemas.microsoft.com/office/drawing/2014/main" xmlns:p14="http://schemas.microsoft.com/office/powerpoint/2010/main" xmlns:a14="http://schemas.microsoft.com/office/drawing/2010/main" w="9525">
+                <a14:hiddenLine xmlns:a14="http://schemas.microsoft.com/office/drawing/2010/main" xmlns:p14="http://schemas.microsoft.com/office/powerpoint/2010/main" xmlns:a16="http://schemas.microsoft.com/office/drawing/2014/main" xmlns="" w="9525">
                   <a:solidFill>
                     <a:srgbClr val="000000"/>
                   </a:solidFill>
@@ -43389,7 +43748,7 @@
             </a:ln>
             <a:extLst>
               <a:ext uri="{91240B29-F687-4f45-9708-019B960494DF}">
-                <a14:hiddenLine xmlns="" xmlns:a16="http://schemas.microsoft.com/office/drawing/2014/main" xmlns:p14="http://schemas.microsoft.com/office/powerpoint/2010/main" xmlns:a14="http://schemas.microsoft.com/office/drawing/2010/main" w="9525">
+                <a14:hiddenLine xmlns:a14="http://schemas.microsoft.com/office/drawing/2010/main" xmlns:p14="http://schemas.microsoft.com/office/powerpoint/2010/main" xmlns:a16="http://schemas.microsoft.com/office/drawing/2014/main" xmlns="" w="9525">
                   <a:solidFill>
                     <a:srgbClr val="000000"/>
                   </a:solidFill>
@@ -43476,7 +43835,7 @@
             </a:ln>
             <a:extLst>
               <a:ext uri="{91240B29-F687-4f45-9708-019B960494DF}">
-                <a14:hiddenLine xmlns="" xmlns:a16="http://schemas.microsoft.com/office/drawing/2014/main" xmlns:p14="http://schemas.microsoft.com/office/powerpoint/2010/main" xmlns:a14="http://schemas.microsoft.com/office/drawing/2010/main" w="9525">
+                <a14:hiddenLine xmlns:a14="http://schemas.microsoft.com/office/drawing/2010/main" xmlns:p14="http://schemas.microsoft.com/office/powerpoint/2010/main" xmlns:a16="http://schemas.microsoft.com/office/drawing/2014/main" xmlns="" w="9525">
                   <a:solidFill>
                     <a:srgbClr val="000000"/>
                   </a:solidFill>
@@ -43560,7 +43919,7 @@
             </a:ln>
             <a:extLst>
               <a:ext uri="{91240B29-F687-4f45-9708-019B960494DF}">
-                <a14:hiddenLine xmlns="" xmlns:a16="http://schemas.microsoft.com/office/drawing/2014/main" xmlns:p14="http://schemas.microsoft.com/office/powerpoint/2010/main" xmlns:a14="http://schemas.microsoft.com/office/drawing/2010/main" w="9525">
+                <a14:hiddenLine xmlns:a14="http://schemas.microsoft.com/office/drawing/2010/main" xmlns:p14="http://schemas.microsoft.com/office/powerpoint/2010/main" xmlns:a16="http://schemas.microsoft.com/office/drawing/2014/main" xmlns="" w="9525">
                   <a:solidFill>
                     <a:srgbClr val="000000"/>
                   </a:solidFill>
@@ -43672,7 +44031,7 @@
             </a:ln>
             <a:extLst>
               <a:ext uri="{91240B29-F687-4f45-9708-019B960494DF}">
-                <a14:hiddenLine xmlns="" xmlns:a16="http://schemas.microsoft.com/office/drawing/2014/main" xmlns:p14="http://schemas.microsoft.com/office/powerpoint/2010/main" xmlns:a14="http://schemas.microsoft.com/office/drawing/2010/main" w="9525">
+                <a14:hiddenLine xmlns:a14="http://schemas.microsoft.com/office/drawing/2010/main" xmlns:p14="http://schemas.microsoft.com/office/powerpoint/2010/main" xmlns:a16="http://schemas.microsoft.com/office/drawing/2014/main" xmlns="" w="9525">
                   <a:solidFill>
                     <a:srgbClr val="000000"/>
                   </a:solidFill>
@@ -43784,7 +44143,7 @@
             </a:ln>
             <a:extLst>
               <a:ext uri="{91240B29-F687-4f45-9708-019B960494DF}">
-                <a14:hiddenLine xmlns="" xmlns:a16="http://schemas.microsoft.com/office/drawing/2014/main" xmlns:p14="http://schemas.microsoft.com/office/powerpoint/2010/main" xmlns:a14="http://schemas.microsoft.com/office/drawing/2010/main" w="9525">
+                <a14:hiddenLine xmlns:a14="http://schemas.microsoft.com/office/drawing/2010/main" xmlns:p14="http://schemas.microsoft.com/office/powerpoint/2010/main" xmlns:a16="http://schemas.microsoft.com/office/drawing/2014/main" xmlns="" w="9525">
                   <a:solidFill>
                     <a:srgbClr val="000000"/>
                   </a:solidFill>
@@ -43871,7 +44230,7 @@
             </a:ln>
             <a:extLst>
               <a:ext uri="{91240B29-F687-4f45-9708-019B960494DF}">
-                <a14:hiddenLine xmlns="" xmlns:a16="http://schemas.microsoft.com/office/drawing/2014/main" xmlns:p14="http://schemas.microsoft.com/office/powerpoint/2010/main" xmlns:a14="http://schemas.microsoft.com/office/drawing/2010/main" w="9525">
+                <a14:hiddenLine xmlns:a14="http://schemas.microsoft.com/office/drawing/2010/main" xmlns:p14="http://schemas.microsoft.com/office/powerpoint/2010/main" xmlns:a16="http://schemas.microsoft.com/office/drawing/2014/main" xmlns="" w="9525">
                   <a:solidFill>
                     <a:srgbClr val="000000"/>
                   </a:solidFill>
@@ -44013,7 +44372,7 @@
             </a:ln>
             <a:extLst>
               <a:ext uri="{91240B29-F687-4f45-9708-019B960494DF}">
-                <a14:hiddenLine xmlns="" xmlns:a16="http://schemas.microsoft.com/office/drawing/2014/main" xmlns:p14="http://schemas.microsoft.com/office/powerpoint/2010/main" xmlns:a14="http://schemas.microsoft.com/office/drawing/2010/main" w="9525">
+                <a14:hiddenLine xmlns:a14="http://schemas.microsoft.com/office/drawing/2010/main" xmlns:p14="http://schemas.microsoft.com/office/powerpoint/2010/main" xmlns:a16="http://schemas.microsoft.com/office/drawing/2014/main" xmlns="" w="9525">
                   <a:solidFill>
                     <a:srgbClr val="000000"/>
                   </a:solidFill>
@@ -44043,13 +44402,13 @@
   <p:clrMapOvr>
     <a:masterClrMapping/>
   </p:clrMapOvr>
-  <mc:AlternateContent xmlns:mc="http://schemas.openxmlformats.org/markup-compatibility/2006">
-    <mc:Choice xmlns:p14="http://schemas.microsoft.com/office/powerpoint/2010/main" Requires="p14">
+  <mc:AlternateContent xmlns:mc="http://schemas.openxmlformats.org/markup-compatibility/2006" xmlns:p14="http://schemas.microsoft.com/office/powerpoint/2010/main">
+    <mc:Choice Requires="p14">
       <p:transition spd="slow" p14:dur="1500">
         <p:split orient="vert"/>
       </p:transition>
     </mc:Choice>
-    <mc:Fallback>
+    <mc:Fallback xmlns="">
       <p:transition spd="slow">
         <p:split orient="vert"/>
       </p:transition>
@@ -44581,7 +44940,7 @@
             <a:noFill/>
             <a:extLst>
               <a:ext uri="{909E8E84-426E-40dd-AFC4-6F175D3DCCD1}">
-                <a14:hiddenFill xmlns="" xmlns:a16="http://schemas.microsoft.com/office/drawing/2014/main" xmlns:a14="http://schemas.microsoft.com/office/drawing/2010/main" xmlns:p14="http://schemas.microsoft.com/office/powerpoint/2010/main">
+                <a14:hiddenFill xmlns:p14="http://schemas.microsoft.com/office/powerpoint/2010/main" xmlns:a14="http://schemas.microsoft.com/office/drawing/2010/main" xmlns:a16="http://schemas.microsoft.com/office/drawing/2014/main" xmlns="">
                   <a:solidFill>
                     <a:srgbClr val="FFFFFF"/>
                   </a:solidFill>
@@ -44701,7 +45060,7 @@
             </a:ln>
             <a:extLst>
               <a:ext uri="{91240B29-F687-4f45-9708-019B960494DF}">
-                <a14:hiddenLine xmlns="" xmlns:a16="http://schemas.microsoft.com/office/drawing/2014/main" xmlns:a14="http://schemas.microsoft.com/office/drawing/2010/main" xmlns:p14="http://schemas.microsoft.com/office/powerpoint/2010/main" w="9525">
+                <a14:hiddenLine xmlns:p14="http://schemas.microsoft.com/office/powerpoint/2010/main" xmlns:a14="http://schemas.microsoft.com/office/drawing/2010/main" xmlns:a16="http://schemas.microsoft.com/office/drawing/2014/main" xmlns="" w="9525">
                   <a:solidFill>
                     <a:srgbClr val="000000"/>
                   </a:solidFill>
@@ -44813,7 +45172,7 @@
             </a:ln>
             <a:extLst>
               <a:ext uri="{91240B29-F687-4f45-9708-019B960494DF}">
-                <a14:hiddenLine xmlns="" xmlns:a16="http://schemas.microsoft.com/office/drawing/2014/main" xmlns:a14="http://schemas.microsoft.com/office/drawing/2010/main" xmlns:p14="http://schemas.microsoft.com/office/powerpoint/2010/main" w="9525">
+                <a14:hiddenLine xmlns:p14="http://schemas.microsoft.com/office/powerpoint/2010/main" xmlns:a14="http://schemas.microsoft.com/office/drawing/2010/main" xmlns:a16="http://schemas.microsoft.com/office/drawing/2014/main" xmlns="" w="9525">
                   <a:solidFill>
                     <a:srgbClr val="000000"/>
                   </a:solidFill>
@@ -44925,7 +45284,7 @@
             </a:ln>
             <a:extLst>
               <a:ext uri="{91240B29-F687-4f45-9708-019B960494DF}">
-                <a14:hiddenLine xmlns="" xmlns:a16="http://schemas.microsoft.com/office/drawing/2014/main" xmlns:a14="http://schemas.microsoft.com/office/drawing/2010/main" xmlns:p14="http://schemas.microsoft.com/office/powerpoint/2010/main" w="9525">
+                <a14:hiddenLine xmlns:p14="http://schemas.microsoft.com/office/powerpoint/2010/main" xmlns:a14="http://schemas.microsoft.com/office/drawing/2010/main" xmlns:a16="http://schemas.microsoft.com/office/drawing/2014/main" xmlns="" w="9525">
                   <a:solidFill>
                     <a:srgbClr val="000000"/>
                   </a:solidFill>
@@ -44981,7 +45340,7 @@
             </a:ln>
             <a:extLst>
               <a:ext uri="{91240B29-F687-4f45-9708-019B960494DF}">
-                <a14:hiddenLine xmlns="" xmlns:a16="http://schemas.microsoft.com/office/drawing/2014/main" xmlns:a14="http://schemas.microsoft.com/office/drawing/2010/main" xmlns:p14="http://schemas.microsoft.com/office/powerpoint/2010/main" w="9525">
+                <a14:hiddenLine xmlns:p14="http://schemas.microsoft.com/office/powerpoint/2010/main" xmlns:a14="http://schemas.microsoft.com/office/drawing/2010/main" xmlns:a16="http://schemas.microsoft.com/office/drawing/2014/main" xmlns="" w="9525">
                   <a:solidFill>
                     <a:srgbClr val="000000"/>
                   </a:solidFill>
@@ -45093,7 +45452,7 @@
             </a:ln>
             <a:extLst>
               <a:ext uri="{91240B29-F687-4f45-9708-019B960494DF}">
-                <a14:hiddenLine xmlns="" xmlns:a16="http://schemas.microsoft.com/office/drawing/2014/main" xmlns:a14="http://schemas.microsoft.com/office/drawing/2010/main" xmlns:p14="http://schemas.microsoft.com/office/powerpoint/2010/main" w="9525">
+                <a14:hiddenLine xmlns:p14="http://schemas.microsoft.com/office/powerpoint/2010/main" xmlns:a14="http://schemas.microsoft.com/office/drawing/2010/main" xmlns:a16="http://schemas.microsoft.com/office/drawing/2014/main" xmlns="" w="9525">
                   <a:solidFill>
                     <a:srgbClr val="000000"/>
                   </a:solidFill>
@@ -45177,7 +45536,7 @@
             </a:ln>
             <a:extLst>
               <a:ext uri="{91240B29-F687-4f45-9708-019B960494DF}">
-                <a14:hiddenLine xmlns="" xmlns:a16="http://schemas.microsoft.com/office/drawing/2014/main" xmlns:a14="http://schemas.microsoft.com/office/drawing/2010/main" xmlns:p14="http://schemas.microsoft.com/office/powerpoint/2010/main" w="9525">
+                <a14:hiddenLine xmlns:p14="http://schemas.microsoft.com/office/powerpoint/2010/main" xmlns:a14="http://schemas.microsoft.com/office/drawing/2010/main" xmlns:a16="http://schemas.microsoft.com/office/drawing/2014/main" xmlns="" w="9525">
                   <a:solidFill>
                     <a:srgbClr val="000000"/>
                   </a:solidFill>
@@ -45261,7 +45620,7 @@
             </a:ln>
             <a:extLst>
               <a:ext uri="{91240B29-F687-4f45-9708-019B960494DF}">
-                <a14:hiddenLine xmlns="" xmlns:a16="http://schemas.microsoft.com/office/drawing/2014/main" xmlns:a14="http://schemas.microsoft.com/office/drawing/2010/main" xmlns:p14="http://schemas.microsoft.com/office/powerpoint/2010/main" w="9525">
+                <a14:hiddenLine xmlns:p14="http://schemas.microsoft.com/office/powerpoint/2010/main" xmlns:a14="http://schemas.microsoft.com/office/drawing/2010/main" xmlns:a16="http://schemas.microsoft.com/office/drawing/2014/main" xmlns="" w="9525">
                   <a:solidFill>
                     <a:srgbClr val="000000"/>
                   </a:solidFill>
@@ -45373,7 +45732,7 @@
             </a:ln>
             <a:extLst>
               <a:ext uri="{91240B29-F687-4f45-9708-019B960494DF}">
-                <a14:hiddenLine xmlns="" xmlns:a16="http://schemas.microsoft.com/office/drawing/2014/main" xmlns:a14="http://schemas.microsoft.com/office/drawing/2010/main" xmlns:p14="http://schemas.microsoft.com/office/powerpoint/2010/main" w="9525">
+                <a14:hiddenLine xmlns:p14="http://schemas.microsoft.com/office/powerpoint/2010/main" xmlns:a14="http://schemas.microsoft.com/office/drawing/2010/main" xmlns:a16="http://schemas.microsoft.com/office/drawing/2014/main" xmlns="" w="9525">
                   <a:solidFill>
                     <a:srgbClr val="000000"/>
                   </a:solidFill>
@@ -45457,7 +45816,7 @@
             </a:ln>
             <a:extLst>
               <a:ext uri="{91240B29-F687-4f45-9708-019B960494DF}">
-                <a14:hiddenLine xmlns="" xmlns:a16="http://schemas.microsoft.com/office/drawing/2014/main" xmlns:a14="http://schemas.microsoft.com/office/drawing/2010/main" xmlns:p14="http://schemas.microsoft.com/office/powerpoint/2010/main" w="9525">
+                <a14:hiddenLine xmlns:p14="http://schemas.microsoft.com/office/powerpoint/2010/main" xmlns:a14="http://schemas.microsoft.com/office/drawing/2010/main" xmlns:a16="http://schemas.microsoft.com/office/drawing/2014/main" xmlns="" w="9525">
                   <a:solidFill>
                     <a:srgbClr val="000000"/>
                   </a:solidFill>
@@ -45541,7 +45900,7 @@
             </a:ln>
             <a:extLst>
               <a:ext uri="{91240B29-F687-4f45-9708-019B960494DF}">
-                <a14:hiddenLine xmlns="" xmlns:a16="http://schemas.microsoft.com/office/drawing/2014/main" xmlns:a14="http://schemas.microsoft.com/office/drawing/2010/main" xmlns:p14="http://schemas.microsoft.com/office/powerpoint/2010/main" w="9525">
+                <a14:hiddenLine xmlns:p14="http://schemas.microsoft.com/office/powerpoint/2010/main" xmlns:a14="http://schemas.microsoft.com/office/drawing/2010/main" xmlns:a16="http://schemas.microsoft.com/office/drawing/2014/main" xmlns="" w="9525">
                   <a:solidFill>
                     <a:srgbClr val="000000"/>
                   </a:solidFill>
@@ -45653,7 +46012,7 @@
             </a:ln>
             <a:extLst>
               <a:ext uri="{91240B29-F687-4f45-9708-019B960494DF}">
-                <a14:hiddenLine xmlns="" xmlns:a16="http://schemas.microsoft.com/office/drawing/2014/main" xmlns:a14="http://schemas.microsoft.com/office/drawing/2010/main" xmlns:p14="http://schemas.microsoft.com/office/powerpoint/2010/main" w="9525">
+                <a14:hiddenLine xmlns:p14="http://schemas.microsoft.com/office/powerpoint/2010/main" xmlns:a14="http://schemas.microsoft.com/office/drawing/2010/main" xmlns:a16="http://schemas.microsoft.com/office/drawing/2014/main" xmlns="" w="9525">
                   <a:solidFill>
                     <a:srgbClr val="000000"/>
                   </a:solidFill>
@@ -45765,7 +46124,7 @@
             </a:ln>
             <a:extLst>
               <a:ext uri="{91240B29-F687-4f45-9708-019B960494DF}">
-                <a14:hiddenLine xmlns="" xmlns:a16="http://schemas.microsoft.com/office/drawing/2014/main" xmlns:a14="http://schemas.microsoft.com/office/drawing/2010/main" xmlns:p14="http://schemas.microsoft.com/office/powerpoint/2010/main" w="9525">
+                <a14:hiddenLine xmlns:p14="http://schemas.microsoft.com/office/powerpoint/2010/main" xmlns:a14="http://schemas.microsoft.com/office/drawing/2010/main" xmlns:a16="http://schemas.microsoft.com/office/drawing/2014/main" xmlns="" w="9525">
                   <a:solidFill>
                     <a:srgbClr val="000000"/>
                   </a:solidFill>
@@ -45849,7 +46208,7 @@
             </a:ln>
             <a:extLst>
               <a:ext uri="{91240B29-F687-4f45-9708-019B960494DF}">
-                <a14:hiddenLine xmlns="" xmlns:a16="http://schemas.microsoft.com/office/drawing/2014/main" xmlns:a14="http://schemas.microsoft.com/office/drawing/2010/main" xmlns:p14="http://schemas.microsoft.com/office/powerpoint/2010/main" w="9525">
+                <a14:hiddenLine xmlns:p14="http://schemas.microsoft.com/office/powerpoint/2010/main" xmlns:a14="http://schemas.microsoft.com/office/drawing/2010/main" xmlns:a16="http://schemas.microsoft.com/office/drawing/2014/main" xmlns="" w="9525">
                   <a:solidFill>
                     <a:srgbClr val="000000"/>
                   </a:solidFill>
@@ -45981,7 +46340,7 @@
             </a:ln>
             <a:extLst>
               <a:ext uri="{91240B29-F687-4f45-9708-019B960494DF}">
-                <a14:hiddenLine xmlns="" xmlns:a16="http://schemas.microsoft.com/office/drawing/2014/main" xmlns:a14="http://schemas.microsoft.com/office/drawing/2010/main" xmlns:p14="http://schemas.microsoft.com/office/powerpoint/2010/main" w="9525">
+                <a14:hiddenLine xmlns:p14="http://schemas.microsoft.com/office/powerpoint/2010/main" xmlns:a14="http://schemas.microsoft.com/office/drawing/2010/main" xmlns:a16="http://schemas.microsoft.com/office/drawing/2014/main" xmlns="" w="9525">
                   <a:solidFill>
                     <a:srgbClr val="000000"/>
                   </a:solidFill>
@@ -46065,7 +46424,7 @@
             </a:ln>
             <a:extLst>
               <a:ext uri="{91240B29-F687-4f45-9708-019B960494DF}">
-                <a14:hiddenLine xmlns="" xmlns:a16="http://schemas.microsoft.com/office/drawing/2014/main" xmlns:a14="http://schemas.microsoft.com/office/drawing/2010/main" xmlns:p14="http://schemas.microsoft.com/office/powerpoint/2010/main" w="9525">
+                <a14:hiddenLine xmlns:p14="http://schemas.microsoft.com/office/powerpoint/2010/main" xmlns:a14="http://schemas.microsoft.com/office/drawing/2010/main" xmlns:a16="http://schemas.microsoft.com/office/drawing/2014/main" xmlns="" w="9525">
                   <a:solidFill>
                     <a:srgbClr val="000000"/>
                   </a:solidFill>
@@ -46177,7 +46536,7 @@
             </a:ln>
             <a:extLst>
               <a:ext uri="{91240B29-F687-4f45-9708-019B960494DF}">
-                <a14:hiddenLine xmlns="" xmlns:a16="http://schemas.microsoft.com/office/drawing/2014/main" xmlns:a14="http://schemas.microsoft.com/office/drawing/2010/main" xmlns:p14="http://schemas.microsoft.com/office/powerpoint/2010/main" w="9525">
+                <a14:hiddenLine xmlns:p14="http://schemas.microsoft.com/office/powerpoint/2010/main" xmlns:a14="http://schemas.microsoft.com/office/drawing/2010/main" xmlns:a16="http://schemas.microsoft.com/office/drawing/2014/main" xmlns="" w="9525">
                   <a:solidFill>
                     <a:srgbClr val="000000"/>
                   </a:solidFill>
@@ -46289,7 +46648,7 @@
             </a:ln>
             <a:extLst>
               <a:ext uri="{91240B29-F687-4f45-9708-019B960494DF}">
-                <a14:hiddenLine xmlns="" xmlns:a16="http://schemas.microsoft.com/office/drawing/2014/main" xmlns:a14="http://schemas.microsoft.com/office/drawing/2010/main" xmlns:p14="http://schemas.microsoft.com/office/powerpoint/2010/main" w="9525">
+                <a14:hiddenLine xmlns:p14="http://schemas.microsoft.com/office/powerpoint/2010/main" xmlns:a14="http://schemas.microsoft.com/office/drawing/2010/main" xmlns:a16="http://schemas.microsoft.com/office/drawing/2014/main" xmlns="" w="9525">
                   <a:solidFill>
                     <a:srgbClr val="000000"/>
                   </a:solidFill>
@@ -46373,7 +46732,7 @@
             </a:ln>
             <a:extLst>
               <a:ext uri="{91240B29-F687-4f45-9708-019B960494DF}">
-                <a14:hiddenLine xmlns="" xmlns:a16="http://schemas.microsoft.com/office/drawing/2014/main" xmlns:a14="http://schemas.microsoft.com/office/drawing/2010/main" xmlns:p14="http://schemas.microsoft.com/office/powerpoint/2010/main" w="9525">
+                <a14:hiddenLine xmlns:p14="http://schemas.microsoft.com/office/powerpoint/2010/main" xmlns:a14="http://schemas.microsoft.com/office/drawing/2010/main" xmlns:a16="http://schemas.microsoft.com/office/drawing/2014/main" xmlns="" w="9525">
                   <a:solidFill>
                     <a:srgbClr val="000000"/>
                   </a:solidFill>
@@ -46485,7 +46844,7 @@
             </a:ln>
             <a:extLst>
               <a:ext uri="{91240B29-F687-4f45-9708-019B960494DF}">
-                <a14:hiddenLine xmlns="" xmlns:a16="http://schemas.microsoft.com/office/drawing/2014/main" xmlns:a14="http://schemas.microsoft.com/office/drawing/2010/main" xmlns:p14="http://schemas.microsoft.com/office/powerpoint/2010/main" w="9525">
+                <a14:hiddenLine xmlns:p14="http://schemas.microsoft.com/office/powerpoint/2010/main" xmlns:a14="http://schemas.microsoft.com/office/drawing/2010/main" xmlns:a16="http://schemas.microsoft.com/office/drawing/2014/main" xmlns="" w="9525">
                   <a:solidFill>
                     <a:srgbClr val="000000"/>
                   </a:solidFill>
@@ -46597,7 +46956,7 @@
             </a:ln>
             <a:extLst>
               <a:ext uri="{91240B29-F687-4f45-9708-019B960494DF}">
-                <a14:hiddenLine xmlns="" xmlns:a16="http://schemas.microsoft.com/office/drawing/2014/main" xmlns:a14="http://schemas.microsoft.com/office/drawing/2010/main" xmlns:p14="http://schemas.microsoft.com/office/powerpoint/2010/main" w="9525">
+                <a14:hiddenLine xmlns:p14="http://schemas.microsoft.com/office/powerpoint/2010/main" xmlns:a14="http://schemas.microsoft.com/office/drawing/2010/main" xmlns:a16="http://schemas.microsoft.com/office/drawing/2014/main" xmlns="" w="9525">
                   <a:solidFill>
                     <a:srgbClr val="000000"/>
                   </a:solidFill>
@@ -46675,7 +47034,7 @@
             </a:ln>
             <a:extLst>
               <a:ext uri="{91240B29-F687-4f45-9708-019B960494DF}">
-                <a14:hiddenLine xmlns="" xmlns:a16="http://schemas.microsoft.com/office/drawing/2014/main" xmlns:a14="http://schemas.microsoft.com/office/drawing/2010/main" xmlns:p14="http://schemas.microsoft.com/office/powerpoint/2010/main" w="9525">
+                <a14:hiddenLine xmlns:p14="http://schemas.microsoft.com/office/powerpoint/2010/main" xmlns:a14="http://schemas.microsoft.com/office/drawing/2010/main" xmlns:a16="http://schemas.microsoft.com/office/drawing/2014/main" xmlns="" w="9525">
                   <a:solidFill>
                     <a:srgbClr val="000000"/>
                   </a:solidFill>
@@ -46787,7 +47146,7 @@
             </a:ln>
             <a:extLst>
               <a:ext uri="{91240B29-F687-4f45-9708-019B960494DF}">
-                <a14:hiddenLine xmlns="" xmlns:a16="http://schemas.microsoft.com/office/drawing/2014/main" xmlns:a14="http://schemas.microsoft.com/office/drawing/2010/main" xmlns:p14="http://schemas.microsoft.com/office/powerpoint/2010/main" w="9525">
+                <a14:hiddenLine xmlns:p14="http://schemas.microsoft.com/office/powerpoint/2010/main" xmlns:a14="http://schemas.microsoft.com/office/drawing/2010/main" xmlns:a16="http://schemas.microsoft.com/office/drawing/2014/main" xmlns="" w="9525">
                   <a:solidFill>
                     <a:srgbClr val="000000"/>
                   </a:solidFill>
@@ -46865,7 +47224,7 @@
             </a:ln>
             <a:extLst>
               <a:ext uri="{91240B29-F687-4f45-9708-019B960494DF}">
-                <a14:hiddenLine xmlns="" xmlns:a16="http://schemas.microsoft.com/office/drawing/2014/main" xmlns:a14="http://schemas.microsoft.com/office/drawing/2010/main" xmlns:p14="http://schemas.microsoft.com/office/powerpoint/2010/main" w="9525">
+                <a14:hiddenLine xmlns:p14="http://schemas.microsoft.com/office/powerpoint/2010/main" xmlns:a14="http://schemas.microsoft.com/office/drawing/2010/main" xmlns:a16="http://schemas.microsoft.com/office/drawing/2014/main" xmlns="" w="9525">
                   <a:solidFill>
                     <a:srgbClr val="000000"/>
                   </a:solidFill>
@@ -46977,7 +47336,7 @@
             </a:ln>
             <a:extLst>
               <a:ext uri="{91240B29-F687-4f45-9708-019B960494DF}">
-                <a14:hiddenLine xmlns="" xmlns:a16="http://schemas.microsoft.com/office/drawing/2014/main" xmlns:a14="http://schemas.microsoft.com/office/drawing/2010/main" xmlns:p14="http://schemas.microsoft.com/office/powerpoint/2010/main" w="9525">
+                <a14:hiddenLine xmlns:p14="http://schemas.microsoft.com/office/powerpoint/2010/main" xmlns:a14="http://schemas.microsoft.com/office/drawing/2010/main" xmlns:a16="http://schemas.microsoft.com/office/drawing/2014/main" xmlns="" w="9525">
                   <a:solidFill>
                     <a:srgbClr val="000000"/>
                   </a:solidFill>
@@ -47067,7 +47426,7 @@
             </a:ln>
             <a:extLst>
               <a:ext uri="{91240B29-F687-4f45-9708-019B960494DF}">
-                <a14:hiddenLine xmlns="" xmlns:a16="http://schemas.microsoft.com/office/drawing/2014/main" xmlns:a14="http://schemas.microsoft.com/office/drawing/2010/main" xmlns:p14="http://schemas.microsoft.com/office/powerpoint/2010/main" w="9525">
+                <a14:hiddenLine xmlns:p14="http://schemas.microsoft.com/office/powerpoint/2010/main" xmlns:a14="http://schemas.microsoft.com/office/drawing/2010/main" xmlns:a16="http://schemas.microsoft.com/office/drawing/2014/main" xmlns="" w="9525">
                   <a:solidFill>
                     <a:srgbClr val="000000"/>
                   </a:solidFill>
@@ -47179,7 +47538,7 @@
             </a:ln>
             <a:extLst>
               <a:ext uri="{91240B29-F687-4f45-9708-019B960494DF}">
-                <a14:hiddenLine xmlns="" xmlns:a16="http://schemas.microsoft.com/office/drawing/2014/main" xmlns:a14="http://schemas.microsoft.com/office/drawing/2010/main" xmlns:p14="http://schemas.microsoft.com/office/powerpoint/2010/main" w="9525">
+                <a14:hiddenLine xmlns:p14="http://schemas.microsoft.com/office/powerpoint/2010/main" xmlns:a14="http://schemas.microsoft.com/office/drawing/2010/main" xmlns:a16="http://schemas.microsoft.com/office/drawing/2014/main" xmlns="" w="9525">
                   <a:solidFill>
                     <a:srgbClr val="000000"/>
                   </a:solidFill>
@@ -47269,7 +47628,7 @@
             </a:ln>
             <a:extLst>
               <a:ext uri="{91240B29-F687-4f45-9708-019B960494DF}">
-                <a14:hiddenLine xmlns="" xmlns:a16="http://schemas.microsoft.com/office/drawing/2014/main" xmlns:a14="http://schemas.microsoft.com/office/drawing/2010/main" xmlns:p14="http://schemas.microsoft.com/office/powerpoint/2010/main" w="9525">
+                <a14:hiddenLine xmlns:p14="http://schemas.microsoft.com/office/powerpoint/2010/main" xmlns:a14="http://schemas.microsoft.com/office/drawing/2010/main" xmlns:a16="http://schemas.microsoft.com/office/drawing/2014/main" xmlns="" w="9525">
                   <a:solidFill>
                     <a:srgbClr val="000000"/>
                   </a:solidFill>
@@ -47381,7 +47740,7 @@
             </a:ln>
             <a:extLst>
               <a:ext uri="{91240B29-F687-4f45-9708-019B960494DF}">
-                <a14:hiddenLine xmlns="" xmlns:a16="http://schemas.microsoft.com/office/drawing/2014/main" xmlns:a14="http://schemas.microsoft.com/office/drawing/2010/main" xmlns:p14="http://schemas.microsoft.com/office/powerpoint/2010/main" w="9525">
+                <a14:hiddenLine xmlns:p14="http://schemas.microsoft.com/office/powerpoint/2010/main" xmlns:a14="http://schemas.microsoft.com/office/drawing/2010/main" xmlns:a16="http://schemas.microsoft.com/office/drawing/2014/main" xmlns="" w="9525">
                   <a:solidFill>
                     <a:srgbClr val="000000"/>
                   </a:solidFill>
@@ -47437,7 +47796,7 @@
             </a:ln>
             <a:extLst>
               <a:ext uri="{91240B29-F687-4f45-9708-019B960494DF}">
-                <a14:hiddenLine xmlns="" xmlns:a16="http://schemas.microsoft.com/office/drawing/2014/main" xmlns:a14="http://schemas.microsoft.com/office/drawing/2010/main" xmlns:p14="http://schemas.microsoft.com/office/powerpoint/2010/main" w="9525">
+                <a14:hiddenLine xmlns:p14="http://schemas.microsoft.com/office/powerpoint/2010/main" xmlns:a14="http://schemas.microsoft.com/office/drawing/2010/main" xmlns:a16="http://schemas.microsoft.com/office/drawing/2014/main" xmlns="" w="9525">
                   <a:solidFill>
                     <a:srgbClr val="000000"/>
                   </a:solidFill>
@@ -47549,7 +47908,7 @@
             </a:ln>
             <a:extLst>
               <a:ext uri="{91240B29-F687-4f45-9708-019B960494DF}">
-                <a14:hiddenLine xmlns="" xmlns:a16="http://schemas.microsoft.com/office/drawing/2014/main" xmlns:a14="http://schemas.microsoft.com/office/drawing/2010/main" xmlns:p14="http://schemas.microsoft.com/office/powerpoint/2010/main" w="9525">
+                <a14:hiddenLine xmlns:p14="http://schemas.microsoft.com/office/powerpoint/2010/main" xmlns:a14="http://schemas.microsoft.com/office/drawing/2010/main" xmlns:a16="http://schemas.microsoft.com/office/drawing/2014/main" xmlns="" w="9525">
                   <a:solidFill>
                     <a:srgbClr val="000000"/>
                   </a:solidFill>
@@ -47633,7 +47992,7 @@
             </a:ln>
             <a:extLst>
               <a:ext uri="{91240B29-F687-4f45-9708-019B960494DF}">
-                <a14:hiddenLine xmlns="" xmlns:a16="http://schemas.microsoft.com/office/drawing/2014/main" xmlns:a14="http://schemas.microsoft.com/office/drawing/2010/main" xmlns:p14="http://schemas.microsoft.com/office/powerpoint/2010/main" w="9525">
+                <a14:hiddenLine xmlns:p14="http://schemas.microsoft.com/office/powerpoint/2010/main" xmlns:a14="http://schemas.microsoft.com/office/drawing/2010/main" xmlns:a16="http://schemas.microsoft.com/office/drawing/2014/main" xmlns="" w="9525">
                   <a:solidFill>
                     <a:srgbClr val="000000"/>
                   </a:solidFill>
@@ -47717,7 +48076,7 @@
             </a:ln>
             <a:extLst>
               <a:ext uri="{91240B29-F687-4f45-9708-019B960494DF}">
-                <a14:hiddenLine xmlns="" xmlns:a16="http://schemas.microsoft.com/office/drawing/2014/main" xmlns:a14="http://schemas.microsoft.com/office/drawing/2010/main" xmlns:p14="http://schemas.microsoft.com/office/powerpoint/2010/main" w="9525">
+                <a14:hiddenLine xmlns:p14="http://schemas.microsoft.com/office/powerpoint/2010/main" xmlns:a14="http://schemas.microsoft.com/office/drawing/2010/main" xmlns:a16="http://schemas.microsoft.com/office/drawing/2014/main" xmlns="" w="9525">
                   <a:solidFill>
                     <a:srgbClr val="000000"/>
                   </a:solidFill>
@@ -47829,7 +48188,7 @@
             </a:ln>
             <a:extLst>
               <a:ext uri="{91240B29-F687-4f45-9708-019B960494DF}">
-                <a14:hiddenLine xmlns="" xmlns:a16="http://schemas.microsoft.com/office/drawing/2014/main" xmlns:a14="http://schemas.microsoft.com/office/drawing/2010/main" xmlns:p14="http://schemas.microsoft.com/office/powerpoint/2010/main" w="9525">
+                <a14:hiddenLine xmlns:p14="http://schemas.microsoft.com/office/powerpoint/2010/main" xmlns:a14="http://schemas.microsoft.com/office/drawing/2010/main" xmlns:a16="http://schemas.microsoft.com/office/drawing/2014/main" xmlns="" w="9525">
                   <a:solidFill>
                     <a:srgbClr val="000000"/>
                   </a:solidFill>
@@ -47919,7 +48278,7 @@
             </a:ln>
             <a:extLst>
               <a:ext uri="{91240B29-F687-4f45-9708-019B960494DF}">
-                <a14:hiddenLine xmlns="" xmlns:a16="http://schemas.microsoft.com/office/drawing/2014/main" xmlns:a14="http://schemas.microsoft.com/office/drawing/2010/main" xmlns:p14="http://schemas.microsoft.com/office/powerpoint/2010/main" w="9525">
+                <a14:hiddenLine xmlns:p14="http://schemas.microsoft.com/office/powerpoint/2010/main" xmlns:a14="http://schemas.microsoft.com/office/drawing/2010/main" xmlns:a16="http://schemas.microsoft.com/office/drawing/2014/main" xmlns="" w="9525">
                   <a:solidFill>
                     <a:srgbClr val="000000"/>
                   </a:solidFill>
@@ -48003,7 +48362,7 @@
             </a:ln>
             <a:extLst>
               <a:ext uri="{91240B29-F687-4f45-9708-019B960494DF}">
-                <a14:hiddenLine xmlns="" xmlns:a16="http://schemas.microsoft.com/office/drawing/2014/main" xmlns:a14="http://schemas.microsoft.com/office/drawing/2010/main" xmlns:p14="http://schemas.microsoft.com/office/powerpoint/2010/main" w="9525">
+                <a14:hiddenLine xmlns:p14="http://schemas.microsoft.com/office/powerpoint/2010/main" xmlns:a14="http://schemas.microsoft.com/office/drawing/2010/main" xmlns:a16="http://schemas.microsoft.com/office/drawing/2014/main" xmlns="" w="9525">
                   <a:solidFill>
                     <a:srgbClr val="000000"/>
                   </a:solidFill>
@@ -48115,7 +48474,7 @@
             </a:ln>
             <a:extLst>
               <a:ext uri="{91240B29-F687-4f45-9708-019B960494DF}">
-                <a14:hiddenLine xmlns="" xmlns:a16="http://schemas.microsoft.com/office/drawing/2014/main" xmlns:a14="http://schemas.microsoft.com/office/drawing/2010/main" xmlns:p14="http://schemas.microsoft.com/office/powerpoint/2010/main" w="9525">
+                <a14:hiddenLine xmlns:p14="http://schemas.microsoft.com/office/powerpoint/2010/main" xmlns:a14="http://schemas.microsoft.com/office/drawing/2010/main" xmlns:a16="http://schemas.microsoft.com/office/drawing/2014/main" xmlns="" w="9525">
                   <a:solidFill>
                     <a:srgbClr val="000000"/>
                   </a:solidFill>
@@ -48199,7 +48558,7 @@
             </a:ln>
             <a:extLst>
               <a:ext uri="{91240B29-F687-4f45-9708-019B960494DF}">
-                <a14:hiddenLine xmlns="" xmlns:a16="http://schemas.microsoft.com/office/drawing/2014/main" xmlns:a14="http://schemas.microsoft.com/office/drawing/2010/main" xmlns:p14="http://schemas.microsoft.com/office/powerpoint/2010/main" w="9525">
+                <a14:hiddenLine xmlns:p14="http://schemas.microsoft.com/office/powerpoint/2010/main" xmlns:a14="http://schemas.microsoft.com/office/drawing/2010/main" xmlns:a16="http://schemas.microsoft.com/office/drawing/2014/main" xmlns="" w="9525">
                   <a:solidFill>
                     <a:srgbClr val="000000"/>
                   </a:solidFill>
@@ -48311,7 +48670,7 @@
             </a:ln>
             <a:extLst>
               <a:ext uri="{91240B29-F687-4f45-9708-019B960494DF}">
-                <a14:hiddenLine xmlns="" xmlns:a16="http://schemas.microsoft.com/office/drawing/2014/main" xmlns:a14="http://schemas.microsoft.com/office/drawing/2010/main" xmlns:p14="http://schemas.microsoft.com/office/powerpoint/2010/main" w="9525">
+                <a14:hiddenLine xmlns:p14="http://schemas.microsoft.com/office/powerpoint/2010/main" xmlns:a14="http://schemas.microsoft.com/office/drawing/2010/main" xmlns:a16="http://schemas.microsoft.com/office/drawing/2014/main" xmlns="" w="9525">
                   <a:solidFill>
                     <a:srgbClr val="000000"/>
                   </a:solidFill>
@@ -48395,7 +48754,7 @@
             </a:ln>
             <a:extLst>
               <a:ext uri="{91240B29-F687-4f45-9708-019B960494DF}">
-                <a14:hiddenLine xmlns="" xmlns:a16="http://schemas.microsoft.com/office/drawing/2014/main" xmlns:a14="http://schemas.microsoft.com/office/drawing/2010/main" xmlns:p14="http://schemas.microsoft.com/office/powerpoint/2010/main" w="9525">
+                <a14:hiddenLine xmlns:p14="http://schemas.microsoft.com/office/powerpoint/2010/main" xmlns:a14="http://schemas.microsoft.com/office/drawing/2010/main" xmlns:a16="http://schemas.microsoft.com/office/drawing/2014/main" xmlns="" w="9525">
                   <a:solidFill>
                     <a:srgbClr val="000000"/>
                   </a:solidFill>
@@ -48507,7 +48866,7 @@
             </a:ln>
             <a:extLst>
               <a:ext uri="{91240B29-F687-4f45-9708-019B960494DF}">
-                <a14:hiddenLine xmlns="" xmlns:a16="http://schemas.microsoft.com/office/drawing/2014/main" xmlns:a14="http://schemas.microsoft.com/office/drawing/2010/main" xmlns:p14="http://schemas.microsoft.com/office/powerpoint/2010/main" w="9525">
+                <a14:hiddenLine xmlns:p14="http://schemas.microsoft.com/office/powerpoint/2010/main" xmlns:a14="http://schemas.microsoft.com/office/drawing/2010/main" xmlns:a16="http://schemas.microsoft.com/office/drawing/2014/main" xmlns="" w="9525">
                   <a:solidFill>
                     <a:srgbClr val="000000"/>
                   </a:solidFill>
@@ -48563,7 +48922,7 @@
             </a:ln>
             <a:extLst>
               <a:ext uri="{91240B29-F687-4f45-9708-019B960494DF}">
-                <a14:hiddenLine xmlns="" xmlns:a16="http://schemas.microsoft.com/office/drawing/2014/main" xmlns:a14="http://schemas.microsoft.com/office/drawing/2010/main" xmlns:p14="http://schemas.microsoft.com/office/powerpoint/2010/main" w="9525">
+                <a14:hiddenLine xmlns:p14="http://schemas.microsoft.com/office/powerpoint/2010/main" xmlns:a14="http://schemas.microsoft.com/office/drawing/2010/main" xmlns:a16="http://schemas.microsoft.com/office/drawing/2014/main" xmlns="" w="9525">
                   <a:solidFill>
                     <a:srgbClr val="000000"/>
                   </a:solidFill>
@@ -48650,7 +49009,7 @@
             </a:ln>
             <a:extLst>
               <a:ext uri="{91240B29-F687-4f45-9708-019B960494DF}">
-                <a14:hiddenLine xmlns="" xmlns:a16="http://schemas.microsoft.com/office/drawing/2014/main" xmlns:a14="http://schemas.microsoft.com/office/drawing/2010/main" xmlns:p14="http://schemas.microsoft.com/office/powerpoint/2010/main" w="9525">
+                <a14:hiddenLine xmlns:p14="http://schemas.microsoft.com/office/powerpoint/2010/main" xmlns:a14="http://schemas.microsoft.com/office/drawing/2010/main" xmlns:a16="http://schemas.microsoft.com/office/drawing/2014/main" xmlns="" w="9525">
                   <a:solidFill>
                     <a:srgbClr val="000000"/>
                   </a:solidFill>
@@ -48762,7 +49121,7 @@
             </a:ln>
             <a:extLst>
               <a:ext uri="{91240B29-F687-4f45-9708-019B960494DF}">
-                <a14:hiddenLine xmlns="" xmlns:a16="http://schemas.microsoft.com/office/drawing/2014/main" xmlns:a14="http://schemas.microsoft.com/office/drawing/2010/main" xmlns:p14="http://schemas.microsoft.com/office/powerpoint/2010/main" w="9525">
+                <a14:hiddenLine xmlns:p14="http://schemas.microsoft.com/office/powerpoint/2010/main" xmlns:a14="http://schemas.microsoft.com/office/drawing/2010/main" xmlns:a16="http://schemas.microsoft.com/office/drawing/2014/main" xmlns="" w="9525">
                   <a:solidFill>
                     <a:srgbClr val="000000"/>
                   </a:solidFill>
@@ -48846,7 +49205,7 @@
             </a:ln>
             <a:extLst>
               <a:ext uri="{91240B29-F687-4f45-9708-019B960494DF}">
-                <a14:hiddenLine xmlns="" xmlns:a16="http://schemas.microsoft.com/office/drawing/2014/main" xmlns:a14="http://schemas.microsoft.com/office/drawing/2010/main" xmlns:p14="http://schemas.microsoft.com/office/powerpoint/2010/main" w="9525">
+                <a14:hiddenLine xmlns:p14="http://schemas.microsoft.com/office/powerpoint/2010/main" xmlns:a14="http://schemas.microsoft.com/office/drawing/2010/main" xmlns:a16="http://schemas.microsoft.com/office/drawing/2014/main" xmlns="" w="9525">
                   <a:solidFill>
                     <a:srgbClr val="000000"/>
                   </a:solidFill>
@@ -48958,7 +49317,7 @@
             </a:ln>
             <a:extLst>
               <a:ext uri="{91240B29-F687-4f45-9708-019B960494DF}">
-                <a14:hiddenLine xmlns="" xmlns:a16="http://schemas.microsoft.com/office/drawing/2014/main" xmlns:a14="http://schemas.microsoft.com/office/drawing/2010/main" xmlns:p14="http://schemas.microsoft.com/office/powerpoint/2010/main" w="9525">
+                <a14:hiddenLine xmlns:p14="http://schemas.microsoft.com/office/powerpoint/2010/main" xmlns:a14="http://schemas.microsoft.com/office/drawing/2010/main" xmlns:a16="http://schemas.microsoft.com/office/drawing/2014/main" xmlns="" w="9525">
                   <a:solidFill>
                     <a:srgbClr val="000000"/>
                   </a:solidFill>
@@ -49070,7 +49429,7 @@
             </a:ln>
             <a:extLst>
               <a:ext uri="{91240B29-F687-4f45-9708-019B960494DF}">
-                <a14:hiddenLine xmlns="" xmlns:a16="http://schemas.microsoft.com/office/drawing/2014/main" xmlns:a14="http://schemas.microsoft.com/office/drawing/2010/main" xmlns:p14="http://schemas.microsoft.com/office/powerpoint/2010/main" w="9525">
+                <a14:hiddenLine xmlns:p14="http://schemas.microsoft.com/office/powerpoint/2010/main" xmlns:a14="http://schemas.microsoft.com/office/drawing/2010/main" xmlns:a16="http://schemas.microsoft.com/office/drawing/2014/main" xmlns="" w="9525">
                   <a:solidFill>
                     <a:srgbClr val="000000"/>
                   </a:solidFill>
@@ -49157,7 +49516,7 @@
             </a:ln>
             <a:extLst>
               <a:ext uri="{91240B29-F687-4f45-9708-019B960494DF}">
-                <a14:hiddenLine xmlns="" xmlns:a16="http://schemas.microsoft.com/office/drawing/2014/main" xmlns:a14="http://schemas.microsoft.com/office/drawing/2010/main" xmlns:p14="http://schemas.microsoft.com/office/powerpoint/2010/main" w="9525">
+                <a14:hiddenLine xmlns:p14="http://schemas.microsoft.com/office/powerpoint/2010/main" xmlns:a14="http://schemas.microsoft.com/office/drawing/2010/main" xmlns:a16="http://schemas.microsoft.com/office/drawing/2014/main" xmlns="" w="9525">
                   <a:solidFill>
                     <a:srgbClr val="000000"/>
                   </a:solidFill>
@@ -49241,7 +49600,7 @@
             </a:ln>
             <a:extLst>
               <a:ext uri="{91240B29-F687-4f45-9708-019B960494DF}">
-                <a14:hiddenLine xmlns="" xmlns:a16="http://schemas.microsoft.com/office/drawing/2014/main" xmlns:a14="http://schemas.microsoft.com/office/drawing/2010/main" xmlns:p14="http://schemas.microsoft.com/office/powerpoint/2010/main" w="9525">
+                <a14:hiddenLine xmlns:p14="http://schemas.microsoft.com/office/powerpoint/2010/main" xmlns:a14="http://schemas.microsoft.com/office/drawing/2010/main" xmlns:a16="http://schemas.microsoft.com/office/drawing/2014/main" xmlns="" w="9525">
                   <a:solidFill>
                     <a:srgbClr val="000000"/>
                   </a:solidFill>
@@ -49353,7 +49712,7 @@
             </a:ln>
             <a:extLst>
               <a:ext uri="{91240B29-F687-4f45-9708-019B960494DF}">
-                <a14:hiddenLine xmlns="" xmlns:a16="http://schemas.microsoft.com/office/drawing/2014/main" xmlns:a14="http://schemas.microsoft.com/office/drawing/2010/main" xmlns:p14="http://schemas.microsoft.com/office/powerpoint/2010/main" w="9525">
+                <a14:hiddenLine xmlns:p14="http://schemas.microsoft.com/office/powerpoint/2010/main" xmlns:a14="http://schemas.microsoft.com/office/drawing/2010/main" xmlns:a16="http://schemas.microsoft.com/office/drawing/2014/main" xmlns="" w="9525">
                   <a:solidFill>
                     <a:srgbClr val="000000"/>
                   </a:solidFill>
@@ -49465,7 +49824,7 @@
             </a:ln>
             <a:extLst>
               <a:ext uri="{91240B29-F687-4f45-9708-019B960494DF}">
-                <a14:hiddenLine xmlns="" xmlns:a16="http://schemas.microsoft.com/office/drawing/2014/main" xmlns:a14="http://schemas.microsoft.com/office/drawing/2010/main" xmlns:p14="http://schemas.microsoft.com/office/powerpoint/2010/main" w="9525">
+                <a14:hiddenLine xmlns:p14="http://schemas.microsoft.com/office/powerpoint/2010/main" xmlns:a14="http://schemas.microsoft.com/office/drawing/2010/main" xmlns:a16="http://schemas.microsoft.com/office/drawing/2014/main" xmlns="" w="9525">
                   <a:solidFill>
                     <a:srgbClr val="000000"/>
                   </a:solidFill>
@@ -49549,7 +49908,7 @@
             </a:ln>
             <a:extLst>
               <a:ext uri="{91240B29-F687-4f45-9708-019B960494DF}">
-                <a14:hiddenLine xmlns="" xmlns:a16="http://schemas.microsoft.com/office/drawing/2014/main" xmlns:a14="http://schemas.microsoft.com/office/drawing/2010/main" xmlns:p14="http://schemas.microsoft.com/office/powerpoint/2010/main" w="9525">
+                <a14:hiddenLine xmlns:p14="http://schemas.microsoft.com/office/powerpoint/2010/main" xmlns:a14="http://schemas.microsoft.com/office/drawing/2010/main" xmlns:a16="http://schemas.microsoft.com/office/drawing/2014/main" xmlns="" w="9525">
                   <a:solidFill>
                     <a:srgbClr val="000000"/>
                   </a:solidFill>
@@ -49691,7 +50050,7 @@
             </a:ln>
             <a:extLst>
               <a:ext uri="{91240B29-F687-4f45-9708-019B960494DF}">
-                <a14:hiddenLine xmlns="" xmlns:a16="http://schemas.microsoft.com/office/drawing/2014/main" xmlns:a14="http://schemas.microsoft.com/office/drawing/2010/main" xmlns:p14="http://schemas.microsoft.com/office/powerpoint/2010/main" w="9525">
+                <a14:hiddenLine xmlns:p14="http://schemas.microsoft.com/office/powerpoint/2010/main" xmlns:a14="http://schemas.microsoft.com/office/drawing/2010/main" xmlns:a16="http://schemas.microsoft.com/office/drawing/2014/main" xmlns="" w="9525">
                   <a:solidFill>
                     <a:srgbClr val="000000"/>
                   </a:solidFill>
@@ -49781,7 +50140,7 @@
             </a:ln>
             <a:extLst>
               <a:ext uri="{91240B29-F687-4f45-9708-019B960494DF}">
-                <a14:hiddenLine xmlns="" xmlns:a16="http://schemas.microsoft.com/office/drawing/2014/main" xmlns:a14="http://schemas.microsoft.com/office/drawing/2010/main" xmlns:p14="http://schemas.microsoft.com/office/powerpoint/2010/main" w="9525">
+                <a14:hiddenLine xmlns:p14="http://schemas.microsoft.com/office/powerpoint/2010/main" xmlns:a14="http://schemas.microsoft.com/office/drawing/2010/main" xmlns:a16="http://schemas.microsoft.com/office/drawing/2014/main" xmlns="" w="9525">
                   <a:solidFill>
                     <a:srgbClr val="000000"/>
                   </a:solidFill>
@@ -49893,7 +50252,7 @@
             </a:ln>
             <a:extLst>
               <a:ext uri="{91240B29-F687-4f45-9708-019B960494DF}">
-                <a14:hiddenLine xmlns="" xmlns:a16="http://schemas.microsoft.com/office/drawing/2014/main" xmlns:a14="http://schemas.microsoft.com/office/drawing/2010/main" xmlns:p14="http://schemas.microsoft.com/office/powerpoint/2010/main" w="9525">
+                <a14:hiddenLine xmlns:p14="http://schemas.microsoft.com/office/powerpoint/2010/main" xmlns:a14="http://schemas.microsoft.com/office/drawing/2010/main" xmlns:a16="http://schemas.microsoft.com/office/drawing/2014/main" xmlns="" w="9525">
                   <a:solidFill>
                     <a:srgbClr val="000000"/>
                   </a:solidFill>

--- a/docs/VSCA11Y_Prezentacija.pptx
+++ b/docs/VSCA11Y_Prezentacija.pptx
@@ -6764,7 +6764,7 @@
           <a:noFill/>
           <a:extLst>
             <a:ext uri="{909E8E84-426E-40dd-AFC4-6F175D3DCCD1}">
-              <a14:hiddenFill xmlns="" xmlns:a14="http://schemas.microsoft.com/office/drawing/2010/main">
+              <a14:hiddenFill xmlns:a14="http://schemas.microsoft.com/office/drawing/2010/main" xmlns="">
                 <a:solidFill>
                   <a:srgbClr val="FFFFFF"/>
                 </a:solidFill>
@@ -6824,7 +6824,7 @@
             </a:ln>
             <a:extLst>
               <a:ext uri="{91240B29-F687-4f45-9708-019B960494DF}">
-                <a14:hiddenLine xmlns="" xmlns:a14="http://schemas.microsoft.com/office/drawing/2010/main" w="9525">
+                <a14:hiddenLine xmlns:a14="http://schemas.microsoft.com/office/drawing/2010/main" xmlns="" w="9525">
                   <a:solidFill>
                     <a:srgbClr val="000000"/>
                   </a:solidFill>
@@ -6921,7 +6921,7 @@
             </a:ln>
             <a:extLst>
               <a:ext uri="{91240B29-F687-4f45-9708-019B960494DF}">
-                <a14:hiddenLine xmlns="" xmlns:a14="http://schemas.microsoft.com/office/drawing/2010/main" w="9525">
+                <a14:hiddenLine xmlns:a14="http://schemas.microsoft.com/office/drawing/2010/main" xmlns="" w="9525">
                   <a:solidFill>
                     <a:srgbClr val="000000"/>
                   </a:solidFill>
@@ -7018,7 +7018,7 @@
             </a:ln>
             <a:extLst>
               <a:ext uri="{91240B29-F687-4f45-9708-019B960494DF}">
-                <a14:hiddenLine xmlns="" xmlns:a14="http://schemas.microsoft.com/office/drawing/2010/main" w="9525">
+                <a14:hiddenLine xmlns:a14="http://schemas.microsoft.com/office/drawing/2010/main" xmlns="" w="9525">
                   <a:solidFill>
                     <a:srgbClr val="000000"/>
                   </a:solidFill>
@@ -7059,7 +7059,7 @@
             </a:ln>
             <a:extLst>
               <a:ext uri="{91240B29-F687-4f45-9708-019B960494DF}">
-                <a14:hiddenLine xmlns="" xmlns:a14="http://schemas.microsoft.com/office/drawing/2010/main" w="9525">
+                <a14:hiddenLine xmlns:a14="http://schemas.microsoft.com/office/drawing/2010/main" xmlns="" w="9525">
                   <a:solidFill>
                     <a:srgbClr val="000000"/>
                   </a:solidFill>
@@ -7156,7 +7156,7 @@
             </a:ln>
             <a:extLst>
               <a:ext uri="{91240B29-F687-4f45-9708-019B960494DF}">
-                <a14:hiddenLine xmlns="" xmlns:a14="http://schemas.microsoft.com/office/drawing/2010/main" w="9525">
+                <a14:hiddenLine xmlns:a14="http://schemas.microsoft.com/office/drawing/2010/main" xmlns="" w="9525">
                   <a:solidFill>
                     <a:srgbClr val="000000"/>
                   </a:solidFill>
@@ -7225,7 +7225,7 @@
             </a:ln>
             <a:extLst>
               <a:ext uri="{91240B29-F687-4f45-9708-019B960494DF}">
-                <a14:hiddenLine xmlns="" xmlns:a14="http://schemas.microsoft.com/office/drawing/2010/main" w="9525">
+                <a14:hiddenLine xmlns:a14="http://schemas.microsoft.com/office/drawing/2010/main" xmlns="" w="9525">
                   <a:solidFill>
                     <a:srgbClr val="000000"/>
                   </a:solidFill>
@@ -7294,7 +7294,7 @@
             </a:ln>
             <a:extLst>
               <a:ext uri="{91240B29-F687-4f45-9708-019B960494DF}">
-                <a14:hiddenLine xmlns="" xmlns:a14="http://schemas.microsoft.com/office/drawing/2010/main" w="9525">
+                <a14:hiddenLine xmlns:a14="http://schemas.microsoft.com/office/drawing/2010/main" xmlns="" w="9525">
                   <a:solidFill>
                     <a:srgbClr val="000000"/>
                   </a:solidFill>
@@ -7391,7 +7391,7 @@
             </a:ln>
             <a:extLst>
               <a:ext uri="{91240B29-F687-4f45-9708-019B960494DF}">
-                <a14:hiddenLine xmlns="" xmlns:a14="http://schemas.microsoft.com/office/drawing/2010/main" w="9525">
+                <a14:hiddenLine xmlns:a14="http://schemas.microsoft.com/office/drawing/2010/main" xmlns="" w="9525">
                   <a:solidFill>
                     <a:srgbClr val="000000"/>
                   </a:solidFill>
@@ -7460,7 +7460,7 @@
             </a:ln>
             <a:extLst>
               <a:ext uri="{91240B29-F687-4f45-9708-019B960494DF}">
-                <a14:hiddenLine xmlns="" xmlns:a14="http://schemas.microsoft.com/office/drawing/2010/main" w="9525">
+                <a14:hiddenLine xmlns:a14="http://schemas.microsoft.com/office/drawing/2010/main" xmlns="" w="9525">
                   <a:solidFill>
                     <a:srgbClr val="000000"/>
                   </a:solidFill>
@@ -7529,7 +7529,7 @@
             </a:ln>
             <a:extLst>
               <a:ext uri="{91240B29-F687-4f45-9708-019B960494DF}">
-                <a14:hiddenLine xmlns="" xmlns:a14="http://schemas.microsoft.com/office/drawing/2010/main" w="9525">
+                <a14:hiddenLine xmlns:a14="http://schemas.microsoft.com/office/drawing/2010/main" xmlns="" w="9525">
                   <a:solidFill>
                     <a:srgbClr val="000000"/>
                   </a:solidFill>
@@ -7626,7 +7626,7 @@
             </a:ln>
             <a:extLst>
               <a:ext uri="{91240B29-F687-4f45-9708-019B960494DF}">
-                <a14:hiddenLine xmlns="" xmlns:a14="http://schemas.microsoft.com/office/drawing/2010/main" w="9525">
+                <a14:hiddenLine xmlns:a14="http://schemas.microsoft.com/office/drawing/2010/main" xmlns="" w="9525">
                   <a:solidFill>
                     <a:srgbClr val="000000"/>
                   </a:solidFill>
@@ -7723,7 +7723,7 @@
             </a:ln>
             <a:extLst>
               <a:ext uri="{91240B29-F687-4f45-9708-019B960494DF}">
-                <a14:hiddenLine xmlns="" xmlns:a14="http://schemas.microsoft.com/office/drawing/2010/main" w="9525">
+                <a14:hiddenLine xmlns:a14="http://schemas.microsoft.com/office/drawing/2010/main" xmlns="" w="9525">
                   <a:solidFill>
                     <a:srgbClr val="000000"/>
                   </a:solidFill>
@@ -7792,7 +7792,7 @@
             </a:ln>
             <a:extLst>
               <a:ext uri="{91240B29-F687-4f45-9708-019B960494DF}">
-                <a14:hiddenLine xmlns="" xmlns:a14="http://schemas.microsoft.com/office/drawing/2010/main" w="9525">
+                <a14:hiddenLine xmlns:a14="http://schemas.microsoft.com/office/drawing/2010/main" xmlns="" w="9525">
                   <a:solidFill>
                     <a:srgbClr val="000000"/>
                   </a:solidFill>
@@ -7909,7 +7909,7 @@
             </a:ln>
             <a:extLst>
               <a:ext uri="{91240B29-F687-4f45-9708-019B960494DF}">
-                <a14:hiddenLine xmlns="" xmlns:a14="http://schemas.microsoft.com/office/drawing/2010/main" w="9525">
+                <a14:hiddenLine xmlns:a14="http://schemas.microsoft.com/office/drawing/2010/main" xmlns="" w="9525">
                   <a:solidFill>
                     <a:srgbClr val="000000"/>
                   </a:solidFill>
@@ -7978,7 +7978,7 @@
             </a:ln>
             <a:extLst>
               <a:ext uri="{91240B29-F687-4f45-9708-019B960494DF}">
-                <a14:hiddenLine xmlns="" xmlns:a14="http://schemas.microsoft.com/office/drawing/2010/main" w="9525">
+                <a14:hiddenLine xmlns:a14="http://schemas.microsoft.com/office/drawing/2010/main" xmlns="" w="9525">
                   <a:solidFill>
                     <a:srgbClr val="000000"/>
                   </a:solidFill>
@@ -8075,7 +8075,7 @@
             </a:ln>
             <a:extLst>
               <a:ext uri="{91240B29-F687-4f45-9708-019B960494DF}">
-                <a14:hiddenLine xmlns="" xmlns:a14="http://schemas.microsoft.com/office/drawing/2010/main" w="9525">
+                <a14:hiddenLine xmlns:a14="http://schemas.microsoft.com/office/drawing/2010/main" xmlns="" w="9525">
                   <a:solidFill>
                     <a:srgbClr val="000000"/>
                   </a:solidFill>
@@ -8172,7 +8172,7 @@
             </a:ln>
             <a:extLst>
               <a:ext uri="{91240B29-F687-4f45-9708-019B960494DF}">
-                <a14:hiddenLine xmlns="" xmlns:a14="http://schemas.microsoft.com/office/drawing/2010/main" w="9525">
+                <a14:hiddenLine xmlns:a14="http://schemas.microsoft.com/office/drawing/2010/main" xmlns="" w="9525">
                   <a:solidFill>
                     <a:srgbClr val="000000"/>
                   </a:solidFill>
@@ -8241,7 +8241,7 @@
             </a:ln>
             <a:extLst>
               <a:ext uri="{91240B29-F687-4f45-9708-019B960494DF}">
-                <a14:hiddenLine xmlns="" xmlns:a14="http://schemas.microsoft.com/office/drawing/2010/main" w="9525">
+                <a14:hiddenLine xmlns:a14="http://schemas.microsoft.com/office/drawing/2010/main" xmlns="" w="9525">
                   <a:solidFill>
                     <a:srgbClr val="000000"/>
                   </a:solidFill>
@@ -8338,7 +8338,7 @@
             </a:ln>
             <a:extLst>
               <a:ext uri="{91240B29-F687-4f45-9708-019B960494DF}">
-                <a14:hiddenLine xmlns="" xmlns:a14="http://schemas.microsoft.com/office/drawing/2010/main" w="9525">
+                <a14:hiddenLine xmlns:a14="http://schemas.microsoft.com/office/drawing/2010/main" xmlns="" w="9525">
                   <a:solidFill>
                     <a:srgbClr val="000000"/>
                   </a:solidFill>
@@ -8435,7 +8435,7 @@
             </a:ln>
             <a:extLst>
               <a:ext uri="{91240B29-F687-4f45-9708-019B960494DF}">
-                <a14:hiddenLine xmlns="" xmlns:a14="http://schemas.microsoft.com/office/drawing/2010/main" w="9525">
+                <a14:hiddenLine xmlns:a14="http://schemas.microsoft.com/office/drawing/2010/main" xmlns="" w="9525">
                   <a:solidFill>
                     <a:srgbClr val="000000"/>
                   </a:solidFill>
@@ -8498,7 +8498,7 @@
             </a:ln>
             <a:extLst>
               <a:ext uri="{91240B29-F687-4f45-9708-019B960494DF}">
-                <a14:hiddenLine xmlns="" xmlns:a14="http://schemas.microsoft.com/office/drawing/2010/main" w="9525">
+                <a14:hiddenLine xmlns:a14="http://schemas.microsoft.com/office/drawing/2010/main" xmlns="" w="9525">
                   <a:solidFill>
                     <a:srgbClr val="000000"/>
                   </a:solidFill>
@@ -8595,7 +8595,7 @@
             </a:ln>
             <a:extLst>
               <a:ext uri="{91240B29-F687-4f45-9708-019B960494DF}">
-                <a14:hiddenLine xmlns="" xmlns:a14="http://schemas.microsoft.com/office/drawing/2010/main" w="9525">
+                <a14:hiddenLine xmlns:a14="http://schemas.microsoft.com/office/drawing/2010/main" xmlns="" w="9525">
                   <a:solidFill>
                     <a:srgbClr val="000000"/>
                   </a:solidFill>
@@ -8658,7 +8658,7 @@
             </a:ln>
             <a:extLst>
               <a:ext uri="{91240B29-F687-4f45-9708-019B960494DF}">
-                <a14:hiddenLine xmlns="" xmlns:a14="http://schemas.microsoft.com/office/drawing/2010/main" w="9525">
+                <a14:hiddenLine xmlns:a14="http://schemas.microsoft.com/office/drawing/2010/main" xmlns="" w="9525">
                   <a:solidFill>
                     <a:srgbClr val="000000"/>
                   </a:solidFill>
@@ -8755,7 +8755,7 @@
             </a:ln>
             <a:extLst>
               <a:ext uri="{91240B29-F687-4f45-9708-019B960494DF}">
-                <a14:hiddenLine xmlns="" xmlns:a14="http://schemas.microsoft.com/office/drawing/2010/main" w="9525">
+                <a14:hiddenLine xmlns:a14="http://schemas.microsoft.com/office/drawing/2010/main" xmlns="" w="9525">
                   <a:solidFill>
                     <a:srgbClr val="000000"/>
                   </a:solidFill>
@@ -8830,7 +8830,7 @@
             </a:ln>
             <a:extLst>
               <a:ext uri="{91240B29-F687-4f45-9708-019B960494DF}">
-                <a14:hiddenLine xmlns="" xmlns:a14="http://schemas.microsoft.com/office/drawing/2010/main" w="9525">
+                <a14:hiddenLine xmlns:a14="http://schemas.microsoft.com/office/drawing/2010/main" xmlns="" w="9525">
                   <a:solidFill>
                     <a:srgbClr val="000000"/>
                   </a:solidFill>
@@ -8927,7 +8927,7 @@
             </a:ln>
             <a:extLst>
               <a:ext uri="{91240B29-F687-4f45-9708-019B960494DF}">
-                <a14:hiddenLine xmlns="" xmlns:a14="http://schemas.microsoft.com/office/drawing/2010/main" w="9525">
+                <a14:hiddenLine xmlns:a14="http://schemas.microsoft.com/office/drawing/2010/main" xmlns="" w="9525">
                   <a:solidFill>
                     <a:srgbClr val="000000"/>
                   </a:solidFill>
@@ -9002,7 +9002,7 @@
             </a:ln>
             <a:extLst>
               <a:ext uri="{91240B29-F687-4f45-9708-019B960494DF}">
-                <a14:hiddenLine xmlns="" xmlns:a14="http://schemas.microsoft.com/office/drawing/2010/main" w="9525">
+                <a14:hiddenLine xmlns:a14="http://schemas.microsoft.com/office/drawing/2010/main" xmlns="" w="9525">
                   <a:solidFill>
                     <a:srgbClr val="000000"/>
                   </a:solidFill>
@@ -9099,7 +9099,7 @@
             </a:ln>
             <a:extLst>
               <a:ext uri="{91240B29-F687-4f45-9708-019B960494DF}">
-                <a14:hiddenLine xmlns="" xmlns:a14="http://schemas.microsoft.com/office/drawing/2010/main" w="9525">
+                <a14:hiddenLine xmlns:a14="http://schemas.microsoft.com/office/drawing/2010/main" xmlns="" w="9525">
                   <a:solidFill>
                     <a:srgbClr val="000000"/>
                   </a:solidFill>
@@ -9140,7 +9140,7 @@
             </a:ln>
             <a:extLst>
               <a:ext uri="{91240B29-F687-4f45-9708-019B960494DF}">
-                <a14:hiddenLine xmlns="" xmlns:a14="http://schemas.microsoft.com/office/drawing/2010/main" w="9525">
+                <a14:hiddenLine xmlns:a14="http://schemas.microsoft.com/office/drawing/2010/main" xmlns="" w="9525">
                   <a:solidFill>
                     <a:srgbClr val="000000"/>
                   </a:solidFill>
@@ -9237,7 +9237,7 @@
             </a:ln>
             <a:extLst>
               <a:ext uri="{91240B29-F687-4f45-9708-019B960494DF}">
-                <a14:hiddenLine xmlns="" xmlns:a14="http://schemas.microsoft.com/office/drawing/2010/main" w="9525">
+                <a14:hiddenLine xmlns:a14="http://schemas.microsoft.com/office/drawing/2010/main" xmlns="" w="9525">
                   <a:solidFill>
                     <a:srgbClr val="000000"/>
                   </a:solidFill>
@@ -9306,7 +9306,7 @@
             </a:ln>
             <a:extLst>
               <a:ext uri="{91240B29-F687-4f45-9708-019B960494DF}">
-                <a14:hiddenLine xmlns="" xmlns:a14="http://schemas.microsoft.com/office/drawing/2010/main" w="9525">
+                <a14:hiddenLine xmlns:a14="http://schemas.microsoft.com/office/drawing/2010/main" xmlns="" w="9525">
                   <a:solidFill>
                     <a:srgbClr val="000000"/>
                   </a:solidFill>
@@ -9375,7 +9375,7 @@
             </a:ln>
             <a:extLst>
               <a:ext uri="{91240B29-F687-4f45-9708-019B960494DF}">
-                <a14:hiddenLine xmlns="" xmlns:a14="http://schemas.microsoft.com/office/drawing/2010/main" w="9525">
+                <a14:hiddenLine xmlns:a14="http://schemas.microsoft.com/office/drawing/2010/main" xmlns="" w="9525">
                   <a:solidFill>
                     <a:srgbClr val="000000"/>
                   </a:solidFill>
@@ -9472,7 +9472,7 @@
             </a:ln>
             <a:extLst>
               <a:ext uri="{91240B29-F687-4f45-9708-019B960494DF}">
-                <a14:hiddenLine xmlns="" xmlns:a14="http://schemas.microsoft.com/office/drawing/2010/main" w="9525">
+                <a14:hiddenLine xmlns:a14="http://schemas.microsoft.com/office/drawing/2010/main" xmlns="" w="9525">
                   <a:solidFill>
                     <a:srgbClr val="000000"/>
                   </a:solidFill>
@@ -9547,7 +9547,7 @@
             </a:ln>
             <a:extLst>
               <a:ext uri="{91240B29-F687-4f45-9708-019B960494DF}">
-                <a14:hiddenLine xmlns="" xmlns:a14="http://schemas.microsoft.com/office/drawing/2010/main" w="9525">
+                <a14:hiddenLine xmlns:a14="http://schemas.microsoft.com/office/drawing/2010/main" xmlns="" w="9525">
                   <a:solidFill>
                     <a:srgbClr val="000000"/>
                   </a:solidFill>
@@ -9616,7 +9616,7 @@
             </a:ln>
             <a:extLst>
               <a:ext uri="{91240B29-F687-4f45-9708-019B960494DF}">
-                <a14:hiddenLine xmlns="" xmlns:a14="http://schemas.microsoft.com/office/drawing/2010/main" w="9525">
+                <a14:hiddenLine xmlns:a14="http://schemas.microsoft.com/office/drawing/2010/main" xmlns="" w="9525">
                   <a:solidFill>
                     <a:srgbClr val="000000"/>
                   </a:solidFill>
@@ -9713,7 +9713,7 @@
             </a:ln>
             <a:extLst>
               <a:ext uri="{91240B29-F687-4f45-9708-019B960494DF}">
-                <a14:hiddenLine xmlns="" xmlns:a14="http://schemas.microsoft.com/office/drawing/2010/main" w="9525">
+                <a14:hiddenLine xmlns:a14="http://schemas.microsoft.com/office/drawing/2010/main" xmlns="" w="9525">
                   <a:solidFill>
                     <a:srgbClr val="000000"/>
                   </a:solidFill>
@@ -9782,7 +9782,7 @@
             </a:ln>
             <a:extLst>
               <a:ext uri="{91240B29-F687-4f45-9708-019B960494DF}">
-                <a14:hiddenLine xmlns="" xmlns:a14="http://schemas.microsoft.com/office/drawing/2010/main" w="9525">
+                <a14:hiddenLine xmlns:a14="http://schemas.microsoft.com/office/drawing/2010/main" xmlns="" w="9525">
                   <a:solidFill>
                     <a:srgbClr val="000000"/>
                   </a:solidFill>
@@ -9879,7 +9879,7 @@
             </a:ln>
             <a:extLst>
               <a:ext uri="{91240B29-F687-4f45-9708-019B960494DF}">
-                <a14:hiddenLine xmlns="" xmlns:a14="http://schemas.microsoft.com/office/drawing/2010/main" w="9525">
+                <a14:hiddenLine xmlns:a14="http://schemas.microsoft.com/office/drawing/2010/main" xmlns="" w="9525">
                   <a:solidFill>
                     <a:srgbClr val="000000"/>
                   </a:solidFill>
@@ -9948,7 +9948,7 @@
             </a:ln>
             <a:extLst>
               <a:ext uri="{91240B29-F687-4f45-9708-019B960494DF}">
-                <a14:hiddenLine xmlns="" xmlns:a14="http://schemas.microsoft.com/office/drawing/2010/main" w="9525">
+                <a14:hiddenLine xmlns:a14="http://schemas.microsoft.com/office/drawing/2010/main" xmlns="" w="9525">
                   <a:solidFill>
                     <a:srgbClr val="000000"/>
                   </a:solidFill>
@@ -10045,7 +10045,7 @@
             </a:ln>
             <a:extLst>
               <a:ext uri="{91240B29-F687-4f45-9708-019B960494DF}">
-                <a14:hiddenLine xmlns="" xmlns:a14="http://schemas.microsoft.com/office/drawing/2010/main" w="9525">
+                <a14:hiddenLine xmlns:a14="http://schemas.microsoft.com/office/drawing/2010/main" xmlns="" w="9525">
                   <a:solidFill>
                     <a:srgbClr val="000000"/>
                   </a:solidFill>
@@ -10086,7 +10086,7 @@
             </a:ln>
             <a:extLst>
               <a:ext uri="{91240B29-F687-4f45-9708-019B960494DF}">
-                <a14:hiddenLine xmlns="" xmlns:a14="http://schemas.microsoft.com/office/drawing/2010/main" w="9525">
+                <a14:hiddenLine xmlns:a14="http://schemas.microsoft.com/office/drawing/2010/main" xmlns="" w="9525">
                   <a:solidFill>
                     <a:srgbClr val="000000"/>
                   </a:solidFill>
@@ -10158,7 +10158,7 @@
             </a:ln>
             <a:extLst>
               <a:ext uri="{91240B29-F687-4f45-9708-019B960494DF}">
-                <a14:hiddenLine xmlns="" xmlns:a14="http://schemas.microsoft.com/office/drawing/2010/main" w="9525">
+                <a14:hiddenLine xmlns:a14="http://schemas.microsoft.com/office/drawing/2010/main" xmlns="" w="9525">
                   <a:solidFill>
                     <a:srgbClr val="000000"/>
                   </a:solidFill>
@@ -10255,7 +10255,7 @@
             </a:ln>
             <a:extLst>
               <a:ext uri="{91240B29-F687-4f45-9708-019B960494DF}">
-                <a14:hiddenLine xmlns="" xmlns:a14="http://schemas.microsoft.com/office/drawing/2010/main" w="9525">
+                <a14:hiddenLine xmlns:a14="http://schemas.microsoft.com/office/drawing/2010/main" xmlns="" w="9525">
                   <a:solidFill>
                     <a:srgbClr val="000000"/>
                   </a:solidFill>
@@ -10324,7 +10324,7 @@
             </a:ln>
             <a:extLst>
               <a:ext uri="{91240B29-F687-4f45-9708-019B960494DF}">
-                <a14:hiddenLine xmlns="" xmlns:a14="http://schemas.microsoft.com/office/drawing/2010/main" w="9525">
+                <a14:hiddenLine xmlns:a14="http://schemas.microsoft.com/office/drawing/2010/main" xmlns="" w="9525">
                   <a:solidFill>
                     <a:srgbClr val="000000"/>
                   </a:solidFill>
@@ -10421,7 +10421,7 @@
             </a:ln>
             <a:extLst>
               <a:ext uri="{91240B29-F687-4f45-9708-019B960494DF}">
-                <a14:hiddenLine xmlns="" xmlns:a14="http://schemas.microsoft.com/office/drawing/2010/main" w="9525">
+                <a14:hiddenLine xmlns:a14="http://schemas.microsoft.com/office/drawing/2010/main" xmlns="" w="9525">
                   <a:solidFill>
                     <a:srgbClr val="000000"/>
                   </a:solidFill>
@@ -10518,7 +10518,7 @@
             </a:ln>
             <a:extLst>
               <a:ext uri="{91240B29-F687-4f45-9708-019B960494DF}">
-                <a14:hiddenLine xmlns="" xmlns:a14="http://schemas.microsoft.com/office/drawing/2010/main" w="9525">
+                <a14:hiddenLine xmlns:a14="http://schemas.microsoft.com/office/drawing/2010/main" xmlns="" w="9525">
                   <a:solidFill>
                     <a:srgbClr val="000000"/>
                   </a:solidFill>
@@ -10590,7 +10590,7 @@
             </a:ln>
             <a:extLst>
               <a:ext uri="{91240B29-F687-4f45-9708-019B960494DF}">
-                <a14:hiddenLine xmlns="" xmlns:a14="http://schemas.microsoft.com/office/drawing/2010/main" w="9525">
+                <a14:hiddenLine xmlns:a14="http://schemas.microsoft.com/office/drawing/2010/main" xmlns="" w="9525">
                   <a:solidFill>
                     <a:srgbClr val="000000"/>
                   </a:solidFill>
@@ -10659,7 +10659,7 @@
             </a:ln>
             <a:extLst>
               <a:ext uri="{91240B29-F687-4f45-9708-019B960494DF}">
-                <a14:hiddenLine xmlns="" xmlns:a14="http://schemas.microsoft.com/office/drawing/2010/main" w="9525">
+                <a14:hiddenLine xmlns:a14="http://schemas.microsoft.com/office/drawing/2010/main" xmlns="" w="9525">
                   <a:solidFill>
                     <a:srgbClr val="000000"/>
                   </a:solidFill>
@@ -10756,7 +10756,7 @@
             </a:ln>
             <a:extLst>
               <a:ext uri="{91240B29-F687-4f45-9708-019B960494DF}">
-                <a14:hiddenLine xmlns="" xmlns:a14="http://schemas.microsoft.com/office/drawing/2010/main" w="9525">
+                <a14:hiddenLine xmlns:a14="http://schemas.microsoft.com/office/drawing/2010/main" xmlns="" w="9525">
                   <a:solidFill>
                     <a:srgbClr val="000000"/>
                   </a:solidFill>
@@ -10853,7 +10853,7 @@
             </a:ln>
             <a:extLst>
               <a:ext uri="{91240B29-F687-4f45-9708-019B960494DF}">
-                <a14:hiddenLine xmlns="" xmlns:a14="http://schemas.microsoft.com/office/drawing/2010/main" w="9525">
+                <a14:hiddenLine xmlns:a14="http://schemas.microsoft.com/office/drawing/2010/main" xmlns="" w="9525">
                   <a:solidFill>
                     <a:srgbClr val="000000"/>
                   </a:solidFill>
@@ -10922,7 +10922,7 @@
             </a:ln>
             <a:extLst>
               <a:ext uri="{91240B29-F687-4f45-9708-019B960494DF}">
-                <a14:hiddenLine xmlns="" xmlns:a14="http://schemas.microsoft.com/office/drawing/2010/main" w="9525">
+                <a14:hiddenLine xmlns:a14="http://schemas.microsoft.com/office/drawing/2010/main" xmlns="" w="9525">
                   <a:solidFill>
                     <a:srgbClr val="000000"/>
                   </a:solidFill>
@@ -11049,7 +11049,7 @@
             </a:ln>
             <a:extLst>
               <a:ext uri="{91240B29-F687-4f45-9708-019B960494DF}">
-                <a14:hiddenLine xmlns="" xmlns:a14="http://schemas.microsoft.com/office/drawing/2010/main" w="9525">
+                <a14:hiddenLine xmlns:a14="http://schemas.microsoft.com/office/drawing/2010/main" xmlns="" w="9525">
                   <a:solidFill>
                     <a:srgbClr val="000000"/>
                   </a:solidFill>
@@ -11124,7 +11124,7 @@
             </a:ln>
             <a:extLst>
               <a:ext uri="{91240B29-F687-4f45-9708-019B960494DF}">
-                <a14:hiddenLine xmlns="" xmlns:a14="http://schemas.microsoft.com/office/drawing/2010/main" w="9525">
+                <a14:hiddenLine xmlns:a14="http://schemas.microsoft.com/office/drawing/2010/main" xmlns="" w="9525">
                   <a:solidFill>
                     <a:srgbClr val="000000"/>
                   </a:solidFill>
@@ -11221,7 +11221,7 @@
             </a:ln>
             <a:extLst>
               <a:ext uri="{91240B29-F687-4f45-9708-019B960494DF}">
-                <a14:hiddenLine xmlns="" xmlns:a14="http://schemas.microsoft.com/office/drawing/2010/main" w="9525">
+                <a14:hiddenLine xmlns:a14="http://schemas.microsoft.com/office/drawing/2010/main" xmlns="" w="9525">
                   <a:solidFill>
                     <a:srgbClr val="000000"/>
                   </a:solidFill>
@@ -11368,7 +11368,7 @@
           <a:p>
             <a:fld id="{6733B157-BC8D-485A-B099-210699CD19FB}" type="datetimeFigureOut">
               <a:rPr lang="en-US" smtClean="0"/>
-              <a:t>4/6/2026</a:t>
+              <a:t>4/7/2026</a:t>
             </a:fld>
             <a:endParaRPr lang="en-US"/>
           </a:p>
@@ -11635,7 +11635,7 @@
           <a:p>
             <a:fld id="{6733B157-BC8D-485A-B099-210699CD19FB}" type="datetimeFigureOut">
               <a:rPr lang="en-US" smtClean="0"/>
-              <a:t>4/6/2026</a:t>
+              <a:t>4/7/2026</a:t>
             </a:fld>
             <a:endParaRPr lang="en-US"/>
           </a:p>
@@ -11831,7 +11831,7 @@
           <a:p>
             <a:fld id="{6733B157-BC8D-485A-B099-210699CD19FB}" type="datetimeFigureOut">
               <a:rPr lang="en-US" smtClean="0"/>
-              <a:t>4/6/2026</a:t>
+              <a:t>4/7/2026</a:t>
             </a:fld>
             <a:endParaRPr lang="en-US"/>
           </a:p>
@@ -12094,7 +12094,7 @@
           <a:p>
             <a:fld id="{6733B157-BC8D-485A-B099-210699CD19FB}" type="datetimeFigureOut">
               <a:rPr lang="en-US" smtClean="0"/>
-              <a:t>4/6/2026</a:t>
+              <a:t>4/7/2026</a:t>
             </a:fld>
             <a:endParaRPr lang="en-US"/>
           </a:p>
@@ -12528,7 +12528,7 @@
           <a:p>
             <a:fld id="{6733B157-BC8D-485A-B099-210699CD19FB}" type="datetimeFigureOut">
               <a:rPr lang="en-US" smtClean="0"/>
-              <a:t>4/6/2026</a:t>
+              <a:t>4/7/2026</a:t>
             </a:fld>
             <a:endParaRPr lang="en-US"/>
           </a:p>
@@ -13074,7 +13074,7 @@
           <a:p>
             <a:fld id="{6733B157-BC8D-485A-B099-210699CD19FB}" type="datetimeFigureOut">
               <a:rPr lang="en-US" smtClean="0"/>
-              <a:t>4/6/2026</a:t>
+              <a:t>4/7/2026</a:t>
             </a:fld>
             <a:endParaRPr lang="en-US"/>
           </a:p>
@@ -13794,7 +13794,7 @@
           <a:p>
             <a:fld id="{6733B157-BC8D-485A-B099-210699CD19FB}" type="datetimeFigureOut">
               <a:rPr lang="en-US" smtClean="0"/>
-              <a:t>4/6/2026</a:t>
+              <a:t>4/7/2026</a:t>
             </a:fld>
             <a:endParaRPr lang="en-US"/>
           </a:p>
@@ -13964,7 +13964,7 @@
           <a:p>
             <a:fld id="{6733B157-BC8D-485A-B099-210699CD19FB}" type="datetimeFigureOut">
               <a:rPr lang="en-US" smtClean="0"/>
-              <a:t>4/6/2026</a:t>
+              <a:t>4/7/2026</a:t>
             </a:fld>
             <a:endParaRPr lang="en-US"/>
           </a:p>
@@ -14144,7 +14144,7 @@
           <a:p>
             <a:fld id="{6733B157-BC8D-485A-B099-210699CD19FB}" type="datetimeFigureOut">
               <a:rPr lang="en-US" smtClean="0"/>
-              <a:t>4/6/2026</a:t>
+              <a:t>4/7/2026</a:t>
             </a:fld>
             <a:endParaRPr lang="en-US"/>
           </a:p>
@@ -14314,7 +14314,7 @@
           <a:p>
             <a:fld id="{6733B157-BC8D-485A-B099-210699CD19FB}" type="datetimeFigureOut">
               <a:rPr lang="en-US" smtClean="0"/>
-              <a:t>4/6/2026</a:t>
+              <a:t>4/7/2026</a:t>
             </a:fld>
             <a:endParaRPr lang="en-US"/>
           </a:p>
@@ -14564,7 +14564,7 @@
           <a:p>
             <a:fld id="{6733B157-BC8D-485A-B099-210699CD19FB}" type="datetimeFigureOut">
               <a:rPr lang="en-US" smtClean="0"/>
-              <a:t>4/6/2026</a:t>
+              <a:t>4/7/2026</a:t>
             </a:fld>
             <a:endParaRPr lang="en-US"/>
           </a:p>
@@ -14796,7 +14796,7 @@
           <a:p>
             <a:fld id="{6733B157-BC8D-485A-B099-210699CD19FB}" type="datetimeFigureOut">
               <a:rPr lang="en-US" smtClean="0"/>
-              <a:t>4/6/2026</a:t>
+              <a:t>4/7/2026</a:t>
             </a:fld>
             <a:endParaRPr lang="en-US"/>
           </a:p>
@@ -15177,7 +15177,7 @@
           <a:p>
             <a:fld id="{6733B157-BC8D-485A-B099-210699CD19FB}" type="datetimeFigureOut">
               <a:rPr lang="en-US" smtClean="0"/>
-              <a:t>4/6/2026</a:t>
+              <a:t>4/7/2026</a:t>
             </a:fld>
             <a:endParaRPr lang="en-US"/>
           </a:p>
@@ -15295,7 +15295,7 @@
           <a:p>
             <a:fld id="{6733B157-BC8D-485A-B099-210699CD19FB}" type="datetimeFigureOut">
               <a:rPr lang="en-US" smtClean="0"/>
-              <a:t>4/6/2026</a:t>
+              <a:t>4/7/2026</a:t>
             </a:fld>
             <a:endParaRPr lang="en-US"/>
           </a:p>
@@ -15390,7 +15390,7 @@
           <a:p>
             <a:fld id="{6733B157-BC8D-485A-B099-210699CD19FB}" type="datetimeFigureOut">
               <a:rPr lang="en-US" smtClean="0"/>
-              <a:t>4/6/2026</a:t>
+              <a:t>4/7/2026</a:t>
             </a:fld>
             <a:endParaRPr lang="en-US"/>
           </a:p>
@@ -15639,7 +15639,7 @@
           <a:p>
             <a:fld id="{6733B157-BC8D-485A-B099-210699CD19FB}" type="datetimeFigureOut">
               <a:rPr lang="en-US" smtClean="0"/>
-              <a:t>4/6/2026</a:t>
+              <a:t>4/7/2026</a:t>
             </a:fld>
             <a:endParaRPr lang="en-US"/>
           </a:p>
@@ -15919,7 +15919,7 @@
           <a:p>
             <a:fld id="{6733B157-BC8D-485A-B099-210699CD19FB}" type="datetimeFigureOut">
               <a:rPr lang="en-US" smtClean="0"/>
-              <a:t>4/6/2026</a:t>
+              <a:t>4/7/2026</a:t>
             </a:fld>
             <a:endParaRPr lang="en-US"/>
           </a:p>
@@ -16035,7 +16035,7 @@
           <a:noFill/>
           <a:extLst>
             <a:ext uri="{909E8E84-426E-40dd-AFC4-6F175D3DCCD1}">
-              <a14:hiddenFill xmlns="" xmlns:a14="http://schemas.microsoft.com/office/drawing/2010/main">
+              <a14:hiddenFill xmlns:a14="http://schemas.microsoft.com/office/drawing/2010/main" xmlns="">
                 <a:solidFill>
                   <a:srgbClr val="FFFFFF"/>
                 </a:solidFill>
@@ -16109,7 +16109,7 @@
               </a:ln>
               <a:extLst>
                 <a:ext uri="{91240B29-F687-4f45-9708-019B960494DF}">
-                  <a14:hiddenLine xmlns="" xmlns:a14="http://schemas.microsoft.com/office/drawing/2010/main" w="9525">
+                  <a14:hiddenLine xmlns:a14="http://schemas.microsoft.com/office/drawing/2010/main" xmlns="" w="9525">
                     <a:solidFill>
                       <a:srgbClr val="000000"/>
                     </a:solidFill>
@@ -16206,7 +16206,7 @@
               </a:ln>
               <a:extLst>
                 <a:ext uri="{91240B29-F687-4f45-9708-019B960494DF}">
-                  <a14:hiddenLine xmlns="" xmlns:a14="http://schemas.microsoft.com/office/drawing/2010/main" w="9525">
+                  <a14:hiddenLine xmlns:a14="http://schemas.microsoft.com/office/drawing/2010/main" xmlns="" w="9525">
                     <a:solidFill>
                       <a:srgbClr val="000000"/>
                     </a:solidFill>
@@ -16303,7 +16303,7 @@
               </a:ln>
               <a:extLst>
                 <a:ext uri="{91240B29-F687-4f45-9708-019B960494DF}">
-                  <a14:hiddenLine xmlns="" xmlns:a14="http://schemas.microsoft.com/office/drawing/2010/main" w="9525">
+                  <a14:hiddenLine xmlns:a14="http://schemas.microsoft.com/office/drawing/2010/main" xmlns="" w="9525">
                     <a:solidFill>
                       <a:srgbClr val="000000"/>
                     </a:solidFill>
@@ -16372,7 +16372,7 @@
               </a:ln>
               <a:extLst>
                 <a:ext uri="{91240B29-F687-4f45-9708-019B960494DF}">
-                  <a14:hiddenLine xmlns="" xmlns:a14="http://schemas.microsoft.com/office/drawing/2010/main" w="9525">
+                  <a14:hiddenLine xmlns:a14="http://schemas.microsoft.com/office/drawing/2010/main" xmlns="" w="9525">
                     <a:solidFill>
                       <a:srgbClr val="000000"/>
                     </a:solidFill>
@@ -16469,7 +16469,7 @@
               </a:ln>
               <a:extLst>
                 <a:ext uri="{91240B29-F687-4f45-9708-019B960494DF}">
-                  <a14:hiddenLine xmlns="" xmlns:a14="http://schemas.microsoft.com/office/drawing/2010/main" w="9525">
+                  <a14:hiddenLine xmlns:a14="http://schemas.microsoft.com/office/drawing/2010/main" xmlns="" w="9525">
                     <a:solidFill>
                       <a:srgbClr val="000000"/>
                     </a:solidFill>
@@ -16538,7 +16538,7 @@
               </a:ln>
               <a:extLst>
                 <a:ext uri="{91240B29-F687-4f45-9708-019B960494DF}">
-                  <a14:hiddenLine xmlns="" xmlns:a14="http://schemas.microsoft.com/office/drawing/2010/main" w="9525">
+                  <a14:hiddenLine xmlns:a14="http://schemas.microsoft.com/office/drawing/2010/main" xmlns="" w="9525">
                     <a:solidFill>
                       <a:srgbClr val="000000"/>
                     </a:solidFill>
@@ -16607,7 +16607,7 @@
               </a:ln>
               <a:extLst>
                 <a:ext uri="{91240B29-F687-4f45-9708-019B960494DF}">
-                  <a14:hiddenLine xmlns="" xmlns:a14="http://schemas.microsoft.com/office/drawing/2010/main" w="9525">
+                  <a14:hiddenLine xmlns:a14="http://schemas.microsoft.com/office/drawing/2010/main" xmlns="" w="9525">
                     <a:solidFill>
                       <a:srgbClr val="000000"/>
                     </a:solidFill>
@@ -16704,7 +16704,7 @@
               </a:ln>
               <a:extLst>
                 <a:ext uri="{91240B29-F687-4f45-9708-019B960494DF}">
-                  <a14:hiddenLine xmlns="" xmlns:a14="http://schemas.microsoft.com/office/drawing/2010/main" w="9525">
+                  <a14:hiddenLine xmlns:a14="http://schemas.microsoft.com/office/drawing/2010/main" xmlns="" w="9525">
                     <a:solidFill>
                       <a:srgbClr val="000000"/>
                     </a:solidFill>
@@ -16801,7 +16801,7 @@
               </a:ln>
               <a:extLst>
                 <a:ext uri="{91240B29-F687-4f45-9708-019B960494DF}">
-                  <a14:hiddenLine xmlns="" xmlns:a14="http://schemas.microsoft.com/office/drawing/2010/main" w="9525">
+                  <a14:hiddenLine xmlns:a14="http://schemas.microsoft.com/office/drawing/2010/main" xmlns="" w="9525">
                     <a:solidFill>
                       <a:srgbClr val="000000"/>
                     </a:solidFill>
@@ -16870,7 +16870,7 @@
               </a:ln>
               <a:extLst>
                 <a:ext uri="{91240B29-F687-4f45-9708-019B960494DF}">
-                  <a14:hiddenLine xmlns="" xmlns:a14="http://schemas.microsoft.com/office/drawing/2010/main" w="9525">
+                  <a14:hiddenLine xmlns:a14="http://schemas.microsoft.com/office/drawing/2010/main" xmlns="" w="9525">
                     <a:solidFill>
                       <a:srgbClr val="000000"/>
                     </a:solidFill>
@@ -16987,7 +16987,7 @@
               </a:ln>
               <a:extLst>
                 <a:ext uri="{91240B29-F687-4f45-9708-019B960494DF}">
-                  <a14:hiddenLine xmlns="" xmlns:a14="http://schemas.microsoft.com/office/drawing/2010/main" w="9525">
+                  <a14:hiddenLine xmlns:a14="http://schemas.microsoft.com/office/drawing/2010/main" xmlns="" w="9525">
                     <a:solidFill>
                       <a:srgbClr val="000000"/>
                     </a:solidFill>
@@ -17085,7 +17085,7 @@
               </a:ln>
               <a:extLst>
                 <a:ext uri="{91240B29-F687-4f45-9708-019B960494DF}">
-                  <a14:hiddenLine xmlns="" xmlns:a14="http://schemas.microsoft.com/office/drawing/2010/main" w="9525">
+                  <a14:hiddenLine xmlns:a14="http://schemas.microsoft.com/office/drawing/2010/main" xmlns="" w="9525">
                     <a:solidFill>
                       <a:srgbClr val="000000"/>
                     </a:solidFill>
@@ -17154,7 +17154,7 @@
               </a:ln>
               <a:extLst>
                 <a:ext uri="{91240B29-F687-4f45-9708-019B960494DF}">
-                  <a14:hiddenLine xmlns="" xmlns:a14="http://schemas.microsoft.com/office/drawing/2010/main" w="9525">
+                  <a14:hiddenLine xmlns:a14="http://schemas.microsoft.com/office/drawing/2010/main" xmlns="" w="9525">
                     <a:solidFill>
                       <a:srgbClr val="000000"/>
                     </a:solidFill>
@@ -17223,7 +17223,7 @@
               </a:ln>
               <a:extLst>
                 <a:ext uri="{91240B29-F687-4f45-9708-019B960494DF}">
-                  <a14:hiddenLine xmlns="" xmlns:a14="http://schemas.microsoft.com/office/drawing/2010/main" w="9525">
+                  <a14:hiddenLine xmlns:a14="http://schemas.microsoft.com/office/drawing/2010/main" xmlns="" w="9525">
                     <a:solidFill>
                       <a:srgbClr val="000000"/>
                     </a:solidFill>
@@ -17320,7 +17320,7 @@
               </a:ln>
               <a:extLst>
                 <a:ext uri="{91240B29-F687-4f45-9708-019B960494DF}">
-                  <a14:hiddenLine xmlns="" xmlns:a14="http://schemas.microsoft.com/office/drawing/2010/main" w="9525">
+                  <a14:hiddenLine xmlns:a14="http://schemas.microsoft.com/office/drawing/2010/main" xmlns="" w="9525">
                     <a:solidFill>
                       <a:srgbClr val="000000"/>
                     </a:solidFill>
@@ -17361,7 +17361,7 @@
               </a:ln>
               <a:extLst>
                 <a:ext uri="{91240B29-F687-4f45-9708-019B960494DF}">
-                  <a14:hiddenLine xmlns="" xmlns:a14="http://schemas.microsoft.com/office/drawing/2010/main" w="9525">
+                  <a14:hiddenLine xmlns:a14="http://schemas.microsoft.com/office/drawing/2010/main" xmlns="" w="9525">
                     <a:solidFill>
                       <a:srgbClr val="000000"/>
                     </a:solidFill>
@@ -17433,7 +17433,7 @@
               </a:ln>
               <a:extLst>
                 <a:ext uri="{91240B29-F687-4f45-9708-019B960494DF}">
-                  <a14:hiddenLine xmlns="" xmlns:a14="http://schemas.microsoft.com/office/drawing/2010/main" w="9525">
+                  <a14:hiddenLine xmlns:a14="http://schemas.microsoft.com/office/drawing/2010/main" xmlns="" w="9525">
                     <a:solidFill>
                       <a:srgbClr val="000000"/>
                     </a:solidFill>
@@ -17530,7 +17530,7 @@
               </a:ln>
               <a:extLst>
                 <a:ext uri="{91240B29-F687-4f45-9708-019B960494DF}">
-                  <a14:hiddenLine xmlns="" xmlns:a14="http://schemas.microsoft.com/office/drawing/2010/main" w="9525">
+                  <a14:hiddenLine xmlns:a14="http://schemas.microsoft.com/office/drawing/2010/main" xmlns="" w="9525">
                     <a:solidFill>
                       <a:srgbClr val="000000"/>
                     </a:solidFill>
@@ -17599,7 +17599,7 @@
               </a:ln>
               <a:extLst>
                 <a:ext uri="{91240B29-F687-4f45-9708-019B960494DF}">
-                  <a14:hiddenLine xmlns="" xmlns:a14="http://schemas.microsoft.com/office/drawing/2010/main" w="9525">
+                  <a14:hiddenLine xmlns:a14="http://schemas.microsoft.com/office/drawing/2010/main" xmlns="" w="9525">
                     <a:solidFill>
                       <a:srgbClr val="000000"/>
                     </a:solidFill>
@@ -17696,7 +17696,7 @@
               </a:ln>
               <a:extLst>
                 <a:ext uri="{91240B29-F687-4f45-9708-019B960494DF}">
-                  <a14:hiddenLine xmlns="" xmlns:a14="http://schemas.microsoft.com/office/drawing/2010/main" w="9525">
+                  <a14:hiddenLine xmlns:a14="http://schemas.microsoft.com/office/drawing/2010/main" xmlns="" w="9525">
                     <a:solidFill>
                       <a:srgbClr val="000000"/>
                     </a:solidFill>
@@ -17768,7 +17768,7 @@
               </a:ln>
               <a:extLst>
                 <a:ext uri="{91240B29-F687-4f45-9708-019B960494DF}">
-                  <a14:hiddenLine xmlns="" xmlns:a14="http://schemas.microsoft.com/office/drawing/2010/main" w="9525">
+                  <a14:hiddenLine xmlns:a14="http://schemas.microsoft.com/office/drawing/2010/main" xmlns="" w="9525">
                     <a:solidFill>
                       <a:srgbClr val="000000"/>
                     </a:solidFill>
@@ -17837,7 +17837,7 @@
               </a:ln>
               <a:extLst>
                 <a:ext uri="{91240B29-F687-4f45-9708-019B960494DF}">
-                  <a14:hiddenLine xmlns="" xmlns:a14="http://schemas.microsoft.com/office/drawing/2010/main" w="9525">
+                  <a14:hiddenLine xmlns:a14="http://schemas.microsoft.com/office/drawing/2010/main" xmlns="" w="9525">
                     <a:solidFill>
                       <a:srgbClr val="000000"/>
                     </a:solidFill>
@@ -17934,7 +17934,7 @@
               </a:ln>
               <a:extLst>
                 <a:ext uri="{91240B29-F687-4f45-9708-019B960494DF}">
-                  <a14:hiddenLine xmlns="" xmlns:a14="http://schemas.microsoft.com/office/drawing/2010/main" w="9525">
+                  <a14:hiddenLine xmlns:a14="http://schemas.microsoft.com/office/drawing/2010/main" xmlns="" w="9525">
                     <a:solidFill>
                       <a:srgbClr val="000000"/>
                     </a:solidFill>
@@ -18031,7 +18031,7 @@
               </a:ln>
               <a:extLst>
                 <a:ext uri="{91240B29-F687-4f45-9708-019B960494DF}">
-                  <a14:hiddenLine xmlns="" xmlns:a14="http://schemas.microsoft.com/office/drawing/2010/main" w="9525">
+                  <a14:hiddenLine xmlns:a14="http://schemas.microsoft.com/office/drawing/2010/main" xmlns="" w="9525">
                     <a:solidFill>
                       <a:srgbClr val="000000"/>
                     </a:solidFill>
@@ -18103,7 +18103,7 @@
               </a:ln>
               <a:extLst>
                 <a:ext uri="{91240B29-F687-4f45-9708-019B960494DF}">
-                  <a14:hiddenLine xmlns="" xmlns:a14="http://schemas.microsoft.com/office/drawing/2010/main" w="9525">
+                  <a14:hiddenLine xmlns:a14="http://schemas.microsoft.com/office/drawing/2010/main" xmlns="" w="9525">
                     <a:solidFill>
                       <a:srgbClr val="000000"/>
                     </a:solidFill>
@@ -18230,7 +18230,7 @@
               </a:ln>
               <a:extLst>
                 <a:ext uri="{91240B29-F687-4f45-9708-019B960494DF}">
-                  <a14:hiddenLine xmlns="" xmlns:a14="http://schemas.microsoft.com/office/drawing/2010/main" w="9525">
+                  <a14:hiddenLine xmlns:a14="http://schemas.microsoft.com/office/drawing/2010/main" xmlns="" w="9525">
                     <a:solidFill>
                       <a:srgbClr val="000000"/>
                     </a:solidFill>
@@ -18335,7 +18335,7 @@
               </a:ln>
               <a:extLst>
                 <a:ext uri="{91240B29-F687-4f45-9708-019B960494DF}">
-                  <a14:hiddenLine xmlns="" xmlns:a14="http://schemas.microsoft.com/office/drawing/2010/main" w="9525">
+                  <a14:hiddenLine xmlns:a14="http://schemas.microsoft.com/office/drawing/2010/main" xmlns="" w="9525">
                     <a:solidFill>
                       <a:srgbClr val="000000"/>
                     </a:solidFill>
@@ -18457,7 +18457,7 @@
               </a:ln>
               <a:extLst>
                 <a:ext uri="{91240B29-F687-4f45-9708-019B960494DF}">
-                  <a14:hiddenLine xmlns="" xmlns:a14="http://schemas.microsoft.com/office/drawing/2010/main" w="9525">
+                  <a14:hiddenLine xmlns:a14="http://schemas.microsoft.com/office/drawing/2010/main" xmlns="" w="9525">
                     <a:solidFill>
                       <a:srgbClr val="000000"/>
                     </a:solidFill>
@@ -18554,7 +18554,7 @@
               </a:ln>
               <a:extLst>
                 <a:ext uri="{91240B29-F687-4f45-9708-019B960494DF}">
-                  <a14:hiddenLine xmlns="" xmlns:a14="http://schemas.microsoft.com/office/drawing/2010/main" w="9525">
+                  <a14:hiddenLine xmlns:a14="http://schemas.microsoft.com/office/drawing/2010/main" xmlns="" w="9525">
                     <a:solidFill>
                       <a:srgbClr val="000000"/>
                     </a:solidFill>
@@ -18626,7 +18626,7 @@
               </a:ln>
               <a:extLst>
                 <a:ext uri="{91240B29-F687-4f45-9708-019B960494DF}">
-                  <a14:hiddenLine xmlns="" xmlns:a14="http://schemas.microsoft.com/office/drawing/2010/main" w="9525">
+                  <a14:hiddenLine xmlns:a14="http://schemas.microsoft.com/office/drawing/2010/main" xmlns="" w="9525">
                     <a:solidFill>
                       <a:srgbClr val="000000"/>
                     </a:solidFill>
@@ -18723,7 +18723,7 @@
               </a:ln>
               <a:extLst>
                 <a:ext uri="{91240B29-F687-4f45-9708-019B960494DF}">
-                  <a14:hiddenLine xmlns="" xmlns:a14="http://schemas.microsoft.com/office/drawing/2010/main" w="9525">
+                  <a14:hiddenLine xmlns:a14="http://schemas.microsoft.com/office/drawing/2010/main" xmlns="" w="9525">
                     <a:solidFill>
                       <a:srgbClr val="000000"/>
                     </a:solidFill>
@@ -18798,7 +18798,7 @@
               </a:ln>
               <a:extLst>
                 <a:ext uri="{91240B29-F687-4f45-9708-019B960494DF}">
-                  <a14:hiddenLine xmlns="" xmlns:a14="http://schemas.microsoft.com/office/drawing/2010/main" w="9525">
+                  <a14:hiddenLine xmlns:a14="http://schemas.microsoft.com/office/drawing/2010/main" xmlns="" w="9525">
                     <a:solidFill>
                       <a:srgbClr val="000000"/>
                     </a:solidFill>
@@ -18895,7 +18895,7 @@
               </a:ln>
               <a:extLst>
                 <a:ext uri="{91240B29-F687-4f45-9708-019B960494DF}">
-                  <a14:hiddenLine xmlns="" xmlns:a14="http://schemas.microsoft.com/office/drawing/2010/main" w="9525">
+                  <a14:hiddenLine xmlns:a14="http://schemas.microsoft.com/office/drawing/2010/main" xmlns="" w="9525">
                     <a:solidFill>
                       <a:srgbClr val="000000"/>
                     </a:solidFill>
@@ -18970,7 +18970,7 @@
               </a:ln>
               <a:extLst>
                 <a:ext uri="{91240B29-F687-4f45-9708-019B960494DF}">
-                  <a14:hiddenLine xmlns="" xmlns:a14="http://schemas.microsoft.com/office/drawing/2010/main" w="9525">
+                  <a14:hiddenLine xmlns:a14="http://schemas.microsoft.com/office/drawing/2010/main" xmlns="" w="9525">
                     <a:solidFill>
                       <a:srgbClr val="000000"/>
                     </a:solidFill>
@@ -19067,7 +19067,7 @@
               </a:ln>
               <a:extLst>
                 <a:ext uri="{91240B29-F687-4f45-9708-019B960494DF}">
-                  <a14:hiddenLine xmlns="" xmlns:a14="http://schemas.microsoft.com/office/drawing/2010/main" w="9525">
+                  <a14:hiddenLine xmlns:a14="http://schemas.microsoft.com/office/drawing/2010/main" xmlns="" w="9525">
                     <a:solidFill>
                       <a:srgbClr val="000000"/>
                     </a:solidFill>
@@ -19108,7 +19108,7 @@
               </a:ln>
               <a:extLst>
                 <a:ext uri="{91240B29-F687-4f45-9708-019B960494DF}">
-                  <a14:hiddenLine xmlns="" xmlns:a14="http://schemas.microsoft.com/office/drawing/2010/main" w="9525">
+                  <a14:hiddenLine xmlns:a14="http://schemas.microsoft.com/office/drawing/2010/main" xmlns="" w="9525">
                     <a:solidFill>
                       <a:srgbClr val="000000"/>
                     </a:solidFill>
@@ -19255,7 +19255,7 @@
           <a:p>
             <a:fld id="{6733B157-BC8D-485A-B099-210699CD19FB}" type="datetimeFigureOut">
               <a:rPr lang="en-US" smtClean="0"/>
-              <a:t>4/6/2026</a:t>
+              <a:t>4/7/2026</a:t>
             </a:fld>
             <a:endParaRPr lang="en-US"/>
           </a:p>
@@ -21385,6 +21385,30 @@
 <file path=ppt/slides/slide13.xml><?xml version="1.0" encoding="utf-8"?>
 <p:sld xmlns:a="http://schemas.openxmlformats.org/drawingml/2006/main" xmlns:r="http://schemas.openxmlformats.org/officeDocument/2006/relationships" xmlns:p="http://schemas.openxmlformats.org/presentationml/2006/main">
   <p:cSld>
+    <p:bg>
+      <p:bgPr>
+        <a:blipFill>
+          <a:blip r:embed="rId2">
+            <a:duotone>
+              <a:schemeClr val="bg2">
+                <a:shade val="88000"/>
+                <a:hueMod val="106000"/>
+                <a:satMod val="140000"/>
+                <a:lumMod val="54000"/>
+              </a:schemeClr>
+              <a:schemeClr val="bg2">
+                <a:tint val="98000"/>
+                <a:hueMod val="90000"/>
+                <a:satMod val="150000"/>
+                <a:lumMod val="160000"/>
+              </a:schemeClr>
+            </a:duotone>
+          </a:blip>
+          <a:stretch/>
+        </a:blipFill>
+        <a:effectLst/>
+      </p:bgPr>
+    </p:bg>
     <p:spTree>
       <p:nvGrpSpPr>
         <p:cNvPr id="1" name=""/>
@@ -21415,19 +21439,82 @@
             <p:ph type="title"/>
           </p:nvPr>
         </p:nvSpPr>
-        <p:spPr/>
+        <p:spPr>
+          <a:xfrm>
+            <a:off x="1141413" y="618518"/>
+            <a:ext cx="9905998" cy="1478570"/>
+          </a:xfrm>
+        </p:spPr>
         <p:txBody>
-          <a:bodyPr/>
+          <a:bodyPr>
+            <a:normAutofit/>
+          </a:bodyPr>
           <a:lstStyle/>
           <a:p>
             <a:r>
-              <a:rPr lang="hr-HR" dirty="0"/>
+              <a:rPr lang="hr-HR"/>
               <a:t>TEHNIČKA REALIZACIJA</a:t>
             </a:r>
-            <a:endParaRPr lang="en-US" dirty="0"/>
+            <a:endParaRPr lang="en-US"/>
           </a:p>
         </p:txBody>
       </p:sp>
+      <p:pic>
+        <p:nvPicPr>
+          <p:cNvPr id="5" name="Graphic 4" descr="Mining tools with solid fill">
+            <a:extLst>
+              <a:ext uri="{FF2B5EF4-FFF2-40B4-BE49-F238E27FC236}">
+                <a16:creationId xmlns:a16="http://schemas.microsoft.com/office/drawing/2014/main" id="{C57E0219-EB39-296A-0C00-163EA4CD516F}"/>
+              </a:ext>
+            </a:extLst>
+          </p:cNvPr>
+          <p:cNvPicPr>
+            <a:picLocks noChangeAspect="1"/>
+          </p:cNvPicPr>
+          <p:nvPr/>
+        </p:nvPicPr>
+        <p:blipFill>
+          <a:blip r:embed="rId3">
+            <a:extLst>
+              <a:ext uri="{96DAC541-7B7A-43D3-8B79-37D633B846F1}">
+                <asvg:svgBlip xmlns:asvg="http://schemas.microsoft.com/office/drawing/2016/SVG/main" r:embed="rId4"/>
+              </a:ext>
+            </a:extLst>
+          </a:blip>
+          <a:stretch>
+            <a:fillRect/>
+          </a:stretch>
+        </p:blipFill>
+        <p:spPr>
+          <a:xfrm>
+            <a:off x="1141411" y="2277013"/>
+            <a:ext cx="3494597" cy="3494597"/>
+          </a:xfrm>
+          <a:prstGeom prst="round2DiagRect">
+            <a:avLst>
+              <a:gd name="adj1" fmla="val 5608"/>
+              <a:gd name="adj2" fmla="val 0"/>
+            </a:avLst>
+          </a:prstGeom>
+          <a:ln w="19050" cap="sq">
+            <a:solidFill>
+              <a:schemeClr val="tx2">
+                <a:lumMod val="60000"/>
+                <a:lumOff val="40000"/>
+                <a:alpha val="60000"/>
+              </a:schemeClr>
+            </a:solidFill>
+            <a:miter lim="800000"/>
+          </a:ln>
+          <a:effectLst>
+            <a:outerShdw blurRad="88900" dist="38100" dir="5400000" algn="t" rotWithShape="0">
+              <a:prstClr val="black">
+                <a:alpha val="40000"/>
+              </a:prstClr>
+            </a:outerShdw>
+          </a:effectLst>
+        </p:spPr>
+      </p:pic>
       <p:sp>
         <p:nvSpPr>
           <p:cNvPr id="4" name="Rectangle 1">
@@ -21446,17 +21533,12 @@
         </p:nvSpPr>
         <p:spPr bwMode="auto">
           <a:xfrm>
-            <a:off x="838200" y="2060020"/>
-            <a:ext cx="6477607" cy="2217082"/>
+            <a:off x="5034579" y="2249487"/>
+            <a:ext cx="6012832" cy="3541714"/>
           </a:xfrm>
           <a:prstGeom prst="rect">
             <a:avLst/>
           </a:prstGeom>
-          <a:noFill/>
-          <a:ln>
-            <a:noFill/>
-          </a:ln>
-          <a:effectLst/>
           <a:extLst>
             <a:ext uri="{909E8E84-426E-40DD-AFC4-6F175D3DCCD1}">
               <a14:hiddenFill xmlns:a14="http://schemas.microsoft.com/office/drawing/2010/main">
@@ -21487,23 +21569,20 @@
           </a:extLst>
         </p:spPr>
         <p:txBody>
-          <a:bodyPr vert="horz" wrap="none" lIns="91440" tIns="45720" rIns="91440" bIns="45720" numCol="1" anchor="ctr" anchorCtr="0" compatLnSpc="1">
+          <a:bodyPr vert="horz" lIns="91440" tIns="45720" rIns="91440" bIns="45720" numCol="1" anchorCtr="0" compatLnSpc="1">
             <a:prstTxWarp prst="textNoShape">
               <a:avLst/>
             </a:prstTxWarp>
-            <a:spAutoFit/>
+            <a:normAutofit/>
           </a:bodyPr>
           <a:lstStyle/>
           <a:p>
-            <a:pPr marL="0" marR="0" lvl="0" indent="0" algn="l" defTabSz="914400" rtl="0" eaLnBrk="0" fontAlgn="base" latinLnBrk="0" hangingPunct="0">
-              <a:lnSpc>
-                <a:spcPct val="150000"/>
-              </a:lnSpc>
+            <a:pPr marL="0" marR="0" lvl="0" indent="0" defTabSz="914400" rtl="0" eaLnBrk="0" fontAlgn="base" latinLnBrk="0" hangingPunct="0">
               <a:spcBef>
                 <a:spcPct val="0"/>
               </a:spcBef>
               <a:spcAft>
-                <a:spcPct val="0"/>
+                <a:spcPts val="600"/>
               </a:spcAft>
               <a:buClrTx/>
               <a:buSzTx/>
@@ -21512,52 +21591,40 @@
               <a:tabLst/>
             </a:pPr>
             <a:r>
-              <a:rPr kumimoji="0" lang="en-US" altLang="en-US" sz="3200" b="0" i="0" u="none" strike="noStrike" cap="none" normalizeH="0" baseline="0" dirty="0">
+              <a:rPr kumimoji="0" lang="en-US" altLang="en-US" b="0" i="0" u="none" strike="noStrike" cap="none" normalizeH="0" baseline="0">
                 <a:ln>
                   <a:noFill/>
                 </a:ln>
-                <a:solidFill>
-                  <a:schemeClr val="tx1"/>
-                </a:solidFill>
                 <a:effectLst/>
                 <a:latin typeface="Arial" panose="020B0604020202020204" pitchFamily="34" charset="0"/>
               </a:rPr>
               <a:t>TypeScript – VS Code </a:t>
             </a:r>
             <a:r>
-              <a:rPr kumimoji="0" lang="en-US" altLang="en-US" sz="3200" b="0" i="0" u="none" strike="noStrike" cap="none" normalizeH="0" baseline="0" dirty="0" err="1">
+              <a:rPr kumimoji="0" lang="en-US" altLang="en-US" b="0" i="0" u="none" strike="noStrike" cap="none" normalizeH="0" baseline="0" err="1">
                 <a:ln>
                   <a:noFill/>
                 </a:ln>
-                <a:solidFill>
-                  <a:schemeClr val="tx1"/>
-                </a:solidFill>
                 <a:effectLst/>
                 <a:latin typeface="Arial" panose="020B0604020202020204" pitchFamily="34" charset="0"/>
               </a:rPr>
               <a:t>ekstenzija</a:t>
             </a:r>
-            <a:endParaRPr kumimoji="0" lang="en-US" altLang="en-US" sz="3200" b="0" i="0" u="none" strike="noStrike" cap="none" normalizeH="0" baseline="0" dirty="0">
+            <a:endParaRPr kumimoji="0" lang="hr-HR" altLang="en-US" b="0" i="0" u="none" strike="noStrike" cap="none" normalizeH="0" baseline="0">
               <a:ln>
                 <a:noFill/>
               </a:ln>
-              <a:solidFill>
-                <a:schemeClr val="tx1"/>
-              </a:solidFill>
               <a:effectLst/>
               <a:latin typeface="Arial" panose="020B0604020202020204" pitchFamily="34" charset="0"/>
             </a:endParaRPr>
           </a:p>
           <a:p>
-            <a:pPr marL="0" marR="0" lvl="0" indent="0" algn="l" defTabSz="914400" rtl="0" eaLnBrk="0" fontAlgn="base" latinLnBrk="0" hangingPunct="0">
-              <a:lnSpc>
-                <a:spcPct val="150000"/>
-              </a:lnSpc>
+            <a:pPr marL="0" marR="0" lvl="0" indent="0" defTabSz="914400" rtl="0" eaLnBrk="0" fontAlgn="base" latinLnBrk="0" hangingPunct="0">
               <a:spcBef>
                 <a:spcPct val="0"/>
               </a:spcBef>
               <a:spcAft>
-                <a:spcPct val="0"/>
+                <a:spcPts val="600"/>
               </a:spcAft>
               <a:buClrTx/>
               <a:buSzTx/>
@@ -21566,91 +21633,38 @@
               <a:tabLst/>
             </a:pPr>
             <a:r>
-              <a:rPr kumimoji="0" lang="en-US" altLang="en-US" sz="3200" b="0" i="0" u="none" strike="noStrike" cap="none" normalizeH="0" baseline="0" dirty="0">
-                <a:ln>
-                  <a:noFill/>
-                </a:ln>
-                <a:solidFill>
-                  <a:schemeClr val="tx1"/>
-                </a:solidFill>
-                <a:effectLst/>
+              <a:rPr lang="hr-HR" altLang="en-US" err="1">
                 <a:latin typeface="Arial" panose="020B0604020202020204" pitchFamily="34" charset="0"/>
               </a:rPr>
-              <a:t>Python </a:t>
+              <a:t>TypeScript</a:t>
             </a:r>
             <a:r>
-              <a:rPr kumimoji="0" lang="hr-HR" altLang="en-US" sz="3200" b="0" i="0" u="none" strike="noStrike" cap="none" normalizeH="0" baseline="0" dirty="0">
-                <a:ln>
-                  <a:noFill/>
-                </a:ln>
-                <a:solidFill>
-                  <a:schemeClr val="tx1"/>
-                </a:solidFill>
-                <a:effectLst/>
-                <a:latin typeface="Arial" panose="020B0604020202020204" pitchFamily="34" charset="0"/>
-              </a:rPr>
-              <a:t>+ </a:t>
-            </a:r>
-            <a:r>
-              <a:rPr kumimoji="0" lang="hr-HR" altLang="en-US" sz="3200" b="0" i="0" u="none" strike="noStrike" cap="none" normalizeH="0" baseline="0" dirty="0" err="1">
-                <a:ln>
-                  <a:noFill/>
-                </a:ln>
-                <a:solidFill>
-                  <a:schemeClr val="tx1"/>
-                </a:solidFill>
-                <a:effectLst/>
-                <a:latin typeface="Arial" panose="020B0604020202020204" pitchFamily="34" charset="0"/>
-              </a:rPr>
-              <a:t>WebView</a:t>
-            </a:r>
-            <a:r>
-              <a:rPr kumimoji="0" lang="hr-HR" altLang="en-US" sz="3200" b="0" i="0" u="none" strike="noStrike" cap="none" normalizeH="0" baseline="0" dirty="0">
-                <a:ln>
-                  <a:noFill/>
-                </a:ln>
-                <a:solidFill>
-                  <a:schemeClr val="tx1"/>
-                </a:solidFill>
-                <a:effectLst/>
+              <a:rPr lang="hr-HR" altLang="en-US">
                 <a:latin typeface="Arial" panose="020B0604020202020204" pitchFamily="34" charset="0"/>
               </a:rPr>
               <a:t> </a:t>
             </a:r>
             <a:r>
-              <a:rPr kumimoji="0" lang="en-US" altLang="en-US" sz="3200" b="0" i="0" u="none" strike="noStrike" cap="none" normalizeH="0" baseline="0" dirty="0">
-                <a:ln>
-                  <a:noFill/>
-                </a:ln>
-                <a:solidFill>
-                  <a:schemeClr val="tx1"/>
-                </a:solidFill>
-                <a:effectLst/>
+              <a:rPr lang="hr-HR" altLang="en-US" err="1">
                 <a:latin typeface="Arial" panose="020B0604020202020204" pitchFamily="34" charset="0"/>
               </a:rPr>
-              <a:t>– Ishihara test</a:t>
+              <a:t>lint</a:t>
             </a:r>
-            <a:endParaRPr kumimoji="0" lang="hr-HR" altLang="en-US" sz="3200" b="0" i="0" u="none" strike="noStrike" cap="none" normalizeH="0" baseline="0" dirty="0">
+            <a:endParaRPr kumimoji="0" lang="en-US" altLang="en-US" b="0" i="0" u="none" strike="noStrike" cap="none" normalizeH="0" baseline="0">
               <a:ln>
                 <a:noFill/>
               </a:ln>
-              <a:solidFill>
-                <a:schemeClr val="tx1"/>
-              </a:solidFill>
               <a:effectLst/>
               <a:latin typeface="Arial" panose="020B0604020202020204" pitchFamily="34" charset="0"/>
             </a:endParaRPr>
           </a:p>
           <a:p>
-            <a:pPr marL="0" marR="0" lvl="0" indent="0" algn="l" defTabSz="914400" rtl="0" eaLnBrk="0" fontAlgn="base" latinLnBrk="0" hangingPunct="0">
-              <a:lnSpc>
-                <a:spcPct val="150000"/>
-              </a:lnSpc>
+            <a:pPr marL="0" marR="0" lvl="0" indent="0" defTabSz="914400" rtl="0" eaLnBrk="0" fontAlgn="base" latinLnBrk="0" hangingPunct="0">
               <a:spcBef>
                 <a:spcPct val="0"/>
               </a:spcBef>
               <a:spcAft>
-                <a:spcPct val="0"/>
+                <a:spcPts val="600"/>
               </a:spcAft>
               <a:buClrTx/>
               <a:buSzTx/>
@@ -21659,116 +21673,161 @@
               <a:tabLst/>
             </a:pPr>
             <a:r>
-              <a:rPr kumimoji="0" lang="en-US" altLang="en-US" sz="3200" b="0" i="0" u="none" strike="noStrike" cap="none" normalizeH="0" baseline="0" dirty="0">
+              <a:rPr kumimoji="0" lang="en-US" altLang="en-US" b="0" i="0" u="none" strike="noStrike" cap="none" normalizeH="0" baseline="0">
                 <a:ln>
                   <a:noFill/>
                 </a:ln>
-                <a:solidFill>
-                  <a:schemeClr val="tx1"/>
-                </a:solidFill>
+                <a:effectLst/>
+                <a:latin typeface="Arial" panose="020B0604020202020204" pitchFamily="34" charset="0"/>
+              </a:rPr>
+              <a:t>Python </a:t>
+            </a:r>
+            <a:r>
+              <a:rPr kumimoji="0" lang="hr-HR" altLang="en-US" b="0" i="0" u="none" strike="noStrike" cap="none" normalizeH="0" baseline="0">
+                <a:ln>
+                  <a:noFill/>
+                </a:ln>
+                <a:effectLst/>
+                <a:latin typeface="Arial" panose="020B0604020202020204" pitchFamily="34" charset="0"/>
+              </a:rPr>
+              <a:t>+ </a:t>
+            </a:r>
+            <a:r>
+              <a:rPr kumimoji="0" lang="hr-HR" altLang="en-US" b="0" i="0" u="none" strike="noStrike" cap="none" normalizeH="0" baseline="0" err="1">
+                <a:ln>
+                  <a:noFill/>
+                </a:ln>
+                <a:effectLst/>
+                <a:latin typeface="Arial" panose="020B0604020202020204" pitchFamily="34" charset="0"/>
+              </a:rPr>
+              <a:t>WebView</a:t>
+            </a:r>
+            <a:r>
+              <a:rPr kumimoji="0" lang="hr-HR" altLang="en-US" b="0" i="0" u="none" strike="noStrike" cap="none" normalizeH="0" baseline="0">
+                <a:ln>
+                  <a:noFill/>
+                </a:ln>
+                <a:effectLst/>
+                <a:latin typeface="Arial" panose="020B0604020202020204" pitchFamily="34" charset="0"/>
+              </a:rPr>
+              <a:t> </a:t>
+            </a:r>
+            <a:r>
+              <a:rPr kumimoji="0" lang="en-US" altLang="en-US" b="0" i="0" u="none" strike="noStrike" cap="none" normalizeH="0" baseline="0">
+                <a:ln>
+                  <a:noFill/>
+                </a:ln>
+                <a:effectLst/>
+                <a:latin typeface="Arial" panose="020B0604020202020204" pitchFamily="34" charset="0"/>
+              </a:rPr>
+              <a:t>– Ishihara test</a:t>
+            </a:r>
+            <a:endParaRPr kumimoji="0" lang="hr-HR" altLang="en-US" b="0" i="0" u="none" strike="noStrike" cap="none" normalizeH="0" baseline="0">
+              <a:ln>
+                <a:noFill/>
+              </a:ln>
+              <a:effectLst/>
+              <a:latin typeface="Arial" panose="020B0604020202020204" pitchFamily="34" charset="0"/>
+            </a:endParaRPr>
+          </a:p>
+          <a:p>
+            <a:pPr marL="0" marR="0" lvl="0" indent="0" defTabSz="914400" rtl="0" eaLnBrk="0" fontAlgn="base" latinLnBrk="0" hangingPunct="0">
+              <a:spcBef>
+                <a:spcPct val="0"/>
+              </a:spcBef>
+              <a:spcAft>
+                <a:spcPts val="600"/>
+              </a:spcAft>
+              <a:buClrTx/>
+              <a:buSzTx/>
+              <a:buFontTx/>
+              <a:buChar char="•"/>
+              <a:tabLst/>
+            </a:pPr>
+            <a:r>
+              <a:rPr kumimoji="0" lang="en-US" altLang="en-US" b="0" i="0" u="none" strike="noStrike" cap="none" normalizeH="0" baseline="0">
+                <a:ln>
+                  <a:noFill/>
+                </a:ln>
                 <a:effectLst/>
                 <a:latin typeface="Arial" panose="020B0604020202020204" pitchFamily="34" charset="0"/>
               </a:rPr>
               <a:t>Ne </a:t>
             </a:r>
             <a:r>
-              <a:rPr kumimoji="0" lang="en-US" altLang="en-US" sz="3200" b="0" i="0" u="none" strike="noStrike" cap="none" normalizeH="0" baseline="0" dirty="0" err="1">
+              <a:rPr kumimoji="0" lang="en-US" altLang="en-US" b="0" i="0" u="none" strike="noStrike" cap="none" normalizeH="0" baseline="0" err="1">
                 <a:ln>
                   <a:noFill/>
                 </a:ln>
-                <a:solidFill>
-                  <a:schemeClr val="tx1"/>
-                </a:solidFill>
                 <a:effectLst/>
                 <a:latin typeface="Arial" panose="020B0604020202020204" pitchFamily="34" charset="0"/>
               </a:rPr>
               <a:t>mijenja</a:t>
             </a:r>
             <a:r>
-              <a:rPr kumimoji="0" lang="en-US" altLang="en-US" sz="3200" b="0" i="0" u="none" strike="noStrike" cap="none" normalizeH="0" baseline="0" dirty="0">
+              <a:rPr kumimoji="0" lang="en-US" altLang="en-US" b="0" i="0" u="none" strike="noStrike" cap="none" normalizeH="0" baseline="0">
                 <a:ln>
                   <a:noFill/>
                 </a:ln>
-                <a:solidFill>
-                  <a:schemeClr val="tx1"/>
-                </a:solidFill>
                 <a:effectLst/>
                 <a:latin typeface="Arial" panose="020B0604020202020204" pitchFamily="34" charset="0"/>
               </a:rPr>
               <a:t> </a:t>
             </a:r>
             <a:r>
-              <a:rPr kumimoji="0" lang="en-US" altLang="en-US" sz="3200" b="0" i="0" u="none" strike="noStrike" cap="none" normalizeH="0" baseline="0" dirty="0" err="1">
+              <a:rPr kumimoji="0" lang="en-US" altLang="en-US" b="0" i="0" u="none" strike="noStrike" cap="none" normalizeH="0" baseline="0" err="1">
                 <a:ln>
                   <a:noFill/>
                 </a:ln>
-                <a:solidFill>
-                  <a:schemeClr val="tx1"/>
-                </a:solidFill>
                 <a:effectLst/>
                 <a:latin typeface="Arial" panose="020B0604020202020204" pitchFamily="34" charset="0"/>
               </a:rPr>
               <a:t>izvorni</a:t>
             </a:r>
             <a:r>
-              <a:rPr kumimoji="0" lang="en-US" altLang="en-US" sz="3200" b="0" i="0" u="none" strike="noStrike" cap="none" normalizeH="0" baseline="0" dirty="0">
+              <a:rPr kumimoji="0" lang="en-US" altLang="en-US" b="0" i="0" u="none" strike="noStrike" cap="none" normalizeH="0" baseline="0">
                 <a:ln>
                   <a:noFill/>
                 </a:ln>
-                <a:solidFill>
-                  <a:schemeClr val="tx1"/>
-                </a:solidFill>
                 <a:effectLst/>
                 <a:latin typeface="Arial" panose="020B0604020202020204" pitchFamily="34" charset="0"/>
               </a:rPr>
               <a:t> </a:t>
             </a:r>
             <a:r>
-              <a:rPr kumimoji="0" lang="en-US" altLang="en-US" sz="3200" b="0" i="0" u="none" strike="noStrike" cap="none" normalizeH="0" baseline="0" dirty="0" err="1">
+              <a:rPr kumimoji="0" lang="en-US" altLang="en-US" b="0" i="0" u="none" strike="noStrike" cap="none" normalizeH="0" baseline="0" err="1">
                 <a:ln>
                   <a:noFill/>
                 </a:ln>
-                <a:solidFill>
-                  <a:schemeClr val="tx1"/>
-                </a:solidFill>
                 <a:effectLst/>
                 <a:latin typeface="Arial" panose="020B0604020202020204" pitchFamily="34" charset="0"/>
               </a:rPr>
               <a:t>kod</a:t>
             </a:r>
             <a:r>
-              <a:rPr kumimoji="0" lang="en-US" altLang="en-US" sz="3200" b="0" i="0" u="none" strike="noStrike" cap="none" normalizeH="0" baseline="0" dirty="0">
+              <a:rPr kumimoji="0" lang="en-US" altLang="en-US" b="0" i="0" u="none" strike="noStrike" cap="none" normalizeH="0" baseline="0">
                 <a:ln>
                   <a:noFill/>
                 </a:ln>
-                <a:solidFill>
-                  <a:schemeClr val="tx1"/>
-                </a:solidFill>
                 <a:effectLst/>
                 <a:latin typeface="Arial" panose="020B0604020202020204" pitchFamily="34" charset="0"/>
               </a:rPr>
               <a:t> </a:t>
             </a:r>
             <a:r>
-              <a:rPr kumimoji="0" lang="en-US" altLang="en-US" sz="3200" b="0" i="0" u="none" strike="noStrike" cap="none" normalizeH="0" baseline="0" dirty="0" err="1">
+              <a:rPr kumimoji="0" lang="en-US" altLang="en-US" b="0" i="0" u="none" strike="noStrike" cap="none" normalizeH="0" baseline="0" err="1">
                 <a:ln>
                   <a:noFill/>
                 </a:ln>
-                <a:solidFill>
-                  <a:schemeClr val="tx1"/>
-                </a:solidFill>
                 <a:effectLst/>
                 <a:latin typeface="Arial" panose="020B0604020202020204" pitchFamily="34" charset="0"/>
               </a:rPr>
               <a:t>korisnika</a:t>
             </a:r>
-            <a:endParaRPr kumimoji="0" lang="en-US" altLang="en-US" sz="3200" b="0" i="0" u="none" strike="noStrike" cap="none" normalizeH="0" baseline="0" dirty="0">
+            <a:endParaRPr kumimoji="0" lang="en-US" altLang="en-US" b="0" i="0" u="none" strike="noStrike" cap="none" normalizeH="0" baseline="0">
               <a:ln>
                 <a:noFill/>
               </a:ln>
-              <a:solidFill>
-                <a:schemeClr val="tx1"/>
-              </a:solidFill>
               <a:effectLst/>
               <a:latin typeface="Arial" panose="020B0604020202020204" pitchFamily="34" charset="0"/>
             </a:endParaRPr>
@@ -21974,6 +22033,67 @@
                                           <p:spTgt spid="4">
                                             <p:txEl>
                                               <p:pRg st="2" end="2"/>
+                                            </p:txEl>
+                                          </p:spTgt>
+                                        </p:tgtEl>
+                                      </p:cBhvr>
+                                    </p:animEffect>
+                                  </p:childTnLst>
+                                </p:cTn>
+                              </p:par>
+                            </p:childTnLst>
+                          </p:cTn>
+                        </p:par>
+                      </p:childTnLst>
+                    </p:cTn>
+                  </p:par>
+                  <p:par>
+                    <p:cTn id="18" fill="hold">
+                      <p:stCondLst>
+                        <p:cond delay="indefinite"/>
+                      </p:stCondLst>
+                      <p:childTnLst>
+                        <p:par>
+                          <p:cTn id="19" fill="hold">
+                            <p:stCondLst>
+                              <p:cond delay="0"/>
+                            </p:stCondLst>
+                            <p:childTnLst>
+                              <p:par>
+                                <p:cTn id="20" presetID="10" presetClass="entr" presetSubtype="0" fill="hold" grpId="0" nodeType="clickEffect">
+                                  <p:stCondLst>
+                                    <p:cond delay="0"/>
+                                  </p:stCondLst>
+                                  <p:childTnLst>
+                                    <p:set>
+                                      <p:cBhvr>
+                                        <p:cTn id="21" dur="1" fill="hold">
+                                          <p:stCondLst>
+                                            <p:cond delay="0"/>
+                                          </p:stCondLst>
+                                        </p:cTn>
+                                        <p:tgtEl>
+                                          <p:spTgt spid="4">
+                                            <p:txEl>
+                                              <p:pRg st="3" end="3"/>
+                                            </p:txEl>
+                                          </p:spTgt>
+                                        </p:tgtEl>
+                                        <p:attrNameLst>
+                                          <p:attrName>style.visibility</p:attrName>
+                                        </p:attrNameLst>
+                                      </p:cBhvr>
+                                      <p:to>
+                                        <p:strVal val="visible"/>
+                                      </p:to>
+                                    </p:set>
+                                    <p:animEffect transition="in" filter="fade">
+                                      <p:cBhvr>
+                                        <p:cTn id="22" dur="500"/>
+                                        <p:tgtEl>
+                                          <p:spTgt spid="4">
+                                            <p:txEl>
+                                              <p:pRg st="3" end="3"/>
                                             </p:txEl>
                                           </p:spTgt>
                                         </p:tgtEl>
@@ -22201,7 +22321,7 @@
             <a:noFill/>
             <a:extLst>
               <a:ext uri="{909E8E84-426E-40dd-AFC4-6F175D3DCCD1}">
-                <a14:hiddenFill xmlns:p14="http://schemas.microsoft.com/office/powerpoint/2010/main" xmlns:a14="http://schemas.microsoft.com/office/drawing/2010/main" xmlns:a16="http://schemas.microsoft.com/office/drawing/2014/main" xmlns="">
+                <a14:hiddenFill xmlns="" xmlns:a16="http://schemas.microsoft.com/office/drawing/2014/main" xmlns:a14="http://schemas.microsoft.com/office/drawing/2010/main" xmlns:p14="http://schemas.microsoft.com/office/powerpoint/2010/main">
                   <a:solidFill>
                     <a:srgbClr val="FFFFFF"/>
                   </a:solidFill>
@@ -22321,7 +22441,7 @@
             </a:ln>
             <a:extLst>
               <a:ext uri="{91240B29-F687-4f45-9708-019B960494DF}">
-                <a14:hiddenLine xmlns:p14="http://schemas.microsoft.com/office/powerpoint/2010/main" xmlns:a14="http://schemas.microsoft.com/office/drawing/2010/main" xmlns:a16="http://schemas.microsoft.com/office/drawing/2014/main" xmlns="" w="9525">
+                <a14:hiddenLine xmlns="" xmlns:a16="http://schemas.microsoft.com/office/drawing/2014/main" xmlns:a14="http://schemas.microsoft.com/office/drawing/2010/main" xmlns:p14="http://schemas.microsoft.com/office/powerpoint/2010/main" w="9525">
                   <a:solidFill>
                     <a:srgbClr val="000000"/>
                   </a:solidFill>
@@ -22433,7 +22553,7 @@
             </a:ln>
             <a:extLst>
               <a:ext uri="{91240B29-F687-4f45-9708-019B960494DF}">
-                <a14:hiddenLine xmlns:p14="http://schemas.microsoft.com/office/powerpoint/2010/main" xmlns:a14="http://schemas.microsoft.com/office/drawing/2010/main" xmlns:a16="http://schemas.microsoft.com/office/drawing/2014/main" xmlns="" w="9525">
+                <a14:hiddenLine xmlns="" xmlns:a16="http://schemas.microsoft.com/office/drawing/2014/main" xmlns:a14="http://schemas.microsoft.com/office/drawing/2010/main" xmlns:p14="http://schemas.microsoft.com/office/powerpoint/2010/main" w="9525">
                   <a:solidFill>
                     <a:srgbClr val="000000"/>
                   </a:solidFill>
@@ -22545,7 +22665,7 @@
             </a:ln>
             <a:extLst>
               <a:ext uri="{91240B29-F687-4f45-9708-019B960494DF}">
-                <a14:hiddenLine xmlns:p14="http://schemas.microsoft.com/office/powerpoint/2010/main" xmlns:a14="http://schemas.microsoft.com/office/drawing/2010/main" xmlns:a16="http://schemas.microsoft.com/office/drawing/2014/main" xmlns="" w="9525">
+                <a14:hiddenLine xmlns="" xmlns:a16="http://schemas.microsoft.com/office/drawing/2014/main" xmlns:a14="http://schemas.microsoft.com/office/drawing/2010/main" xmlns:p14="http://schemas.microsoft.com/office/powerpoint/2010/main" w="9525">
                   <a:solidFill>
                     <a:srgbClr val="000000"/>
                   </a:solidFill>
@@ -22601,7 +22721,7 @@
             </a:ln>
             <a:extLst>
               <a:ext uri="{91240B29-F687-4f45-9708-019B960494DF}">
-                <a14:hiddenLine xmlns:p14="http://schemas.microsoft.com/office/powerpoint/2010/main" xmlns:a14="http://schemas.microsoft.com/office/drawing/2010/main" xmlns:a16="http://schemas.microsoft.com/office/drawing/2014/main" xmlns="" w="9525">
+                <a14:hiddenLine xmlns="" xmlns:a16="http://schemas.microsoft.com/office/drawing/2014/main" xmlns:a14="http://schemas.microsoft.com/office/drawing/2010/main" xmlns:p14="http://schemas.microsoft.com/office/powerpoint/2010/main" w="9525">
                   <a:solidFill>
                     <a:srgbClr val="000000"/>
                   </a:solidFill>
@@ -22713,7 +22833,7 @@
             </a:ln>
             <a:extLst>
               <a:ext uri="{91240B29-F687-4f45-9708-019B960494DF}">
-                <a14:hiddenLine xmlns:p14="http://schemas.microsoft.com/office/powerpoint/2010/main" xmlns:a14="http://schemas.microsoft.com/office/drawing/2010/main" xmlns:a16="http://schemas.microsoft.com/office/drawing/2014/main" xmlns="" w="9525">
+                <a14:hiddenLine xmlns="" xmlns:a16="http://schemas.microsoft.com/office/drawing/2014/main" xmlns:a14="http://schemas.microsoft.com/office/drawing/2010/main" xmlns:p14="http://schemas.microsoft.com/office/powerpoint/2010/main" w="9525">
                   <a:solidFill>
                     <a:srgbClr val="000000"/>
                   </a:solidFill>
@@ -22797,7 +22917,7 @@
             </a:ln>
             <a:extLst>
               <a:ext uri="{91240B29-F687-4f45-9708-019B960494DF}">
-                <a14:hiddenLine xmlns:p14="http://schemas.microsoft.com/office/powerpoint/2010/main" xmlns:a14="http://schemas.microsoft.com/office/drawing/2010/main" xmlns:a16="http://schemas.microsoft.com/office/drawing/2014/main" xmlns="" w="9525">
+                <a14:hiddenLine xmlns="" xmlns:a16="http://schemas.microsoft.com/office/drawing/2014/main" xmlns:a14="http://schemas.microsoft.com/office/drawing/2010/main" xmlns:p14="http://schemas.microsoft.com/office/powerpoint/2010/main" w="9525">
                   <a:solidFill>
                     <a:srgbClr val="000000"/>
                   </a:solidFill>
@@ -22881,7 +23001,7 @@
             </a:ln>
             <a:extLst>
               <a:ext uri="{91240B29-F687-4f45-9708-019B960494DF}">
-                <a14:hiddenLine xmlns:p14="http://schemas.microsoft.com/office/powerpoint/2010/main" xmlns:a14="http://schemas.microsoft.com/office/drawing/2010/main" xmlns:a16="http://schemas.microsoft.com/office/drawing/2014/main" xmlns="" w="9525">
+                <a14:hiddenLine xmlns="" xmlns:a16="http://schemas.microsoft.com/office/drawing/2014/main" xmlns:a14="http://schemas.microsoft.com/office/drawing/2010/main" xmlns:p14="http://schemas.microsoft.com/office/powerpoint/2010/main" w="9525">
                   <a:solidFill>
                     <a:srgbClr val="000000"/>
                   </a:solidFill>
@@ -22993,7 +23113,7 @@
             </a:ln>
             <a:extLst>
               <a:ext uri="{91240B29-F687-4f45-9708-019B960494DF}">
-                <a14:hiddenLine xmlns:p14="http://schemas.microsoft.com/office/powerpoint/2010/main" xmlns:a14="http://schemas.microsoft.com/office/drawing/2010/main" xmlns:a16="http://schemas.microsoft.com/office/drawing/2014/main" xmlns="" w="9525">
+                <a14:hiddenLine xmlns="" xmlns:a16="http://schemas.microsoft.com/office/drawing/2014/main" xmlns:a14="http://schemas.microsoft.com/office/drawing/2010/main" xmlns:p14="http://schemas.microsoft.com/office/powerpoint/2010/main" w="9525">
                   <a:solidFill>
                     <a:srgbClr val="000000"/>
                   </a:solidFill>
@@ -23077,7 +23197,7 @@
             </a:ln>
             <a:extLst>
               <a:ext uri="{91240B29-F687-4f45-9708-019B960494DF}">
-                <a14:hiddenLine xmlns:p14="http://schemas.microsoft.com/office/powerpoint/2010/main" xmlns:a14="http://schemas.microsoft.com/office/drawing/2010/main" xmlns:a16="http://schemas.microsoft.com/office/drawing/2014/main" xmlns="" w="9525">
+                <a14:hiddenLine xmlns="" xmlns:a16="http://schemas.microsoft.com/office/drawing/2014/main" xmlns:a14="http://schemas.microsoft.com/office/drawing/2010/main" xmlns:p14="http://schemas.microsoft.com/office/powerpoint/2010/main" w="9525">
                   <a:solidFill>
                     <a:srgbClr val="000000"/>
                   </a:solidFill>
@@ -23161,7 +23281,7 @@
             </a:ln>
             <a:extLst>
               <a:ext uri="{91240B29-F687-4f45-9708-019B960494DF}">
-                <a14:hiddenLine xmlns:p14="http://schemas.microsoft.com/office/powerpoint/2010/main" xmlns:a14="http://schemas.microsoft.com/office/drawing/2010/main" xmlns:a16="http://schemas.microsoft.com/office/drawing/2014/main" xmlns="" w="9525">
+                <a14:hiddenLine xmlns="" xmlns:a16="http://schemas.microsoft.com/office/drawing/2014/main" xmlns:a14="http://schemas.microsoft.com/office/drawing/2010/main" xmlns:p14="http://schemas.microsoft.com/office/powerpoint/2010/main" w="9525">
                   <a:solidFill>
                     <a:srgbClr val="000000"/>
                   </a:solidFill>
@@ -23273,7 +23393,7 @@
             </a:ln>
             <a:extLst>
               <a:ext uri="{91240B29-F687-4f45-9708-019B960494DF}">
-                <a14:hiddenLine xmlns:p14="http://schemas.microsoft.com/office/powerpoint/2010/main" xmlns:a14="http://schemas.microsoft.com/office/drawing/2010/main" xmlns:a16="http://schemas.microsoft.com/office/drawing/2014/main" xmlns="" w="9525">
+                <a14:hiddenLine xmlns="" xmlns:a16="http://schemas.microsoft.com/office/drawing/2014/main" xmlns:a14="http://schemas.microsoft.com/office/drawing/2010/main" xmlns:p14="http://schemas.microsoft.com/office/powerpoint/2010/main" w="9525">
                   <a:solidFill>
                     <a:srgbClr val="000000"/>
                   </a:solidFill>
@@ -23385,7 +23505,7 @@
             </a:ln>
             <a:extLst>
               <a:ext uri="{91240B29-F687-4f45-9708-019B960494DF}">
-                <a14:hiddenLine xmlns:p14="http://schemas.microsoft.com/office/powerpoint/2010/main" xmlns:a14="http://schemas.microsoft.com/office/drawing/2010/main" xmlns:a16="http://schemas.microsoft.com/office/drawing/2014/main" xmlns="" w="9525">
+                <a14:hiddenLine xmlns="" xmlns:a16="http://schemas.microsoft.com/office/drawing/2014/main" xmlns:a14="http://schemas.microsoft.com/office/drawing/2010/main" xmlns:p14="http://schemas.microsoft.com/office/powerpoint/2010/main" w="9525">
                   <a:solidFill>
                     <a:srgbClr val="000000"/>
                   </a:solidFill>
@@ -23469,7 +23589,7 @@
             </a:ln>
             <a:extLst>
               <a:ext uri="{91240B29-F687-4f45-9708-019B960494DF}">
-                <a14:hiddenLine xmlns:p14="http://schemas.microsoft.com/office/powerpoint/2010/main" xmlns:a14="http://schemas.microsoft.com/office/drawing/2010/main" xmlns:a16="http://schemas.microsoft.com/office/drawing/2014/main" xmlns="" w="9525">
+                <a14:hiddenLine xmlns="" xmlns:a16="http://schemas.microsoft.com/office/drawing/2014/main" xmlns:a14="http://schemas.microsoft.com/office/drawing/2010/main" xmlns:p14="http://schemas.microsoft.com/office/powerpoint/2010/main" w="9525">
                   <a:solidFill>
                     <a:srgbClr val="000000"/>
                   </a:solidFill>
@@ -23601,7 +23721,7 @@
             </a:ln>
             <a:extLst>
               <a:ext uri="{91240B29-F687-4f45-9708-019B960494DF}">
-                <a14:hiddenLine xmlns:p14="http://schemas.microsoft.com/office/powerpoint/2010/main" xmlns:a14="http://schemas.microsoft.com/office/drawing/2010/main" xmlns:a16="http://schemas.microsoft.com/office/drawing/2014/main" xmlns="" w="9525">
+                <a14:hiddenLine xmlns="" xmlns:a16="http://schemas.microsoft.com/office/drawing/2014/main" xmlns:a14="http://schemas.microsoft.com/office/drawing/2010/main" xmlns:p14="http://schemas.microsoft.com/office/powerpoint/2010/main" w="9525">
                   <a:solidFill>
                     <a:srgbClr val="000000"/>
                   </a:solidFill>
@@ -23685,7 +23805,7 @@
             </a:ln>
             <a:extLst>
               <a:ext uri="{91240B29-F687-4f45-9708-019B960494DF}">
-                <a14:hiddenLine xmlns:p14="http://schemas.microsoft.com/office/powerpoint/2010/main" xmlns:a14="http://schemas.microsoft.com/office/drawing/2010/main" xmlns:a16="http://schemas.microsoft.com/office/drawing/2014/main" xmlns="" w="9525">
+                <a14:hiddenLine xmlns="" xmlns:a16="http://schemas.microsoft.com/office/drawing/2014/main" xmlns:a14="http://schemas.microsoft.com/office/drawing/2010/main" xmlns:p14="http://schemas.microsoft.com/office/powerpoint/2010/main" w="9525">
                   <a:solidFill>
                     <a:srgbClr val="000000"/>
                   </a:solidFill>
@@ -23797,7 +23917,7 @@
             </a:ln>
             <a:extLst>
               <a:ext uri="{91240B29-F687-4f45-9708-019B960494DF}">
-                <a14:hiddenLine xmlns:p14="http://schemas.microsoft.com/office/powerpoint/2010/main" xmlns:a14="http://schemas.microsoft.com/office/drawing/2010/main" xmlns:a16="http://schemas.microsoft.com/office/drawing/2014/main" xmlns="" w="9525">
+                <a14:hiddenLine xmlns="" xmlns:a16="http://schemas.microsoft.com/office/drawing/2014/main" xmlns:a14="http://schemas.microsoft.com/office/drawing/2010/main" xmlns:p14="http://schemas.microsoft.com/office/powerpoint/2010/main" w="9525">
                   <a:solidFill>
                     <a:srgbClr val="000000"/>
                   </a:solidFill>
@@ -23909,7 +24029,7 @@
             </a:ln>
             <a:extLst>
               <a:ext uri="{91240B29-F687-4f45-9708-019B960494DF}">
-                <a14:hiddenLine xmlns:p14="http://schemas.microsoft.com/office/powerpoint/2010/main" xmlns:a14="http://schemas.microsoft.com/office/drawing/2010/main" xmlns:a16="http://schemas.microsoft.com/office/drawing/2014/main" xmlns="" w="9525">
+                <a14:hiddenLine xmlns="" xmlns:a16="http://schemas.microsoft.com/office/drawing/2014/main" xmlns:a14="http://schemas.microsoft.com/office/drawing/2010/main" xmlns:p14="http://schemas.microsoft.com/office/powerpoint/2010/main" w="9525">
                   <a:solidFill>
                     <a:srgbClr val="000000"/>
                   </a:solidFill>
@@ -23993,7 +24113,7 @@
             </a:ln>
             <a:extLst>
               <a:ext uri="{91240B29-F687-4f45-9708-019B960494DF}">
-                <a14:hiddenLine xmlns:p14="http://schemas.microsoft.com/office/powerpoint/2010/main" xmlns:a14="http://schemas.microsoft.com/office/drawing/2010/main" xmlns:a16="http://schemas.microsoft.com/office/drawing/2014/main" xmlns="" w="9525">
+                <a14:hiddenLine xmlns="" xmlns:a16="http://schemas.microsoft.com/office/drawing/2014/main" xmlns:a14="http://schemas.microsoft.com/office/drawing/2010/main" xmlns:p14="http://schemas.microsoft.com/office/powerpoint/2010/main" w="9525">
                   <a:solidFill>
                     <a:srgbClr val="000000"/>
                   </a:solidFill>
@@ -24105,7 +24225,7 @@
             </a:ln>
             <a:extLst>
               <a:ext uri="{91240B29-F687-4f45-9708-019B960494DF}">
-                <a14:hiddenLine xmlns:p14="http://schemas.microsoft.com/office/powerpoint/2010/main" xmlns:a14="http://schemas.microsoft.com/office/drawing/2010/main" xmlns:a16="http://schemas.microsoft.com/office/drawing/2014/main" xmlns="" w="9525">
+                <a14:hiddenLine xmlns="" xmlns:a16="http://schemas.microsoft.com/office/drawing/2014/main" xmlns:a14="http://schemas.microsoft.com/office/drawing/2010/main" xmlns:p14="http://schemas.microsoft.com/office/powerpoint/2010/main" w="9525">
                   <a:solidFill>
                     <a:srgbClr val="000000"/>
                   </a:solidFill>
@@ -24217,7 +24337,7 @@
             </a:ln>
             <a:extLst>
               <a:ext uri="{91240B29-F687-4f45-9708-019B960494DF}">
-                <a14:hiddenLine xmlns:p14="http://schemas.microsoft.com/office/powerpoint/2010/main" xmlns:a14="http://schemas.microsoft.com/office/drawing/2010/main" xmlns:a16="http://schemas.microsoft.com/office/drawing/2014/main" xmlns="" w="9525">
+                <a14:hiddenLine xmlns="" xmlns:a16="http://schemas.microsoft.com/office/drawing/2014/main" xmlns:a14="http://schemas.microsoft.com/office/drawing/2010/main" xmlns:p14="http://schemas.microsoft.com/office/powerpoint/2010/main" w="9525">
                   <a:solidFill>
                     <a:srgbClr val="000000"/>
                   </a:solidFill>
@@ -24295,7 +24415,7 @@
             </a:ln>
             <a:extLst>
               <a:ext uri="{91240B29-F687-4f45-9708-019B960494DF}">
-                <a14:hiddenLine xmlns:p14="http://schemas.microsoft.com/office/powerpoint/2010/main" xmlns:a14="http://schemas.microsoft.com/office/drawing/2010/main" xmlns:a16="http://schemas.microsoft.com/office/drawing/2014/main" xmlns="" w="9525">
+                <a14:hiddenLine xmlns="" xmlns:a16="http://schemas.microsoft.com/office/drawing/2014/main" xmlns:a14="http://schemas.microsoft.com/office/drawing/2010/main" xmlns:p14="http://schemas.microsoft.com/office/powerpoint/2010/main" w="9525">
                   <a:solidFill>
                     <a:srgbClr val="000000"/>
                   </a:solidFill>
@@ -24407,7 +24527,7 @@
             </a:ln>
             <a:extLst>
               <a:ext uri="{91240B29-F687-4f45-9708-019B960494DF}">
-                <a14:hiddenLine xmlns:p14="http://schemas.microsoft.com/office/powerpoint/2010/main" xmlns:a14="http://schemas.microsoft.com/office/drawing/2010/main" xmlns:a16="http://schemas.microsoft.com/office/drawing/2014/main" xmlns="" w="9525">
+                <a14:hiddenLine xmlns="" xmlns:a16="http://schemas.microsoft.com/office/drawing/2014/main" xmlns:a14="http://schemas.microsoft.com/office/drawing/2010/main" xmlns:p14="http://schemas.microsoft.com/office/powerpoint/2010/main" w="9525">
                   <a:solidFill>
                     <a:srgbClr val="000000"/>
                   </a:solidFill>
@@ -24485,7 +24605,7 @@
             </a:ln>
             <a:extLst>
               <a:ext uri="{91240B29-F687-4f45-9708-019B960494DF}">
-                <a14:hiddenLine xmlns:p14="http://schemas.microsoft.com/office/powerpoint/2010/main" xmlns:a14="http://schemas.microsoft.com/office/drawing/2010/main" xmlns:a16="http://schemas.microsoft.com/office/drawing/2014/main" xmlns="" w="9525">
+                <a14:hiddenLine xmlns="" xmlns:a16="http://schemas.microsoft.com/office/drawing/2014/main" xmlns:a14="http://schemas.microsoft.com/office/drawing/2010/main" xmlns:p14="http://schemas.microsoft.com/office/powerpoint/2010/main" w="9525">
                   <a:solidFill>
                     <a:srgbClr val="000000"/>
                   </a:solidFill>
@@ -24597,7 +24717,7 @@
             </a:ln>
             <a:extLst>
               <a:ext uri="{91240B29-F687-4f45-9708-019B960494DF}">
-                <a14:hiddenLine xmlns:p14="http://schemas.microsoft.com/office/powerpoint/2010/main" xmlns:a14="http://schemas.microsoft.com/office/drawing/2010/main" xmlns:a16="http://schemas.microsoft.com/office/drawing/2014/main" xmlns="" w="9525">
+                <a14:hiddenLine xmlns="" xmlns:a16="http://schemas.microsoft.com/office/drawing/2014/main" xmlns:a14="http://schemas.microsoft.com/office/drawing/2010/main" xmlns:p14="http://schemas.microsoft.com/office/powerpoint/2010/main" w="9525">
                   <a:solidFill>
                     <a:srgbClr val="000000"/>
                   </a:solidFill>
@@ -24687,7 +24807,7 @@
             </a:ln>
             <a:extLst>
               <a:ext uri="{91240B29-F687-4f45-9708-019B960494DF}">
-                <a14:hiddenLine xmlns:p14="http://schemas.microsoft.com/office/powerpoint/2010/main" xmlns:a14="http://schemas.microsoft.com/office/drawing/2010/main" xmlns:a16="http://schemas.microsoft.com/office/drawing/2014/main" xmlns="" w="9525">
+                <a14:hiddenLine xmlns="" xmlns:a16="http://schemas.microsoft.com/office/drawing/2014/main" xmlns:a14="http://schemas.microsoft.com/office/drawing/2010/main" xmlns:p14="http://schemas.microsoft.com/office/powerpoint/2010/main" w="9525">
                   <a:solidFill>
                     <a:srgbClr val="000000"/>
                   </a:solidFill>
@@ -24799,7 +24919,7 @@
             </a:ln>
             <a:extLst>
               <a:ext uri="{91240B29-F687-4f45-9708-019B960494DF}">
-                <a14:hiddenLine xmlns:p14="http://schemas.microsoft.com/office/powerpoint/2010/main" xmlns:a14="http://schemas.microsoft.com/office/drawing/2010/main" xmlns:a16="http://schemas.microsoft.com/office/drawing/2014/main" xmlns="" w="9525">
+                <a14:hiddenLine xmlns="" xmlns:a16="http://schemas.microsoft.com/office/drawing/2014/main" xmlns:a14="http://schemas.microsoft.com/office/drawing/2010/main" xmlns:p14="http://schemas.microsoft.com/office/powerpoint/2010/main" w="9525">
                   <a:solidFill>
                     <a:srgbClr val="000000"/>
                   </a:solidFill>
@@ -24889,7 +25009,7 @@
             </a:ln>
             <a:extLst>
               <a:ext uri="{91240B29-F687-4f45-9708-019B960494DF}">
-                <a14:hiddenLine xmlns:p14="http://schemas.microsoft.com/office/powerpoint/2010/main" xmlns:a14="http://schemas.microsoft.com/office/drawing/2010/main" xmlns:a16="http://schemas.microsoft.com/office/drawing/2014/main" xmlns="" w="9525">
+                <a14:hiddenLine xmlns="" xmlns:a16="http://schemas.microsoft.com/office/drawing/2014/main" xmlns:a14="http://schemas.microsoft.com/office/drawing/2010/main" xmlns:p14="http://schemas.microsoft.com/office/powerpoint/2010/main" w="9525">
                   <a:solidFill>
                     <a:srgbClr val="000000"/>
                   </a:solidFill>
@@ -25001,7 +25121,7 @@
             </a:ln>
             <a:extLst>
               <a:ext uri="{91240B29-F687-4f45-9708-019B960494DF}">
-                <a14:hiddenLine xmlns:p14="http://schemas.microsoft.com/office/powerpoint/2010/main" xmlns:a14="http://schemas.microsoft.com/office/drawing/2010/main" xmlns:a16="http://schemas.microsoft.com/office/drawing/2014/main" xmlns="" w="9525">
+                <a14:hiddenLine xmlns="" xmlns:a16="http://schemas.microsoft.com/office/drawing/2014/main" xmlns:a14="http://schemas.microsoft.com/office/drawing/2010/main" xmlns:p14="http://schemas.microsoft.com/office/powerpoint/2010/main" w="9525">
                   <a:solidFill>
                     <a:srgbClr val="000000"/>
                   </a:solidFill>
@@ -25057,7 +25177,7 @@
             </a:ln>
             <a:extLst>
               <a:ext uri="{91240B29-F687-4f45-9708-019B960494DF}">
-                <a14:hiddenLine xmlns:p14="http://schemas.microsoft.com/office/powerpoint/2010/main" xmlns:a14="http://schemas.microsoft.com/office/drawing/2010/main" xmlns:a16="http://schemas.microsoft.com/office/drawing/2014/main" xmlns="" w="9525">
+                <a14:hiddenLine xmlns="" xmlns:a16="http://schemas.microsoft.com/office/drawing/2014/main" xmlns:a14="http://schemas.microsoft.com/office/drawing/2010/main" xmlns:p14="http://schemas.microsoft.com/office/powerpoint/2010/main" w="9525">
                   <a:solidFill>
                     <a:srgbClr val="000000"/>
                   </a:solidFill>
@@ -25169,7 +25289,7 @@
             </a:ln>
             <a:extLst>
               <a:ext uri="{91240B29-F687-4f45-9708-019B960494DF}">
-                <a14:hiddenLine xmlns:p14="http://schemas.microsoft.com/office/powerpoint/2010/main" xmlns:a14="http://schemas.microsoft.com/office/drawing/2010/main" xmlns:a16="http://schemas.microsoft.com/office/drawing/2014/main" xmlns="" w="9525">
+                <a14:hiddenLine xmlns="" xmlns:a16="http://schemas.microsoft.com/office/drawing/2014/main" xmlns:a14="http://schemas.microsoft.com/office/drawing/2010/main" xmlns:p14="http://schemas.microsoft.com/office/powerpoint/2010/main" w="9525">
                   <a:solidFill>
                     <a:srgbClr val="000000"/>
                   </a:solidFill>
@@ -25253,7 +25373,7 @@
             </a:ln>
             <a:extLst>
               <a:ext uri="{91240B29-F687-4f45-9708-019B960494DF}">
-                <a14:hiddenLine xmlns:p14="http://schemas.microsoft.com/office/powerpoint/2010/main" xmlns:a14="http://schemas.microsoft.com/office/drawing/2010/main" xmlns:a16="http://schemas.microsoft.com/office/drawing/2014/main" xmlns="" w="9525">
+                <a14:hiddenLine xmlns="" xmlns:a16="http://schemas.microsoft.com/office/drawing/2014/main" xmlns:a14="http://schemas.microsoft.com/office/drawing/2010/main" xmlns:p14="http://schemas.microsoft.com/office/powerpoint/2010/main" w="9525">
                   <a:solidFill>
                     <a:srgbClr val="000000"/>
                   </a:solidFill>
@@ -25337,7 +25457,7 @@
             </a:ln>
             <a:extLst>
               <a:ext uri="{91240B29-F687-4f45-9708-019B960494DF}">
-                <a14:hiddenLine xmlns:p14="http://schemas.microsoft.com/office/powerpoint/2010/main" xmlns:a14="http://schemas.microsoft.com/office/drawing/2010/main" xmlns:a16="http://schemas.microsoft.com/office/drawing/2014/main" xmlns="" w="9525">
+                <a14:hiddenLine xmlns="" xmlns:a16="http://schemas.microsoft.com/office/drawing/2014/main" xmlns:a14="http://schemas.microsoft.com/office/drawing/2010/main" xmlns:p14="http://schemas.microsoft.com/office/powerpoint/2010/main" w="9525">
                   <a:solidFill>
                     <a:srgbClr val="000000"/>
                   </a:solidFill>
@@ -25449,7 +25569,7 @@
             </a:ln>
             <a:extLst>
               <a:ext uri="{91240B29-F687-4f45-9708-019B960494DF}">
-                <a14:hiddenLine xmlns:p14="http://schemas.microsoft.com/office/powerpoint/2010/main" xmlns:a14="http://schemas.microsoft.com/office/drawing/2010/main" xmlns:a16="http://schemas.microsoft.com/office/drawing/2014/main" xmlns="" w="9525">
+                <a14:hiddenLine xmlns="" xmlns:a16="http://schemas.microsoft.com/office/drawing/2014/main" xmlns:a14="http://schemas.microsoft.com/office/drawing/2010/main" xmlns:p14="http://schemas.microsoft.com/office/powerpoint/2010/main" w="9525">
                   <a:solidFill>
                     <a:srgbClr val="000000"/>
                   </a:solidFill>
@@ -25539,7 +25659,7 @@
             </a:ln>
             <a:extLst>
               <a:ext uri="{91240B29-F687-4f45-9708-019B960494DF}">
-                <a14:hiddenLine xmlns:p14="http://schemas.microsoft.com/office/powerpoint/2010/main" xmlns:a14="http://schemas.microsoft.com/office/drawing/2010/main" xmlns:a16="http://schemas.microsoft.com/office/drawing/2014/main" xmlns="" w="9525">
+                <a14:hiddenLine xmlns="" xmlns:a16="http://schemas.microsoft.com/office/drawing/2014/main" xmlns:a14="http://schemas.microsoft.com/office/drawing/2010/main" xmlns:p14="http://schemas.microsoft.com/office/powerpoint/2010/main" w="9525">
                   <a:solidFill>
                     <a:srgbClr val="000000"/>
                   </a:solidFill>
@@ -25623,7 +25743,7 @@
             </a:ln>
             <a:extLst>
               <a:ext uri="{91240B29-F687-4f45-9708-019B960494DF}">
-                <a14:hiddenLine xmlns:p14="http://schemas.microsoft.com/office/powerpoint/2010/main" xmlns:a14="http://schemas.microsoft.com/office/drawing/2010/main" xmlns:a16="http://schemas.microsoft.com/office/drawing/2014/main" xmlns="" w="9525">
+                <a14:hiddenLine xmlns="" xmlns:a16="http://schemas.microsoft.com/office/drawing/2014/main" xmlns:a14="http://schemas.microsoft.com/office/drawing/2010/main" xmlns:p14="http://schemas.microsoft.com/office/powerpoint/2010/main" w="9525">
                   <a:solidFill>
                     <a:srgbClr val="000000"/>
                   </a:solidFill>
@@ -25735,7 +25855,7 @@
             </a:ln>
             <a:extLst>
               <a:ext uri="{91240B29-F687-4f45-9708-019B960494DF}">
-                <a14:hiddenLine xmlns:p14="http://schemas.microsoft.com/office/powerpoint/2010/main" xmlns:a14="http://schemas.microsoft.com/office/drawing/2010/main" xmlns:a16="http://schemas.microsoft.com/office/drawing/2014/main" xmlns="" w="9525">
+                <a14:hiddenLine xmlns="" xmlns:a16="http://schemas.microsoft.com/office/drawing/2014/main" xmlns:a14="http://schemas.microsoft.com/office/drawing/2010/main" xmlns:p14="http://schemas.microsoft.com/office/powerpoint/2010/main" w="9525">
                   <a:solidFill>
                     <a:srgbClr val="000000"/>
                   </a:solidFill>
@@ -25819,7 +25939,7 @@
             </a:ln>
             <a:extLst>
               <a:ext uri="{91240B29-F687-4f45-9708-019B960494DF}">
-                <a14:hiddenLine xmlns:p14="http://schemas.microsoft.com/office/powerpoint/2010/main" xmlns:a14="http://schemas.microsoft.com/office/drawing/2010/main" xmlns:a16="http://schemas.microsoft.com/office/drawing/2014/main" xmlns="" w="9525">
+                <a14:hiddenLine xmlns="" xmlns:a16="http://schemas.microsoft.com/office/drawing/2014/main" xmlns:a14="http://schemas.microsoft.com/office/drawing/2010/main" xmlns:p14="http://schemas.microsoft.com/office/powerpoint/2010/main" w="9525">
                   <a:solidFill>
                     <a:srgbClr val="000000"/>
                   </a:solidFill>
@@ -25931,7 +26051,7 @@
             </a:ln>
             <a:extLst>
               <a:ext uri="{91240B29-F687-4f45-9708-019B960494DF}">
-                <a14:hiddenLine xmlns:p14="http://schemas.microsoft.com/office/powerpoint/2010/main" xmlns:a14="http://schemas.microsoft.com/office/drawing/2010/main" xmlns:a16="http://schemas.microsoft.com/office/drawing/2014/main" xmlns="" w="9525">
+                <a14:hiddenLine xmlns="" xmlns:a16="http://schemas.microsoft.com/office/drawing/2014/main" xmlns:a14="http://schemas.microsoft.com/office/drawing/2010/main" xmlns:p14="http://schemas.microsoft.com/office/powerpoint/2010/main" w="9525">
                   <a:solidFill>
                     <a:srgbClr val="000000"/>
                   </a:solidFill>
@@ -26015,7 +26135,7 @@
             </a:ln>
             <a:extLst>
               <a:ext uri="{91240B29-F687-4f45-9708-019B960494DF}">
-                <a14:hiddenLine xmlns:p14="http://schemas.microsoft.com/office/powerpoint/2010/main" xmlns:a14="http://schemas.microsoft.com/office/drawing/2010/main" xmlns:a16="http://schemas.microsoft.com/office/drawing/2014/main" xmlns="" w="9525">
+                <a14:hiddenLine xmlns="" xmlns:a16="http://schemas.microsoft.com/office/drawing/2014/main" xmlns:a14="http://schemas.microsoft.com/office/drawing/2010/main" xmlns:p14="http://schemas.microsoft.com/office/powerpoint/2010/main" w="9525">
                   <a:solidFill>
                     <a:srgbClr val="000000"/>
                   </a:solidFill>
@@ -26127,7 +26247,7 @@
             </a:ln>
             <a:extLst>
               <a:ext uri="{91240B29-F687-4f45-9708-019B960494DF}">
-                <a14:hiddenLine xmlns:p14="http://schemas.microsoft.com/office/powerpoint/2010/main" xmlns:a14="http://schemas.microsoft.com/office/drawing/2010/main" xmlns:a16="http://schemas.microsoft.com/office/drawing/2014/main" xmlns="" w="9525">
+                <a14:hiddenLine xmlns="" xmlns:a16="http://schemas.microsoft.com/office/drawing/2014/main" xmlns:a14="http://schemas.microsoft.com/office/drawing/2010/main" xmlns:p14="http://schemas.microsoft.com/office/powerpoint/2010/main" w="9525">
                   <a:solidFill>
                     <a:srgbClr val="000000"/>
                   </a:solidFill>
@@ -26183,7 +26303,7 @@
             </a:ln>
             <a:extLst>
               <a:ext uri="{91240B29-F687-4f45-9708-019B960494DF}">
-                <a14:hiddenLine xmlns:p14="http://schemas.microsoft.com/office/powerpoint/2010/main" xmlns:a14="http://schemas.microsoft.com/office/drawing/2010/main" xmlns:a16="http://schemas.microsoft.com/office/drawing/2014/main" xmlns="" w="9525">
+                <a14:hiddenLine xmlns="" xmlns:a16="http://schemas.microsoft.com/office/drawing/2014/main" xmlns:a14="http://schemas.microsoft.com/office/drawing/2010/main" xmlns:p14="http://schemas.microsoft.com/office/powerpoint/2010/main" w="9525">
                   <a:solidFill>
                     <a:srgbClr val="000000"/>
                   </a:solidFill>
@@ -26270,7 +26390,7 @@
             </a:ln>
             <a:extLst>
               <a:ext uri="{91240B29-F687-4f45-9708-019B960494DF}">
-                <a14:hiddenLine xmlns:p14="http://schemas.microsoft.com/office/powerpoint/2010/main" xmlns:a14="http://schemas.microsoft.com/office/drawing/2010/main" xmlns:a16="http://schemas.microsoft.com/office/drawing/2014/main" xmlns="" w="9525">
+                <a14:hiddenLine xmlns="" xmlns:a16="http://schemas.microsoft.com/office/drawing/2014/main" xmlns:a14="http://schemas.microsoft.com/office/drawing/2010/main" xmlns:p14="http://schemas.microsoft.com/office/powerpoint/2010/main" w="9525">
                   <a:solidFill>
                     <a:srgbClr val="000000"/>
                   </a:solidFill>
@@ -26382,7 +26502,7 @@
             </a:ln>
             <a:extLst>
               <a:ext uri="{91240B29-F687-4f45-9708-019B960494DF}">
-                <a14:hiddenLine xmlns:p14="http://schemas.microsoft.com/office/powerpoint/2010/main" xmlns:a14="http://schemas.microsoft.com/office/drawing/2010/main" xmlns:a16="http://schemas.microsoft.com/office/drawing/2014/main" xmlns="" w="9525">
+                <a14:hiddenLine xmlns="" xmlns:a16="http://schemas.microsoft.com/office/drawing/2014/main" xmlns:a14="http://schemas.microsoft.com/office/drawing/2010/main" xmlns:p14="http://schemas.microsoft.com/office/powerpoint/2010/main" w="9525">
                   <a:solidFill>
                     <a:srgbClr val="000000"/>
                   </a:solidFill>
@@ -26466,7 +26586,7 @@
             </a:ln>
             <a:extLst>
               <a:ext uri="{91240B29-F687-4f45-9708-019B960494DF}">
-                <a14:hiddenLine xmlns:p14="http://schemas.microsoft.com/office/powerpoint/2010/main" xmlns:a14="http://schemas.microsoft.com/office/drawing/2010/main" xmlns:a16="http://schemas.microsoft.com/office/drawing/2014/main" xmlns="" w="9525">
+                <a14:hiddenLine xmlns="" xmlns:a16="http://schemas.microsoft.com/office/drawing/2014/main" xmlns:a14="http://schemas.microsoft.com/office/drawing/2010/main" xmlns:p14="http://schemas.microsoft.com/office/powerpoint/2010/main" w="9525">
                   <a:solidFill>
                     <a:srgbClr val="000000"/>
                   </a:solidFill>
@@ -26578,7 +26698,7 @@
             </a:ln>
             <a:extLst>
               <a:ext uri="{91240B29-F687-4f45-9708-019B960494DF}">
-                <a14:hiddenLine xmlns:p14="http://schemas.microsoft.com/office/powerpoint/2010/main" xmlns:a14="http://schemas.microsoft.com/office/drawing/2010/main" xmlns:a16="http://schemas.microsoft.com/office/drawing/2014/main" xmlns="" w="9525">
+                <a14:hiddenLine xmlns="" xmlns:a16="http://schemas.microsoft.com/office/drawing/2014/main" xmlns:a14="http://schemas.microsoft.com/office/drawing/2010/main" xmlns:p14="http://schemas.microsoft.com/office/powerpoint/2010/main" w="9525">
                   <a:solidFill>
                     <a:srgbClr val="000000"/>
                   </a:solidFill>
@@ -26690,7 +26810,7 @@
             </a:ln>
             <a:extLst>
               <a:ext uri="{91240B29-F687-4f45-9708-019B960494DF}">
-                <a14:hiddenLine xmlns:p14="http://schemas.microsoft.com/office/powerpoint/2010/main" xmlns:a14="http://schemas.microsoft.com/office/drawing/2010/main" xmlns:a16="http://schemas.microsoft.com/office/drawing/2014/main" xmlns="" w="9525">
+                <a14:hiddenLine xmlns="" xmlns:a16="http://schemas.microsoft.com/office/drawing/2014/main" xmlns:a14="http://schemas.microsoft.com/office/drawing/2010/main" xmlns:p14="http://schemas.microsoft.com/office/powerpoint/2010/main" w="9525">
                   <a:solidFill>
                     <a:srgbClr val="000000"/>
                   </a:solidFill>
@@ -26777,7 +26897,7 @@
             </a:ln>
             <a:extLst>
               <a:ext uri="{91240B29-F687-4f45-9708-019B960494DF}">
-                <a14:hiddenLine xmlns:p14="http://schemas.microsoft.com/office/powerpoint/2010/main" xmlns:a14="http://schemas.microsoft.com/office/drawing/2010/main" xmlns:a16="http://schemas.microsoft.com/office/drawing/2014/main" xmlns="" w="9525">
+                <a14:hiddenLine xmlns="" xmlns:a16="http://schemas.microsoft.com/office/drawing/2014/main" xmlns:a14="http://schemas.microsoft.com/office/drawing/2010/main" xmlns:p14="http://schemas.microsoft.com/office/powerpoint/2010/main" w="9525">
                   <a:solidFill>
                     <a:srgbClr val="000000"/>
                   </a:solidFill>
@@ -26861,7 +26981,7 @@
             </a:ln>
             <a:extLst>
               <a:ext uri="{91240B29-F687-4f45-9708-019B960494DF}">
-                <a14:hiddenLine xmlns:p14="http://schemas.microsoft.com/office/powerpoint/2010/main" xmlns:a14="http://schemas.microsoft.com/office/drawing/2010/main" xmlns:a16="http://schemas.microsoft.com/office/drawing/2014/main" xmlns="" w="9525">
+                <a14:hiddenLine xmlns="" xmlns:a16="http://schemas.microsoft.com/office/drawing/2014/main" xmlns:a14="http://schemas.microsoft.com/office/drawing/2010/main" xmlns:p14="http://schemas.microsoft.com/office/powerpoint/2010/main" w="9525">
                   <a:solidFill>
                     <a:srgbClr val="000000"/>
                   </a:solidFill>
@@ -26973,7 +27093,7 @@
             </a:ln>
             <a:extLst>
               <a:ext uri="{91240B29-F687-4f45-9708-019B960494DF}">
-                <a14:hiddenLine xmlns:p14="http://schemas.microsoft.com/office/powerpoint/2010/main" xmlns:a14="http://schemas.microsoft.com/office/drawing/2010/main" xmlns:a16="http://schemas.microsoft.com/office/drawing/2014/main" xmlns="" w="9525">
+                <a14:hiddenLine xmlns="" xmlns:a16="http://schemas.microsoft.com/office/drawing/2014/main" xmlns:a14="http://schemas.microsoft.com/office/drawing/2010/main" xmlns:p14="http://schemas.microsoft.com/office/powerpoint/2010/main" w="9525">
                   <a:solidFill>
                     <a:srgbClr val="000000"/>
                   </a:solidFill>
@@ -27085,7 +27205,7 @@
             </a:ln>
             <a:extLst>
               <a:ext uri="{91240B29-F687-4f45-9708-019B960494DF}">
-                <a14:hiddenLine xmlns:p14="http://schemas.microsoft.com/office/powerpoint/2010/main" xmlns:a14="http://schemas.microsoft.com/office/drawing/2010/main" xmlns:a16="http://schemas.microsoft.com/office/drawing/2014/main" xmlns="" w="9525">
+                <a14:hiddenLine xmlns="" xmlns:a16="http://schemas.microsoft.com/office/drawing/2014/main" xmlns:a14="http://schemas.microsoft.com/office/drawing/2010/main" xmlns:p14="http://schemas.microsoft.com/office/powerpoint/2010/main" w="9525">
                   <a:solidFill>
                     <a:srgbClr val="000000"/>
                   </a:solidFill>
@@ -27169,7 +27289,7 @@
             </a:ln>
             <a:extLst>
               <a:ext uri="{91240B29-F687-4f45-9708-019B960494DF}">
-                <a14:hiddenLine xmlns:p14="http://schemas.microsoft.com/office/powerpoint/2010/main" xmlns:a14="http://schemas.microsoft.com/office/drawing/2010/main" xmlns:a16="http://schemas.microsoft.com/office/drawing/2014/main" xmlns="" w="9525">
+                <a14:hiddenLine xmlns="" xmlns:a16="http://schemas.microsoft.com/office/drawing/2014/main" xmlns:a14="http://schemas.microsoft.com/office/drawing/2010/main" xmlns:p14="http://schemas.microsoft.com/office/powerpoint/2010/main" w="9525">
                   <a:solidFill>
                     <a:srgbClr val="000000"/>
                   </a:solidFill>
@@ -27311,7 +27431,7 @@
             </a:ln>
             <a:extLst>
               <a:ext uri="{91240B29-F687-4f45-9708-019B960494DF}">
-                <a14:hiddenLine xmlns:p14="http://schemas.microsoft.com/office/powerpoint/2010/main" xmlns:a14="http://schemas.microsoft.com/office/drawing/2010/main" xmlns:a16="http://schemas.microsoft.com/office/drawing/2014/main" xmlns="" w="9525">
+                <a14:hiddenLine xmlns="" xmlns:a16="http://schemas.microsoft.com/office/drawing/2014/main" xmlns:a14="http://schemas.microsoft.com/office/drawing/2010/main" xmlns:p14="http://schemas.microsoft.com/office/powerpoint/2010/main" w="9525">
                   <a:solidFill>
                     <a:srgbClr val="000000"/>
                   </a:solidFill>
@@ -27401,7 +27521,7 @@
             </a:ln>
             <a:extLst>
               <a:ext uri="{91240B29-F687-4f45-9708-019B960494DF}">
-                <a14:hiddenLine xmlns:p14="http://schemas.microsoft.com/office/powerpoint/2010/main" xmlns:a14="http://schemas.microsoft.com/office/drawing/2010/main" xmlns:a16="http://schemas.microsoft.com/office/drawing/2014/main" xmlns="" w="9525">
+                <a14:hiddenLine xmlns="" xmlns:a16="http://schemas.microsoft.com/office/drawing/2014/main" xmlns:a14="http://schemas.microsoft.com/office/drawing/2010/main" xmlns:p14="http://schemas.microsoft.com/office/powerpoint/2010/main" w="9525">
                   <a:solidFill>
                     <a:srgbClr val="000000"/>
                   </a:solidFill>
@@ -27513,7 +27633,7 @@
             </a:ln>
             <a:extLst>
               <a:ext uri="{91240B29-F687-4f45-9708-019B960494DF}">
-                <a14:hiddenLine xmlns:p14="http://schemas.microsoft.com/office/powerpoint/2010/main" xmlns:a14="http://schemas.microsoft.com/office/drawing/2010/main" xmlns:a16="http://schemas.microsoft.com/office/drawing/2014/main" xmlns="" w="9525">
+                <a14:hiddenLine xmlns="" xmlns:a16="http://schemas.microsoft.com/office/drawing/2014/main" xmlns:a14="http://schemas.microsoft.com/office/drawing/2010/main" xmlns:p14="http://schemas.microsoft.com/office/powerpoint/2010/main" w="9525">
                   <a:solidFill>
                     <a:srgbClr val="000000"/>
                   </a:solidFill>
@@ -28440,6 +28560,225 @@
   <p:clrMapOvr>
     <a:masterClrMapping/>
   </p:clrMapOvr>
+  <p:transition spd="slow">
+    <p:push/>
+  </p:transition>
+  <p:timing>
+    <p:tnLst>
+      <p:par>
+        <p:cTn id="1" dur="indefinite" restart="never" nodeType="tmRoot">
+          <p:childTnLst>
+            <p:seq concurrent="1" nextAc="seek">
+              <p:cTn id="2" dur="indefinite" nodeType="mainSeq">
+                <p:childTnLst>
+                  <p:par>
+                    <p:cTn id="3" fill="hold">
+                      <p:stCondLst>
+                        <p:cond delay="indefinite"/>
+                      </p:stCondLst>
+                      <p:childTnLst>
+                        <p:par>
+                          <p:cTn id="4" fill="hold">
+                            <p:stCondLst>
+                              <p:cond delay="0"/>
+                            </p:stCondLst>
+                            <p:childTnLst>
+                              <p:par>
+                                <p:cTn id="5" presetID="22" presetClass="entr" presetSubtype="4" fill="hold" grpId="0" nodeType="clickEffect">
+                                  <p:stCondLst>
+                                    <p:cond delay="0"/>
+                                  </p:stCondLst>
+                                  <p:childTnLst>
+                                    <p:set>
+                                      <p:cBhvr>
+                                        <p:cTn id="6" dur="1" fill="hold">
+                                          <p:stCondLst>
+                                            <p:cond delay="0"/>
+                                          </p:stCondLst>
+                                        </p:cTn>
+                                        <p:tgtEl>
+                                          <p:spTgt spid="3">
+                                            <p:txEl>
+                                              <p:pRg st="0" end="0"/>
+                                            </p:txEl>
+                                          </p:spTgt>
+                                        </p:tgtEl>
+                                        <p:attrNameLst>
+                                          <p:attrName>style.visibility</p:attrName>
+                                        </p:attrNameLst>
+                                      </p:cBhvr>
+                                      <p:to>
+                                        <p:strVal val="visible"/>
+                                      </p:to>
+                                    </p:set>
+                                    <p:animEffect transition="in" filter="wipe(down)">
+                                      <p:cBhvr>
+                                        <p:cTn id="7" dur="500"/>
+                                        <p:tgtEl>
+                                          <p:spTgt spid="3">
+                                            <p:txEl>
+                                              <p:pRg st="0" end="0"/>
+                                            </p:txEl>
+                                          </p:spTgt>
+                                        </p:tgtEl>
+                                      </p:cBhvr>
+                                    </p:animEffect>
+                                  </p:childTnLst>
+                                </p:cTn>
+                              </p:par>
+                            </p:childTnLst>
+                          </p:cTn>
+                        </p:par>
+                      </p:childTnLst>
+                    </p:cTn>
+                  </p:par>
+                  <p:par>
+                    <p:cTn id="8" fill="hold">
+                      <p:stCondLst>
+                        <p:cond delay="indefinite"/>
+                      </p:stCondLst>
+                      <p:childTnLst>
+                        <p:par>
+                          <p:cTn id="9" fill="hold">
+                            <p:stCondLst>
+                              <p:cond delay="0"/>
+                            </p:stCondLst>
+                            <p:childTnLst>
+                              <p:par>
+                                <p:cTn id="10" presetID="22" presetClass="entr" presetSubtype="4" fill="hold" grpId="0" nodeType="clickEffect">
+                                  <p:stCondLst>
+                                    <p:cond delay="0"/>
+                                  </p:stCondLst>
+                                  <p:childTnLst>
+                                    <p:set>
+                                      <p:cBhvr>
+                                        <p:cTn id="11" dur="1" fill="hold">
+                                          <p:stCondLst>
+                                            <p:cond delay="0"/>
+                                          </p:stCondLst>
+                                        </p:cTn>
+                                        <p:tgtEl>
+                                          <p:spTgt spid="3">
+                                            <p:txEl>
+                                              <p:pRg st="1" end="1"/>
+                                            </p:txEl>
+                                          </p:spTgt>
+                                        </p:tgtEl>
+                                        <p:attrNameLst>
+                                          <p:attrName>style.visibility</p:attrName>
+                                        </p:attrNameLst>
+                                      </p:cBhvr>
+                                      <p:to>
+                                        <p:strVal val="visible"/>
+                                      </p:to>
+                                    </p:set>
+                                    <p:animEffect transition="in" filter="wipe(down)">
+                                      <p:cBhvr>
+                                        <p:cTn id="12" dur="500"/>
+                                        <p:tgtEl>
+                                          <p:spTgt spid="3">
+                                            <p:txEl>
+                                              <p:pRg st="1" end="1"/>
+                                            </p:txEl>
+                                          </p:spTgt>
+                                        </p:tgtEl>
+                                      </p:cBhvr>
+                                    </p:animEffect>
+                                  </p:childTnLst>
+                                </p:cTn>
+                              </p:par>
+                            </p:childTnLst>
+                          </p:cTn>
+                        </p:par>
+                      </p:childTnLst>
+                    </p:cTn>
+                  </p:par>
+                  <p:par>
+                    <p:cTn id="13" fill="hold">
+                      <p:stCondLst>
+                        <p:cond delay="indefinite"/>
+                      </p:stCondLst>
+                      <p:childTnLst>
+                        <p:par>
+                          <p:cTn id="14" fill="hold">
+                            <p:stCondLst>
+                              <p:cond delay="0"/>
+                            </p:stCondLst>
+                            <p:childTnLst>
+                              <p:par>
+                                <p:cTn id="15" presetID="22" presetClass="entr" presetSubtype="4" fill="hold" grpId="0" nodeType="clickEffect">
+                                  <p:stCondLst>
+                                    <p:cond delay="0"/>
+                                  </p:stCondLst>
+                                  <p:childTnLst>
+                                    <p:set>
+                                      <p:cBhvr>
+                                        <p:cTn id="16" dur="1" fill="hold">
+                                          <p:stCondLst>
+                                            <p:cond delay="0"/>
+                                          </p:stCondLst>
+                                        </p:cTn>
+                                        <p:tgtEl>
+                                          <p:spTgt spid="3">
+                                            <p:txEl>
+                                              <p:pRg st="2" end="2"/>
+                                            </p:txEl>
+                                          </p:spTgt>
+                                        </p:tgtEl>
+                                        <p:attrNameLst>
+                                          <p:attrName>style.visibility</p:attrName>
+                                        </p:attrNameLst>
+                                      </p:cBhvr>
+                                      <p:to>
+                                        <p:strVal val="visible"/>
+                                      </p:to>
+                                    </p:set>
+                                    <p:animEffect transition="in" filter="wipe(down)">
+                                      <p:cBhvr>
+                                        <p:cTn id="17" dur="500"/>
+                                        <p:tgtEl>
+                                          <p:spTgt spid="3">
+                                            <p:txEl>
+                                              <p:pRg st="2" end="2"/>
+                                            </p:txEl>
+                                          </p:spTgt>
+                                        </p:tgtEl>
+                                      </p:cBhvr>
+                                    </p:animEffect>
+                                  </p:childTnLst>
+                                </p:cTn>
+                              </p:par>
+                            </p:childTnLst>
+                          </p:cTn>
+                        </p:par>
+                      </p:childTnLst>
+                    </p:cTn>
+                  </p:par>
+                </p:childTnLst>
+              </p:cTn>
+              <p:prevCondLst>
+                <p:cond evt="onPrev" delay="0">
+                  <p:tgtEl>
+                    <p:sldTgt/>
+                  </p:tgtEl>
+                </p:cond>
+              </p:prevCondLst>
+              <p:nextCondLst>
+                <p:cond evt="onNext" delay="0">
+                  <p:tgtEl>
+                    <p:sldTgt/>
+                  </p:tgtEl>
+                </p:cond>
+              </p:nextCondLst>
+            </p:seq>
+          </p:childTnLst>
+        </p:cTn>
+      </p:par>
+    </p:tnLst>
+    <p:bldLst>
+      <p:bldP spid="3" grpId="0" build="p"/>
+    </p:bldLst>
+  </p:timing>
 </p:sld>
 </file>
 
@@ -28612,10 +28951,10 @@
       </p:pic>
       <p:pic>
         <p:nvPicPr>
-          <p:cNvPr id="9" name="Picture 8">
+          <p:cNvPr id="6" name="Picture 5">
             <a:extLst>
               <a:ext uri="{FF2B5EF4-FFF2-40B4-BE49-F238E27FC236}">
-                <a16:creationId xmlns:a16="http://schemas.microsoft.com/office/drawing/2014/main" id="{7F4427D1-1736-B9A5-229B-5775933D678C}"/>
+                <a16:creationId xmlns:a16="http://schemas.microsoft.com/office/drawing/2014/main" id="{3E55175D-55FE-D13B-624B-F445CD52E752}"/>
               </a:ext>
             </a:extLst>
           </p:cNvPr>
@@ -28638,8 +28977,8 @@
         </p:blipFill>
         <p:spPr>
           <a:xfrm>
-            <a:off x="2314575" y="3906044"/>
-            <a:ext cx="3200400" cy="2633056"/>
+            <a:off x="2318369" y="4267532"/>
+            <a:ext cx="5077534" cy="1971950"/>
           </a:xfrm>
           <a:prstGeom prst="rect">
             <a:avLst/>
@@ -28656,6 +28995,340 @@
   <p:clrMapOvr>
     <a:masterClrMapping/>
   </p:clrMapOvr>
+  <mc:AlternateContent xmlns:mc="http://schemas.openxmlformats.org/markup-compatibility/2006">
+    <mc:Choice xmlns:p15="http://schemas.microsoft.com/office/powerpoint/2012/main" Requires="p15">
+      <p:transition xmlns:p14="http://schemas.microsoft.com/office/powerpoint/2010/main" spd="slow" p14:dur="2000">
+        <p15:prstTrans prst="fallOver"/>
+      </p:transition>
+    </mc:Choice>
+    <mc:Fallback>
+      <p:transition spd="slow">
+        <p:fade/>
+      </p:transition>
+    </mc:Fallback>
+  </mc:AlternateContent>
+  <p:timing>
+    <p:tnLst>
+      <p:par>
+        <p:cTn id="1" dur="indefinite" restart="never" nodeType="tmRoot">
+          <p:childTnLst>
+            <p:seq concurrent="1" nextAc="seek">
+              <p:cTn id="2" dur="indefinite" nodeType="mainSeq">
+                <p:childTnLst>
+                  <p:par>
+                    <p:cTn id="3" fill="hold">
+                      <p:stCondLst>
+                        <p:cond delay="indefinite"/>
+                      </p:stCondLst>
+                      <p:childTnLst>
+                        <p:par>
+                          <p:cTn id="4" fill="hold">
+                            <p:stCondLst>
+                              <p:cond delay="0"/>
+                            </p:stCondLst>
+                            <p:childTnLst>
+                              <p:par>
+                                <p:cTn id="5" presetID="16" presetClass="entr" presetSubtype="21" fill="hold" grpId="0" nodeType="clickEffect">
+                                  <p:stCondLst>
+                                    <p:cond delay="0"/>
+                                  </p:stCondLst>
+                                  <p:childTnLst>
+                                    <p:set>
+                                      <p:cBhvr>
+                                        <p:cTn id="6" dur="1" fill="hold">
+                                          <p:stCondLst>
+                                            <p:cond delay="0"/>
+                                          </p:stCondLst>
+                                        </p:cTn>
+                                        <p:tgtEl>
+                                          <p:spTgt spid="3">
+                                            <p:txEl>
+                                              <p:pRg st="0" end="0"/>
+                                            </p:txEl>
+                                          </p:spTgt>
+                                        </p:tgtEl>
+                                        <p:attrNameLst>
+                                          <p:attrName>style.visibility</p:attrName>
+                                        </p:attrNameLst>
+                                      </p:cBhvr>
+                                      <p:to>
+                                        <p:strVal val="visible"/>
+                                      </p:to>
+                                    </p:set>
+                                    <p:animEffect transition="in" filter="barn(inVertical)">
+                                      <p:cBhvr>
+                                        <p:cTn id="7" dur="500"/>
+                                        <p:tgtEl>
+                                          <p:spTgt spid="3">
+                                            <p:txEl>
+                                              <p:pRg st="0" end="0"/>
+                                            </p:txEl>
+                                          </p:spTgt>
+                                        </p:tgtEl>
+                                      </p:cBhvr>
+                                    </p:animEffect>
+                                  </p:childTnLst>
+                                </p:cTn>
+                              </p:par>
+                            </p:childTnLst>
+                          </p:cTn>
+                        </p:par>
+                      </p:childTnLst>
+                    </p:cTn>
+                  </p:par>
+                  <p:par>
+                    <p:cTn id="8" fill="hold">
+                      <p:stCondLst>
+                        <p:cond delay="indefinite"/>
+                      </p:stCondLst>
+                      <p:childTnLst>
+                        <p:par>
+                          <p:cTn id="9" fill="hold">
+                            <p:stCondLst>
+                              <p:cond delay="0"/>
+                            </p:stCondLst>
+                            <p:childTnLst>
+                              <p:par>
+                                <p:cTn id="10" presetID="16" presetClass="entr" presetSubtype="21" fill="hold" grpId="0" nodeType="clickEffect">
+                                  <p:stCondLst>
+                                    <p:cond delay="0"/>
+                                  </p:stCondLst>
+                                  <p:childTnLst>
+                                    <p:set>
+                                      <p:cBhvr>
+                                        <p:cTn id="11" dur="1" fill="hold">
+                                          <p:stCondLst>
+                                            <p:cond delay="0"/>
+                                          </p:stCondLst>
+                                        </p:cTn>
+                                        <p:tgtEl>
+                                          <p:spTgt spid="3">
+                                            <p:txEl>
+                                              <p:pRg st="1" end="1"/>
+                                            </p:txEl>
+                                          </p:spTgt>
+                                        </p:tgtEl>
+                                        <p:attrNameLst>
+                                          <p:attrName>style.visibility</p:attrName>
+                                        </p:attrNameLst>
+                                      </p:cBhvr>
+                                      <p:to>
+                                        <p:strVal val="visible"/>
+                                      </p:to>
+                                    </p:set>
+                                    <p:animEffect transition="in" filter="barn(inVertical)">
+                                      <p:cBhvr>
+                                        <p:cTn id="12" dur="500"/>
+                                        <p:tgtEl>
+                                          <p:spTgt spid="3">
+                                            <p:txEl>
+                                              <p:pRg st="1" end="1"/>
+                                            </p:txEl>
+                                          </p:spTgt>
+                                        </p:tgtEl>
+                                      </p:cBhvr>
+                                    </p:animEffect>
+                                  </p:childTnLst>
+                                </p:cTn>
+                              </p:par>
+                            </p:childTnLst>
+                          </p:cTn>
+                        </p:par>
+                      </p:childTnLst>
+                    </p:cTn>
+                  </p:par>
+                  <p:par>
+                    <p:cTn id="13" fill="hold">
+                      <p:stCondLst>
+                        <p:cond delay="indefinite"/>
+                      </p:stCondLst>
+                      <p:childTnLst>
+                        <p:par>
+                          <p:cTn id="14" fill="hold">
+                            <p:stCondLst>
+                              <p:cond delay="0"/>
+                            </p:stCondLst>
+                            <p:childTnLst>
+                              <p:par>
+                                <p:cTn id="15" presetID="6" presetClass="entr" presetSubtype="32" fill="hold" nodeType="clickEffect">
+                                  <p:stCondLst>
+                                    <p:cond delay="0"/>
+                                  </p:stCondLst>
+                                  <p:childTnLst>
+                                    <p:set>
+                                      <p:cBhvr>
+                                        <p:cTn id="16" dur="1" fill="hold">
+                                          <p:stCondLst>
+                                            <p:cond delay="0"/>
+                                          </p:stCondLst>
+                                        </p:cTn>
+                                        <p:tgtEl>
+                                          <p:spTgt spid="5"/>
+                                        </p:tgtEl>
+                                        <p:attrNameLst>
+                                          <p:attrName>style.visibility</p:attrName>
+                                        </p:attrNameLst>
+                                      </p:cBhvr>
+                                      <p:to>
+                                        <p:strVal val="visible"/>
+                                      </p:to>
+                                    </p:set>
+                                    <p:animEffect transition="in" filter="circle(out)">
+                                      <p:cBhvr>
+                                        <p:cTn id="17" dur="2000"/>
+                                        <p:tgtEl>
+                                          <p:spTgt spid="5"/>
+                                        </p:tgtEl>
+                                      </p:cBhvr>
+                                    </p:animEffect>
+                                  </p:childTnLst>
+                                </p:cTn>
+                              </p:par>
+                            </p:childTnLst>
+                          </p:cTn>
+                        </p:par>
+                      </p:childTnLst>
+                    </p:cTn>
+                  </p:par>
+                  <p:par>
+                    <p:cTn id="18" fill="hold">
+                      <p:stCondLst>
+                        <p:cond delay="indefinite"/>
+                      </p:stCondLst>
+                      <p:childTnLst>
+                        <p:par>
+                          <p:cTn id="19" fill="hold">
+                            <p:stCondLst>
+                              <p:cond delay="0"/>
+                            </p:stCondLst>
+                            <p:childTnLst>
+                              <p:par>
+                                <p:cTn id="20" presetID="16" presetClass="entr" presetSubtype="21" fill="hold" nodeType="clickEffect">
+                                  <p:stCondLst>
+                                    <p:cond delay="0"/>
+                                  </p:stCondLst>
+                                  <p:childTnLst>
+                                    <p:set>
+                                      <p:cBhvr>
+                                        <p:cTn id="21" dur="1" fill="hold">
+                                          <p:stCondLst>
+                                            <p:cond delay="0"/>
+                                          </p:stCondLst>
+                                        </p:cTn>
+                                        <p:tgtEl>
+                                          <p:spTgt spid="3">
+                                            <p:txEl>
+                                              <p:pRg st="2" end="2"/>
+                                            </p:txEl>
+                                          </p:spTgt>
+                                        </p:tgtEl>
+                                        <p:attrNameLst>
+                                          <p:attrName>style.visibility</p:attrName>
+                                        </p:attrNameLst>
+                                      </p:cBhvr>
+                                      <p:to>
+                                        <p:strVal val="visible"/>
+                                      </p:to>
+                                    </p:set>
+                                    <p:animEffect transition="in" filter="barn(inVertical)">
+                                      <p:cBhvr>
+                                        <p:cTn id="22" dur="500"/>
+                                        <p:tgtEl>
+                                          <p:spTgt spid="3">
+                                            <p:txEl>
+                                              <p:pRg st="2" end="2"/>
+                                            </p:txEl>
+                                          </p:spTgt>
+                                        </p:tgtEl>
+                                      </p:cBhvr>
+                                    </p:animEffect>
+                                  </p:childTnLst>
+                                </p:cTn>
+                              </p:par>
+                            </p:childTnLst>
+                          </p:cTn>
+                        </p:par>
+                      </p:childTnLst>
+                    </p:cTn>
+                  </p:par>
+                  <p:par>
+                    <p:cTn id="23" fill="hold">
+                      <p:stCondLst>
+                        <p:cond delay="indefinite"/>
+                      </p:stCondLst>
+                      <p:childTnLst>
+                        <p:par>
+                          <p:cTn id="24" fill="hold">
+                            <p:stCondLst>
+                              <p:cond delay="0"/>
+                            </p:stCondLst>
+                            <p:childTnLst>
+                              <p:par>
+                                <p:cTn id="25" presetID="6" presetClass="entr" presetSubtype="16" fill="hold" nodeType="clickEffect">
+                                  <p:stCondLst>
+                                    <p:cond delay="0"/>
+                                  </p:stCondLst>
+                                  <p:childTnLst>
+                                    <p:set>
+                                      <p:cBhvr>
+                                        <p:cTn id="26" dur="1" fill="hold">
+                                          <p:stCondLst>
+                                            <p:cond delay="0"/>
+                                          </p:stCondLst>
+                                        </p:cTn>
+                                        <p:tgtEl>
+                                          <p:spTgt spid="6"/>
+                                        </p:tgtEl>
+                                        <p:attrNameLst>
+                                          <p:attrName>style.visibility</p:attrName>
+                                        </p:attrNameLst>
+                                      </p:cBhvr>
+                                      <p:to>
+                                        <p:strVal val="visible"/>
+                                      </p:to>
+                                    </p:set>
+                                    <p:animEffect transition="in" filter="circle(in)">
+                                      <p:cBhvr>
+                                        <p:cTn id="27" dur="2000"/>
+                                        <p:tgtEl>
+                                          <p:spTgt spid="6"/>
+                                        </p:tgtEl>
+                                      </p:cBhvr>
+                                    </p:animEffect>
+                                  </p:childTnLst>
+                                </p:cTn>
+                              </p:par>
+                            </p:childTnLst>
+                          </p:cTn>
+                        </p:par>
+                      </p:childTnLst>
+                    </p:cTn>
+                  </p:par>
+                </p:childTnLst>
+              </p:cTn>
+              <p:prevCondLst>
+                <p:cond evt="onPrev" delay="0">
+                  <p:tgtEl>
+                    <p:sldTgt/>
+                  </p:tgtEl>
+                </p:cond>
+              </p:prevCondLst>
+              <p:nextCondLst>
+                <p:cond evt="onNext" delay="0">
+                  <p:tgtEl>
+                    <p:sldTgt/>
+                  </p:tgtEl>
+                </p:cond>
+              </p:nextCondLst>
+            </p:seq>
+          </p:childTnLst>
+        </p:cTn>
+      </p:par>
+    </p:tnLst>
+    <p:bldLst>
+      <p:bldP spid="3" grpId="0" uiExpand="1" build="p"/>
+    </p:bldLst>
+  </p:timing>
 </p:sld>
 </file>
 
@@ -29039,7 +29712,7 @@
             <a:noFill/>
             <a:extLst>
               <a:ext uri="{909E8E84-426E-40dd-AFC4-6F175D3DCCD1}">
-                <a14:hiddenFill xmlns:p14="http://schemas.microsoft.com/office/powerpoint/2010/main" xmlns:a14="http://schemas.microsoft.com/office/drawing/2010/main" xmlns:a16="http://schemas.microsoft.com/office/drawing/2014/main" xmlns="">
+                <a14:hiddenFill xmlns="" xmlns:a16="http://schemas.microsoft.com/office/drawing/2014/main" xmlns:a14="http://schemas.microsoft.com/office/drawing/2010/main" xmlns:p14="http://schemas.microsoft.com/office/powerpoint/2010/main">
                   <a:solidFill>
                     <a:srgbClr val="FFFFFF"/>
                   </a:solidFill>
@@ -32271,7 +32944,7 @@
             <a:noFill/>
             <a:extLst>
               <a:ext uri="{909E8E84-426E-40dd-AFC4-6F175D3DCCD1}">
-                <a14:hiddenFill xmlns:p14="http://schemas.microsoft.com/office/powerpoint/2010/main" xmlns:a14="http://schemas.microsoft.com/office/drawing/2010/main" xmlns:a16="http://schemas.microsoft.com/office/drawing/2014/main" xmlns="">
+                <a14:hiddenFill xmlns="" xmlns:a16="http://schemas.microsoft.com/office/drawing/2014/main" xmlns:a14="http://schemas.microsoft.com/office/drawing/2010/main" xmlns:p14="http://schemas.microsoft.com/office/powerpoint/2010/main">
                   <a:solidFill>
                     <a:srgbClr val="FFFFFF"/>
                   </a:solidFill>
@@ -32428,7 +33101,7 @@
             </a:ln>
             <a:extLst>
               <a:ext uri="{91240B29-F687-4f45-9708-019B960494DF}">
-                <a14:hiddenLine xmlns:p14="http://schemas.microsoft.com/office/powerpoint/2010/main" xmlns:a14="http://schemas.microsoft.com/office/drawing/2010/main" xmlns:a16="http://schemas.microsoft.com/office/drawing/2014/main" xmlns="" w="9525">
+                <a14:hiddenLine xmlns="" xmlns:a16="http://schemas.microsoft.com/office/drawing/2014/main" xmlns:a14="http://schemas.microsoft.com/office/drawing/2010/main" xmlns:p14="http://schemas.microsoft.com/office/powerpoint/2010/main" w="9525">
                   <a:solidFill>
                     <a:srgbClr val="000000"/>
                   </a:solidFill>
@@ -32540,7 +33213,7 @@
             </a:ln>
             <a:extLst>
               <a:ext uri="{91240B29-F687-4f45-9708-019B960494DF}">
-                <a14:hiddenLine xmlns:p14="http://schemas.microsoft.com/office/powerpoint/2010/main" xmlns:a14="http://schemas.microsoft.com/office/drawing/2010/main" xmlns:a16="http://schemas.microsoft.com/office/drawing/2014/main" xmlns="" w="9525">
+                <a14:hiddenLine xmlns="" xmlns:a16="http://schemas.microsoft.com/office/drawing/2014/main" xmlns:a14="http://schemas.microsoft.com/office/drawing/2010/main" xmlns:p14="http://schemas.microsoft.com/office/powerpoint/2010/main" w="9525">
                   <a:solidFill>
                     <a:srgbClr val="000000"/>
                   </a:solidFill>
@@ -32652,7 +33325,7 @@
             </a:ln>
             <a:extLst>
               <a:ext uri="{91240B29-F687-4f45-9708-019B960494DF}">
-                <a14:hiddenLine xmlns:p14="http://schemas.microsoft.com/office/powerpoint/2010/main" xmlns:a14="http://schemas.microsoft.com/office/drawing/2010/main" xmlns:a16="http://schemas.microsoft.com/office/drawing/2014/main" xmlns="" w="9525">
+                <a14:hiddenLine xmlns="" xmlns:a16="http://schemas.microsoft.com/office/drawing/2014/main" xmlns:a14="http://schemas.microsoft.com/office/drawing/2010/main" xmlns:p14="http://schemas.microsoft.com/office/powerpoint/2010/main" w="9525">
                   <a:solidFill>
                     <a:srgbClr val="000000"/>
                   </a:solidFill>
@@ -32708,7 +33381,7 @@
             </a:ln>
             <a:extLst>
               <a:ext uri="{91240B29-F687-4f45-9708-019B960494DF}">
-                <a14:hiddenLine xmlns:p14="http://schemas.microsoft.com/office/powerpoint/2010/main" xmlns:a14="http://schemas.microsoft.com/office/drawing/2010/main" xmlns:a16="http://schemas.microsoft.com/office/drawing/2014/main" xmlns="" w="9525">
+                <a14:hiddenLine xmlns="" xmlns:a16="http://schemas.microsoft.com/office/drawing/2014/main" xmlns:a14="http://schemas.microsoft.com/office/drawing/2010/main" xmlns:p14="http://schemas.microsoft.com/office/powerpoint/2010/main" w="9525">
                   <a:solidFill>
                     <a:srgbClr val="000000"/>
                   </a:solidFill>
@@ -32820,7 +33493,7 @@
             </a:ln>
             <a:extLst>
               <a:ext uri="{91240B29-F687-4f45-9708-019B960494DF}">
-                <a14:hiddenLine xmlns:p14="http://schemas.microsoft.com/office/powerpoint/2010/main" xmlns:a14="http://schemas.microsoft.com/office/drawing/2010/main" xmlns:a16="http://schemas.microsoft.com/office/drawing/2014/main" xmlns="" w="9525">
+                <a14:hiddenLine xmlns="" xmlns:a16="http://schemas.microsoft.com/office/drawing/2014/main" xmlns:a14="http://schemas.microsoft.com/office/drawing/2010/main" xmlns:p14="http://schemas.microsoft.com/office/powerpoint/2010/main" w="9525">
                   <a:solidFill>
                     <a:srgbClr val="000000"/>
                   </a:solidFill>
@@ -32904,7 +33577,7 @@
             </a:ln>
             <a:extLst>
               <a:ext uri="{91240B29-F687-4f45-9708-019B960494DF}">
-                <a14:hiddenLine xmlns:p14="http://schemas.microsoft.com/office/powerpoint/2010/main" xmlns:a14="http://schemas.microsoft.com/office/drawing/2010/main" xmlns:a16="http://schemas.microsoft.com/office/drawing/2014/main" xmlns="" w="9525">
+                <a14:hiddenLine xmlns="" xmlns:a16="http://schemas.microsoft.com/office/drawing/2014/main" xmlns:a14="http://schemas.microsoft.com/office/drawing/2010/main" xmlns:p14="http://schemas.microsoft.com/office/powerpoint/2010/main" w="9525">
                   <a:solidFill>
                     <a:srgbClr val="000000"/>
                   </a:solidFill>
@@ -32988,7 +33661,7 @@
             </a:ln>
             <a:extLst>
               <a:ext uri="{91240B29-F687-4f45-9708-019B960494DF}">
-                <a14:hiddenLine xmlns:p14="http://schemas.microsoft.com/office/powerpoint/2010/main" xmlns:a14="http://schemas.microsoft.com/office/drawing/2010/main" xmlns:a16="http://schemas.microsoft.com/office/drawing/2014/main" xmlns="" w="9525">
+                <a14:hiddenLine xmlns="" xmlns:a16="http://schemas.microsoft.com/office/drawing/2014/main" xmlns:a14="http://schemas.microsoft.com/office/drawing/2010/main" xmlns:p14="http://schemas.microsoft.com/office/powerpoint/2010/main" w="9525">
                   <a:solidFill>
                     <a:srgbClr val="000000"/>
                   </a:solidFill>
@@ -33100,7 +33773,7 @@
             </a:ln>
             <a:extLst>
               <a:ext uri="{91240B29-F687-4f45-9708-019B960494DF}">
-                <a14:hiddenLine xmlns:p14="http://schemas.microsoft.com/office/powerpoint/2010/main" xmlns:a14="http://schemas.microsoft.com/office/drawing/2010/main" xmlns:a16="http://schemas.microsoft.com/office/drawing/2014/main" xmlns="" w="9525">
+                <a14:hiddenLine xmlns="" xmlns:a16="http://schemas.microsoft.com/office/drawing/2014/main" xmlns:a14="http://schemas.microsoft.com/office/drawing/2010/main" xmlns:p14="http://schemas.microsoft.com/office/powerpoint/2010/main" w="9525">
                   <a:solidFill>
                     <a:srgbClr val="000000"/>
                   </a:solidFill>
@@ -33184,7 +33857,7 @@
             </a:ln>
             <a:extLst>
               <a:ext uri="{91240B29-F687-4f45-9708-019B960494DF}">
-                <a14:hiddenLine xmlns:p14="http://schemas.microsoft.com/office/powerpoint/2010/main" xmlns:a14="http://schemas.microsoft.com/office/drawing/2010/main" xmlns:a16="http://schemas.microsoft.com/office/drawing/2014/main" xmlns="" w="9525">
+                <a14:hiddenLine xmlns="" xmlns:a16="http://schemas.microsoft.com/office/drawing/2014/main" xmlns:a14="http://schemas.microsoft.com/office/drawing/2010/main" xmlns:p14="http://schemas.microsoft.com/office/powerpoint/2010/main" w="9525">
                   <a:solidFill>
                     <a:srgbClr val="000000"/>
                   </a:solidFill>
@@ -33268,7 +33941,7 @@
             </a:ln>
             <a:extLst>
               <a:ext uri="{91240B29-F687-4f45-9708-019B960494DF}">
-                <a14:hiddenLine xmlns:p14="http://schemas.microsoft.com/office/powerpoint/2010/main" xmlns:a14="http://schemas.microsoft.com/office/drawing/2010/main" xmlns:a16="http://schemas.microsoft.com/office/drawing/2014/main" xmlns="" w="9525">
+                <a14:hiddenLine xmlns="" xmlns:a16="http://schemas.microsoft.com/office/drawing/2014/main" xmlns:a14="http://schemas.microsoft.com/office/drawing/2010/main" xmlns:p14="http://schemas.microsoft.com/office/powerpoint/2010/main" w="9525">
                   <a:solidFill>
                     <a:srgbClr val="000000"/>
                   </a:solidFill>
@@ -33380,7 +34053,7 @@
             </a:ln>
             <a:extLst>
               <a:ext uri="{91240B29-F687-4f45-9708-019B960494DF}">
-                <a14:hiddenLine xmlns:p14="http://schemas.microsoft.com/office/powerpoint/2010/main" xmlns:a14="http://schemas.microsoft.com/office/drawing/2010/main" xmlns:a16="http://schemas.microsoft.com/office/drawing/2014/main" xmlns="" w="9525">
+                <a14:hiddenLine xmlns="" xmlns:a16="http://schemas.microsoft.com/office/drawing/2014/main" xmlns:a14="http://schemas.microsoft.com/office/drawing/2010/main" xmlns:p14="http://schemas.microsoft.com/office/powerpoint/2010/main" w="9525">
                   <a:solidFill>
                     <a:srgbClr val="000000"/>
                   </a:solidFill>
@@ -33492,7 +34165,7 @@
             </a:ln>
             <a:extLst>
               <a:ext uri="{91240B29-F687-4f45-9708-019B960494DF}">
-                <a14:hiddenLine xmlns:p14="http://schemas.microsoft.com/office/powerpoint/2010/main" xmlns:a14="http://schemas.microsoft.com/office/drawing/2010/main" xmlns:a16="http://schemas.microsoft.com/office/drawing/2014/main" xmlns="" w="9525">
+                <a14:hiddenLine xmlns="" xmlns:a16="http://schemas.microsoft.com/office/drawing/2014/main" xmlns:a14="http://schemas.microsoft.com/office/drawing/2010/main" xmlns:p14="http://schemas.microsoft.com/office/powerpoint/2010/main" w="9525">
                   <a:solidFill>
                     <a:srgbClr val="000000"/>
                   </a:solidFill>
@@ -33576,7 +34249,7 @@
             </a:ln>
             <a:extLst>
               <a:ext uri="{91240B29-F687-4f45-9708-019B960494DF}">
-                <a14:hiddenLine xmlns:p14="http://schemas.microsoft.com/office/powerpoint/2010/main" xmlns:a14="http://schemas.microsoft.com/office/drawing/2010/main" xmlns:a16="http://schemas.microsoft.com/office/drawing/2014/main" xmlns="" w="9525">
+                <a14:hiddenLine xmlns="" xmlns:a16="http://schemas.microsoft.com/office/drawing/2014/main" xmlns:a14="http://schemas.microsoft.com/office/drawing/2010/main" xmlns:p14="http://schemas.microsoft.com/office/powerpoint/2010/main" w="9525">
                   <a:solidFill>
                     <a:srgbClr val="000000"/>
                   </a:solidFill>
@@ -33708,7 +34381,7 @@
             </a:ln>
             <a:extLst>
               <a:ext uri="{91240B29-F687-4f45-9708-019B960494DF}">
-                <a14:hiddenLine xmlns:p14="http://schemas.microsoft.com/office/powerpoint/2010/main" xmlns:a14="http://schemas.microsoft.com/office/drawing/2010/main" xmlns:a16="http://schemas.microsoft.com/office/drawing/2014/main" xmlns="" w="9525">
+                <a14:hiddenLine xmlns="" xmlns:a16="http://schemas.microsoft.com/office/drawing/2014/main" xmlns:a14="http://schemas.microsoft.com/office/drawing/2010/main" xmlns:p14="http://schemas.microsoft.com/office/powerpoint/2010/main" w="9525">
                   <a:solidFill>
                     <a:srgbClr val="000000"/>
                   </a:solidFill>
@@ -33792,7 +34465,7 @@
             </a:ln>
             <a:extLst>
               <a:ext uri="{91240B29-F687-4f45-9708-019B960494DF}">
-                <a14:hiddenLine xmlns:p14="http://schemas.microsoft.com/office/powerpoint/2010/main" xmlns:a14="http://schemas.microsoft.com/office/drawing/2010/main" xmlns:a16="http://schemas.microsoft.com/office/drawing/2014/main" xmlns="" w="9525">
+                <a14:hiddenLine xmlns="" xmlns:a16="http://schemas.microsoft.com/office/drawing/2014/main" xmlns:a14="http://schemas.microsoft.com/office/drawing/2010/main" xmlns:p14="http://schemas.microsoft.com/office/powerpoint/2010/main" w="9525">
                   <a:solidFill>
                     <a:srgbClr val="000000"/>
                   </a:solidFill>
@@ -33904,7 +34577,7 @@
             </a:ln>
             <a:extLst>
               <a:ext uri="{91240B29-F687-4f45-9708-019B960494DF}">
-                <a14:hiddenLine xmlns:p14="http://schemas.microsoft.com/office/powerpoint/2010/main" xmlns:a14="http://schemas.microsoft.com/office/drawing/2010/main" xmlns:a16="http://schemas.microsoft.com/office/drawing/2014/main" xmlns="" w="9525">
+                <a14:hiddenLine xmlns="" xmlns:a16="http://schemas.microsoft.com/office/drawing/2014/main" xmlns:a14="http://schemas.microsoft.com/office/drawing/2010/main" xmlns:p14="http://schemas.microsoft.com/office/powerpoint/2010/main" w="9525">
                   <a:solidFill>
                     <a:srgbClr val="000000"/>
                   </a:solidFill>
@@ -34016,7 +34689,7 @@
             </a:ln>
             <a:extLst>
               <a:ext uri="{91240B29-F687-4f45-9708-019B960494DF}">
-                <a14:hiddenLine xmlns:p14="http://schemas.microsoft.com/office/powerpoint/2010/main" xmlns:a14="http://schemas.microsoft.com/office/drawing/2010/main" xmlns:a16="http://schemas.microsoft.com/office/drawing/2014/main" xmlns="" w="9525">
+                <a14:hiddenLine xmlns="" xmlns:a16="http://schemas.microsoft.com/office/drawing/2014/main" xmlns:a14="http://schemas.microsoft.com/office/drawing/2010/main" xmlns:p14="http://schemas.microsoft.com/office/powerpoint/2010/main" w="9525">
                   <a:solidFill>
                     <a:srgbClr val="000000"/>
                   </a:solidFill>
@@ -34100,7 +34773,7 @@
             </a:ln>
             <a:extLst>
               <a:ext uri="{91240B29-F687-4f45-9708-019B960494DF}">
-                <a14:hiddenLine xmlns:p14="http://schemas.microsoft.com/office/powerpoint/2010/main" xmlns:a14="http://schemas.microsoft.com/office/drawing/2010/main" xmlns:a16="http://schemas.microsoft.com/office/drawing/2014/main" xmlns="" w="9525">
+                <a14:hiddenLine xmlns="" xmlns:a16="http://schemas.microsoft.com/office/drawing/2014/main" xmlns:a14="http://schemas.microsoft.com/office/drawing/2010/main" xmlns:p14="http://schemas.microsoft.com/office/powerpoint/2010/main" w="9525">
                   <a:solidFill>
                     <a:srgbClr val="000000"/>
                   </a:solidFill>
@@ -34212,7 +34885,7 @@
             </a:ln>
             <a:extLst>
               <a:ext uri="{91240B29-F687-4f45-9708-019B960494DF}">
-                <a14:hiddenLine xmlns:p14="http://schemas.microsoft.com/office/powerpoint/2010/main" xmlns:a14="http://schemas.microsoft.com/office/drawing/2010/main" xmlns:a16="http://schemas.microsoft.com/office/drawing/2014/main" xmlns="" w="9525">
+                <a14:hiddenLine xmlns="" xmlns:a16="http://schemas.microsoft.com/office/drawing/2014/main" xmlns:a14="http://schemas.microsoft.com/office/drawing/2010/main" xmlns:p14="http://schemas.microsoft.com/office/powerpoint/2010/main" w="9525">
                   <a:solidFill>
                     <a:srgbClr val="000000"/>
                   </a:solidFill>
@@ -34324,7 +34997,7 @@
             </a:ln>
             <a:extLst>
               <a:ext uri="{91240B29-F687-4f45-9708-019B960494DF}">
-                <a14:hiddenLine xmlns:p14="http://schemas.microsoft.com/office/powerpoint/2010/main" xmlns:a14="http://schemas.microsoft.com/office/drawing/2010/main" xmlns:a16="http://schemas.microsoft.com/office/drawing/2014/main" xmlns="" w="9525">
+                <a14:hiddenLine xmlns="" xmlns:a16="http://schemas.microsoft.com/office/drawing/2014/main" xmlns:a14="http://schemas.microsoft.com/office/drawing/2010/main" xmlns:p14="http://schemas.microsoft.com/office/powerpoint/2010/main" w="9525">
                   <a:solidFill>
                     <a:srgbClr val="000000"/>
                   </a:solidFill>
@@ -34402,7 +35075,7 @@
             </a:ln>
             <a:extLst>
               <a:ext uri="{91240B29-F687-4f45-9708-019B960494DF}">
-                <a14:hiddenLine xmlns:p14="http://schemas.microsoft.com/office/powerpoint/2010/main" xmlns:a14="http://schemas.microsoft.com/office/drawing/2010/main" xmlns:a16="http://schemas.microsoft.com/office/drawing/2014/main" xmlns="" w="9525">
+                <a14:hiddenLine xmlns="" xmlns:a16="http://schemas.microsoft.com/office/drawing/2014/main" xmlns:a14="http://schemas.microsoft.com/office/drawing/2010/main" xmlns:p14="http://schemas.microsoft.com/office/powerpoint/2010/main" w="9525">
                   <a:solidFill>
                     <a:srgbClr val="000000"/>
                   </a:solidFill>
@@ -34514,7 +35187,7 @@
             </a:ln>
             <a:extLst>
               <a:ext uri="{91240B29-F687-4f45-9708-019B960494DF}">
-                <a14:hiddenLine xmlns:p14="http://schemas.microsoft.com/office/powerpoint/2010/main" xmlns:a14="http://schemas.microsoft.com/office/drawing/2010/main" xmlns:a16="http://schemas.microsoft.com/office/drawing/2014/main" xmlns="" w="9525">
+                <a14:hiddenLine xmlns="" xmlns:a16="http://schemas.microsoft.com/office/drawing/2014/main" xmlns:a14="http://schemas.microsoft.com/office/drawing/2010/main" xmlns:p14="http://schemas.microsoft.com/office/powerpoint/2010/main" w="9525">
                   <a:solidFill>
                     <a:srgbClr val="000000"/>
                   </a:solidFill>
@@ -34592,7 +35265,7 @@
             </a:ln>
             <a:extLst>
               <a:ext uri="{91240B29-F687-4f45-9708-019B960494DF}">
-                <a14:hiddenLine xmlns:p14="http://schemas.microsoft.com/office/powerpoint/2010/main" xmlns:a14="http://schemas.microsoft.com/office/drawing/2010/main" xmlns:a16="http://schemas.microsoft.com/office/drawing/2014/main" xmlns="" w="9525">
+                <a14:hiddenLine xmlns="" xmlns:a16="http://schemas.microsoft.com/office/drawing/2014/main" xmlns:a14="http://schemas.microsoft.com/office/drawing/2010/main" xmlns:p14="http://schemas.microsoft.com/office/powerpoint/2010/main" w="9525">
                   <a:solidFill>
                     <a:srgbClr val="000000"/>
                   </a:solidFill>
@@ -34704,7 +35377,7 @@
             </a:ln>
             <a:extLst>
               <a:ext uri="{91240B29-F687-4f45-9708-019B960494DF}">
-                <a14:hiddenLine xmlns:p14="http://schemas.microsoft.com/office/powerpoint/2010/main" xmlns:a14="http://schemas.microsoft.com/office/drawing/2010/main" xmlns:a16="http://schemas.microsoft.com/office/drawing/2014/main" xmlns="" w="9525">
+                <a14:hiddenLine xmlns="" xmlns:a16="http://schemas.microsoft.com/office/drawing/2014/main" xmlns:a14="http://schemas.microsoft.com/office/drawing/2010/main" xmlns:p14="http://schemas.microsoft.com/office/powerpoint/2010/main" w="9525">
                   <a:solidFill>
                     <a:srgbClr val="000000"/>
                   </a:solidFill>
@@ -34794,7 +35467,7 @@
             </a:ln>
             <a:extLst>
               <a:ext uri="{91240B29-F687-4f45-9708-019B960494DF}">
-                <a14:hiddenLine xmlns:p14="http://schemas.microsoft.com/office/powerpoint/2010/main" xmlns:a14="http://schemas.microsoft.com/office/drawing/2010/main" xmlns:a16="http://schemas.microsoft.com/office/drawing/2014/main" xmlns="" w="9525">
+                <a14:hiddenLine xmlns="" xmlns:a16="http://schemas.microsoft.com/office/drawing/2014/main" xmlns:a14="http://schemas.microsoft.com/office/drawing/2010/main" xmlns:p14="http://schemas.microsoft.com/office/powerpoint/2010/main" w="9525">
                   <a:solidFill>
                     <a:srgbClr val="000000"/>
                   </a:solidFill>
@@ -34906,7 +35579,7 @@
             </a:ln>
             <a:extLst>
               <a:ext uri="{91240B29-F687-4f45-9708-019B960494DF}">
-                <a14:hiddenLine xmlns:p14="http://schemas.microsoft.com/office/powerpoint/2010/main" xmlns:a14="http://schemas.microsoft.com/office/drawing/2010/main" xmlns:a16="http://schemas.microsoft.com/office/drawing/2014/main" xmlns="" w="9525">
+                <a14:hiddenLine xmlns="" xmlns:a16="http://schemas.microsoft.com/office/drawing/2014/main" xmlns:a14="http://schemas.microsoft.com/office/drawing/2010/main" xmlns:p14="http://schemas.microsoft.com/office/powerpoint/2010/main" w="9525">
                   <a:solidFill>
                     <a:srgbClr val="000000"/>
                   </a:solidFill>
@@ -34996,7 +35669,7 @@
             </a:ln>
             <a:extLst>
               <a:ext uri="{91240B29-F687-4f45-9708-019B960494DF}">
-                <a14:hiddenLine xmlns:p14="http://schemas.microsoft.com/office/powerpoint/2010/main" xmlns:a14="http://schemas.microsoft.com/office/drawing/2010/main" xmlns:a16="http://schemas.microsoft.com/office/drawing/2014/main" xmlns="" w="9525">
+                <a14:hiddenLine xmlns="" xmlns:a16="http://schemas.microsoft.com/office/drawing/2014/main" xmlns:a14="http://schemas.microsoft.com/office/drawing/2010/main" xmlns:p14="http://schemas.microsoft.com/office/powerpoint/2010/main" w="9525">
                   <a:solidFill>
                     <a:srgbClr val="000000"/>
                   </a:solidFill>
@@ -35108,7 +35781,7 @@
             </a:ln>
             <a:extLst>
               <a:ext uri="{91240B29-F687-4f45-9708-019B960494DF}">
-                <a14:hiddenLine xmlns:p14="http://schemas.microsoft.com/office/powerpoint/2010/main" xmlns:a14="http://schemas.microsoft.com/office/drawing/2010/main" xmlns:a16="http://schemas.microsoft.com/office/drawing/2014/main" xmlns="" w="9525">
+                <a14:hiddenLine xmlns="" xmlns:a16="http://schemas.microsoft.com/office/drawing/2014/main" xmlns:a14="http://schemas.microsoft.com/office/drawing/2010/main" xmlns:p14="http://schemas.microsoft.com/office/powerpoint/2010/main" w="9525">
                   <a:solidFill>
                     <a:srgbClr val="000000"/>
                   </a:solidFill>
@@ -35164,7 +35837,7 @@
             </a:ln>
             <a:extLst>
               <a:ext uri="{91240B29-F687-4f45-9708-019B960494DF}">
-                <a14:hiddenLine xmlns:p14="http://schemas.microsoft.com/office/powerpoint/2010/main" xmlns:a14="http://schemas.microsoft.com/office/drawing/2010/main" xmlns:a16="http://schemas.microsoft.com/office/drawing/2014/main" xmlns="" w="9525">
+                <a14:hiddenLine xmlns="" xmlns:a16="http://schemas.microsoft.com/office/drawing/2014/main" xmlns:a14="http://schemas.microsoft.com/office/drawing/2010/main" xmlns:p14="http://schemas.microsoft.com/office/powerpoint/2010/main" w="9525">
                   <a:solidFill>
                     <a:srgbClr val="000000"/>
                   </a:solidFill>
@@ -35276,7 +35949,7 @@
             </a:ln>
             <a:extLst>
               <a:ext uri="{91240B29-F687-4f45-9708-019B960494DF}">
-                <a14:hiddenLine xmlns:p14="http://schemas.microsoft.com/office/powerpoint/2010/main" xmlns:a14="http://schemas.microsoft.com/office/drawing/2010/main" xmlns:a16="http://schemas.microsoft.com/office/drawing/2014/main" xmlns="" w="9525">
+                <a14:hiddenLine xmlns="" xmlns:a16="http://schemas.microsoft.com/office/drawing/2014/main" xmlns:a14="http://schemas.microsoft.com/office/drawing/2010/main" xmlns:p14="http://schemas.microsoft.com/office/powerpoint/2010/main" w="9525">
                   <a:solidFill>
                     <a:srgbClr val="000000"/>
                   </a:solidFill>
@@ -35360,7 +36033,7 @@
             </a:ln>
             <a:extLst>
               <a:ext uri="{91240B29-F687-4f45-9708-019B960494DF}">
-                <a14:hiddenLine xmlns:p14="http://schemas.microsoft.com/office/powerpoint/2010/main" xmlns:a14="http://schemas.microsoft.com/office/drawing/2010/main" xmlns:a16="http://schemas.microsoft.com/office/drawing/2014/main" xmlns="" w="9525">
+                <a14:hiddenLine xmlns="" xmlns:a16="http://schemas.microsoft.com/office/drawing/2014/main" xmlns:a14="http://schemas.microsoft.com/office/drawing/2010/main" xmlns:p14="http://schemas.microsoft.com/office/powerpoint/2010/main" w="9525">
                   <a:solidFill>
                     <a:srgbClr val="000000"/>
                   </a:solidFill>
@@ -35444,7 +36117,7 @@
             </a:ln>
             <a:extLst>
               <a:ext uri="{91240B29-F687-4f45-9708-019B960494DF}">
-                <a14:hiddenLine xmlns:p14="http://schemas.microsoft.com/office/powerpoint/2010/main" xmlns:a14="http://schemas.microsoft.com/office/drawing/2010/main" xmlns:a16="http://schemas.microsoft.com/office/drawing/2014/main" xmlns="" w="9525">
+                <a14:hiddenLine xmlns="" xmlns:a16="http://schemas.microsoft.com/office/drawing/2014/main" xmlns:a14="http://schemas.microsoft.com/office/drawing/2010/main" xmlns:p14="http://schemas.microsoft.com/office/powerpoint/2010/main" w="9525">
                   <a:solidFill>
                     <a:srgbClr val="000000"/>
                   </a:solidFill>
@@ -35556,7 +36229,7 @@
             </a:ln>
             <a:extLst>
               <a:ext uri="{91240B29-F687-4f45-9708-019B960494DF}">
-                <a14:hiddenLine xmlns:p14="http://schemas.microsoft.com/office/powerpoint/2010/main" xmlns:a14="http://schemas.microsoft.com/office/drawing/2010/main" xmlns:a16="http://schemas.microsoft.com/office/drawing/2014/main" xmlns="" w="9525">
+                <a14:hiddenLine xmlns="" xmlns:a16="http://schemas.microsoft.com/office/drawing/2014/main" xmlns:a14="http://schemas.microsoft.com/office/drawing/2010/main" xmlns:p14="http://schemas.microsoft.com/office/powerpoint/2010/main" w="9525">
                   <a:solidFill>
                     <a:srgbClr val="000000"/>
                   </a:solidFill>
@@ -35646,7 +36319,7 @@
             </a:ln>
             <a:extLst>
               <a:ext uri="{91240B29-F687-4f45-9708-019B960494DF}">
-                <a14:hiddenLine xmlns:p14="http://schemas.microsoft.com/office/powerpoint/2010/main" xmlns:a14="http://schemas.microsoft.com/office/drawing/2010/main" xmlns:a16="http://schemas.microsoft.com/office/drawing/2014/main" xmlns="" w="9525">
+                <a14:hiddenLine xmlns="" xmlns:a16="http://schemas.microsoft.com/office/drawing/2014/main" xmlns:a14="http://schemas.microsoft.com/office/drawing/2010/main" xmlns:p14="http://schemas.microsoft.com/office/powerpoint/2010/main" w="9525">
                   <a:solidFill>
                     <a:srgbClr val="000000"/>
                   </a:solidFill>
@@ -35730,7 +36403,7 @@
             </a:ln>
             <a:extLst>
               <a:ext uri="{91240B29-F687-4f45-9708-019B960494DF}">
-                <a14:hiddenLine xmlns:p14="http://schemas.microsoft.com/office/powerpoint/2010/main" xmlns:a14="http://schemas.microsoft.com/office/drawing/2010/main" xmlns:a16="http://schemas.microsoft.com/office/drawing/2014/main" xmlns="" w="9525">
+                <a14:hiddenLine xmlns="" xmlns:a16="http://schemas.microsoft.com/office/drawing/2014/main" xmlns:a14="http://schemas.microsoft.com/office/drawing/2010/main" xmlns:p14="http://schemas.microsoft.com/office/powerpoint/2010/main" w="9525">
                   <a:solidFill>
                     <a:srgbClr val="000000"/>
                   </a:solidFill>
@@ -35842,7 +36515,7 @@
             </a:ln>
             <a:extLst>
               <a:ext uri="{91240B29-F687-4f45-9708-019B960494DF}">
-                <a14:hiddenLine xmlns:p14="http://schemas.microsoft.com/office/powerpoint/2010/main" xmlns:a14="http://schemas.microsoft.com/office/drawing/2010/main" xmlns:a16="http://schemas.microsoft.com/office/drawing/2014/main" xmlns="" w="9525">
+                <a14:hiddenLine xmlns="" xmlns:a16="http://schemas.microsoft.com/office/drawing/2014/main" xmlns:a14="http://schemas.microsoft.com/office/drawing/2010/main" xmlns:p14="http://schemas.microsoft.com/office/powerpoint/2010/main" w="9525">
                   <a:solidFill>
                     <a:srgbClr val="000000"/>
                   </a:solidFill>
@@ -35926,7 +36599,7 @@
             </a:ln>
             <a:extLst>
               <a:ext uri="{91240B29-F687-4f45-9708-019B960494DF}">
-                <a14:hiddenLine xmlns:p14="http://schemas.microsoft.com/office/powerpoint/2010/main" xmlns:a14="http://schemas.microsoft.com/office/drawing/2010/main" xmlns:a16="http://schemas.microsoft.com/office/drawing/2014/main" xmlns="" w="9525">
+                <a14:hiddenLine xmlns="" xmlns:a16="http://schemas.microsoft.com/office/drawing/2014/main" xmlns:a14="http://schemas.microsoft.com/office/drawing/2010/main" xmlns:p14="http://schemas.microsoft.com/office/powerpoint/2010/main" w="9525">
                   <a:solidFill>
                     <a:srgbClr val="000000"/>
                   </a:solidFill>
@@ -36038,7 +36711,7 @@
             </a:ln>
             <a:extLst>
               <a:ext uri="{91240B29-F687-4f45-9708-019B960494DF}">
-                <a14:hiddenLine xmlns:p14="http://schemas.microsoft.com/office/powerpoint/2010/main" xmlns:a14="http://schemas.microsoft.com/office/drawing/2010/main" xmlns:a16="http://schemas.microsoft.com/office/drawing/2014/main" xmlns="" w="9525">
+                <a14:hiddenLine xmlns="" xmlns:a16="http://schemas.microsoft.com/office/drawing/2014/main" xmlns:a14="http://schemas.microsoft.com/office/drawing/2010/main" xmlns:p14="http://schemas.microsoft.com/office/powerpoint/2010/main" w="9525">
                   <a:solidFill>
                     <a:srgbClr val="000000"/>
                   </a:solidFill>
@@ -36122,7 +36795,7 @@
             </a:ln>
             <a:extLst>
               <a:ext uri="{91240B29-F687-4f45-9708-019B960494DF}">
-                <a14:hiddenLine xmlns:p14="http://schemas.microsoft.com/office/powerpoint/2010/main" xmlns:a14="http://schemas.microsoft.com/office/drawing/2010/main" xmlns:a16="http://schemas.microsoft.com/office/drawing/2014/main" xmlns="" w="9525">
+                <a14:hiddenLine xmlns="" xmlns:a16="http://schemas.microsoft.com/office/drawing/2014/main" xmlns:a14="http://schemas.microsoft.com/office/drawing/2010/main" xmlns:p14="http://schemas.microsoft.com/office/powerpoint/2010/main" w="9525">
                   <a:solidFill>
                     <a:srgbClr val="000000"/>
                   </a:solidFill>
@@ -36234,7 +36907,7 @@
             </a:ln>
             <a:extLst>
               <a:ext uri="{91240B29-F687-4f45-9708-019B960494DF}">
-                <a14:hiddenLine xmlns:p14="http://schemas.microsoft.com/office/powerpoint/2010/main" xmlns:a14="http://schemas.microsoft.com/office/drawing/2010/main" xmlns:a16="http://schemas.microsoft.com/office/drawing/2014/main" xmlns="" w="9525">
+                <a14:hiddenLine xmlns="" xmlns:a16="http://schemas.microsoft.com/office/drawing/2014/main" xmlns:a14="http://schemas.microsoft.com/office/drawing/2010/main" xmlns:p14="http://schemas.microsoft.com/office/powerpoint/2010/main" w="9525">
                   <a:solidFill>
                     <a:srgbClr val="000000"/>
                   </a:solidFill>
@@ -36290,7 +36963,7 @@
             </a:ln>
             <a:extLst>
               <a:ext uri="{91240B29-F687-4f45-9708-019B960494DF}">
-                <a14:hiddenLine xmlns:p14="http://schemas.microsoft.com/office/powerpoint/2010/main" xmlns:a14="http://schemas.microsoft.com/office/drawing/2010/main" xmlns:a16="http://schemas.microsoft.com/office/drawing/2014/main" xmlns="" w="9525">
+                <a14:hiddenLine xmlns="" xmlns:a16="http://schemas.microsoft.com/office/drawing/2014/main" xmlns:a14="http://schemas.microsoft.com/office/drawing/2010/main" xmlns:p14="http://schemas.microsoft.com/office/powerpoint/2010/main" w="9525">
                   <a:solidFill>
                     <a:srgbClr val="000000"/>
                   </a:solidFill>
@@ -36377,7 +37050,7 @@
             </a:ln>
             <a:extLst>
               <a:ext uri="{91240B29-F687-4f45-9708-019B960494DF}">
-                <a14:hiddenLine xmlns:p14="http://schemas.microsoft.com/office/powerpoint/2010/main" xmlns:a14="http://schemas.microsoft.com/office/drawing/2010/main" xmlns:a16="http://schemas.microsoft.com/office/drawing/2014/main" xmlns="" w="9525">
+                <a14:hiddenLine xmlns="" xmlns:a16="http://schemas.microsoft.com/office/drawing/2014/main" xmlns:a14="http://schemas.microsoft.com/office/drawing/2010/main" xmlns:p14="http://schemas.microsoft.com/office/powerpoint/2010/main" w="9525">
                   <a:solidFill>
                     <a:srgbClr val="000000"/>
                   </a:solidFill>
@@ -36489,7 +37162,7 @@
             </a:ln>
             <a:extLst>
               <a:ext uri="{91240B29-F687-4f45-9708-019B960494DF}">
-                <a14:hiddenLine xmlns:p14="http://schemas.microsoft.com/office/powerpoint/2010/main" xmlns:a14="http://schemas.microsoft.com/office/drawing/2010/main" xmlns:a16="http://schemas.microsoft.com/office/drawing/2014/main" xmlns="" w="9525">
+                <a14:hiddenLine xmlns="" xmlns:a16="http://schemas.microsoft.com/office/drawing/2014/main" xmlns:a14="http://schemas.microsoft.com/office/drawing/2010/main" xmlns:p14="http://schemas.microsoft.com/office/powerpoint/2010/main" w="9525">
                   <a:solidFill>
                     <a:srgbClr val="000000"/>
                   </a:solidFill>
@@ -36573,7 +37246,7 @@
             </a:ln>
             <a:extLst>
               <a:ext uri="{91240B29-F687-4f45-9708-019B960494DF}">
-                <a14:hiddenLine xmlns:p14="http://schemas.microsoft.com/office/powerpoint/2010/main" xmlns:a14="http://schemas.microsoft.com/office/drawing/2010/main" xmlns:a16="http://schemas.microsoft.com/office/drawing/2014/main" xmlns="" w="9525">
+                <a14:hiddenLine xmlns="" xmlns:a16="http://schemas.microsoft.com/office/drawing/2014/main" xmlns:a14="http://schemas.microsoft.com/office/drawing/2010/main" xmlns:p14="http://schemas.microsoft.com/office/powerpoint/2010/main" w="9525">
                   <a:solidFill>
                     <a:srgbClr val="000000"/>
                   </a:solidFill>
@@ -36685,7 +37358,7 @@
             </a:ln>
             <a:extLst>
               <a:ext uri="{91240B29-F687-4f45-9708-019B960494DF}">
-                <a14:hiddenLine xmlns:p14="http://schemas.microsoft.com/office/powerpoint/2010/main" xmlns:a14="http://schemas.microsoft.com/office/drawing/2010/main" xmlns:a16="http://schemas.microsoft.com/office/drawing/2014/main" xmlns="" w="9525">
+                <a14:hiddenLine xmlns="" xmlns:a16="http://schemas.microsoft.com/office/drawing/2014/main" xmlns:a14="http://schemas.microsoft.com/office/drawing/2010/main" xmlns:p14="http://schemas.microsoft.com/office/powerpoint/2010/main" w="9525">
                   <a:solidFill>
                     <a:srgbClr val="000000"/>
                   </a:solidFill>
@@ -36797,7 +37470,7 @@
             </a:ln>
             <a:extLst>
               <a:ext uri="{91240B29-F687-4f45-9708-019B960494DF}">
-                <a14:hiddenLine xmlns:p14="http://schemas.microsoft.com/office/powerpoint/2010/main" xmlns:a14="http://schemas.microsoft.com/office/drawing/2010/main" xmlns:a16="http://schemas.microsoft.com/office/drawing/2014/main" xmlns="" w="9525">
+                <a14:hiddenLine xmlns="" xmlns:a16="http://schemas.microsoft.com/office/drawing/2014/main" xmlns:a14="http://schemas.microsoft.com/office/drawing/2010/main" xmlns:p14="http://schemas.microsoft.com/office/powerpoint/2010/main" w="9525">
                   <a:solidFill>
                     <a:srgbClr val="000000"/>
                   </a:solidFill>
@@ -36884,7 +37557,7 @@
             </a:ln>
             <a:extLst>
               <a:ext uri="{91240B29-F687-4f45-9708-019B960494DF}">
-                <a14:hiddenLine xmlns:p14="http://schemas.microsoft.com/office/powerpoint/2010/main" xmlns:a14="http://schemas.microsoft.com/office/drawing/2010/main" xmlns:a16="http://schemas.microsoft.com/office/drawing/2014/main" xmlns="" w="9525">
+                <a14:hiddenLine xmlns="" xmlns:a16="http://schemas.microsoft.com/office/drawing/2014/main" xmlns:a14="http://schemas.microsoft.com/office/drawing/2010/main" xmlns:p14="http://schemas.microsoft.com/office/powerpoint/2010/main" w="9525">
                   <a:solidFill>
                     <a:srgbClr val="000000"/>
                   </a:solidFill>
@@ -36968,7 +37641,7 @@
             </a:ln>
             <a:extLst>
               <a:ext uri="{91240B29-F687-4f45-9708-019B960494DF}">
-                <a14:hiddenLine xmlns:p14="http://schemas.microsoft.com/office/powerpoint/2010/main" xmlns:a14="http://schemas.microsoft.com/office/drawing/2010/main" xmlns:a16="http://schemas.microsoft.com/office/drawing/2014/main" xmlns="" w="9525">
+                <a14:hiddenLine xmlns="" xmlns:a16="http://schemas.microsoft.com/office/drawing/2014/main" xmlns:a14="http://schemas.microsoft.com/office/drawing/2010/main" xmlns:p14="http://schemas.microsoft.com/office/powerpoint/2010/main" w="9525">
                   <a:solidFill>
                     <a:srgbClr val="000000"/>
                   </a:solidFill>
@@ -37080,7 +37753,7 @@
             </a:ln>
             <a:extLst>
               <a:ext uri="{91240B29-F687-4f45-9708-019B960494DF}">
-                <a14:hiddenLine xmlns:p14="http://schemas.microsoft.com/office/powerpoint/2010/main" xmlns:a14="http://schemas.microsoft.com/office/drawing/2010/main" xmlns:a16="http://schemas.microsoft.com/office/drawing/2014/main" xmlns="" w="9525">
+                <a14:hiddenLine xmlns="" xmlns:a16="http://schemas.microsoft.com/office/drawing/2014/main" xmlns:a14="http://schemas.microsoft.com/office/drawing/2010/main" xmlns:p14="http://schemas.microsoft.com/office/powerpoint/2010/main" w="9525">
                   <a:solidFill>
                     <a:srgbClr val="000000"/>
                   </a:solidFill>
@@ -37192,7 +37865,7 @@
             </a:ln>
             <a:extLst>
               <a:ext uri="{91240B29-F687-4f45-9708-019B960494DF}">
-                <a14:hiddenLine xmlns:p14="http://schemas.microsoft.com/office/powerpoint/2010/main" xmlns:a14="http://schemas.microsoft.com/office/drawing/2010/main" xmlns:a16="http://schemas.microsoft.com/office/drawing/2014/main" xmlns="" w="9525">
+                <a14:hiddenLine xmlns="" xmlns:a16="http://schemas.microsoft.com/office/drawing/2014/main" xmlns:a14="http://schemas.microsoft.com/office/drawing/2010/main" xmlns:p14="http://schemas.microsoft.com/office/powerpoint/2010/main" w="9525">
                   <a:solidFill>
                     <a:srgbClr val="000000"/>
                   </a:solidFill>
@@ -37276,7 +37949,7 @@
             </a:ln>
             <a:extLst>
               <a:ext uri="{91240B29-F687-4f45-9708-019B960494DF}">
-                <a14:hiddenLine xmlns:p14="http://schemas.microsoft.com/office/powerpoint/2010/main" xmlns:a14="http://schemas.microsoft.com/office/drawing/2010/main" xmlns:a16="http://schemas.microsoft.com/office/drawing/2014/main" xmlns="" w="9525">
+                <a14:hiddenLine xmlns="" xmlns:a16="http://schemas.microsoft.com/office/drawing/2014/main" xmlns:a14="http://schemas.microsoft.com/office/drawing/2010/main" xmlns:p14="http://schemas.microsoft.com/office/powerpoint/2010/main" w="9525">
                   <a:solidFill>
                     <a:srgbClr val="000000"/>
                   </a:solidFill>
@@ -37418,7 +38091,7 @@
             </a:ln>
             <a:extLst>
               <a:ext uri="{91240B29-F687-4f45-9708-019B960494DF}">
-                <a14:hiddenLine xmlns:p14="http://schemas.microsoft.com/office/powerpoint/2010/main" xmlns:a14="http://schemas.microsoft.com/office/drawing/2010/main" xmlns:a16="http://schemas.microsoft.com/office/drawing/2014/main" xmlns="" w="9525">
+                <a14:hiddenLine xmlns="" xmlns:a16="http://schemas.microsoft.com/office/drawing/2014/main" xmlns:a14="http://schemas.microsoft.com/office/drawing/2010/main" xmlns:p14="http://schemas.microsoft.com/office/powerpoint/2010/main" w="9525">
                   <a:solidFill>
                     <a:srgbClr val="000000"/>
                   </a:solidFill>
@@ -37508,7 +38181,7 @@
             </a:ln>
             <a:extLst>
               <a:ext uri="{91240B29-F687-4f45-9708-019B960494DF}">
-                <a14:hiddenLine xmlns:p14="http://schemas.microsoft.com/office/powerpoint/2010/main" xmlns:a14="http://schemas.microsoft.com/office/drawing/2010/main" xmlns:a16="http://schemas.microsoft.com/office/drawing/2014/main" xmlns="" w="9525">
+                <a14:hiddenLine xmlns="" xmlns:a16="http://schemas.microsoft.com/office/drawing/2014/main" xmlns:a14="http://schemas.microsoft.com/office/drawing/2010/main" xmlns:p14="http://schemas.microsoft.com/office/powerpoint/2010/main" w="9525">
                   <a:solidFill>
                     <a:srgbClr val="000000"/>
                   </a:solidFill>
@@ -37620,7 +38293,7 @@
             </a:ln>
             <a:extLst>
               <a:ext uri="{91240B29-F687-4f45-9708-019B960494DF}">
-                <a14:hiddenLine xmlns:p14="http://schemas.microsoft.com/office/powerpoint/2010/main" xmlns:a14="http://schemas.microsoft.com/office/drawing/2010/main" xmlns:a16="http://schemas.microsoft.com/office/drawing/2014/main" xmlns="" w="9525">
+                <a14:hiddenLine xmlns="" xmlns:a16="http://schemas.microsoft.com/office/drawing/2014/main" xmlns:a14="http://schemas.microsoft.com/office/drawing/2010/main" xmlns:p14="http://schemas.microsoft.com/office/powerpoint/2010/main" w="9525">
                   <a:solidFill>
                     <a:srgbClr val="000000"/>
                   </a:solidFill>
@@ -41196,7 +41869,7 @@
           <a:noFill/>
           <a:extLst>
             <a:ext uri="{909E8E84-426E-40dd-AFC4-6F175D3DCCD1}">
-              <a14:hiddenFill xmlns:a14="http://schemas.microsoft.com/office/drawing/2010/main" xmlns:p14="http://schemas.microsoft.com/office/powerpoint/2010/main" xmlns:a16="http://schemas.microsoft.com/office/drawing/2014/main" xmlns="">
+              <a14:hiddenFill xmlns="" xmlns:a16="http://schemas.microsoft.com/office/drawing/2014/main" xmlns:p14="http://schemas.microsoft.com/office/powerpoint/2010/main" xmlns:a14="http://schemas.microsoft.com/office/drawing/2010/main">
                 <a:solidFill>
                   <a:srgbClr val="FFFFFF"/>
                 </a:solidFill>
@@ -41861,7 +42534,7 @@
             </a:ln>
             <a:extLst>
               <a:ext uri="{91240B29-F687-4f45-9708-019B960494DF}">
-                <a14:hiddenLine xmlns:a14="http://schemas.microsoft.com/office/drawing/2010/main" xmlns:p14="http://schemas.microsoft.com/office/powerpoint/2010/main" xmlns:a16="http://schemas.microsoft.com/office/drawing/2014/main" xmlns="" w="9525">
+                <a14:hiddenLine xmlns="" xmlns:a16="http://schemas.microsoft.com/office/drawing/2014/main" xmlns:p14="http://schemas.microsoft.com/office/powerpoint/2010/main" xmlns:a14="http://schemas.microsoft.com/office/drawing/2010/main" w="9525">
                   <a:solidFill>
                     <a:srgbClr val="000000"/>
                   </a:solidFill>
@@ -41973,7 +42646,7 @@
             </a:ln>
             <a:extLst>
               <a:ext uri="{91240B29-F687-4f45-9708-019B960494DF}">
-                <a14:hiddenLine xmlns:a14="http://schemas.microsoft.com/office/drawing/2010/main" xmlns:p14="http://schemas.microsoft.com/office/powerpoint/2010/main" xmlns:a16="http://schemas.microsoft.com/office/drawing/2014/main" xmlns="" w="9525">
+                <a14:hiddenLine xmlns="" xmlns:a16="http://schemas.microsoft.com/office/drawing/2014/main" xmlns:p14="http://schemas.microsoft.com/office/powerpoint/2010/main" xmlns:a14="http://schemas.microsoft.com/office/drawing/2010/main" w="9525">
                   <a:solidFill>
                     <a:srgbClr val="000000"/>
                   </a:solidFill>
@@ -42085,7 +42758,7 @@
             </a:ln>
             <a:extLst>
               <a:ext uri="{91240B29-F687-4f45-9708-019B960494DF}">
-                <a14:hiddenLine xmlns:a14="http://schemas.microsoft.com/office/drawing/2010/main" xmlns:p14="http://schemas.microsoft.com/office/powerpoint/2010/main" xmlns:a16="http://schemas.microsoft.com/office/drawing/2014/main" xmlns="" w="9525">
+                <a14:hiddenLine xmlns="" xmlns:a16="http://schemas.microsoft.com/office/drawing/2014/main" xmlns:p14="http://schemas.microsoft.com/office/powerpoint/2010/main" xmlns:a14="http://schemas.microsoft.com/office/drawing/2010/main" w="9525">
                   <a:solidFill>
                     <a:srgbClr val="000000"/>
                   </a:solidFill>
@@ -42169,7 +42842,7 @@
             </a:ln>
             <a:extLst>
               <a:ext uri="{91240B29-F687-4f45-9708-019B960494DF}">
-                <a14:hiddenLine xmlns:a14="http://schemas.microsoft.com/office/drawing/2010/main" xmlns:p14="http://schemas.microsoft.com/office/powerpoint/2010/main" xmlns:a16="http://schemas.microsoft.com/office/drawing/2014/main" xmlns="" w="9525">
+                <a14:hiddenLine xmlns="" xmlns:a16="http://schemas.microsoft.com/office/drawing/2014/main" xmlns:p14="http://schemas.microsoft.com/office/powerpoint/2010/main" xmlns:a14="http://schemas.microsoft.com/office/drawing/2010/main" w="9525">
                   <a:solidFill>
                     <a:srgbClr val="000000"/>
                   </a:solidFill>
@@ -42281,7 +42954,7 @@
             </a:ln>
             <a:extLst>
               <a:ext uri="{91240B29-F687-4f45-9708-019B960494DF}">
-                <a14:hiddenLine xmlns:a14="http://schemas.microsoft.com/office/drawing/2010/main" xmlns:p14="http://schemas.microsoft.com/office/powerpoint/2010/main" xmlns:a16="http://schemas.microsoft.com/office/drawing/2014/main" xmlns="" w="9525">
+                <a14:hiddenLine xmlns="" xmlns:a16="http://schemas.microsoft.com/office/drawing/2014/main" xmlns:p14="http://schemas.microsoft.com/office/powerpoint/2010/main" xmlns:a14="http://schemas.microsoft.com/office/drawing/2010/main" w="9525">
                   <a:solidFill>
                     <a:srgbClr val="000000"/>
                   </a:solidFill>
@@ -42365,7 +43038,7 @@
             </a:ln>
             <a:extLst>
               <a:ext uri="{91240B29-F687-4f45-9708-019B960494DF}">
-                <a14:hiddenLine xmlns:a14="http://schemas.microsoft.com/office/drawing/2010/main" xmlns:p14="http://schemas.microsoft.com/office/powerpoint/2010/main" xmlns:a16="http://schemas.microsoft.com/office/drawing/2014/main" xmlns="" w="9525">
+                <a14:hiddenLine xmlns="" xmlns:a16="http://schemas.microsoft.com/office/drawing/2014/main" xmlns:p14="http://schemas.microsoft.com/office/powerpoint/2010/main" xmlns:a14="http://schemas.microsoft.com/office/drawing/2010/main" w="9525">
                   <a:solidFill>
                     <a:srgbClr val="000000"/>
                   </a:solidFill>
@@ -42449,7 +43122,7 @@
             </a:ln>
             <a:extLst>
               <a:ext uri="{91240B29-F687-4f45-9708-019B960494DF}">
-                <a14:hiddenLine xmlns:a14="http://schemas.microsoft.com/office/drawing/2010/main" xmlns:p14="http://schemas.microsoft.com/office/powerpoint/2010/main" xmlns:a16="http://schemas.microsoft.com/office/drawing/2014/main" xmlns="" w="9525">
+                <a14:hiddenLine xmlns="" xmlns:a16="http://schemas.microsoft.com/office/drawing/2014/main" xmlns:p14="http://schemas.microsoft.com/office/powerpoint/2010/main" xmlns:a14="http://schemas.microsoft.com/office/drawing/2010/main" w="9525">
                   <a:solidFill>
                     <a:srgbClr val="000000"/>
                   </a:solidFill>
@@ -42561,7 +43234,7 @@
             </a:ln>
             <a:extLst>
               <a:ext uri="{91240B29-F687-4f45-9708-019B960494DF}">
-                <a14:hiddenLine xmlns:a14="http://schemas.microsoft.com/office/drawing/2010/main" xmlns:p14="http://schemas.microsoft.com/office/powerpoint/2010/main" xmlns:a16="http://schemas.microsoft.com/office/drawing/2014/main" xmlns="" w="9525">
+                <a14:hiddenLine xmlns="" xmlns:a16="http://schemas.microsoft.com/office/drawing/2014/main" xmlns:p14="http://schemas.microsoft.com/office/powerpoint/2010/main" xmlns:a14="http://schemas.microsoft.com/office/drawing/2010/main" w="9525">
                   <a:solidFill>
                     <a:srgbClr val="000000"/>
                   </a:solidFill>
@@ -42673,7 +43346,7 @@
             </a:ln>
             <a:extLst>
               <a:ext uri="{91240B29-F687-4f45-9708-019B960494DF}">
-                <a14:hiddenLine xmlns:a14="http://schemas.microsoft.com/office/drawing/2010/main" xmlns:p14="http://schemas.microsoft.com/office/powerpoint/2010/main" xmlns:a16="http://schemas.microsoft.com/office/drawing/2014/main" xmlns="" w="9525">
+                <a14:hiddenLine xmlns="" xmlns:a16="http://schemas.microsoft.com/office/drawing/2014/main" xmlns:p14="http://schemas.microsoft.com/office/powerpoint/2010/main" xmlns:a14="http://schemas.microsoft.com/office/drawing/2010/main" w="9525">
                   <a:solidFill>
                     <a:srgbClr val="000000"/>
                   </a:solidFill>
@@ -42757,7 +43430,7 @@
             </a:ln>
             <a:extLst>
               <a:ext uri="{91240B29-F687-4f45-9708-019B960494DF}">
-                <a14:hiddenLine xmlns:a14="http://schemas.microsoft.com/office/drawing/2010/main" xmlns:p14="http://schemas.microsoft.com/office/powerpoint/2010/main" xmlns:a16="http://schemas.microsoft.com/office/drawing/2014/main" xmlns="" w="9525">
+                <a14:hiddenLine xmlns="" xmlns:a16="http://schemas.microsoft.com/office/drawing/2014/main" xmlns:p14="http://schemas.microsoft.com/office/powerpoint/2010/main" xmlns:a14="http://schemas.microsoft.com/office/drawing/2010/main" w="9525">
                   <a:solidFill>
                     <a:srgbClr val="000000"/>
                   </a:solidFill>
@@ -42889,7 +43562,7 @@
             </a:ln>
             <a:extLst>
               <a:ext uri="{91240B29-F687-4f45-9708-019B960494DF}">
-                <a14:hiddenLine xmlns:a14="http://schemas.microsoft.com/office/drawing/2010/main" xmlns:p14="http://schemas.microsoft.com/office/powerpoint/2010/main" xmlns:a16="http://schemas.microsoft.com/office/drawing/2014/main" xmlns="" w="9525">
+                <a14:hiddenLine xmlns="" xmlns:a16="http://schemas.microsoft.com/office/drawing/2014/main" xmlns:p14="http://schemas.microsoft.com/office/powerpoint/2010/main" xmlns:a14="http://schemas.microsoft.com/office/drawing/2010/main" w="9525">
                   <a:solidFill>
                     <a:srgbClr val="000000"/>
                   </a:solidFill>
@@ -43017,7 +43690,7 @@
             </a:ln>
             <a:extLst>
               <a:ext uri="{91240B29-F687-4f45-9708-019B960494DF}">
-                <a14:hiddenLine xmlns:a14="http://schemas.microsoft.com/office/drawing/2010/main" xmlns:p14="http://schemas.microsoft.com/office/powerpoint/2010/main" xmlns:a16="http://schemas.microsoft.com/office/drawing/2014/main" xmlns="" w="9525">
+                <a14:hiddenLine xmlns="" xmlns:a16="http://schemas.microsoft.com/office/drawing/2014/main" xmlns:p14="http://schemas.microsoft.com/office/powerpoint/2010/main" xmlns:a14="http://schemas.microsoft.com/office/drawing/2010/main" w="9525">
                   <a:solidFill>
                     <a:srgbClr val="000000"/>
                   </a:solidFill>
@@ -43101,7 +43774,7 @@
             </a:ln>
             <a:extLst>
               <a:ext uri="{91240B29-F687-4f45-9708-019B960494DF}">
-                <a14:hiddenLine xmlns:a14="http://schemas.microsoft.com/office/drawing/2010/main" xmlns:p14="http://schemas.microsoft.com/office/powerpoint/2010/main" xmlns:a16="http://schemas.microsoft.com/office/drawing/2014/main" xmlns="" w="9525">
+                <a14:hiddenLine xmlns="" xmlns:a16="http://schemas.microsoft.com/office/drawing/2014/main" xmlns:p14="http://schemas.microsoft.com/office/powerpoint/2010/main" xmlns:a14="http://schemas.microsoft.com/office/drawing/2010/main" w="9525">
                   <a:solidFill>
                     <a:srgbClr val="000000"/>
                   </a:solidFill>
@@ -43185,7 +43858,7 @@
             </a:ln>
             <a:extLst>
               <a:ext uri="{91240B29-F687-4f45-9708-019B960494DF}">
-                <a14:hiddenLine xmlns:a14="http://schemas.microsoft.com/office/drawing/2010/main" xmlns:p14="http://schemas.microsoft.com/office/powerpoint/2010/main" xmlns:a16="http://schemas.microsoft.com/office/drawing/2014/main" xmlns="" w="9525">
+                <a14:hiddenLine xmlns="" xmlns:a16="http://schemas.microsoft.com/office/drawing/2014/main" xmlns:p14="http://schemas.microsoft.com/office/powerpoint/2010/main" xmlns:a14="http://schemas.microsoft.com/office/drawing/2010/main" w="9525">
                   <a:solidFill>
                     <a:srgbClr val="000000"/>
                   </a:solidFill>
@@ -43297,7 +43970,7 @@
             </a:ln>
             <a:extLst>
               <a:ext uri="{91240B29-F687-4f45-9708-019B960494DF}">
-                <a14:hiddenLine xmlns:a14="http://schemas.microsoft.com/office/drawing/2010/main" xmlns:p14="http://schemas.microsoft.com/office/powerpoint/2010/main" xmlns:a16="http://schemas.microsoft.com/office/drawing/2014/main" xmlns="" w="9525">
+                <a14:hiddenLine xmlns="" xmlns:a16="http://schemas.microsoft.com/office/drawing/2014/main" xmlns:p14="http://schemas.microsoft.com/office/powerpoint/2010/main" xmlns:a14="http://schemas.microsoft.com/office/drawing/2010/main" w="9525">
                   <a:solidFill>
                     <a:srgbClr val="000000"/>
                   </a:solidFill>
@@ -43353,7 +44026,7 @@
             </a:ln>
             <a:extLst>
               <a:ext uri="{91240B29-F687-4f45-9708-019B960494DF}">
-                <a14:hiddenLine xmlns:a14="http://schemas.microsoft.com/office/drawing/2010/main" xmlns:p14="http://schemas.microsoft.com/office/powerpoint/2010/main" xmlns:a16="http://schemas.microsoft.com/office/drawing/2014/main" xmlns="" w="9525">
+                <a14:hiddenLine xmlns="" xmlns:a16="http://schemas.microsoft.com/office/drawing/2014/main" xmlns:p14="http://schemas.microsoft.com/office/powerpoint/2010/main" xmlns:a14="http://schemas.microsoft.com/office/drawing/2010/main" w="9525">
                   <a:solidFill>
                     <a:srgbClr val="000000"/>
                   </a:solidFill>
@@ -43440,7 +44113,7 @@
             </a:ln>
             <a:extLst>
               <a:ext uri="{91240B29-F687-4f45-9708-019B960494DF}">
-                <a14:hiddenLine xmlns:a14="http://schemas.microsoft.com/office/drawing/2010/main" xmlns:p14="http://schemas.microsoft.com/office/powerpoint/2010/main" xmlns:a16="http://schemas.microsoft.com/office/drawing/2014/main" xmlns="" w="9525">
+                <a14:hiddenLine xmlns="" xmlns:a16="http://schemas.microsoft.com/office/drawing/2014/main" xmlns:p14="http://schemas.microsoft.com/office/powerpoint/2010/main" xmlns:a14="http://schemas.microsoft.com/office/drawing/2010/main" w="9525">
                   <a:solidFill>
                     <a:srgbClr val="000000"/>
                   </a:solidFill>
@@ -43552,7 +44225,7 @@
             </a:ln>
             <a:extLst>
               <a:ext uri="{91240B29-F687-4f45-9708-019B960494DF}">
-                <a14:hiddenLine xmlns:a14="http://schemas.microsoft.com/office/drawing/2010/main" xmlns:p14="http://schemas.microsoft.com/office/powerpoint/2010/main" xmlns:a16="http://schemas.microsoft.com/office/drawing/2014/main" xmlns="" w="9525">
+                <a14:hiddenLine xmlns="" xmlns:a16="http://schemas.microsoft.com/office/drawing/2014/main" xmlns:p14="http://schemas.microsoft.com/office/powerpoint/2010/main" xmlns:a14="http://schemas.microsoft.com/office/drawing/2010/main" w="9525">
                   <a:solidFill>
                     <a:srgbClr val="000000"/>
                   </a:solidFill>
@@ -43636,7 +44309,7 @@
             </a:ln>
             <a:extLst>
               <a:ext uri="{91240B29-F687-4f45-9708-019B960494DF}">
-                <a14:hiddenLine xmlns:a14="http://schemas.microsoft.com/office/drawing/2010/main" xmlns:p14="http://schemas.microsoft.com/office/powerpoint/2010/main" xmlns:a16="http://schemas.microsoft.com/office/drawing/2014/main" xmlns="" w="9525">
+                <a14:hiddenLine xmlns="" xmlns:a16="http://schemas.microsoft.com/office/drawing/2014/main" xmlns:p14="http://schemas.microsoft.com/office/powerpoint/2010/main" xmlns:a14="http://schemas.microsoft.com/office/drawing/2010/main" w="9525">
                   <a:solidFill>
                     <a:srgbClr val="000000"/>
                   </a:solidFill>
@@ -43748,7 +44421,7 @@
             </a:ln>
             <a:extLst>
               <a:ext uri="{91240B29-F687-4f45-9708-019B960494DF}">
-                <a14:hiddenLine xmlns:a14="http://schemas.microsoft.com/office/drawing/2010/main" xmlns:p14="http://schemas.microsoft.com/office/powerpoint/2010/main" xmlns:a16="http://schemas.microsoft.com/office/drawing/2014/main" xmlns="" w="9525">
+                <a14:hiddenLine xmlns="" xmlns:a16="http://schemas.microsoft.com/office/drawing/2014/main" xmlns:p14="http://schemas.microsoft.com/office/powerpoint/2010/main" xmlns:a14="http://schemas.microsoft.com/office/drawing/2010/main" w="9525">
                   <a:solidFill>
                     <a:srgbClr val="000000"/>
                   </a:solidFill>
@@ -43835,7 +44508,7 @@
             </a:ln>
             <a:extLst>
               <a:ext uri="{91240B29-F687-4f45-9708-019B960494DF}">
-                <a14:hiddenLine xmlns:a14="http://schemas.microsoft.com/office/drawing/2010/main" xmlns:p14="http://schemas.microsoft.com/office/powerpoint/2010/main" xmlns:a16="http://schemas.microsoft.com/office/drawing/2014/main" xmlns="" w="9525">
+                <a14:hiddenLine xmlns="" xmlns:a16="http://schemas.microsoft.com/office/drawing/2014/main" xmlns:p14="http://schemas.microsoft.com/office/powerpoint/2010/main" xmlns:a14="http://schemas.microsoft.com/office/drawing/2010/main" w="9525">
                   <a:solidFill>
                     <a:srgbClr val="000000"/>
                   </a:solidFill>
@@ -43919,7 +44592,7 @@
             </a:ln>
             <a:extLst>
               <a:ext uri="{91240B29-F687-4f45-9708-019B960494DF}">
-                <a14:hiddenLine xmlns:a14="http://schemas.microsoft.com/office/drawing/2010/main" xmlns:p14="http://schemas.microsoft.com/office/powerpoint/2010/main" xmlns:a16="http://schemas.microsoft.com/office/drawing/2014/main" xmlns="" w="9525">
+                <a14:hiddenLine xmlns="" xmlns:a16="http://schemas.microsoft.com/office/drawing/2014/main" xmlns:p14="http://schemas.microsoft.com/office/powerpoint/2010/main" xmlns:a14="http://schemas.microsoft.com/office/drawing/2010/main" w="9525">
                   <a:solidFill>
                     <a:srgbClr val="000000"/>
                   </a:solidFill>
@@ -44031,7 +44704,7 @@
             </a:ln>
             <a:extLst>
               <a:ext uri="{91240B29-F687-4f45-9708-019B960494DF}">
-                <a14:hiddenLine xmlns:a14="http://schemas.microsoft.com/office/drawing/2010/main" xmlns:p14="http://schemas.microsoft.com/office/powerpoint/2010/main" xmlns:a16="http://schemas.microsoft.com/office/drawing/2014/main" xmlns="" w="9525">
+                <a14:hiddenLine xmlns="" xmlns:a16="http://schemas.microsoft.com/office/drawing/2014/main" xmlns:p14="http://schemas.microsoft.com/office/powerpoint/2010/main" xmlns:a14="http://schemas.microsoft.com/office/drawing/2010/main" w="9525">
                   <a:solidFill>
                     <a:srgbClr val="000000"/>
                   </a:solidFill>
@@ -44143,7 +44816,7 @@
             </a:ln>
             <a:extLst>
               <a:ext uri="{91240B29-F687-4f45-9708-019B960494DF}">
-                <a14:hiddenLine xmlns:a14="http://schemas.microsoft.com/office/drawing/2010/main" xmlns:p14="http://schemas.microsoft.com/office/powerpoint/2010/main" xmlns:a16="http://schemas.microsoft.com/office/drawing/2014/main" xmlns="" w="9525">
+                <a14:hiddenLine xmlns="" xmlns:a16="http://schemas.microsoft.com/office/drawing/2014/main" xmlns:p14="http://schemas.microsoft.com/office/powerpoint/2010/main" xmlns:a14="http://schemas.microsoft.com/office/drawing/2010/main" w="9525">
                   <a:solidFill>
                     <a:srgbClr val="000000"/>
                   </a:solidFill>
@@ -44230,7 +44903,7 @@
             </a:ln>
             <a:extLst>
               <a:ext uri="{91240B29-F687-4f45-9708-019B960494DF}">
-                <a14:hiddenLine xmlns:a14="http://schemas.microsoft.com/office/drawing/2010/main" xmlns:p14="http://schemas.microsoft.com/office/powerpoint/2010/main" xmlns:a16="http://schemas.microsoft.com/office/drawing/2014/main" xmlns="" w="9525">
+                <a14:hiddenLine xmlns="" xmlns:a16="http://schemas.microsoft.com/office/drawing/2014/main" xmlns:p14="http://schemas.microsoft.com/office/powerpoint/2010/main" xmlns:a14="http://schemas.microsoft.com/office/drawing/2010/main" w="9525">
                   <a:solidFill>
                     <a:srgbClr val="000000"/>
                   </a:solidFill>
@@ -44372,7 +45045,7 @@
             </a:ln>
             <a:extLst>
               <a:ext uri="{91240B29-F687-4f45-9708-019B960494DF}">
-                <a14:hiddenLine xmlns:a14="http://schemas.microsoft.com/office/drawing/2010/main" xmlns:p14="http://schemas.microsoft.com/office/powerpoint/2010/main" xmlns:a16="http://schemas.microsoft.com/office/drawing/2014/main" xmlns="" w="9525">
+                <a14:hiddenLine xmlns="" xmlns:a16="http://schemas.microsoft.com/office/drawing/2014/main" xmlns:p14="http://schemas.microsoft.com/office/powerpoint/2010/main" xmlns:a14="http://schemas.microsoft.com/office/drawing/2010/main" w="9525">
                   <a:solidFill>
                     <a:srgbClr val="000000"/>
                   </a:solidFill>
@@ -44940,7 +45613,7 @@
             <a:noFill/>
             <a:extLst>
               <a:ext uri="{909E8E84-426E-40dd-AFC4-6F175D3DCCD1}">
-                <a14:hiddenFill xmlns:p14="http://schemas.microsoft.com/office/powerpoint/2010/main" xmlns:a14="http://schemas.microsoft.com/office/drawing/2010/main" xmlns:a16="http://schemas.microsoft.com/office/drawing/2014/main" xmlns="">
+                <a14:hiddenFill xmlns="" xmlns:a16="http://schemas.microsoft.com/office/drawing/2014/main" xmlns:a14="http://schemas.microsoft.com/office/drawing/2010/main" xmlns:p14="http://schemas.microsoft.com/office/powerpoint/2010/main">
                   <a:solidFill>
                     <a:srgbClr val="FFFFFF"/>
                   </a:solidFill>
@@ -45060,7 +45733,7 @@
             </a:ln>
             <a:extLst>
               <a:ext uri="{91240B29-F687-4f45-9708-019B960494DF}">
-                <a14:hiddenLine xmlns:p14="http://schemas.microsoft.com/office/powerpoint/2010/main" xmlns:a14="http://schemas.microsoft.com/office/drawing/2010/main" xmlns:a16="http://schemas.microsoft.com/office/drawing/2014/main" xmlns="" w="9525">
+                <a14:hiddenLine xmlns="" xmlns:a16="http://schemas.microsoft.com/office/drawing/2014/main" xmlns:a14="http://schemas.microsoft.com/office/drawing/2010/main" xmlns:p14="http://schemas.microsoft.com/office/powerpoint/2010/main" w="9525">
                   <a:solidFill>
                     <a:srgbClr val="000000"/>
                   </a:solidFill>
@@ -45172,7 +45845,7 @@
             </a:ln>
             <a:extLst>
               <a:ext uri="{91240B29-F687-4f45-9708-019B960494DF}">
-                <a14:hiddenLine xmlns:p14="http://schemas.microsoft.com/office/powerpoint/2010/main" xmlns:a14="http://schemas.microsoft.com/office/drawing/2010/main" xmlns:a16="http://schemas.microsoft.com/office/drawing/2014/main" xmlns="" w="9525">
+                <a14:hiddenLine xmlns="" xmlns:a16="http://schemas.microsoft.com/office/drawing/2014/main" xmlns:a14="http://schemas.microsoft.com/office/drawing/2010/main" xmlns:p14="http://schemas.microsoft.com/office/powerpoint/2010/main" w="9525">
                   <a:solidFill>
                     <a:srgbClr val="000000"/>
                   </a:solidFill>
@@ -45284,7 +45957,7 @@
             </a:ln>
             <a:extLst>
               <a:ext uri="{91240B29-F687-4f45-9708-019B960494DF}">
-                <a14:hiddenLine xmlns:p14="http://schemas.microsoft.com/office/powerpoint/2010/main" xmlns:a14="http://schemas.microsoft.com/office/drawing/2010/main" xmlns:a16="http://schemas.microsoft.com/office/drawing/2014/main" xmlns="" w="9525">
+                <a14:hiddenLine xmlns="" xmlns:a16="http://schemas.microsoft.com/office/drawing/2014/main" xmlns:a14="http://schemas.microsoft.com/office/drawing/2010/main" xmlns:p14="http://schemas.microsoft.com/office/powerpoint/2010/main" w="9525">
                   <a:solidFill>
                     <a:srgbClr val="000000"/>
                   </a:solidFill>
@@ -45340,7 +46013,7 @@
             </a:ln>
             <a:extLst>
               <a:ext uri="{91240B29-F687-4f45-9708-019B960494DF}">
-                <a14:hiddenLine xmlns:p14="http://schemas.microsoft.com/office/powerpoint/2010/main" xmlns:a14="http://schemas.microsoft.com/office/drawing/2010/main" xmlns:a16="http://schemas.microsoft.com/office/drawing/2014/main" xmlns="" w="9525">
+                <a14:hiddenLine xmlns="" xmlns:a16="http://schemas.microsoft.com/office/drawing/2014/main" xmlns:a14="http://schemas.microsoft.com/office/drawing/2010/main" xmlns:p14="http://schemas.microsoft.com/office/powerpoint/2010/main" w="9525">
                   <a:solidFill>
                     <a:srgbClr val="000000"/>
                   </a:solidFill>
@@ -45452,7 +46125,7 @@
             </a:ln>
             <a:extLst>
               <a:ext uri="{91240B29-F687-4f45-9708-019B960494DF}">
-                <a14:hiddenLine xmlns:p14="http://schemas.microsoft.com/office/powerpoint/2010/main" xmlns:a14="http://schemas.microsoft.com/office/drawing/2010/main" xmlns:a16="http://schemas.microsoft.com/office/drawing/2014/main" xmlns="" w="9525">
+                <a14:hiddenLine xmlns="" xmlns:a16="http://schemas.microsoft.com/office/drawing/2014/main" xmlns:a14="http://schemas.microsoft.com/office/drawing/2010/main" xmlns:p14="http://schemas.microsoft.com/office/powerpoint/2010/main" w="9525">
                   <a:solidFill>
                     <a:srgbClr val="000000"/>
                   </a:solidFill>
@@ -45536,7 +46209,7 @@
             </a:ln>
             <a:extLst>
               <a:ext uri="{91240B29-F687-4f45-9708-019B960494DF}">
-                <a14:hiddenLine xmlns:p14="http://schemas.microsoft.com/office/powerpoint/2010/main" xmlns:a14="http://schemas.microsoft.com/office/drawing/2010/main" xmlns:a16="http://schemas.microsoft.com/office/drawing/2014/main" xmlns="" w="9525">
+                <a14:hiddenLine xmlns="" xmlns:a16="http://schemas.microsoft.com/office/drawing/2014/main" xmlns:a14="http://schemas.microsoft.com/office/drawing/2010/main" xmlns:p14="http://schemas.microsoft.com/office/powerpoint/2010/main" w="9525">
                   <a:solidFill>
                     <a:srgbClr val="000000"/>
                   </a:solidFill>
@@ -45620,7 +46293,7 @@
             </a:ln>
             <a:extLst>
               <a:ext uri="{91240B29-F687-4f45-9708-019B960494DF}">
-                <a14:hiddenLine xmlns:p14="http://schemas.microsoft.com/office/powerpoint/2010/main" xmlns:a14="http://schemas.microsoft.com/office/drawing/2010/main" xmlns:a16="http://schemas.microsoft.com/office/drawing/2014/main" xmlns="" w="9525">
+                <a14:hiddenLine xmlns="" xmlns:a16="http://schemas.microsoft.com/office/drawing/2014/main" xmlns:a14="http://schemas.microsoft.com/office/drawing/2010/main" xmlns:p14="http://schemas.microsoft.com/office/powerpoint/2010/main" w="9525">
                   <a:solidFill>
                     <a:srgbClr val="000000"/>
                   </a:solidFill>
@@ -45732,7 +46405,7 @@
             </a:ln>
             <a:extLst>
               <a:ext uri="{91240B29-F687-4f45-9708-019B960494DF}">
-                <a14:hiddenLine xmlns:p14="http://schemas.microsoft.com/office/powerpoint/2010/main" xmlns:a14="http://schemas.microsoft.com/office/drawing/2010/main" xmlns:a16="http://schemas.microsoft.com/office/drawing/2014/main" xmlns="" w="9525">
+                <a14:hiddenLine xmlns="" xmlns:a16="http://schemas.microsoft.com/office/drawing/2014/main" xmlns:a14="http://schemas.microsoft.com/office/drawing/2010/main" xmlns:p14="http://schemas.microsoft.com/office/powerpoint/2010/main" w="9525">
                   <a:solidFill>
                     <a:srgbClr val="000000"/>
                   </a:solidFill>
@@ -45816,7 +46489,7 @@
             </a:ln>
             <a:extLst>
               <a:ext uri="{91240B29-F687-4f45-9708-019B960494DF}">
-                <a14:hiddenLine xmlns:p14="http://schemas.microsoft.com/office/powerpoint/2010/main" xmlns:a14="http://schemas.microsoft.com/office/drawing/2010/main" xmlns:a16="http://schemas.microsoft.com/office/drawing/2014/main" xmlns="" w="9525">
+                <a14:hiddenLine xmlns="" xmlns:a16="http://schemas.microsoft.com/office/drawing/2014/main" xmlns:a14="http://schemas.microsoft.com/office/drawing/2010/main" xmlns:p14="http://schemas.microsoft.com/office/powerpoint/2010/main" w="9525">
                   <a:solidFill>
                     <a:srgbClr val="000000"/>
                   </a:solidFill>
@@ -45900,7 +46573,7 @@
             </a:ln>
             <a:extLst>
               <a:ext uri="{91240B29-F687-4f45-9708-019B960494DF}">
-                <a14:hiddenLine xmlns:p14="http://schemas.microsoft.com/office/powerpoint/2010/main" xmlns:a14="http://schemas.microsoft.com/office/drawing/2010/main" xmlns:a16="http://schemas.microsoft.com/office/drawing/2014/main" xmlns="" w="9525">
+                <a14:hiddenLine xmlns="" xmlns:a16="http://schemas.microsoft.com/office/drawing/2014/main" xmlns:a14="http://schemas.microsoft.com/office/drawing/2010/main" xmlns:p14="http://schemas.microsoft.com/office/powerpoint/2010/main" w="9525">
                   <a:solidFill>
                     <a:srgbClr val="000000"/>
                   </a:solidFill>
@@ -46012,7 +46685,7 @@
             </a:ln>
             <a:extLst>
               <a:ext uri="{91240B29-F687-4f45-9708-019B960494DF}">
-                <a14:hiddenLine xmlns:p14="http://schemas.microsoft.com/office/powerpoint/2010/main" xmlns:a14="http://schemas.microsoft.com/office/drawing/2010/main" xmlns:a16="http://schemas.microsoft.com/office/drawing/2014/main" xmlns="" w="9525">
+                <a14:hiddenLine xmlns="" xmlns:a16="http://schemas.microsoft.com/office/drawing/2014/main" xmlns:a14="http://schemas.microsoft.com/office/drawing/2010/main" xmlns:p14="http://schemas.microsoft.com/office/powerpoint/2010/main" w="9525">
                   <a:solidFill>
                     <a:srgbClr val="000000"/>
                   </a:solidFill>
@@ -46124,7 +46797,7 @@
             </a:ln>
             <a:extLst>
               <a:ext uri="{91240B29-F687-4f45-9708-019B960494DF}">
-                <a14:hiddenLine xmlns:p14="http://schemas.microsoft.com/office/powerpoint/2010/main" xmlns:a14="http://schemas.microsoft.com/office/drawing/2010/main" xmlns:a16="http://schemas.microsoft.com/office/drawing/2014/main" xmlns="" w="9525">
+                <a14:hiddenLine xmlns="" xmlns:a16="http://schemas.microsoft.com/office/drawing/2014/main" xmlns:a14="http://schemas.microsoft.com/office/drawing/2010/main" xmlns:p14="http://schemas.microsoft.com/office/powerpoint/2010/main" w="9525">
                   <a:solidFill>
                     <a:srgbClr val="000000"/>
                   </a:solidFill>
@@ -46208,7 +46881,7 @@
             </a:ln>
             <a:extLst>
               <a:ext uri="{91240B29-F687-4f45-9708-019B960494DF}">
-                <a14:hiddenLine xmlns:p14="http://schemas.microsoft.com/office/powerpoint/2010/main" xmlns:a14="http://schemas.microsoft.com/office/drawing/2010/main" xmlns:a16="http://schemas.microsoft.com/office/drawing/2014/main" xmlns="" w="9525">
+                <a14:hiddenLine xmlns="" xmlns:a16="http://schemas.microsoft.com/office/drawing/2014/main" xmlns:a14="http://schemas.microsoft.com/office/drawing/2010/main" xmlns:p14="http://schemas.microsoft.com/office/powerpoint/2010/main" w="9525">
                   <a:solidFill>
                     <a:srgbClr val="000000"/>
                   </a:solidFill>
@@ -46340,7 +47013,7 @@
             </a:ln>
             <a:extLst>
               <a:ext uri="{91240B29-F687-4f45-9708-019B960494DF}">
-                <a14:hiddenLine xmlns:p14="http://schemas.microsoft.com/office/powerpoint/2010/main" xmlns:a14="http://schemas.microsoft.com/office/drawing/2010/main" xmlns:a16="http://schemas.microsoft.com/office/drawing/2014/main" xmlns="" w="9525">
+                <a14:hiddenLine xmlns="" xmlns:a16="http://schemas.microsoft.com/office/drawing/2014/main" xmlns:a14="http://schemas.microsoft.com/office/drawing/2010/main" xmlns:p14="http://schemas.microsoft.com/office/powerpoint/2010/main" w="9525">
                   <a:solidFill>
                     <a:srgbClr val="000000"/>
                   </a:solidFill>
@@ -46424,7 +47097,7 @@
             </a:ln>
             <a:extLst>
               <a:ext uri="{91240B29-F687-4f45-9708-019B960494DF}">
-                <a14:hiddenLine xmlns:p14="http://schemas.microsoft.com/office/powerpoint/2010/main" xmlns:a14="http://schemas.microsoft.com/office/drawing/2010/main" xmlns:a16="http://schemas.microsoft.com/office/drawing/2014/main" xmlns="" w="9525">
+                <a14:hiddenLine xmlns="" xmlns:a16="http://schemas.microsoft.com/office/drawing/2014/main" xmlns:a14="http://schemas.microsoft.com/office/drawing/2010/main" xmlns:p14="http://schemas.microsoft.com/office/powerpoint/2010/main" w="9525">
                   <a:solidFill>
                     <a:srgbClr val="000000"/>
                   </a:solidFill>
@@ -46536,7 +47209,7 @@
             </a:ln>
             <a:extLst>
               <a:ext uri="{91240B29-F687-4f45-9708-019B960494DF}">
-                <a14:hiddenLine xmlns:p14="http://schemas.microsoft.com/office/powerpoint/2010/main" xmlns:a14="http://schemas.microsoft.com/office/drawing/2010/main" xmlns:a16="http://schemas.microsoft.com/office/drawing/2014/main" xmlns="" w="9525">
+                <a14:hiddenLine xmlns="" xmlns:a16="http://schemas.microsoft.com/office/drawing/2014/main" xmlns:a14="http://schemas.microsoft.com/office/drawing/2010/main" xmlns:p14="http://schemas.microsoft.com/office/powerpoint/2010/main" w="9525">
                   <a:solidFill>
                     <a:srgbClr val="000000"/>
                   </a:solidFill>
@@ -46648,7 +47321,7 @@
             </a:ln>
             <a:extLst>
               <a:ext uri="{91240B29-F687-4f45-9708-019B960494DF}">
-                <a14:hiddenLine xmlns:p14="http://schemas.microsoft.com/office/powerpoint/2010/main" xmlns:a14="http://schemas.microsoft.com/office/drawing/2010/main" xmlns:a16="http://schemas.microsoft.com/office/drawing/2014/main" xmlns="" w="9525">
+                <a14:hiddenLine xmlns="" xmlns:a16="http://schemas.microsoft.com/office/drawing/2014/main" xmlns:a14="http://schemas.microsoft.com/office/drawing/2010/main" xmlns:p14="http://schemas.microsoft.com/office/powerpoint/2010/main" w="9525">
                   <a:solidFill>
                     <a:srgbClr val="000000"/>
                   </a:solidFill>
@@ -46732,7 +47405,7 @@
             </a:ln>
             <a:extLst>
               <a:ext uri="{91240B29-F687-4f45-9708-019B960494DF}">
-                <a14:hiddenLine xmlns:p14="http://schemas.microsoft.com/office/powerpoint/2010/main" xmlns:a14="http://schemas.microsoft.com/office/drawing/2010/main" xmlns:a16="http://schemas.microsoft.com/office/drawing/2014/main" xmlns="" w="9525">
+                <a14:hiddenLine xmlns="" xmlns:a16="http://schemas.microsoft.com/office/drawing/2014/main" xmlns:a14="http://schemas.microsoft.com/office/drawing/2010/main" xmlns:p14="http://schemas.microsoft.com/office/powerpoint/2010/main" w="9525">
                   <a:solidFill>
                     <a:srgbClr val="000000"/>
                   </a:solidFill>
@@ -46844,7 +47517,7 @@
             </a:ln>
             <a:extLst>
               <a:ext uri="{91240B29-F687-4f45-9708-019B960494DF}">
-                <a14:hiddenLine xmlns:p14="http://schemas.microsoft.com/office/powerpoint/2010/main" xmlns:a14="http://schemas.microsoft.com/office/drawing/2010/main" xmlns:a16="http://schemas.microsoft.com/office/drawing/2014/main" xmlns="" w="9525">
+                <a14:hiddenLine xmlns="" xmlns:a16="http://schemas.microsoft.com/office/drawing/2014/main" xmlns:a14="http://schemas.microsoft.com/office/drawing/2010/main" xmlns:p14="http://schemas.microsoft.com/office/powerpoint/2010/main" w="9525">
                   <a:solidFill>
                     <a:srgbClr val="000000"/>
                   </a:solidFill>
@@ -46956,7 +47629,7 @@
             </a:ln>
             <a:extLst>
               <a:ext uri="{91240B29-F687-4f45-9708-019B960494DF}">
-                <a14:hiddenLine xmlns:p14="http://schemas.microsoft.com/office/powerpoint/2010/main" xmlns:a14="http://schemas.microsoft.com/office/drawing/2010/main" xmlns:a16="http://schemas.microsoft.com/office/drawing/2014/main" xmlns="" w="9525">
+                <a14:hiddenLine xmlns="" xmlns:a16="http://schemas.microsoft.com/office/drawing/2014/main" xmlns:a14="http://schemas.microsoft.com/office/drawing/2010/main" xmlns:p14="http://schemas.microsoft.com/office/powerpoint/2010/main" w="9525">
                   <a:solidFill>
                     <a:srgbClr val="000000"/>
                   </a:solidFill>
@@ -47034,7 +47707,7 @@
             </a:ln>
             <a:extLst>
               <a:ext uri="{91240B29-F687-4f45-9708-019B960494DF}">
-                <a14:hiddenLine xmlns:p14="http://schemas.microsoft.com/office/powerpoint/2010/main" xmlns:a14="http://schemas.microsoft.com/office/drawing/2010/main" xmlns:a16="http://schemas.microsoft.com/office/drawing/2014/main" xmlns="" w="9525">
+                <a14:hiddenLine xmlns="" xmlns:a16="http://schemas.microsoft.com/office/drawing/2014/main" xmlns:a14="http://schemas.microsoft.com/office/drawing/2010/main" xmlns:p14="http://schemas.microsoft.com/office/powerpoint/2010/main" w="9525">
                   <a:solidFill>
                     <a:srgbClr val="000000"/>
                   </a:solidFill>
@@ -47146,7 +47819,7 @@
             </a:ln>
             <a:extLst>
               <a:ext uri="{91240B29-F687-4f45-9708-019B960494DF}">
-                <a14:hiddenLine xmlns:p14="http://schemas.microsoft.com/office/powerpoint/2010/main" xmlns:a14="http://schemas.microsoft.com/office/drawing/2010/main" xmlns:a16="http://schemas.microsoft.com/office/drawing/2014/main" xmlns="" w="9525">
+                <a14:hiddenLine xmlns="" xmlns:a16="http://schemas.microsoft.com/office/drawing/2014/main" xmlns:a14="http://schemas.microsoft.com/office/drawing/2010/main" xmlns:p14="http://schemas.microsoft.com/office/powerpoint/2010/main" w="9525">
                   <a:solidFill>
                     <a:srgbClr val="000000"/>
                   </a:solidFill>
@@ -47224,7 +47897,7 @@
             </a:ln>
             <a:extLst>
               <a:ext uri="{91240B29-F687-4f45-9708-019B960494DF}">
-                <a14:hiddenLine xmlns:p14="http://schemas.microsoft.com/office/powerpoint/2010/main" xmlns:a14="http://schemas.microsoft.com/office/drawing/2010/main" xmlns:a16="http://schemas.microsoft.com/office/drawing/2014/main" xmlns="" w="9525">
+                <a14:hiddenLine xmlns="" xmlns:a16="http://schemas.microsoft.com/office/drawing/2014/main" xmlns:a14="http://schemas.microsoft.com/office/drawing/2010/main" xmlns:p14="http://schemas.microsoft.com/office/powerpoint/2010/main" w="9525">
                   <a:solidFill>
                     <a:srgbClr val="000000"/>
                   </a:solidFill>
@@ -47336,7 +48009,7 @@
             </a:ln>
             <a:extLst>
               <a:ext uri="{91240B29-F687-4f45-9708-019B960494DF}">
-                <a14:hiddenLine xmlns:p14="http://schemas.microsoft.com/office/powerpoint/2010/main" xmlns:a14="http://schemas.microsoft.com/office/drawing/2010/main" xmlns:a16="http://schemas.microsoft.com/office/drawing/2014/main" xmlns="" w="9525">
+                <a14:hiddenLine xmlns="" xmlns:a16="http://schemas.microsoft.com/office/drawing/2014/main" xmlns:a14="http://schemas.microsoft.com/office/drawing/2010/main" xmlns:p14="http://schemas.microsoft.com/office/powerpoint/2010/main" w="9525">
                   <a:solidFill>
                     <a:srgbClr val="000000"/>
                   </a:solidFill>
@@ -47426,7 +48099,7 @@
             </a:ln>
             <a:extLst>
               <a:ext uri="{91240B29-F687-4f45-9708-019B960494DF}">
-                <a14:hiddenLine xmlns:p14="http://schemas.microsoft.com/office/powerpoint/2010/main" xmlns:a14="http://schemas.microsoft.com/office/drawing/2010/main" xmlns:a16="http://schemas.microsoft.com/office/drawing/2014/main" xmlns="" w="9525">
+                <a14:hiddenLine xmlns="" xmlns:a16="http://schemas.microsoft.com/office/drawing/2014/main" xmlns:a14="http://schemas.microsoft.com/office/drawing/2010/main" xmlns:p14="http://schemas.microsoft.com/office/powerpoint/2010/main" w="9525">
                   <a:solidFill>
                     <a:srgbClr val="000000"/>
                   </a:solidFill>
@@ -47538,7 +48211,7 @@
             </a:ln>
             <a:extLst>
               <a:ext uri="{91240B29-F687-4f45-9708-019B960494DF}">
-                <a14:hiddenLine xmlns:p14="http://schemas.microsoft.com/office/powerpoint/2010/main" xmlns:a14="http://schemas.microsoft.com/office/drawing/2010/main" xmlns:a16="http://schemas.microsoft.com/office/drawing/2014/main" xmlns="" w="9525">
+                <a14:hiddenLine xmlns="" xmlns:a16="http://schemas.microsoft.com/office/drawing/2014/main" xmlns:a14="http://schemas.microsoft.com/office/drawing/2010/main" xmlns:p14="http://schemas.microsoft.com/office/powerpoint/2010/main" w="9525">
                   <a:solidFill>
                     <a:srgbClr val="000000"/>
                   </a:solidFill>
@@ -47628,7 +48301,7 @@
             </a:ln>
             <a:extLst>
               <a:ext uri="{91240B29-F687-4f45-9708-019B960494DF}">
-                <a14:hiddenLine xmlns:p14="http://schemas.microsoft.com/office/powerpoint/2010/main" xmlns:a14="http://schemas.microsoft.com/office/drawing/2010/main" xmlns:a16="http://schemas.microsoft.com/office/drawing/2014/main" xmlns="" w="9525">
+                <a14:hiddenLine xmlns="" xmlns:a16="http://schemas.microsoft.com/office/drawing/2014/main" xmlns:a14="http://schemas.microsoft.com/office/drawing/2010/main" xmlns:p14="http://schemas.microsoft.com/office/powerpoint/2010/main" w="9525">
                   <a:solidFill>
                     <a:srgbClr val="000000"/>
                   </a:solidFill>
@@ -47740,7 +48413,7 @@
             </a:ln>
             <a:extLst>
               <a:ext uri="{91240B29-F687-4f45-9708-019B960494DF}">
-                <a14:hiddenLine xmlns:p14="http://schemas.microsoft.com/office/powerpoint/2010/main" xmlns:a14="http://schemas.microsoft.com/office/drawing/2010/main" xmlns:a16="http://schemas.microsoft.com/office/drawing/2014/main" xmlns="" w="9525">
+                <a14:hiddenLine xmlns="" xmlns:a16="http://schemas.microsoft.com/office/drawing/2014/main" xmlns:a14="http://schemas.microsoft.com/office/drawing/2010/main" xmlns:p14="http://schemas.microsoft.com/office/powerpoint/2010/main" w="9525">
                   <a:solidFill>
                     <a:srgbClr val="000000"/>
                   </a:solidFill>
@@ -47796,7 +48469,7 @@
             </a:ln>
             <a:extLst>
               <a:ext uri="{91240B29-F687-4f45-9708-019B960494DF}">
-                <a14:hiddenLine xmlns:p14="http://schemas.microsoft.com/office/powerpoint/2010/main" xmlns:a14="http://schemas.microsoft.com/office/drawing/2010/main" xmlns:a16="http://schemas.microsoft.com/office/drawing/2014/main" xmlns="" w="9525">
+                <a14:hiddenLine xmlns="" xmlns:a16="http://schemas.microsoft.com/office/drawing/2014/main" xmlns:a14="http://schemas.microsoft.com/office/drawing/2010/main" xmlns:p14="http://schemas.microsoft.com/office/powerpoint/2010/main" w="9525">
                   <a:solidFill>
                     <a:srgbClr val="000000"/>
                   </a:solidFill>
@@ -47908,7 +48581,7 @@
             </a:ln>
             <a:extLst>
               <a:ext uri="{91240B29-F687-4f45-9708-019B960494DF}">
-                <a14:hiddenLine xmlns:p14="http://schemas.microsoft.com/office/powerpoint/2010/main" xmlns:a14="http://schemas.microsoft.com/office/drawing/2010/main" xmlns:a16="http://schemas.microsoft.com/office/drawing/2014/main" xmlns="" w="9525">
+                <a14:hiddenLine xmlns="" xmlns:a16="http://schemas.microsoft.com/office/drawing/2014/main" xmlns:a14="http://schemas.microsoft.com/office/drawing/2010/main" xmlns:p14="http://schemas.microsoft.com/office/powerpoint/2010/main" w="9525">
                   <a:solidFill>
                     <a:srgbClr val="000000"/>
                   </a:solidFill>
@@ -47992,7 +48665,7 @@
             </a:ln>
             <a:extLst>
               <a:ext uri="{91240B29-F687-4f45-9708-019B960494DF}">
-                <a14:hiddenLine xmlns:p14="http://schemas.microsoft.com/office/powerpoint/2010/main" xmlns:a14="http://schemas.microsoft.com/office/drawing/2010/main" xmlns:a16="http://schemas.microsoft.com/office/drawing/2014/main" xmlns="" w="9525">
+                <a14:hiddenLine xmlns="" xmlns:a16="http://schemas.microsoft.com/office/drawing/2014/main" xmlns:a14="http://schemas.microsoft.com/office/drawing/2010/main" xmlns:p14="http://schemas.microsoft.com/office/powerpoint/2010/main" w="9525">
                   <a:solidFill>
                     <a:srgbClr val="000000"/>
                   </a:solidFill>
@@ -48076,7 +48749,7 @@
             </a:ln>
             <a:extLst>
               <a:ext uri="{91240B29-F687-4f45-9708-019B960494DF}">
-                <a14:hiddenLine xmlns:p14="http://schemas.microsoft.com/office/powerpoint/2010/main" xmlns:a14="http://schemas.microsoft.com/office/drawing/2010/main" xmlns:a16="http://schemas.microsoft.com/office/drawing/2014/main" xmlns="" w="9525">
+                <a14:hiddenLine xmlns="" xmlns:a16="http://schemas.microsoft.com/office/drawing/2014/main" xmlns:a14="http://schemas.microsoft.com/office/drawing/2010/main" xmlns:p14="http://schemas.microsoft.com/office/powerpoint/2010/main" w="9525">
                   <a:solidFill>
                     <a:srgbClr val="000000"/>
                   </a:solidFill>
@@ -48188,7 +48861,7 @@
             </a:ln>
             <a:extLst>
               <a:ext uri="{91240B29-F687-4f45-9708-019B960494DF}">
-                <a14:hiddenLine xmlns:p14="http://schemas.microsoft.com/office/powerpoint/2010/main" xmlns:a14="http://schemas.microsoft.com/office/drawing/2010/main" xmlns:a16="http://schemas.microsoft.com/office/drawing/2014/main" xmlns="" w="9525">
+                <a14:hiddenLine xmlns="" xmlns:a16="http://schemas.microsoft.com/office/drawing/2014/main" xmlns:a14="http://schemas.microsoft.com/office/drawing/2010/main" xmlns:p14="http://schemas.microsoft.com/office/powerpoint/2010/main" w="9525">
                   <a:solidFill>
                     <a:srgbClr val="000000"/>
                   </a:solidFill>
@@ -48278,7 +48951,7 @@
             </a:ln>
             <a:extLst>
               <a:ext uri="{91240B29-F687-4f45-9708-019B960494DF}">
-                <a14:hiddenLine xmlns:p14="http://schemas.microsoft.com/office/powerpoint/2010/main" xmlns:a14="http://schemas.microsoft.com/office/drawing/2010/main" xmlns:a16="http://schemas.microsoft.com/office/drawing/2014/main" xmlns="" w="9525">
+                <a14:hiddenLine xmlns="" xmlns:a16="http://schemas.microsoft.com/office/drawing/2014/main" xmlns:a14="http://schemas.microsoft.com/office/drawing/2010/main" xmlns:p14="http://schemas.microsoft.com/office/powerpoint/2010/main" w="9525">
                   <a:solidFill>
                     <a:srgbClr val="000000"/>
                   </a:solidFill>
@@ -48362,7 +49035,7 @@
             </a:ln>
             <a:extLst>
               <a:ext uri="{91240B29-F687-4f45-9708-019B960494DF}">
-                <a14:hiddenLine xmlns:p14="http://schemas.microsoft.com/office/powerpoint/2010/main" xmlns:a14="http://schemas.microsoft.com/office/drawing/2010/main" xmlns:a16="http://schemas.microsoft.com/office/drawing/2014/main" xmlns="" w="9525">
+                <a14:hiddenLine xmlns="" xmlns:a16="http://schemas.microsoft.com/office/drawing/2014/main" xmlns:a14="http://schemas.microsoft.com/office/drawing/2010/main" xmlns:p14="http://schemas.microsoft.com/office/powerpoint/2010/main" w="9525">
                   <a:solidFill>
                     <a:srgbClr val="000000"/>
                   </a:solidFill>
@@ -48474,7 +49147,7 @@
             </a:ln>
             <a:extLst>
               <a:ext uri="{91240B29-F687-4f45-9708-019B960494DF}">
-                <a14:hiddenLine xmlns:p14="http://schemas.microsoft.com/office/powerpoint/2010/main" xmlns:a14="http://schemas.microsoft.com/office/drawing/2010/main" xmlns:a16="http://schemas.microsoft.com/office/drawing/2014/main" xmlns="" w="9525">
+                <a14:hiddenLine xmlns="" xmlns:a16="http://schemas.microsoft.com/office/drawing/2014/main" xmlns:a14="http://schemas.microsoft.com/office/drawing/2010/main" xmlns:p14="http://schemas.microsoft.com/office/powerpoint/2010/main" w="9525">
                   <a:solidFill>
                     <a:srgbClr val="000000"/>
                   </a:solidFill>
@@ -48558,7 +49231,7 @@
             </a:ln>
             <a:extLst>
               <a:ext uri="{91240B29-F687-4f45-9708-019B960494DF}">
-                <a14:hiddenLine xmlns:p14="http://schemas.microsoft.com/office/powerpoint/2010/main" xmlns:a14="http://schemas.microsoft.com/office/drawing/2010/main" xmlns:a16="http://schemas.microsoft.com/office/drawing/2014/main" xmlns="" w="9525">
+                <a14:hiddenLine xmlns="" xmlns:a16="http://schemas.microsoft.com/office/drawing/2014/main" xmlns:a14="http://schemas.microsoft.com/office/drawing/2010/main" xmlns:p14="http://schemas.microsoft.com/office/powerpoint/2010/main" w="9525">
                   <a:solidFill>
                     <a:srgbClr val="000000"/>
                   </a:solidFill>
@@ -48670,7 +49343,7 @@
             </a:ln>
             <a:extLst>
               <a:ext uri="{91240B29-F687-4f45-9708-019B960494DF}">
-                <a14:hiddenLine xmlns:p14="http://schemas.microsoft.com/office/powerpoint/2010/main" xmlns:a14="http://schemas.microsoft.com/office/drawing/2010/main" xmlns:a16="http://schemas.microsoft.com/office/drawing/2014/main" xmlns="" w="9525">
+                <a14:hiddenLine xmlns="" xmlns:a16="http://schemas.microsoft.com/office/drawing/2014/main" xmlns:a14="http://schemas.microsoft.com/office/drawing/2010/main" xmlns:p14="http://schemas.microsoft.com/office/powerpoint/2010/main" w="9525">
                   <a:solidFill>
                     <a:srgbClr val="000000"/>
                   </a:solidFill>
@@ -48754,7 +49427,7 @@
             </a:ln>
             <a:extLst>
               <a:ext uri="{91240B29-F687-4f45-9708-019B960494DF}">
-                <a14:hiddenLine xmlns:p14="http://schemas.microsoft.com/office/powerpoint/2010/main" xmlns:a14="http://schemas.microsoft.com/office/drawing/2010/main" xmlns:a16="http://schemas.microsoft.com/office/drawing/2014/main" xmlns="" w="9525">
+                <a14:hiddenLine xmlns="" xmlns:a16="http://schemas.microsoft.com/office/drawing/2014/main" xmlns:a14="http://schemas.microsoft.com/office/drawing/2010/main" xmlns:p14="http://schemas.microsoft.com/office/powerpoint/2010/main" w="9525">
                   <a:solidFill>
                     <a:srgbClr val="000000"/>
                   </a:solidFill>
@@ -48866,7 +49539,7 @@
             </a:ln>
             <a:extLst>
               <a:ext uri="{91240B29-F687-4f45-9708-019B960494DF}">
-                <a14:hiddenLine xmlns:p14="http://schemas.microsoft.com/office/powerpoint/2010/main" xmlns:a14="http://schemas.microsoft.com/office/drawing/2010/main" xmlns:a16="http://schemas.microsoft.com/office/drawing/2014/main" xmlns="" w="9525">
+                <a14:hiddenLine xmlns="" xmlns:a16="http://schemas.microsoft.com/office/drawing/2014/main" xmlns:a14="http://schemas.microsoft.com/office/drawing/2010/main" xmlns:p14="http://schemas.microsoft.com/office/powerpoint/2010/main" w="9525">
                   <a:solidFill>
                     <a:srgbClr val="000000"/>
                   </a:solidFill>
@@ -48922,7 +49595,7 @@
             </a:ln>
             <a:extLst>
               <a:ext uri="{91240B29-F687-4f45-9708-019B960494DF}">
-                <a14:hiddenLine xmlns:p14="http://schemas.microsoft.com/office/powerpoint/2010/main" xmlns:a14="http://schemas.microsoft.com/office/drawing/2010/main" xmlns:a16="http://schemas.microsoft.com/office/drawing/2014/main" xmlns="" w="9525">
+                <a14:hiddenLine xmlns="" xmlns:a16="http://schemas.microsoft.com/office/drawing/2014/main" xmlns:a14="http://schemas.microsoft.com/office/drawing/2010/main" xmlns:p14="http://schemas.microsoft.com/office/powerpoint/2010/main" w="9525">
                   <a:solidFill>
                     <a:srgbClr val="000000"/>
                   </a:solidFill>
@@ -49009,7 +49682,7 @@
             </a:ln>
             <a:extLst>
               <a:ext uri="{91240B29-F687-4f45-9708-019B960494DF}">
-                <a14:hiddenLine xmlns:p14="http://schemas.microsoft.com/office/powerpoint/2010/main" xmlns:a14="http://schemas.microsoft.com/office/drawing/2010/main" xmlns:a16="http://schemas.microsoft.com/office/drawing/2014/main" xmlns="" w="9525">
+                <a14:hiddenLine xmlns="" xmlns:a16="http://schemas.microsoft.com/office/drawing/2014/main" xmlns:a14="http://schemas.microsoft.com/office/drawing/2010/main" xmlns:p14="http://schemas.microsoft.com/office/powerpoint/2010/main" w="9525">
                   <a:solidFill>
                     <a:srgbClr val="000000"/>
                   </a:solidFill>
@@ -49121,7 +49794,7 @@
             </a:ln>
             <a:extLst>
               <a:ext uri="{91240B29-F687-4f45-9708-019B960494DF}">
-                <a14:hiddenLine xmlns:p14="http://schemas.microsoft.com/office/powerpoint/2010/main" xmlns:a14="http://schemas.microsoft.com/office/drawing/2010/main" xmlns:a16="http://schemas.microsoft.com/office/drawing/2014/main" xmlns="" w="9525">
+                <a14:hiddenLine xmlns="" xmlns:a16="http://schemas.microsoft.com/office/drawing/2014/main" xmlns:a14="http://schemas.microsoft.com/office/drawing/2010/main" xmlns:p14="http://schemas.microsoft.com/office/powerpoint/2010/main" w="9525">
                   <a:solidFill>
                     <a:srgbClr val="000000"/>
                   </a:solidFill>
@@ -49205,7 +49878,7 @@
             </a:ln>
             <a:extLst>
               <a:ext uri="{91240B29-F687-4f45-9708-019B960494DF}">
-                <a14:hiddenLine xmlns:p14="http://schemas.microsoft.com/office/powerpoint/2010/main" xmlns:a14="http://schemas.microsoft.com/office/drawing/2010/main" xmlns:a16="http://schemas.microsoft.com/office/drawing/2014/main" xmlns="" w="9525">
+                <a14:hiddenLine xmlns="" xmlns:a16="http://schemas.microsoft.com/office/drawing/2014/main" xmlns:a14="http://schemas.microsoft.com/office/drawing/2010/main" xmlns:p14="http://schemas.microsoft.com/office/powerpoint/2010/main" w="9525">
                   <a:solidFill>
                     <a:srgbClr val="000000"/>
                   </a:solidFill>
@@ -49317,7 +49990,7 @@
             </a:ln>
             <a:extLst>
               <a:ext uri="{91240B29-F687-4f45-9708-019B960494DF}">
-                <a14:hiddenLine xmlns:p14="http://schemas.microsoft.com/office/powerpoint/2010/main" xmlns:a14="http://schemas.microsoft.com/office/drawing/2010/main" xmlns:a16="http://schemas.microsoft.com/office/drawing/2014/main" xmlns="" w="9525">
+                <a14:hiddenLine xmlns="" xmlns:a16="http://schemas.microsoft.com/office/drawing/2014/main" xmlns:a14="http://schemas.microsoft.com/office/drawing/2010/main" xmlns:p14="http://schemas.microsoft.com/office/powerpoint/2010/main" w="9525">
                   <a:solidFill>
                     <a:srgbClr val="000000"/>
                   </a:solidFill>
@@ -49429,7 +50102,7 @@
             </a:ln>
             <a:extLst>
               <a:ext uri="{91240B29-F687-4f45-9708-019B960494DF}">
-                <a14:hiddenLine xmlns:p14="http://schemas.microsoft.com/office/powerpoint/2010/main" xmlns:a14="http://schemas.microsoft.com/office/drawing/2010/main" xmlns:a16="http://schemas.microsoft.com/office/drawing/2014/main" xmlns="" w="9525">
+                <a14:hiddenLine xmlns="" xmlns:a16="http://schemas.microsoft.com/office/drawing/2014/main" xmlns:a14="http://schemas.microsoft.com/office/drawing/2010/main" xmlns:p14="http://schemas.microsoft.com/office/powerpoint/2010/main" w="9525">
                   <a:solidFill>
                     <a:srgbClr val="000000"/>
                   </a:solidFill>
@@ -49516,7 +50189,7 @@
             </a:ln>
             <a:extLst>
               <a:ext uri="{91240B29-F687-4f45-9708-019B960494DF}">
-                <a14:hiddenLine xmlns:p14="http://schemas.microsoft.com/office/powerpoint/2010/main" xmlns:a14="http://schemas.microsoft.com/office/drawing/2010/main" xmlns:a16="http://schemas.microsoft.com/office/drawing/2014/main" xmlns="" w="9525">
+                <a14:hiddenLine xmlns="" xmlns:a16="http://schemas.microsoft.com/office/drawing/2014/main" xmlns:a14="http://schemas.microsoft.com/office/drawing/2010/main" xmlns:p14="http://schemas.microsoft.com/office/powerpoint/2010/main" w="9525">
                   <a:solidFill>
                     <a:srgbClr val="000000"/>
                   </a:solidFill>
@@ -49600,7 +50273,7 @@
             </a:ln>
             <a:extLst>
               <a:ext uri="{91240B29-F687-4f45-9708-019B960494DF}">
-                <a14:hiddenLine xmlns:p14="http://schemas.microsoft.com/office/powerpoint/2010/main" xmlns:a14="http://schemas.microsoft.com/office/drawing/2010/main" xmlns:a16="http://schemas.microsoft.com/office/drawing/2014/main" xmlns="" w="9525">
+                <a14:hiddenLine xmlns="" xmlns:a16="http://schemas.microsoft.com/office/drawing/2014/main" xmlns:a14="http://schemas.microsoft.com/office/drawing/2010/main" xmlns:p14="http://schemas.microsoft.com/office/powerpoint/2010/main" w="9525">
                   <a:solidFill>
                     <a:srgbClr val="000000"/>
                   </a:solidFill>
@@ -49712,7 +50385,7 @@
             </a:ln>
             <a:extLst>
               <a:ext uri="{91240B29-F687-4f45-9708-019B960494DF}">
-                <a14:hiddenLine xmlns:p14="http://schemas.microsoft.com/office/powerpoint/2010/main" xmlns:a14="http://schemas.microsoft.com/office/drawing/2010/main" xmlns:a16="http://schemas.microsoft.com/office/drawing/2014/main" xmlns="" w="9525">
+                <a14:hiddenLine xmlns="" xmlns:a16="http://schemas.microsoft.com/office/drawing/2014/main" xmlns:a14="http://schemas.microsoft.com/office/drawing/2010/main" xmlns:p14="http://schemas.microsoft.com/office/powerpoint/2010/main" w="9525">
                   <a:solidFill>
                     <a:srgbClr val="000000"/>
                   </a:solidFill>
@@ -49824,7 +50497,7 @@
             </a:ln>
             <a:extLst>
               <a:ext uri="{91240B29-F687-4f45-9708-019B960494DF}">
-                <a14:hiddenLine xmlns:p14="http://schemas.microsoft.com/office/powerpoint/2010/main" xmlns:a14="http://schemas.microsoft.com/office/drawing/2010/main" xmlns:a16="http://schemas.microsoft.com/office/drawing/2014/main" xmlns="" w="9525">
+                <a14:hiddenLine xmlns="" xmlns:a16="http://schemas.microsoft.com/office/drawing/2014/main" xmlns:a14="http://schemas.microsoft.com/office/drawing/2010/main" xmlns:p14="http://schemas.microsoft.com/office/powerpoint/2010/main" w="9525">
                   <a:solidFill>
                     <a:srgbClr val="000000"/>
                   </a:solidFill>
@@ -49908,7 +50581,7 @@
             </a:ln>
             <a:extLst>
               <a:ext uri="{91240B29-F687-4f45-9708-019B960494DF}">
-                <a14:hiddenLine xmlns:p14="http://schemas.microsoft.com/office/powerpoint/2010/main" xmlns:a14="http://schemas.microsoft.com/office/drawing/2010/main" xmlns:a16="http://schemas.microsoft.com/office/drawing/2014/main" xmlns="" w="9525">
+                <a14:hiddenLine xmlns="" xmlns:a16="http://schemas.microsoft.com/office/drawing/2014/main" xmlns:a14="http://schemas.microsoft.com/office/drawing/2010/main" xmlns:p14="http://schemas.microsoft.com/office/powerpoint/2010/main" w="9525">
                   <a:solidFill>
                     <a:srgbClr val="000000"/>
                   </a:solidFill>
@@ -50050,7 +50723,7 @@
             </a:ln>
             <a:extLst>
               <a:ext uri="{91240B29-F687-4f45-9708-019B960494DF}">
-                <a14:hiddenLine xmlns:p14="http://schemas.microsoft.com/office/powerpoint/2010/main" xmlns:a14="http://schemas.microsoft.com/office/drawing/2010/main" xmlns:a16="http://schemas.microsoft.com/office/drawing/2014/main" xmlns="" w="9525">
+                <a14:hiddenLine xmlns="" xmlns:a16="http://schemas.microsoft.com/office/drawing/2014/main" xmlns:a14="http://schemas.microsoft.com/office/drawing/2010/main" xmlns:p14="http://schemas.microsoft.com/office/powerpoint/2010/main" w="9525">
                   <a:solidFill>
                     <a:srgbClr val="000000"/>
                   </a:solidFill>
@@ -50140,7 +50813,7 @@
             </a:ln>
             <a:extLst>
               <a:ext uri="{91240B29-F687-4f45-9708-019B960494DF}">
-                <a14:hiddenLine xmlns:p14="http://schemas.microsoft.com/office/powerpoint/2010/main" xmlns:a14="http://schemas.microsoft.com/office/drawing/2010/main" xmlns:a16="http://schemas.microsoft.com/office/drawing/2014/main" xmlns="" w="9525">
+                <a14:hiddenLine xmlns="" xmlns:a16="http://schemas.microsoft.com/office/drawing/2014/main" xmlns:a14="http://schemas.microsoft.com/office/drawing/2010/main" xmlns:p14="http://schemas.microsoft.com/office/powerpoint/2010/main" w="9525">
                   <a:solidFill>
                     <a:srgbClr val="000000"/>
                   </a:solidFill>
@@ -50252,7 +50925,7 @@
             </a:ln>
             <a:extLst>
               <a:ext uri="{91240B29-F687-4f45-9708-019B960494DF}">
-                <a14:hiddenLine xmlns:p14="http://schemas.microsoft.com/office/powerpoint/2010/main" xmlns:a14="http://schemas.microsoft.com/office/drawing/2010/main" xmlns:a16="http://schemas.microsoft.com/office/drawing/2014/main" xmlns="" w="9525">
+                <a14:hiddenLine xmlns="" xmlns:a16="http://schemas.microsoft.com/office/drawing/2014/main" xmlns:a14="http://schemas.microsoft.com/office/drawing/2010/main" xmlns:p14="http://schemas.microsoft.com/office/powerpoint/2010/main" w="9525">
                   <a:solidFill>
                     <a:srgbClr val="000000"/>
                   </a:solidFill>
